--- a/kb/seminars/Research_Seminar_2026_08_v3.pptx
+++ b/kb/seminars/Research_Seminar_2026_08_v3.pptx
@@ -47,9 +47,10 @@
     <p:sldId id="295" r:id="rId41"/>
     <p:sldId id="296" r:id="rId42"/>
     <p:sldId id="297" r:id="rId43"/>
+    <p:sldId id="298" r:id="rId44"/>
   </p:sldIdLst>
   <p:notesMasterIdLst>
-    <p:notesMasterId r:id="rId44"/>
+    <p:notesMasterId r:id="rId45"/>
   </p:notesMasterIdLst>
   <p:sldSz cx="9144000" cy="6858000"/>
   <p:notesSz cx="6858000" cy="9144000"/>
@@ -791,7 +792,7 @@
           <a:p>
             <a:r>
               <a:rPr lang="en-US" dirty="0"/>
-              <a:t>재료공학과 안용훈입니다. 오늘은 황화물 고체전해질을 계산으로 스크리닝한 이야기인데, '무엇을 찾았나'만큼 '무엇을 우리 손으로 철회했나'를 같이 보여드리겠습니다. 그게 왜 발표할 만한 이야기인지가 오늘의 주제입니다.
+              <a:t>재료공학과 안용훈입니다. 오늘은 황화물 고체전해질을 계산으로 스크리닝한 이야기인데, '무엇을 찾았나'만큼 '무엇을 저희 손으로 철회했나'를 같이 보여드리겠습니다. 철회 기록이 왜 숨길 일이 아니라 보여드릴 성과인지, 오늘 그걸 설득해 보겠습니다.
 [용어] sulfide solid electrolyte(황화물 고체전해질): 액체 전해질을 대체하는 이온전도성 고체. 우리 대상은 아지로다이트 Li6PS5Cl 계열.</a:t>
             </a:r>
             <a:endParaRPr lang="en-US" dirty="0"/>
@@ -1059,9 +1060,9 @@
           <a:p>
             <a:r>
               <a:rPr lang="en-US" dirty="0"/>
-              <a:t>바뀐 건 구조입니다. Cl이 늘면 Li 공공이 늘고 anti-site 무질서가 커져 홉 네트워크가 열립니다. 그래서 스크리닝 축을 전자 기술자가 아니라 구조 기술자로 세웠습니다. 전자절연은 게이트로만. 이 한 장이 cascade의 설계 이유입니다.
-[Q] 무질서가 이득이라는 직접 증거 -&gt; MD에서 공공 농도-D 동반 상승 + BVSE 채널% 증가. 앙상블 판정은 beta 게이트 통과분만.
-[용어] anti-site: 원소가 남의 자리(Cl-S)에 앉는 점결함. percolation: 경로가 셀 전체를 관통하게 이어지는 문턱 현상.</a:t>
+              <a:t>바뀐 건 구조입니다. Cl이 늘면 전하 균형 때문에 Li 공공이 늘고, anti-site 무질서가 커져서 홉 네트워크가 열립니다. 왼쪽 그림이 그 네트워크인데요, 경로를 따라 늘어선 자리들이 전부 vacancy 자리입니다. 그래서 스크리닝 축을 전자 기술자가 아니라 구조 기술자로 세웠습니다. 전자절연은 게이트로만 씁니다. 이 한 장이 cascade의 설계 이유입니다.
+[Q] 무질서가 이득이라는 직접 증거 -&gt; MD에서 공공 농도와 D의 동반 상승이 직접 증거입니다(beta 게이트 통과분만 인용). ⚠ BVSE 채널%는 여기서 근거로 쓰지 않는다 - 채널 부피는 D0쪽(prefactor) 지표라 Ea/σ 순위를 못 매긴다는 걸 저희 CSV 헤더에 직접 박아 뒀다(LPSOCl은 채널 +43%인데 Ea가 더 높음). '채널% 증가' 답변 금지.
+[용어] anti-site: 원소가 남의 자리(Cl-S)에 앉는 점결함. percolation: 경로가 셀 전체를 관통하게 이어지는 문턱 현상. empty-lattice proxy: 빈 격자에 Li 탐침 하나 - 지형 모양 기술용, 측정 Ea 아님(그림 하단 단서 그대로).</a:t>
             </a:r>
             <a:endParaRPr lang="en-US" dirty="0"/>
           </a:p>
@@ -1506,7 +1507,7 @@
           <a:p>
             <a:r>
               <a:rPr lang="en-US" dirty="0"/>
-              <a:t>저희 풀은 큐레이션된 47종. 화합물 91 x 농도 3점 = 273계산. 싼 것부터 - UMA 이완 전수, 물성 배터리, 게이트. 그리고 데이터 파일 맨 위 문장을 그대로 읽겠습니다: '이 통과 수는 발견 성능 지표가 아니다.' 저희는 만 종을 거른 게 아니라 사람이 고른 47종을 문헌 표준 게이트로 재표현한 겁니다. 이 구분을 흐리면 Sendek과 부당 비교가 됩니다.
+              <a:t>저희 풀은 큐레이션된 47종. 화합물 91 x 농도 3점 = 273계산. 싼 것부터 - UMA 이완 전수, 물성 배터리, 게이트. 그리고 데이터 파일 맨 위 문장을 그대로 읽겠습니다: '이 통과 수는 발견 성능 지표가 아니다.' 저희는 만 종을 거른 게 아니라 사람이 고른 47종을 문헌 표준 게이트로 재표현한 겁니다. 이 구분을 흐리면 아까 Sendek 쪽과 억지 비교가 돼 버립니다. 그리고 47종이 왜 화합물 91개가 되는지 - 도펀트마다 산화물, Cl-rich 같은 화합물 형태가 하나에서 셋이라 91개입니다.
 [Q] 왜/어떻게 47종 -&gt; 코팅 문헌/전구체/원자가 다양성 기준 화학 큐레이션 + 리뷰어 권고 확장. 선정 이력이 JSON pool_provenance에 단계별로.
 [용어] dose: 치환 분율 x. 도펀트마다 3점 강제 - 농도 내성 축의 재료.</a:t>
             </a:r>
@@ -1596,8 +1597,9 @@
           <a:p>
             <a:r>
               <a:rPr lang="en-US" dirty="0"/>
-              <a:t>다섯 게이트를 한 표로. 구조안정 임계 0은 임의 컷이 아니라 host 자기 자신 - '도핑한 게 안 한 것보다 안정한가'라는 이분 질문. 농도 3점 챔피언의 평균이라 제일 좋은 농도 하나 골라 자랑하는 체리피킹이 구조적으로 막혀 있습니다. 나머지 넷은 각 축 컷 + 문헌 계보.
-[Q] 임계값 민감도 -&gt; 민감합니다. 그래서 다음 장 '1'을 결론으로 안 씁니다. 게이트 상태와 값이 교차 못하게 평탄화, 동점군 내 순위 무의미 명시.</a:t>
+              <a:t>다섯 게이트를 한 표로. 컷 값을 그대로 읽어드리면 - 구조안정은 0인데 이게 host 자기 자신이고요, 산화 게이트의 2.14 V도 undoped host의 onset입니다. 다섯 중 둘이 host를 영점으로 씁니다. 창 게이트는 0.05 V - 창이 존재하기는 해야 한다는 최소 조건. 수송은 BVSE 프록시 정규화 0.3, 역학은 로스터 중앙값 이하(연질+연성). 그리고 농도 3점 챔피언 평균이라 제일 좋은 농도 하나만 골라 자랑하는 체리피킹이 구조적으로 막혀 있습니다.
+[Q] 임계값 민감도 -&gt; 민감합니다. 그래서 다음 장 '1'을 결론으로 안 씁니다. 중앙값 컷(G5)은 정의상 로스터 의존이고, 그래서 게이트 상태와 값이 교차 못하게 평탄화 + 동점군 내 순위 무의미 명시.
+[Q] G4가 왜 MD가 아니라 BVSE 프록시? -&gt; 273계산 전수에 MD는 불가능. 프록시로 거르고 챔피언만 MD/DFT 재검 - 3-tier의 요지.</a:t>
             </a:r>
             <a:endParaRPr lang="en-US" dirty="0"/>
           </a:p>
@@ -1863,7 +1865,7 @@
           <a:p>
             <a:r>
               <a:rPr lang="en-US" dirty="0"/>
-              <a:t>세 가지 이유. 첫째, 마지막 '1'은 화학이 아니라 임계값의 성질. 둘째가 핵심 - 순차 AND는 상보성을 구조적으로 파괴합니다. 수송 약한데 산화안정 뛰어난 후보는 수송 게이트에서 죽는데, 그 후보야말로 수송 강한 놈과 짝지을 때 가장 값진 후보예요. 깔때기는 co-doping 가설 공간을 탐색 전에 잘라 버립니다. 셋째, 실제로 충돌합니다. 저희 B2O3는 수송 축 1등이면서, Zhu 그림 맨 아래 저 B3+ - 가수분해 -0.9로 공기안정 최악군. 이 후보를 점수 하나로 표현할 방법이 없습니다. 그래서 지우지 않고 엮는 쪽으로 갑니다.
+              <a:t>세 가지 이유. 첫째, 마지막 '1'은 화학이 아니라 임계값의 성질. 둘째가 핵심 - 순차 AND는 상보성을 구조적으로 파괴합니다. 수송이 약한데 산화안정이 뛰어난 후보는 수송 게이트에서 죽는데요, 그런 후보일수록 수송이 강한 후보와 짝지었을 때 제일 아깝습니다. 깔때기는 그 짝을 만들어 보기도 전에 버립니다. 셋째, 실제로 충돌합니다. 저희 B2O3는 수송 축 1등이면서, Zhu 그림 맨 아래 저 B3+ - 가수분해 -0.9로 공기안정 최악군. 이 후보를 점수 하나로 표현할 방법이 없습니다. 그래서 지우지 않고 엮는 쪽으로 갑니다.
 [Q] 다목적이면 결정 회피 아닌가 -&gt; 용도가 축 가중을 정합니다. 드라이룸 공정이면 공기축 가중 다운. 결정권을 용도에 돌려주는 것.
 [EN] Isn't multi-objective just indecision? -&gt; No - the application picks the weights; a funnel picks them for you, silently.
 [용어] PMF dF_perc: 시간평균 Li 밀도 자유에너지 지형의 퍼콜레이션 문턱(이 온도의 자유에너지, Ea 아님).</a:t>
@@ -2132,7 +2134,7 @@
             <a:r>
               <a:rPr lang="en-US" dirty="0"/>
               <a:t>조합의 아이디어는 단순합니다. 양극 쪽 막는 도펀트 + 음극 쪽 막는 도펀트로 합동 창을 넓히자. 반경 정합을 곱하고요. 1등 Cr2O3+HfO2 - 단일 최고보다 0.36 V 넓고 상위가 전부 anode-cathode 태그. 상보성이 실제로 구동 변수로 잡혔습니다. 그런데 - 만들 수는 있나? 세 점검: 자리 경쟁(InF3 선례는 서로 다른 자리 = 성공 패턴), 전하 산술, 공동 치환 형성에너지. 앞 둘은 지금 데이터로 점검 가능, 셋째가 계산 필요. 파일 첫 줄에 '가설, 미검증' 박아둔 이유.
-[Q] 실험 선례 -&gt; 아지로다이트 한 염 두 도펀트 계보(CuCl-MgF2-CuBr2-La2O3-InF3-GaF3)가 litdb에 있습니다.
+[Q] 실험 선례 -&gt; 아지로다이트 한 염 두 도펀트 계보가 litdb에 있습니다 - 연도순 CuCl(2021), MgF2(2023), InF3(2024), CuBr2/La2O3(2025), GaF3(2026). InF3(2024)가 이 그룹 자리배정의 원본입니다.
 [Q] 비율은? -&gt; 다음 장 - 지금 모델엔 비율 축이 없다는 게 정직한 답.
 [용어] joint window: max(산화한계)-min(환원한계) - 두 상이 양쪽을 각각 커버한다는 상보 가정.</a:t>
             </a:r>
@@ -2492,8 +2494,8 @@
           <a:p>
             <a:r>
               <a:rPr lang="en-US" dirty="0"/>
-              <a:t>이 표가 오늘의 중심입니다. 2번 - MSD 기울기로 Ea를 냈는데 그 구간이 확산 영역이 아니었습니다. 케이지 진동을 확산으로 착각. beta 게이트가 6중 6을 떨어뜨렸습니다. 10번 - Nd2S3 갭 1.79, 알고 보니 준안정 이론상 다형체 값. id를 박으니 0.76. 그림에 이미 들어가 있던 숫자입니다. 6-7-8번이 한 덩어리 - 다음 장. 그리고 열한 건 중 여섯이 지난 사흘 사이입니다. 게이트는 지금도 돌고 있습니다.
-[Q] 각 철회의 원자료 -&gt; 전부 repo에 - open_items 항목 번호와 커밋으로 추적. 요청 시 항목별 위치 제공.</a:t>
+              <a:t>이 표가 오늘의 중심입니다. 2번 - MSD 기울기로 Ea를 냈는데 그 구간이 확산 영역이 아니었습니다. 케이지 진동을 확산으로 착각. beta 게이트가 6중 6을 떨어뜨렸습니다. 10번 - Nd2S3 갭 1.79, 알고 보니 hull 위 20 meV의 '예측만' 다형체(mp-32586) 값이었습니다. id를 박으니 관측상은 0.76. 그림에 이미 들어가 있던 숫자입니다. 6-7-8번이 한 덩어리 - 다음 장. 장부로 읽으면 아홉 건 철회, 한 건 보류, 한 건 재현성 플래그이고, 다섯 건이 지난 나흘 사이입니다. 게이트는 지금도 돌고 있습니다.
+[Q] 각 철회의 원자료 -&gt; 전부 repo에 있습니다 - open_items 항목 번호와 커밋으로 추적되고, 7-8번(SDCP DFT+U)은 runs/sdcp_phaseB_vasp_v1_2026_08_08/ + db/properties/sdcp_phaseB_dftu_v1.json 에 2026-08-10 등재했습니다.</a:t>
             </a:r>
             <a:endParaRPr lang="en-US" dirty="0"/>
           </a:p>
@@ -3556,7 +3558,8 @@
           <a:p>
             <a:r>
               <a:rPr lang="en-US" dirty="0"/>
-              <a:t>A3. beta 게이트 정의식은 여기 있습니다 - 앙상블 평균 MSD에 적용한다는 게 요점(시드별 beta 평균이 아님).</a:t>
+              <a:t>A3. beta 게이트 정의식은 여기 있습니다 - 앙상블 평균 MSD에 적용한다는 게 요점(시드별 beta 평균이 아님). 오른쪽 그림은 모식도라고 제목에 박아 뒀습니다 - 실측 곡선 아님.
+[감사 이력] 원래 이 자리에 있던 Arrhenius 그림 2장은 철회값 0.253 eV와 절대 sigma 주석을 달고 있어 내렸다(자체 리뷰 F3). 재출력 전까지 모식도로 대체.</a:t>
             </a:r>
             <a:endParaRPr lang="en-US" dirty="0"/>
           </a:p>
@@ -3910,7 +3913,7 @@
           <a:p>
             <a:r>
               <a:rPr lang="en-US" dirty="0"/>
-              <a:t>A6. 원전 미보유 목록이 핵심 - 기억으로 서지를 쓰지 않습니다.</a:t>
+              <a:t>A5b. 자체 레드팀이 만든 5문항 - Q12에 없던 것들. 마지막 답은 빠진 원소 3개를 실제로 외워야 성립한다(발표 전 pool_provenance에서 확인).</a:t>
             </a:r>
             <a:endParaRPr lang="en-US" dirty="0"/>
           </a:p>
@@ -3998,7 +4001,7 @@
           <a:p>
             <a:r>
               <a:rPr lang="en-US" dirty="0"/>
-              <a:t>A7. Part 5 뒤 숫자 백업.</a:t>
+              <a:t>A6. 원전 미보유 목록이 핵심 - 기억으로 서지를 쓰지 않습니다.</a:t>
             </a:r>
             <a:endParaRPr lang="en-US" dirty="0"/>
           </a:p>
@@ -4022,6 +4025,94 @@
             <a:fld id="{F7021451-1387-4CA6-816F-3879F97B5CBC}" type="slidenum">
               <a:rPr lang="en-US"/>
               <a:t>42</a:t>
+            </a:fld>
+            <a:endParaRPr lang="en-US"/>
+          </a:p>
+        </p:txBody>
+      </p:sp>
+    </p:spTree>
+    <p:extLst>
+      <p:ext uri="{BB962C8B-B14F-4D97-AF65-F5344CB8AC3E}">
+        <p14:creationId xmlns:p14="http://schemas.microsoft.com/office/powerpoint/2010/main" val="1024086991"/>
+      </p:ext>
+    </p:extLst>
+  </p:cSld>
+  <p:clrMapOvr>
+    <a:masterClrMapping/>
+  </p:clrMapOvr>
+</p:notes>
+</file>
+
+<file path=ppt/notesSlides/notesSlide43.xml><?xml version="1.0" encoding="utf-8"?>
+<p:notes xmlns:a="http://schemas.openxmlformats.org/drawingml/2006/main" xmlns:r="http://schemas.openxmlformats.org/officeDocument/2006/relationships" xmlns:p="http://schemas.openxmlformats.org/presentationml/2006/main">
+  <p:cSld>
+    <p:spTree>
+      <p:nvGrpSpPr>
+        <p:cNvPr id="1" name=""/>
+        <p:cNvGrpSpPr/>
+        <p:nvPr/>
+      </p:nvGrpSpPr>
+      <p:grpSpPr>
+        <a:xfrm>
+          <a:off x="0" y="0"/>
+          <a:ext cx="0" cy="0"/>
+          <a:chOff x="0" y="0"/>
+          <a:chExt cx="0" cy="0"/>
+        </a:xfrm>
+      </p:grpSpPr>
+      <p:sp>
+        <p:nvSpPr>
+          <p:cNvPr id="2" name="Slide Image Placeholder 1"/>
+          <p:cNvSpPr>
+            <a:spLocks noGrp="1" noRot="1" noChangeAspect="1"/>
+          </p:cNvSpPr>
+          <p:nvPr>
+            <p:ph type="sldImg"/>
+          </p:nvPr>
+        </p:nvSpPr>
+        <p:spPr/>
+      </p:sp>
+      <p:sp>
+        <p:nvSpPr>
+          <p:cNvPr id="3" name="Notes Placeholder 2"/>
+          <p:cNvSpPr>
+            <a:spLocks noGrp="1"/>
+          </p:cNvSpPr>
+          <p:nvPr>
+            <p:ph type="body" idx="1"/>
+          </p:nvPr>
+        </p:nvSpPr>
+        <p:spPr/>
+        <p:txBody>
+          <a:bodyPr/>
+          <a:lstStyle/>
+          <a:p>
+            <a:r>
+              <a:rPr lang="en-US" dirty="0"/>
+              <a:t>A7. Part 5 뒤 숫자 백업.</a:t>
+            </a:r>
+            <a:endParaRPr lang="en-US" dirty="0"/>
+          </a:p>
+        </p:txBody>
+      </p:sp>
+      <p:sp>
+        <p:nvSpPr>
+          <p:cNvPr id="4" name="Slide Number Placeholder 3"/>
+          <p:cNvSpPr>
+            <a:spLocks noGrp="1"/>
+          </p:cNvSpPr>
+          <p:nvPr>
+            <p:ph type="sldNum" sz="quarter" idx="10"/>
+          </p:nvPr>
+        </p:nvSpPr>
+        <p:spPr/>
+        <p:txBody>
+          <a:bodyPr/>
+          <a:lstStyle/>
+          <a:p>
+            <a:fld id="{F7021451-1387-4CA6-816F-3879F97B5CBC}" type="slidenum">
+              <a:rPr lang="en-US"/>
+              <a:t>43</a:t>
             </a:fld>
             <a:endParaRPr lang="en-US"/>
           </a:p>
@@ -4086,9 +4177,10 @@
           <a:p>
             <a:r>
               <a:rPr lang="en-US" dirty="0"/>
-              <a:t>스크리닝 발표는 보통 '몇 개에서 몇 개를 찾았다'로 끝납니다. 더 어려운 질문은 '떨어져야 할 게 정말 떨어졌나'입니다. 아무도 보고 안 합니다. 오늘 저는 저희가 냈다가 철회한 판정 열한 건을 보여드리고, 각각 어느 게이트가 잡았는지 붙이겠습니다. 게이트가 없었으면 이 열한 개 숫자는 그대로 나갔습니다.
-[Q 핵심] 철회가 많다 = 부실? -&gt; 철회 건수는 신뢰도의 반대 지표가 아니라 게이트 밀도의 지표입니다. 게이트 없는 파이프라인은 철회가 0건입니다 - 틀린 게 없어서가 아니라 못 찾아서입니다.
-[EN] Isn't 11 retractions a red flag? -&gt; A pipeline with no gates reports zero retractions - not because nothing is wrong but because nothing is checked.</a:t>
+              <a:t>스크리닝 발표는 보통 '몇 개에서 몇 개를 찾았다'로 끝납니다. 더 어려운 질문은 '떨어져야 할 게 정말 떨어졌나'인데, 이걸 보고하는 발표가 드뭅니다. 저희는 그걸 표로 보여드리겠습니다 - 저희 판정 열한 건을 감사대에 올렸고 아홉 건을 철회했습니다. 그리고 이 열한 개 중 하나는 실제로 지난 세미나에서 결론으로 발표됐던 숫자입니다. 오늘 그 철회부터 보여드립니다.
+[Q 핵심 1합] 철회가 많다 = 부실? -&gt; 철회 건수는 신뢰도의 반대 지표가 아니라 게이트 밀도의 지표입니다. 게이트 없는 파이프라인은 철회가 0건입니다 - 틀린 게 없어서가 아니라 못 찾아서입니다.
+[Q 핵심 2합 - 사후 명명 공격] '오류를 발견한 뒤에 게이트라고 이름 붙인 것 아닌가' -&gt; 절반은 인정합니다. 오류가 규칙을 낳았습니다. 하지만 규칙이 코드에 박힌 뒤에는 사람이 아니라 규칙이 잡습니다: 7번(SDCP)은 'UMA는 전하 분리를 판정할 수 없다'를 사고 전에 미리 코드에 박아둔 규칙이 잡았고, 11번은 자동 감사기가 잡았고, 11건 중 6건이 지난 사흘간 돌던 게이트에서 나왔습니다.
+[EN] Isn't that a red flag? -&gt; A pipeline with no gates reports zero retractions - not because nothing is wrong but because nothing is checked.</a:t>
             </a:r>
             <a:endParaRPr lang="en-US" dirty="0"/>
           </a:p>
@@ -4264,10 +4356,10 @@
           <a:p>
             <a:r>
               <a:rPr lang="en-US" dirty="0"/>
-              <a:t>전자 백 개면 파동함수가 삼백 차원입니다. HK - 바닥상태는 3차원 밀도만으로 결정. KS - 같은 밀도를 주는 비상호작용 계로 치환, 모르는 건 전부 교환상관 범함수 한 곳에. 근사가 한 군데만 들어가니 오차의 성격을 압니다: PBE는 갭을 30-50% 과소평가 - 미분 불연속이 없어서. 그래서 갭 절대값을 안 씁니다. Ni 3d에 U 6.2 - 경험 파라미터라 고정하고 같은 U 안 차이만 인용합니다.
+              <a:t>전자가 백 개면 파동함수가 삼백 차원이라 저장이 안 됩니다. 첫 도약이 Hohenberg-Kohn이고요, 바닥상태는 3차원 밀도만으로 결정됩니다. 두 번째 도약이 Kohn-Sham인데요, 같은 밀도를 주는 가짜 전자계로 바꿔서 풉니다. 모르는 부분은 전부 한 항 - 교환상관 항에 몰아넣고요. 요점은 하나입니다: 근사가 한 곳에만 들어가니까 오차의 성격을 예측할 수 있고, 그래서 저희는 갭 절대값을 안 씁니다. Ni 3d의 U 6.2도 경험 파라미터라서 고정하고 같은 U 안의 차이만 인용합니다. (90초 컷)
+[질문 대비 - 미분 불연속 1분 설명] 전자 수 N을 연속으로 늘리면 총에너지 곡선이 정수마다 꺾여야 하고, 그 꺾임(도함수의 점프)이 갭의 일부입니다. PBE 같은 semi-local 범함수는 이 점프가 0이라 그만큼 갭이 작게 나옵니다 - 부정확이 아니라 구조적 부재.
 [Q] 왜 hybrid 안 쓰나 -&gt; 273계산 스크리닝에 비용 두 자릿수. 순위 문제라 같은 방법 안 차이면 충분.
-[Q] U=6.2 출처 -&gt; MP VASP GGA+U 관례값과 동일 계보. 인용 전 원전 확인 조건을 입력 주석에 박아둠.
-[용어] derivative discontinuity: 전자 수가 정수를 지날 때 XC 퍼텐셜의 점프. semi-local엔 없음.</a:t>
+[Q] U=6.2 출처 -&gt; MP VASP GGA+U 관례값과 동일 계보. 인용 전 원전 확인 조건을 입력 주석에 박아둠.</a:t>
             </a:r>
             <a:endParaRPr lang="en-US" dirty="0"/>
           </a:p>
@@ -4445,7 +4537,8 @@
           <a:p>
             <a:r>
               <a:rPr lang="en-US" dirty="0"/>
-              <a:t>DFT로 200 ps MD는 불가능합니다. 그래서 MLIP. 다만 저희 계에서 실측으로 확인된 한계가 셋: 전하 상태를 못 다루고(이게 Part 6에서 제일 비싼 교훈으로 돌아옵니다), 자기 상태를 못 고르고, 분산력이 훈련에 없습니다. Li3N에는 금지 - 결정론적 편향 확인. 원칙은 하나: MLIP는 스크리닝 대체 모델, 챔피언은 반드시 DFT 재검.
+              <a:t>[그림 단서] 이 그림의 피팅 음영은 표시용 창이고 정본 MSD 창은 2-50 ps 고정 - 질문 나오면 그렇게 답한다.
+DFT로 200 ps MD는 불가능합니다. 그래서 MLIP. 다만 저희 계에서 실측으로 확인된 한계가 셋: 전하 상태를 못 다루고(이게 Part 6에서 제일 비싼 교훈으로 돌아옵니다), 자기 상태를 못 고르고, 분산력이 훈련에 없습니다. Li3N에는 금지 - 결정론적 편향 확인. 원칙은 하나: MLIP는 스크리닝 대체 모델, 챔피언은 반드시 DFT 재검.
 [Q] MLIP 오차? -&gt; 계/물성마다 달라 오차 '값'보다 실패 유형(전하/자기/분산)으로 관리 - 유형에 걸리는 질문은 MLIP로 안 닫습니다.
 [용어] omat: UMA 무기재료 헤드. deterministic bias: 시드를 바꿔도 같은 방향으로 틀리는 오차.</a:t>
             </a:r>
@@ -5089,6 +5182,45 @@
         </p:nvSpPr>
         <p:spPr>
           <a:xfrm>
+            <a:off x="502920" y="3886200"/>
+            <a:ext cx="8138160" cy="274320"/>
+          </a:xfrm>
+          <a:prstGeom prst="rect">
+            <a:avLst/>
+          </a:prstGeom>
+          <a:noFill/>
+          <a:ln/>
+        </p:spPr>
+        <p:txBody>
+          <a:bodyPr wrap="square" lIns="0" tIns="0" rIns="0" bIns="0" rtlCol="0" anchor="ctr"/>
+          <a:lstStyle/>
+          <a:p>
+            <a:pPr indent="0" marL="0">
+              <a:buNone/>
+            </a:pPr>
+            <a:r>
+              <a:rPr lang="en-US" sz="1050" dirty="0">
+                <a:solidFill>
+                  <a:srgbClr val="7F7F7F"/>
+                </a:solidFill>
+                <a:latin typeface="Arial" pitchFamily="34" charset="0"/>
+                <a:ea typeface="Arial" pitchFamily="34" charset="-122"/>
+                <a:cs typeface="Arial" pitchFamily="34" charset="-120"/>
+              </a:rPr>
+              <a:t>게이트가 걸러낸 것들의 기록 — 판정 11건을 감사해 9건을 철회시킨 파이프라인</a:t>
+            </a:r>
+            <a:endParaRPr lang="en-US" sz="1050" dirty="0"/>
+          </a:p>
+        </p:txBody>
+      </p:sp>
+      <p:sp>
+        <p:nvSpPr>
+          <p:cNvPr id="9" name="Text 7"/>
+          <p:cNvSpPr/>
+          <p:nvPr/>
+        </p:nvSpPr>
+        <p:spPr>
+          <a:xfrm>
             <a:off x="502920" y="6309360"/>
             <a:ext cx="3657600" cy="274320"/>
           </a:xfrm>
@@ -5117,98 +5249,6 @@
               <a:t>HANYANG UNIVERSITY</a:t>
             </a:r>
             <a:endParaRPr lang="en-US" sz="1000" dirty="0"/>
-          </a:p>
-        </p:txBody>
-      </p:sp>
-      <p:sp>
-        <p:nvSpPr>
-          <p:cNvPr id="10" name="Text 7"/>
-          <p:cNvSpPr/>
-          <p:nvPr/>
-        </p:nvSpPr>
-        <p:spPr>
-          <a:xfrm>
-            <a:off x="457200" y="6473952"/>
-            <a:ext cx="5029200" cy="274320"/>
-          </a:xfrm>
-          <a:prstGeom prst="rect">
-            <a:avLst/>
-          </a:prstGeom>
-          <a:noFill/>
-          <a:ln/>
-        </p:spPr>
-        <p:txBody>
-          <a:bodyPr wrap="square" lIns="0" tIns="0" rIns="0" bIns="0" rtlCol="0" anchor="ctr"/>
-          <a:lstStyle/>
-          <a:p>
-            <a:pPr indent="0" marL="0">
-              <a:buNone/>
-            </a:pPr>
-            <a:r>
-              <a:rPr lang="en-US" sz="800" b="1" dirty="0">
-                <a:solidFill>
-                  <a:srgbClr val="1F4E79"/>
-                </a:solidFill>
-                <a:latin typeface="Arial" pitchFamily="34" charset="0"/>
-                <a:ea typeface="Arial" pitchFamily="34" charset="-122"/>
-                <a:cs typeface="Arial" pitchFamily="34" charset="-120"/>
-              </a:rPr>
-              <a:t>HANYANG UNIVERSITY</a:t>
-            </a:r>
-            <a:pPr indent="0" marL="0">
-              <a:buNone/>
-            </a:pPr>
-            <a:r>
-              <a:rPr lang="en-US" sz="800" dirty="0">
-                <a:solidFill>
-                  <a:srgbClr val="7F7F7F"/>
-                </a:solidFill>
-                <a:latin typeface="Arial" pitchFamily="34" charset="0"/>
-                <a:ea typeface="Arial" pitchFamily="34" charset="-122"/>
-                <a:cs typeface="Arial" pitchFamily="34" charset="-120"/>
-              </a:rPr>
-              <a:t>   Battery Materials Lab.</a:t>
-            </a:r>
-            <a:endParaRPr lang="en-US" sz="800" dirty="0"/>
-          </a:p>
-        </p:txBody>
-      </p:sp>
-      <p:sp>
-        <p:nvSpPr>
-          <p:cNvPr id="11" name="Text 8"/>
-          <p:cNvSpPr/>
-          <p:nvPr/>
-        </p:nvSpPr>
-        <p:spPr>
-          <a:xfrm>
-            <a:off x="8503920" y="6473952"/>
-            <a:ext cx="320040" cy="274320"/>
-          </a:xfrm>
-          <a:prstGeom prst="rect">
-            <a:avLst/>
-          </a:prstGeom>
-          <a:noFill/>
-          <a:ln/>
-        </p:spPr>
-        <p:txBody>
-          <a:bodyPr wrap="square" lIns="0" tIns="0" rIns="0" bIns="0" rtlCol="0" anchor="ctr"/>
-          <a:lstStyle/>
-          <a:p>
-            <a:pPr algn="r" indent="0" marL="0">
-              <a:buNone/>
-            </a:pPr>
-            <a:r>
-              <a:rPr lang="en-US" sz="900" dirty="0">
-                <a:solidFill>
-                  <a:srgbClr val="7F7F7F"/>
-                </a:solidFill>
-                <a:latin typeface="Arial" pitchFamily="34" charset="0"/>
-                <a:ea typeface="Arial" pitchFamily="34" charset="-122"/>
-                <a:cs typeface="Arial" pitchFamily="34" charset="-120"/>
-              </a:rPr>
-              <a:t>1</a:t>
-            </a:r>
-            <a:endParaRPr lang="en-US" sz="900" dirty="0"/>
           </a:p>
         </p:txBody>
       </p:sp>
@@ -5486,7 +5526,46 @@
       </p:sp>
       <p:sp>
         <p:nvSpPr>
-          <p:cNvPr id="8" name="Shape 6"/>
+          <p:cNvPr id="8" name="Text 6"/>
+          <p:cNvSpPr/>
+          <p:nvPr/>
+        </p:nvSpPr>
+        <p:spPr>
+          <a:xfrm>
+            <a:off x="502920" y="5038344"/>
+            <a:ext cx="1188720" cy="201168"/>
+          </a:xfrm>
+          <a:prstGeom prst="rect">
+            <a:avLst/>
+          </a:prstGeom>
+          <a:noFill/>
+          <a:ln/>
+        </p:spPr>
+        <p:txBody>
+          <a:bodyPr wrap="square" lIns="0" tIns="0" rIns="0" bIns="0" rtlCol="0" anchor="ctr"/>
+          <a:lstStyle/>
+          <a:p>
+            <a:pPr algn="ctr" indent="0" marL="0">
+              <a:buNone/>
+            </a:pPr>
+            <a:r>
+              <a:rPr lang="en-US" sz="850" i="1" dirty="0">
+                <a:solidFill>
+                  <a:srgbClr val="7F7F7F"/>
+                </a:solidFill>
+                <a:latin typeface="Arial" pitchFamily="34" charset="0"/>
+                <a:ea typeface="Arial" pitchFamily="34" charset="-122"/>
+                <a:cs typeface="Arial" pitchFamily="34" charset="-120"/>
+              </a:rPr>
+              <a:t>ask</a:t>
+            </a:r>
+            <a:endParaRPr lang="en-US" sz="850" dirty="0"/>
+          </a:p>
+        </p:txBody>
+      </p:sp>
+      <p:sp>
+        <p:nvSpPr>
+          <p:cNvPr id="9" name="Shape 7"/>
           <p:cNvSpPr/>
           <p:nvPr/>
         </p:nvSpPr>
@@ -5510,7 +5589,7 @@
       </p:sp>
       <p:sp>
         <p:nvSpPr>
-          <p:cNvPr id="9" name="Shape 7"/>
+          <p:cNvPr id="10" name="Shape 8"/>
           <p:cNvSpPr/>
           <p:nvPr/>
         </p:nvSpPr>
@@ -5537,7 +5616,7 @@
       </p:sp>
       <p:sp>
         <p:nvSpPr>
-          <p:cNvPr id="10" name="Text 8"/>
+          <p:cNvPr id="11" name="Text 9"/>
           <p:cNvSpPr/>
           <p:nvPr/>
         </p:nvSpPr>
@@ -5594,7 +5673,46 @@
       </p:sp>
       <p:sp>
         <p:nvSpPr>
-          <p:cNvPr id="11" name="Shape 9"/>
+          <p:cNvPr id="12" name="Text 10"/>
+          <p:cNvSpPr/>
+          <p:nvPr/>
+        </p:nvSpPr>
+        <p:spPr>
+          <a:xfrm>
+            <a:off x="1892808" y="5038344"/>
+            <a:ext cx="1188720" cy="201168"/>
+          </a:xfrm>
+          <a:prstGeom prst="rect">
+            <a:avLst/>
+          </a:prstGeom>
+          <a:noFill/>
+          <a:ln/>
+        </p:spPr>
+        <p:txBody>
+          <a:bodyPr wrap="square" lIns="0" tIns="0" rIns="0" bIns="0" rtlCol="0" anchor="ctr"/>
+          <a:lstStyle/>
+          <a:p>
+            <a:pPr algn="ctr" indent="0" marL="0">
+              <a:buNone/>
+            </a:pPr>
+            <a:r>
+              <a:rPr lang="en-US" sz="850" i="1" dirty="0">
+                <a:solidFill>
+                  <a:srgbClr val="7F7F7F"/>
+                </a:solidFill>
+                <a:latin typeface="Arial" pitchFamily="34" charset="0"/>
+                <a:ea typeface="Arial" pitchFamily="34" charset="-122"/>
+                <a:cs typeface="Arial" pitchFamily="34" charset="-120"/>
+              </a:rPr>
+              <a:t>measure</a:t>
+            </a:r>
+            <a:endParaRPr lang="en-US" sz="850" dirty="0"/>
+          </a:p>
+        </p:txBody>
+      </p:sp>
+      <p:sp>
+        <p:nvSpPr>
+          <p:cNvPr id="13" name="Shape 11"/>
           <p:cNvSpPr/>
           <p:nvPr/>
         </p:nvSpPr>
@@ -5618,7 +5736,7 @@
       </p:sp>
       <p:sp>
         <p:nvSpPr>
-          <p:cNvPr id="12" name="Shape 10"/>
+          <p:cNvPr id="14" name="Shape 12"/>
           <p:cNvSpPr/>
           <p:nvPr/>
         </p:nvSpPr>
@@ -5645,7 +5763,7 @@
       </p:sp>
       <p:sp>
         <p:nvSpPr>
-          <p:cNvPr id="13" name="Text 11"/>
+          <p:cNvPr id="15" name="Text 13"/>
           <p:cNvSpPr/>
           <p:nvPr/>
         </p:nvSpPr>
@@ -5702,7 +5820,46 @@
       </p:sp>
       <p:sp>
         <p:nvSpPr>
-          <p:cNvPr id="14" name="Shape 12"/>
+          <p:cNvPr id="16" name="Text 14"/>
+          <p:cNvSpPr/>
+          <p:nvPr/>
+        </p:nvSpPr>
+        <p:spPr>
+          <a:xfrm>
+            <a:off x="3282696" y="5038344"/>
+            <a:ext cx="1188720" cy="201168"/>
+          </a:xfrm>
+          <a:prstGeom prst="rect">
+            <a:avLst/>
+          </a:prstGeom>
+          <a:noFill/>
+          <a:ln/>
+        </p:spPr>
+        <p:txBody>
+          <a:bodyPr wrap="square" lIns="0" tIns="0" rIns="0" bIns="0" rtlCol="0" anchor="ctr"/>
+          <a:lstStyle/>
+          <a:p>
+            <a:pPr algn="ctr" indent="0" marL="0">
+              <a:buNone/>
+            </a:pPr>
+            <a:r>
+              <a:rPr lang="en-US" sz="850" b="1" i="1" dirty="0">
+                <a:solidFill>
+                  <a:srgbClr val="1F4E79"/>
+                </a:solidFill>
+                <a:latin typeface="Arial" pitchFamily="34" charset="0"/>
+                <a:ea typeface="Arial" pitchFamily="34" charset="-122"/>
+                <a:cs typeface="Arial" pitchFamily="34" charset="-120"/>
+              </a:rPr>
+              <a:t>learn</a:t>
+            </a:r>
+            <a:endParaRPr lang="en-US" sz="850" dirty="0"/>
+          </a:p>
+        </p:txBody>
+      </p:sp>
+      <p:sp>
+        <p:nvSpPr>
+          <p:cNvPr id="17" name="Shape 15"/>
           <p:cNvSpPr/>
           <p:nvPr/>
         </p:nvSpPr>
@@ -5726,7 +5883,7 @@
       </p:sp>
       <p:sp>
         <p:nvSpPr>
-          <p:cNvPr id="15" name="Shape 13"/>
+          <p:cNvPr id="18" name="Shape 16"/>
           <p:cNvSpPr/>
           <p:nvPr/>
         </p:nvSpPr>
@@ -5753,7 +5910,7 @@
       </p:sp>
       <p:sp>
         <p:nvSpPr>
-          <p:cNvPr id="16" name="Text 14"/>
+          <p:cNvPr id="19" name="Text 17"/>
           <p:cNvSpPr/>
           <p:nvPr/>
         </p:nvSpPr>
@@ -5810,7 +5967,46 @@
       </p:sp>
       <p:sp>
         <p:nvSpPr>
-          <p:cNvPr id="17" name="Shape 15"/>
+          <p:cNvPr id="20" name="Text 18"/>
+          <p:cNvSpPr/>
+          <p:nvPr/>
+        </p:nvSpPr>
+        <p:spPr>
+          <a:xfrm>
+            <a:off x="4672584" y="5038344"/>
+            <a:ext cx="1188720" cy="201168"/>
+          </a:xfrm>
+          <a:prstGeom prst="rect">
+            <a:avLst/>
+          </a:prstGeom>
+          <a:noFill/>
+          <a:ln/>
+        </p:spPr>
+        <p:txBody>
+          <a:bodyPr wrap="square" lIns="0" tIns="0" rIns="0" bIns="0" rtlCol="0" anchor="ctr"/>
+          <a:lstStyle/>
+          <a:p>
+            <a:pPr algn="ctr" indent="0" marL="0">
+              <a:buNone/>
+            </a:pPr>
+            <a:r>
+              <a:rPr lang="en-US" sz="850" i="1" dirty="0">
+                <a:solidFill>
+                  <a:srgbClr val="7F7F7F"/>
+                </a:solidFill>
+                <a:latin typeface="Arial" pitchFamily="34" charset="0"/>
+                <a:ea typeface="Arial" pitchFamily="34" charset="-122"/>
+                <a:cs typeface="Arial" pitchFamily="34" charset="-120"/>
+              </a:rPr>
+              <a:t>gate</a:t>
+            </a:r>
+            <a:endParaRPr lang="en-US" sz="850" dirty="0"/>
+          </a:p>
+        </p:txBody>
+      </p:sp>
+      <p:sp>
+        <p:nvSpPr>
+          <p:cNvPr id="21" name="Shape 19"/>
           <p:cNvSpPr/>
           <p:nvPr/>
         </p:nvSpPr>
@@ -5834,7 +6030,7 @@
       </p:sp>
       <p:sp>
         <p:nvSpPr>
-          <p:cNvPr id="18" name="Shape 16"/>
+          <p:cNvPr id="22" name="Shape 20"/>
           <p:cNvSpPr/>
           <p:nvPr/>
         </p:nvSpPr>
@@ -5861,7 +6057,7 @@
       </p:sp>
       <p:sp>
         <p:nvSpPr>
-          <p:cNvPr id="19" name="Text 17"/>
+          <p:cNvPr id="23" name="Text 21"/>
           <p:cNvSpPr/>
           <p:nvPr/>
         </p:nvSpPr>
@@ -5918,7 +6114,46 @@
       </p:sp>
       <p:sp>
         <p:nvSpPr>
-          <p:cNvPr id="20" name="Shape 18"/>
+          <p:cNvPr id="24" name="Text 22"/>
+          <p:cNvSpPr/>
+          <p:nvPr/>
+        </p:nvSpPr>
+        <p:spPr>
+          <a:xfrm>
+            <a:off x="6062472" y="5038344"/>
+            <a:ext cx="1188720" cy="201168"/>
+          </a:xfrm>
+          <a:prstGeom prst="rect">
+            <a:avLst/>
+          </a:prstGeom>
+          <a:noFill/>
+          <a:ln/>
+        </p:spPr>
+        <p:txBody>
+          <a:bodyPr wrap="square" lIns="0" tIns="0" rIns="0" bIns="0" rtlCol="0" anchor="ctr"/>
+          <a:lstStyle/>
+          <a:p>
+            <a:pPr algn="ctr" indent="0" marL="0">
+              <a:buNone/>
+            </a:pPr>
+            <a:r>
+              <a:rPr lang="en-US" sz="850" i="1" dirty="0">
+                <a:solidFill>
+                  <a:srgbClr val="7F7F7F"/>
+                </a:solidFill>
+                <a:latin typeface="Arial" pitchFamily="34" charset="0"/>
+                <a:ea typeface="Arial" pitchFamily="34" charset="-122"/>
+                <a:cs typeface="Arial" pitchFamily="34" charset="-120"/>
+              </a:rPr>
+              <a:t>combine</a:t>
+            </a:r>
+            <a:endParaRPr lang="en-US" sz="850" dirty="0"/>
+          </a:p>
+        </p:txBody>
+      </p:sp>
+      <p:sp>
+        <p:nvSpPr>
+          <p:cNvPr id="25" name="Shape 23"/>
           <p:cNvSpPr/>
           <p:nvPr/>
         </p:nvSpPr>
@@ -5942,7 +6177,7 @@
       </p:sp>
       <p:sp>
         <p:nvSpPr>
-          <p:cNvPr id="21" name="Shape 19"/>
+          <p:cNvPr id="26" name="Shape 24"/>
           <p:cNvSpPr/>
           <p:nvPr/>
         </p:nvSpPr>
@@ -5969,7 +6204,7 @@
       </p:sp>
       <p:sp>
         <p:nvSpPr>
-          <p:cNvPr id="22" name="Text 20"/>
+          <p:cNvPr id="27" name="Text 25"/>
           <p:cNvSpPr/>
           <p:nvPr/>
         </p:nvSpPr>
@@ -6018,7 +6253,7 @@
                 <a:ea typeface="Arial" pitchFamily="34" charset="-122"/>
                 <a:cs typeface="Arial" pitchFamily="34" charset="-120"/>
               </a:rPr>
-              <a:t>11 retractions</a:t>
+              <a:t>11 audited verdicts</a:t>
             </a:r>
             <a:endParaRPr lang="en-US" sz="1000" dirty="0"/>
           </a:p>
@@ -6026,7 +6261,46 @@
       </p:sp>
       <p:sp>
         <p:nvSpPr>
-          <p:cNvPr id="23" name="Shape 21"/>
+          <p:cNvPr id="28" name="Text 26"/>
+          <p:cNvSpPr/>
+          <p:nvPr/>
+        </p:nvSpPr>
+        <p:spPr>
+          <a:xfrm>
+            <a:off x="7452360" y="5038344"/>
+            <a:ext cx="1188720" cy="201168"/>
+          </a:xfrm>
+          <a:prstGeom prst="rect">
+            <a:avLst/>
+          </a:prstGeom>
+          <a:noFill/>
+          <a:ln/>
+        </p:spPr>
+        <p:txBody>
+          <a:bodyPr wrap="square" lIns="0" tIns="0" rIns="0" bIns="0" rtlCol="0" anchor="ctr"/>
+          <a:lstStyle/>
+          <a:p>
+            <a:pPr algn="ctr" indent="0" marL="0">
+              <a:buNone/>
+            </a:pPr>
+            <a:r>
+              <a:rPr lang="en-US" sz="850" i="1" dirty="0">
+                <a:solidFill>
+                  <a:srgbClr val="7F7F7F"/>
+                </a:solidFill>
+                <a:latin typeface="Arial" pitchFamily="34" charset="0"/>
+                <a:ea typeface="Arial" pitchFamily="34" charset="-122"/>
+                <a:cs typeface="Arial" pitchFamily="34" charset="-120"/>
+              </a:rPr>
+              <a:t>doubt</a:t>
+            </a:r>
+            <a:endParaRPr lang="en-US" sz="850" dirty="0"/>
+          </a:p>
+        </p:txBody>
+      </p:sp>
+      <p:sp>
+        <p:nvSpPr>
+          <p:cNvPr id="29" name="Shape 27"/>
           <p:cNvSpPr/>
           <p:nvPr/>
         </p:nvSpPr>
@@ -6050,7 +6324,7 @@
       </p:sp>
       <p:sp>
         <p:nvSpPr>
-          <p:cNvPr id="24" name="Shape 22"/>
+          <p:cNvPr id="30" name="Shape 28"/>
           <p:cNvSpPr/>
           <p:nvPr/>
         </p:nvSpPr>
@@ -6073,7 +6347,7 @@
       </p:sp>
       <p:sp>
         <p:nvSpPr>
-          <p:cNvPr id="25" name="Shape 23"/>
+          <p:cNvPr id="31" name="Shape 29"/>
           <p:cNvSpPr/>
           <p:nvPr/>
         </p:nvSpPr>
@@ -6096,7 +6370,7 @@
       </p:sp>
       <p:sp>
         <p:nvSpPr>
-          <p:cNvPr id="26" name="Text 24"/>
+          <p:cNvPr id="32" name="Text 30"/>
           <p:cNvSpPr/>
           <p:nvPr/>
         </p:nvSpPr>
@@ -6135,7 +6409,7 @@
       </p:sp>
       <p:sp>
         <p:nvSpPr>
-          <p:cNvPr id="27" name="Shape 25"/>
+          <p:cNvPr id="33" name="Shape 31"/>
           <p:cNvSpPr/>
           <p:nvPr/>
         </p:nvSpPr>
@@ -6159,7 +6433,7 @@
       </p:sp>
       <p:sp>
         <p:nvSpPr>
-          <p:cNvPr id="28" name="Shape 26"/>
+          <p:cNvPr id="34" name="Shape 32"/>
           <p:cNvSpPr/>
           <p:nvPr/>
         </p:nvSpPr>
@@ -6182,7 +6456,7 @@
       </p:sp>
       <p:sp>
         <p:nvSpPr>
-          <p:cNvPr id="29" name="Shape 27"/>
+          <p:cNvPr id="35" name="Shape 33"/>
           <p:cNvSpPr/>
           <p:nvPr/>
         </p:nvSpPr>
@@ -6205,7 +6479,7 @@
       </p:sp>
       <p:sp>
         <p:nvSpPr>
-          <p:cNvPr id="30" name="Text 28"/>
+          <p:cNvPr id="36" name="Text 34"/>
           <p:cNvSpPr/>
           <p:nvPr/>
         </p:nvSpPr>
@@ -6244,7 +6518,7 @@
       </p:sp>
       <p:sp>
         <p:nvSpPr>
-          <p:cNvPr id="31" name="Text 29"/>
+          <p:cNvPr id="37" name="Text 35"/>
           <p:cNvSpPr/>
           <p:nvPr/>
         </p:nvSpPr>
@@ -6297,7 +6571,7 @@
       </p:sp>
       <p:sp>
         <p:nvSpPr>
-          <p:cNvPr id="32" name="Text 30"/>
+          <p:cNvPr id="38" name="Text 36"/>
           <p:cNvSpPr/>
           <p:nvPr/>
         </p:nvSpPr>
@@ -7705,7 +7979,7 @@
       </p:sp>
       <p:pic>
         <p:nvPicPr>
-          <p:cNvPr id="5" name="Image 0" descr="/home/user/Yonghoon-DEM-DFT/docs/figures/deck_extracted/bvse_channels.png">    </p:cNvPr>
+          <p:cNvPr id="5" name="Image 0" descr="/home/user/Yonghoon-DEM-DFT/docs/figures/bv_path_annotated_modelc.png">    </p:cNvPr>
           <p:cNvPicPr>
             <a:picLocks noChangeAspect="1"/>
           </p:cNvPicPr>
@@ -7718,8 +7992,8 @@
         </p:blipFill>
         <p:spPr>
           <a:xfrm>
-            <a:off x="502920" y="1463040"/>
-            <a:ext cx="4572000" cy="2377440"/>
+            <a:off x="502920" y="1371600"/>
+            <a:ext cx="4572000" cy="4206240"/>
           </a:xfrm>
           <a:prstGeom prst="rect">
             <a:avLst/>
@@ -7734,7 +8008,7 @@
         </p:nvSpPr>
         <p:spPr>
           <a:xfrm>
-            <a:off x="502920" y="3858768"/>
+            <a:off x="502920" y="5596128"/>
             <a:ext cx="4572000" cy="274320"/>
           </a:xfrm>
           <a:prstGeom prst="rect">
@@ -7759,7 +8033,7 @@
                 <a:ea typeface="Arial" pitchFamily="34" charset="-122"/>
                 <a:cs typeface="Arial" pitchFamily="34" charset="-120"/>
               </a:rPr>
-              <a:t>BVSE percolation channels — the network the substitution opens</a:t>
+              <a:t>BV percolation path, LPSCl₁.₆ — vacancy sites line the hop network (empty-lattice proxy; ranking by MLIP-MD)</a:t>
             </a:r>
             <a:endParaRPr lang="en-US" sz="850" dirty="0"/>
           </a:p>
@@ -7803,6 +8077,27 @@
                 <a:cs typeface="Arial" pitchFamily="34" charset="-120"/>
               </a:rPr>
               <a:t>More Cl → Li vacancies (charge balance) + 4d Cl anti-site → hop network opens</a:t>
+            </a:r>
+            <a:endParaRPr lang="en-US" sz="1150" dirty="0"/>
+          </a:p>
+          <a:p>
+            <a:pPr lvl="1" marL="254000" indent="-127000">
+              <a:spcAft>
+                <a:spcPts val="500"/>
+              </a:spcAft>
+              <a:buSzPct val="100000"/>
+              <a:buChar char="–"/>
+            </a:pPr>
+            <a:r>
+              <a:rPr lang="en-US" sz="1150" dirty="0">
+                <a:solidFill>
+                  <a:srgbClr val="7F7F7F"/>
+                </a:solidFill>
+                <a:latin typeface="Arial" pitchFamily="34" charset="0"/>
+                <a:ea typeface="Arial" pitchFamily="34" charset="-122"/>
+                <a:cs typeface="Arial" pitchFamily="34" charset="-120"/>
+              </a:rPr>
+              <a:t>The static BVSE channel actually shrinks (−15%) — the gain is dynamic: vacancies in motion</a:t>
             </a:r>
             <a:endParaRPr lang="en-US" sz="1150" dirty="0"/>
           </a:p>
@@ -8258,7 +8553,46 @@
       </p:sp>
       <p:sp>
         <p:nvSpPr>
-          <p:cNvPr id="8" name="Shape 6"/>
+          <p:cNvPr id="8" name="Text 6"/>
+          <p:cNvSpPr/>
+          <p:nvPr/>
+        </p:nvSpPr>
+        <p:spPr>
+          <a:xfrm>
+            <a:off x="502920" y="5038344"/>
+            <a:ext cx="1188720" cy="201168"/>
+          </a:xfrm>
+          <a:prstGeom prst="rect">
+            <a:avLst/>
+          </a:prstGeom>
+          <a:noFill/>
+          <a:ln/>
+        </p:spPr>
+        <p:txBody>
+          <a:bodyPr wrap="square" lIns="0" tIns="0" rIns="0" bIns="0" rtlCol="0" anchor="ctr"/>
+          <a:lstStyle/>
+          <a:p>
+            <a:pPr algn="ctr" indent="0" marL="0">
+              <a:buNone/>
+            </a:pPr>
+            <a:r>
+              <a:rPr lang="en-US" sz="850" i="1" dirty="0">
+                <a:solidFill>
+                  <a:srgbClr val="7F7F7F"/>
+                </a:solidFill>
+                <a:latin typeface="Arial" pitchFamily="34" charset="0"/>
+                <a:ea typeface="Arial" pitchFamily="34" charset="-122"/>
+                <a:cs typeface="Arial" pitchFamily="34" charset="-120"/>
+              </a:rPr>
+              <a:t>ask</a:t>
+            </a:r>
+            <a:endParaRPr lang="en-US" sz="850" dirty="0"/>
+          </a:p>
+        </p:txBody>
+      </p:sp>
+      <p:sp>
+        <p:nvSpPr>
+          <p:cNvPr id="9" name="Shape 7"/>
           <p:cNvSpPr/>
           <p:nvPr/>
         </p:nvSpPr>
@@ -8282,7 +8616,7 @@
       </p:sp>
       <p:sp>
         <p:nvSpPr>
-          <p:cNvPr id="9" name="Shape 7"/>
+          <p:cNvPr id="10" name="Shape 8"/>
           <p:cNvSpPr/>
           <p:nvPr/>
         </p:nvSpPr>
@@ -8309,7 +8643,7 @@
       </p:sp>
       <p:sp>
         <p:nvSpPr>
-          <p:cNvPr id="10" name="Text 8"/>
+          <p:cNvPr id="11" name="Text 9"/>
           <p:cNvSpPr/>
           <p:nvPr/>
         </p:nvSpPr>
@@ -8366,7 +8700,46 @@
       </p:sp>
       <p:sp>
         <p:nvSpPr>
-          <p:cNvPr id="11" name="Shape 9"/>
+          <p:cNvPr id="12" name="Text 10"/>
+          <p:cNvSpPr/>
+          <p:nvPr/>
+        </p:nvSpPr>
+        <p:spPr>
+          <a:xfrm>
+            <a:off x="1892808" y="5038344"/>
+            <a:ext cx="1188720" cy="201168"/>
+          </a:xfrm>
+          <a:prstGeom prst="rect">
+            <a:avLst/>
+          </a:prstGeom>
+          <a:noFill/>
+          <a:ln/>
+        </p:spPr>
+        <p:txBody>
+          <a:bodyPr wrap="square" lIns="0" tIns="0" rIns="0" bIns="0" rtlCol="0" anchor="ctr"/>
+          <a:lstStyle/>
+          <a:p>
+            <a:pPr algn="ctr" indent="0" marL="0">
+              <a:buNone/>
+            </a:pPr>
+            <a:r>
+              <a:rPr lang="en-US" sz="850" i="1" dirty="0">
+                <a:solidFill>
+                  <a:srgbClr val="7F7F7F"/>
+                </a:solidFill>
+                <a:latin typeface="Arial" pitchFamily="34" charset="0"/>
+                <a:ea typeface="Arial" pitchFamily="34" charset="-122"/>
+                <a:cs typeface="Arial" pitchFamily="34" charset="-120"/>
+              </a:rPr>
+              <a:t>measure</a:t>
+            </a:r>
+            <a:endParaRPr lang="en-US" sz="850" dirty="0"/>
+          </a:p>
+        </p:txBody>
+      </p:sp>
+      <p:sp>
+        <p:nvSpPr>
+          <p:cNvPr id="13" name="Shape 11"/>
           <p:cNvSpPr/>
           <p:nvPr/>
         </p:nvSpPr>
@@ -8390,7 +8763,7 @@
       </p:sp>
       <p:sp>
         <p:nvSpPr>
-          <p:cNvPr id="12" name="Shape 10"/>
+          <p:cNvPr id="14" name="Shape 12"/>
           <p:cNvSpPr/>
           <p:nvPr/>
         </p:nvSpPr>
@@ -8417,7 +8790,7 @@
       </p:sp>
       <p:sp>
         <p:nvSpPr>
-          <p:cNvPr id="13" name="Text 11"/>
+          <p:cNvPr id="15" name="Text 13"/>
           <p:cNvSpPr/>
           <p:nvPr/>
         </p:nvSpPr>
@@ -8474,7 +8847,46 @@
       </p:sp>
       <p:sp>
         <p:nvSpPr>
-          <p:cNvPr id="14" name="Shape 12"/>
+          <p:cNvPr id="16" name="Text 14"/>
+          <p:cNvSpPr/>
+          <p:nvPr/>
+        </p:nvSpPr>
+        <p:spPr>
+          <a:xfrm>
+            <a:off x="3282696" y="5038344"/>
+            <a:ext cx="1188720" cy="201168"/>
+          </a:xfrm>
+          <a:prstGeom prst="rect">
+            <a:avLst/>
+          </a:prstGeom>
+          <a:noFill/>
+          <a:ln/>
+        </p:spPr>
+        <p:txBody>
+          <a:bodyPr wrap="square" lIns="0" tIns="0" rIns="0" bIns="0" rtlCol="0" anchor="ctr"/>
+          <a:lstStyle/>
+          <a:p>
+            <a:pPr algn="ctr" indent="0" marL="0">
+              <a:buNone/>
+            </a:pPr>
+            <a:r>
+              <a:rPr lang="en-US" sz="850" i="1" dirty="0">
+                <a:solidFill>
+                  <a:srgbClr val="7F7F7F"/>
+                </a:solidFill>
+                <a:latin typeface="Arial" pitchFamily="34" charset="0"/>
+                <a:ea typeface="Arial" pitchFamily="34" charset="-122"/>
+                <a:cs typeface="Arial" pitchFamily="34" charset="-120"/>
+              </a:rPr>
+              <a:t>learn</a:t>
+            </a:r>
+            <a:endParaRPr lang="en-US" sz="850" dirty="0"/>
+          </a:p>
+        </p:txBody>
+      </p:sp>
+      <p:sp>
+        <p:nvSpPr>
+          <p:cNvPr id="17" name="Shape 15"/>
           <p:cNvSpPr/>
           <p:nvPr/>
         </p:nvSpPr>
@@ -8498,7 +8910,7 @@
       </p:sp>
       <p:sp>
         <p:nvSpPr>
-          <p:cNvPr id="15" name="Shape 13"/>
+          <p:cNvPr id="18" name="Shape 16"/>
           <p:cNvSpPr/>
           <p:nvPr/>
         </p:nvSpPr>
@@ -8525,7 +8937,7 @@
       </p:sp>
       <p:sp>
         <p:nvSpPr>
-          <p:cNvPr id="16" name="Text 14"/>
+          <p:cNvPr id="19" name="Text 17"/>
           <p:cNvSpPr/>
           <p:nvPr/>
         </p:nvSpPr>
@@ -8582,7 +8994,46 @@
       </p:sp>
       <p:sp>
         <p:nvSpPr>
-          <p:cNvPr id="17" name="Shape 15"/>
+          <p:cNvPr id="20" name="Text 18"/>
+          <p:cNvSpPr/>
+          <p:nvPr/>
+        </p:nvSpPr>
+        <p:spPr>
+          <a:xfrm>
+            <a:off x="4672584" y="5038344"/>
+            <a:ext cx="1188720" cy="201168"/>
+          </a:xfrm>
+          <a:prstGeom prst="rect">
+            <a:avLst/>
+          </a:prstGeom>
+          <a:noFill/>
+          <a:ln/>
+        </p:spPr>
+        <p:txBody>
+          <a:bodyPr wrap="square" lIns="0" tIns="0" rIns="0" bIns="0" rtlCol="0" anchor="ctr"/>
+          <a:lstStyle/>
+          <a:p>
+            <a:pPr algn="ctr" indent="0" marL="0">
+              <a:buNone/>
+            </a:pPr>
+            <a:r>
+              <a:rPr lang="en-US" sz="850" b="1" i="1" dirty="0">
+                <a:solidFill>
+                  <a:srgbClr val="1F4E79"/>
+                </a:solidFill>
+                <a:latin typeface="Arial" pitchFamily="34" charset="0"/>
+                <a:ea typeface="Arial" pitchFamily="34" charset="-122"/>
+                <a:cs typeface="Arial" pitchFamily="34" charset="-120"/>
+              </a:rPr>
+              <a:t>gate</a:t>
+            </a:r>
+            <a:endParaRPr lang="en-US" sz="850" dirty="0"/>
+          </a:p>
+        </p:txBody>
+      </p:sp>
+      <p:sp>
+        <p:nvSpPr>
+          <p:cNvPr id="21" name="Shape 19"/>
           <p:cNvSpPr/>
           <p:nvPr/>
         </p:nvSpPr>
@@ -8606,7 +9057,7 @@
       </p:sp>
       <p:sp>
         <p:nvSpPr>
-          <p:cNvPr id="18" name="Shape 16"/>
+          <p:cNvPr id="22" name="Shape 20"/>
           <p:cNvSpPr/>
           <p:nvPr/>
         </p:nvSpPr>
@@ -8633,7 +9084,7 @@
       </p:sp>
       <p:sp>
         <p:nvSpPr>
-          <p:cNvPr id="19" name="Text 17"/>
+          <p:cNvPr id="23" name="Text 21"/>
           <p:cNvSpPr/>
           <p:nvPr/>
         </p:nvSpPr>
@@ -8690,7 +9141,46 @@
       </p:sp>
       <p:sp>
         <p:nvSpPr>
-          <p:cNvPr id="20" name="Shape 18"/>
+          <p:cNvPr id="24" name="Text 22"/>
+          <p:cNvSpPr/>
+          <p:nvPr/>
+        </p:nvSpPr>
+        <p:spPr>
+          <a:xfrm>
+            <a:off x="6062472" y="5038344"/>
+            <a:ext cx="1188720" cy="201168"/>
+          </a:xfrm>
+          <a:prstGeom prst="rect">
+            <a:avLst/>
+          </a:prstGeom>
+          <a:noFill/>
+          <a:ln/>
+        </p:spPr>
+        <p:txBody>
+          <a:bodyPr wrap="square" lIns="0" tIns="0" rIns="0" bIns="0" rtlCol="0" anchor="ctr"/>
+          <a:lstStyle/>
+          <a:p>
+            <a:pPr algn="ctr" indent="0" marL="0">
+              <a:buNone/>
+            </a:pPr>
+            <a:r>
+              <a:rPr lang="en-US" sz="850" i="1" dirty="0">
+                <a:solidFill>
+                  <a:srgbClr val="7F7F7F"/>
+                </a:solidFill>
+                <a:latin typeface="Arial" pitchFamily="34" charset="0"/>
+                <a:ea typeface="Arial" pitchFamily="34" charset="-122"/>
+                <a:cs typeface="Arial" pitchFamily="34" charset="-120"/>
+              </a:rPr>
+              <a:t>combine</a:t>
+            </a:r>
+            <a:endParaRPr lang="en-US" sz="850" dirty="0"/>
+          </a:p>
+        </p:txBody>
+      </p:sp>
+      <p:sp>
+        <p:nvSpPr>
+          <p:cNvPr id="25" name="Shape 23"/>
           <p:cNvSpPr/>
           <p:nvPr/>
         </p:nvSpPr>
@@ -8714,7 +9204,7 @@
       </p:sp>
       <p:sp>
         <p:nvSpPr>
-          <p:cNvPr id="21" name="Shape 19"/>
+          <p:cNvPr id="26" name="Shape 24"/>
           <p:cNvSpPr/>
           <p:nvPr/>
         </p:nvSpPr>
@@ -8741,7 +9231,7 @@
       </p:sp>
       <p:sp>
         <p:nvSpPr>
-          <p:cNvPr id="22" name="Text 20"/>
+          <p:cNvPr id="27" name="Text 25"/>
           <p:cNvSpPr/>
           <p:nvPr/>
         </p:nvSpPr>
@@ -8790,7 +9280,7 @@
                 <a:ea typeface="Arial" pitchFamily="34" charset="-122"/>
                 <a:cs typeface="Arial" pitchFamily="34" charset="-120"/>
               </a:rPr>
-              <a:t>11 retractions</a:t>
+              <a:t>11 audited verdicts</a:t>
             </a:r>
             <a:endParaRPr lang="en-US" sz="1000" dirty="0"/>
           </a:p>
@@ -8798,7 +9288,46 @@
       </p:sp>
       <p:sp>
         <p:nvSpPr>
-          <p:cNvPr id="23" name="Shape 21"/>
+          <p:cNvPr id="28" name="Text 26"/>
+          <p:cNvSpPr/>
+          <p:nvPr/>
+        </p:nvSpPr>
+        <p:spPr>
+          <a:xfrm>
+            <a:off x="7452360" y="5038344"/>
+            <a:ext cx="1188720" cy="201168"/>
+          </a:xfrm>
+          <a:prstGeom prst="rect">
+            <a:avLst/>
+          </a:prstGeom>
+          <a:noFill/>
+          <a:ln/>
+        </p:spPr>
+        <p:txBody>
+          <a:bodyPr wrap="square" lIns="0" tIns="0" rIns="0" bIns="0" rtlCol="0" anchor="ctr"/>
+          <a:lstStyle/>
+          <a:p>
+            <a:pPr algn="ctr" indent="0" marL="0">
+              <a:buNone/>
+            </a:pPr>
+            <a:r>
+              <a:rPr lang="en-US" sz="850" i="1" dirty="0">
+                <a:solidFill>
+                  <a:srgbClr val="7F7F7F"/>
+                </a:solidFill>
+                <a:latin typeface="Arial" pitchFamily="34" charset="0"/>
+                <a:ea typeface="Arial" pitchFamily="34" charset="-122"/>
+                <a:cs typeface="Arial" pitchFamily="34" charset="-120"/>
+              </a:rPr>
+              <a:t>doubt</a:t>
+            </a:r>
+            <a:endParaRPr lang="en-US" sz="850" dirty="0"/>
+          </a:p>
+        </p:txBody>
+      </p:sp>
+      <p:sp>
+        <p:nvSpPr>
+          <p:cNvPr id="29" name="Shape 27"/>
           <p:cNvSpPr/>
           <p:nvPr/>
         </p:nvSpPr>
@@ -8822,7 +9351,7 @@
       </p:sp>
       <p:sp>
         <p:nvSpPr>
-          <p:cNvPr id="24" name="Shape 22"/>
+          <p:cNvPr id="30" name="Shape 28"/>
           <p:cNvSpPr/>
           <p:nvPr/>
         </p:nvSpPr>
@@ -8845,7 +9374,7 @@
       </p:sp>
       <p:sp>
         <p:nvSpPr>
-          <p:cNvPr id="25" name="Shape 23"/>
+          <p:cNvPr id="31" name="Shape 29"/>
           <p:cNvSpPr/>
           <p:nvPr/>
         </p:nvSpPr>
@@ -8868,7 +9397,7 @@
       </p:sp>
       <p:sp>
         <p:nvSpPr>
-          <p:cNvPr id="26" name="Text 24"/>
+          <p:cNvPr id="32" name="Text 30"/>
           <p:cNvSpPr/>
           <p:nvPr/>
         </p:nvSpPr>
@@ -8907,7 +9436,7 @@
       </p:sp>
       <p:sp>
         <p:nvSpPr>
-          <p:cNvPr id="27" name="Shape 25"/>
+          <p:cNvPr id="33" name="Shape 31"/>
           <p:cNvSpPr/>
           <p:nvPr/>
         </p:nvSpPr>
@@ -8931,7 +9460,7 @@
       </p:sp>
       <p:sp>
         <p:nvSpPr>
-          <p:cNvPr id="28" name="Shape 26"/>
+          <p:cNvPr id="34" name="Shape 32"/>
           <p:cNvSpPr/>
           <p:nvPr/>
         </p:nvSpPr>
@@ -8954,7 +9483,7 @@
       </p:sp>
       <p:sp>
         <p:nvSpPr>
-          <p:cNvPr id="29" name="Shape 27"/>
+          <p:cNvPr id="35" name="Shape 33"/>
           <p:cNvSpPr/>
           <p:nvPr/>
         </p:nvSpPr>
@@ -8977,7 +9506,7 @@
       </p:sp>
       <p:sp>
         <p:nvSpPr>
-          <p:cNvPr id="30" name="Text 28"/>
+          <p:cNvPr id="36" name="Text 34"/>
           <p:cNvSpPr/>
           <p:nvPr/>
         </p:nvSpPr>
@@ -9016,7 +9545,7 @@
       </p:sp>
       <p:sp>
         <p:nvSpPr>
-          <p:cNvPr id="31" name="Text 29"/>
+          <p:cNvPr id="37" name="Text 35"/>
           <p:cNvSpPr/>
           <p:nvPr/>
         </p:nvSpPr>
@@ -9069,7 +9598,7 @@
       </p:sp>
       <p:sp>
         <p:nvSpPr>
-          <p:cNvPr id="32" name="Text 30"/>
+          <p:cNvPr id="38" name="Text 36"/>
           <p:cNvSpPr/>
           <p:nvPr/>
         </p:nvSpPr>
@@ -9739,7 +10268,7 @@
       </p:sp>
       <p:pic>
         <p:nvPicPr>
-          <p:cNvPr id="8" name="Image 1" descr="/home/user/Yonghoon-DEM-DFT/litdb/figures/richards2016_interface_stability_pseudobinary/fig_2.png">    </p:cNvPr>
+          <p:cNvPr id="8" name="Image 1" descr="/tmp/claude-0/-home-user-Yonghoon-DEM-DFT/82ea256b-12bc-5a75-994e-7718d79c71ba/scratchpad/richards_fig2_annot.png">    </p:cNvPr>
           <p:cNvPicPr>
             <a:picLocks noChangeAspect="1"/>
           </p:cNvPicPr>
@@ -9793,7 +10322,7 @@
                 <a:ea typeface="Arial" pitchFamily="34" charset="-122"/>
                 <a:cs typeface="Arial" pitchFamily="34" charset="-120"/>
               </a:rPr>
-              <a:t>Stability windows by anion — sulfides are the narrow bars (Richards 2016)</a:t>
+              <a:t>Stability windows by anion — sulfides are the narrow bars (Richards 2016; box added)</a:t>
             </a:r>
             <a:endParaRPr lang="en-US" sz="850" dirty="0"/>
           </a:p>
@@ -10052,7 +10581,7 @@
                 <a:ea typeface="Arial" pitchFamily="34" charset="-122"/>
                 <a:cs typeface="Arial" pitchFamily="34" charset="-120"/>
               </a:rPr>
-              <a:t>The common funnel — and the two boxes it never fills</a:t>
+              <a:t>The common funnel — and the two boxes it rarely fills</a:t>
             </a:r>
             <a:endParaRPr lang="en-US" sz="2000" dirty="0"/>
           </a:p>
@@ -10118,7 +10647,7 @@
                 <a:ea typeface="Arial" pitchFamily="34" charset="-122"/>
                 <a:cs typeface="Arial" pitchFamily="34" charset="-120"/>
               </a:rPr>
-              <a:t>Missing ①: failure rates of the gates themselves — false rejects invisible</a:t>
+              <a:t>Rarely reported ①: failure rates of the gates themselves — false rejects invisible</a:t>
             </a:r>
             <a:endParaRPr lang="en-US" sz="1250" dirty="0"/>
           </a:p>
@@ -10139,7 +10668,7 @@
                 <a:ea typeface="Arial" pitchFamily="34" charset="-122"/>
                 <a:cs typeface="Arial" pitchFamily="34" charset="-120"/>
               </a:rPr>
-              <a:t>Missing ②: single-dopant frame — combinations never enter</a:t>
+              <a:t>Rarely entered ②: single-dopant frame — combinations left unexplored</a:t>
             </a:r>
             <a:endParaRPr lang="en-US" sz="1250" dirty="0"/>
           </a:p>
@@ -11073,7 +11602,7 @@
                 <a:ea typeface="Arial" pitchFamily="34" charset="-122"/>
                 <a:cs typeface="Arial" pitchFamily="34" charset="-120"/>
               </a:rPr>
-              <a:t>Our pipeline: 47 dopants → 91 compounds × 3 doses = 273 calculations</a:t>
+              <a:t>Our pipeline: 273 calculations (91 × 3 doses) → 47 dopants with complete axes</a:t>
             </a:r>
             <a:endParaRPr lang="en-US" sz="2000" dirty="0"/>
           </a:p>
@@ -11410,8 +11939,47 @@
         </p:nvSpPr>
         <p:spPr>
           <a:xfrm>
-            <a:off x="502920" y="2606040"/>
-            <a:ext cx="8138160" cy="822960"/>
+            <a:off x="502920" y="2359152"/>
+            <a:ext cx="8138160" cy="237744"/>
+          </a:xfrm>
+          <a:prstGeom prst="rect">
+            <a:avLst/>
+          </a:prstGeom>
+          <a:noFill/>
+          <a:ln/>
+        </p:spPr>
+        <p:txBody>
+          <a:bodyPr wrap="square" lIns="0" tIns="0" rIns="0" bIns="0" rtlCol="0" anchor="ctr"/>
+          <a:lstStyle/>
+          <a:p>
+            <a:pPr algn="ctr" indent="0" marL="0">
+              <a:buNone/>
+            </a:pPr>
+            <a:r>
+              <a:rPr lang="en-US" sz="950" i="1" dirty="0">
+                <a:solidFill>
+                  <a:srgbClr val="7F7F7F"/>
+                </a:solidFill>
+                <a:latin typeface="Arial" pitchFamily="34" charset="0"/>
+                <a:ea typeface="Arial" pitchFamily="34" charset="-122"/>
+                <a:cs typeface="Arial" pitchFamily="34" charset="-120"/>
+              </a:rPr>
+              <a:t>91 curated compounds ran first (1–3 forms per dopant) → 47 dopants have all three axes populated; the other 44 fell to pipeline gaps, never counted as gate fails</a:t>
+            </a:r>
+            <a:endParaRPr lang="en-US" sz="950" dirty="0"/>
+          </a:p>
+        </p:txBody>
+      </p:sp>
+      <p:sp>
+        <p:nvSpPr>
+          <p:cNvPr id="14" name="Text 12"/>
+          <p:cNvSpPr/>
+          <p:nvPr/>
+        </p:nvSpPr>
+        <p:spPr>
+          <a:xfrm>
+            <a:off x="502920" y="2697480"/>
+            <a:ext cx="8138160" cy="777240"/>
           </a:xfrm>
           <a:prstGeom prst="rect">
             <a:avLst/>
@@ -11460,7 +12028,7 @@
                 <a:ea typeface="Arial" pitchFamily="34" charset="-122"/>
                 <a:cs typeface="Arial" pitchFamily="34" charset="-120"/>
               </a:rPr>
-              <a:t>Honesty header, shipped inside the data file (verbatim):</a:t>
+              <a:t>Honesty header, shipped inside the data file (translated from its Korean original):</a:t>
             </a:r>
             <a:endParaRPr lang="en-US" sz="1200" dirty="0"/>
           </a:p>
@@ -11468,7 +12036,7 @@
       </p:sp>
       <p:sp>
         <p:nvSpPr>
-          <p:cNvPr id="14" name="Shape 12"/>
+          <p:cNvPr id="15" name="Shape 13"/>
           <p:cNvSpPr/>
           <p:nvPr/>
         </p:nvSpPr>
@@ -11495,7 +12063,7 @@
       </p:sp>
       <p:sp>
         <p:nvSpPr>
-          <p:cNvPr id="15" name="Text 13"/>
+          <p:cNvPr id="16" name="Text 14"/>
           <p:cNvSpPr/>
           <p:nvPr/>
         </p:nvSpPr>
@@ -11551,7 +12119,7 @@
       </p:sp>
       <p:sp>
         <p:nvSpPr>
-          <p:cNvPr id="16" name="Shape 14"/>
+          <p:cNvPr id="17" name="Shape 15"/>
           <p:cNvSpPr/>
           <p:nvPr/>
         </p:nvSpPr>
@@ -11576,7 +12144,7 @@
       </p:sp>
       <p:sp>
         <p:nvSpPr>
-          <p:cNvPr id="17" name="Text 15"/>
+          <p:cNvPr id="18" name="Text 16"/>
           <p:cNvSpPr/>
           <p:nvPr/>
         </p:nvSpPr>
@@ -11633,7 +12201,7 @@
       </p:sp>
       <p:sp>
         <p:nvSpPr>
-          <p:cNvPr id="18" name="Text 16"/>
+          <p:cNvPr id="19" name="Text 17"/>
           <p:cNvSpPr/>
           <p:nvPr/>
         </p:nvSpPr>
@@ -11672,7 +12240,7 @@
       </p:sp>
       <p:sp>
         <p:nvSpPr>
-          <p:cNvPr id="20" name="Text 17"/>
+          <p:cNvPr id="21" name="Text 18"/>
           <p:cNvSpPr/>
           <p:nvPr/>
         </p:nvSpPr>
@@ -11725,7 +12293,7 @@
       </p:sp>
       <p:sp>
         <p:nvSpPr>
-          <p:cNvPr id="21" name="Text 18"/>
+          <p:cNvPr id="22" name="Text 19"/>
           <p:cNvSpPr/>
           <p:nvPr/>
         </p:nvSpPr>
@@ -11950,13 +12518,13 @@
             <a:tbl>
               <a:tblPr/>
               <a:tblGrid>
-                <a:gridCol w="1143000"/>
-                <a:gridCol w="2286000"/>
-                <a:gridCol w="1143000"/>
-                <a:gridCol w="2377440"/>
-                <a:gridCol w="1188720"/>
+                <a:gridCol w="1097280"/>
+                <a:gridCol w="2148840"/>
+                <a:gridCol w="1965960"/>
+                <a:gridCol w="1828800"/>
+                <a:gridCol w="1097280"/>
               </a:tblGrid>
-              <a:tr h="475488">
+              <a:tr h="512064">
                 <a:tc>
                   <a:txBody>
                     <a:bodyPr/>
@@ -11966,7 +12534,7 @@
                         <a:buNone/>
                       </a:pPr>
                       <a:r>
-                        <a:rPr lang="en-US" sz="950" b="1" dirty="0">
+                        <a:rPr lang="en-US" sz="900" b="1" dirty="0">
                           <a:solidFill>
                             <a:srgbClr val="FFFFFF"/>
                           </a:solidFill>
@@ -11976,7 +12544,7 @@
                         </a:rPr>
                         <a:t>Gate</a:t>
                       </a:r>
-                      <a:endParaRPr lang="en-US" sz="950" dirty="0">
+                      <a:endParaRPr lang="en-US" sz="900" dirty="0">
                         <a:latin typeface="Arial" charset="0"/>
                         <a:ea typeface="Arial" charset="0"/>
                         <a:cs typeface="Arial" charset="0"/>
@@ -12034,7 +12602,7 @@
                         <a:buNone/>
                       </a:pPr>
                       <a:r>
-                        <a:rPr lang="en-US" sz="950" b="1" dirty="0">
+                        <a:rPr lang="en-US" sz="900" b="1" dirty="0">
                           <a:solidFill>
                             <a:srgbClr val="FFFFFF"/>
                           </a:solidFill>
@@ -12044,7 +12612,7 @@
                         </a:rPr>
                         <a:t>Metric</a:t>
                       </a:r>
-                      <a:endParaRPr lang="en-US" sz="950" dirty="0">
+                      <a:endParaRPr lang="en-US" sz="900" dirty="0">
                         <a:latin typeface="Arial" charset="0"/>
                         <a:ea typeface="Arial" charset="0"/>
                         <a:cs typeface="Arial" charset="0"/>
@@ -12102,7 +12670,7 @@
                         <a:buNone/>
                       </a:pPr>
                       <a:r>
-                        <a:rPr lang="en-US" sz="950" b="1" dirty="0">
+                        <a:rPr lang="en-US" sz="900" b="1" dirty="0">
                           <a:solidFill>
                             <a:srgbClr val="FFFFFF"/>
                           </a:solidFill>
@@ -12112,7 +12680,7 @@
                         </a:rPr>
                         <a:t>Threshold</a:t>
                       </a:r>
-                      <a:endParaRPr lang="en-US" sz="950" dirty="0">
+                      <a:endParaRPr lang="en-US" sz="900" dirty="0">
                         <a:latin typeface="Arial" charset="0"/>
                         <a:ea typeface="Arial" charset="0"/>
                         <a:cs typeface="Arial" charset="0"/>
@@ -12170,7 +12738,7 @@
                         <a:buNone/>
                       </a:pPr>
                       <a:r>
-                        <a:rPr lang="en-US" sz="950" b="1" dirty="0">
+                        <a:rPr lang="en-US" sz="900" b="1" dirty="0">
                           <a:solidFill>
                             <a:srgbClr val="FFFFFF"/>
                           </a:solidFill>
@@ -12180,7 +12748,7 @@
                         </a:rPr>
                         <a:t>Physical basis</a:t>
                       </a:r>
-                      <a:endParaRPr lang="en-US" sz="950" dirty="0">
+                      <a:endParaRPr lang="en-US" sz="900" dirty="0">
                         <a:latin typeface="Arial" charset="0"/>
                         <a:ea typeface="Arial" charset="0"/>
                         <a:cs typeface="Arial" charset="0"/>
@@ -12238,7 +12806,7 @@
                         <a:buNone/>
                       </a:pPr>
                       <a:r>
-                        <a:rPr lang="en-US" sz="950" b="1" dirty="0">
+                        <a:rPr lang="en-US" sz="900" b="1" dirty="0">
                           <a:solidFill>
                             <a:srgbClr val="FFFFFF"/>
                           </a:solidFill>
@@ -12248,7 +12816,7 @@
                         </a:rPr>
                         <a:t>Lit. analog</a:t>
                       </a:r>
-                      <a:endParaRPr lang="en-US" sz="950" dirty="0">
+                      <a:endParaRPr lang="en-US" sz="900" dirty="0">
                         <a:latin typeface="Arial" charset="0"/>
                         <a:ea typeface="Arial" charset="0"/>
                         <a:cs typeface="Arial" charset="0"/>
@@ -12298,7 +12866,7 @@
                   </a:tcPr>
                 </a:tc>
               </a:tr>
-              <a:tr h="475488">
+              <a:tr h="512064">
                 <a:tc>
                   <a:txBody>
                     <a:bodyPr/>
@@ -12308,7 +12876,7 @@
                         <a:buNone/>
                       </a:pPr>
                       <a:r>
-                        <a:rPr lang="en-US" sz="950" dirty="0">
+                        <a:rPr lang="en-US" sz="900" dirty="0">
                           <a:solidFill>
                             <a:srgbClr val="262626"/>
                           </a:solidFill>
@@ -12318,7 +12886,7 @@
                         </a:rPr>
                         <a:t>G1 structural</a:t>
                       </a:r>
-                      <a:endParaRPr lang="en-US" sz="950" dirty="0">
+                      <a:endParaRPr lang="en-US" sz="900" dirty="0">
                         <a:latin typeface="Arial" charset="0"/>
                         <a:ea typeface="Arial" charset="0"/>
                         <a:cs typeface="Arial" charset="0"/>
@@ -12373,7 +12941,7 @@
                         <a:buNone/>
                       </a:pPr>
                       <a:r>
-                        <a:rPr lang="en-US" sz="950" dirty="0">
+                        <a:rPr lang="en-US" sz="900" dirty="0">
                           <a:solidFill>
                             <a:srgbClr val="262626"/>
                           </a:solidFill>
@@ -12383,7 +12951,7 @@
                         </a:rPr>
                         <a:t>mean over x of Δe = E(doped)−E(host), UMA</a:t>
                       </a:r>
-                      <a:endParaRPr lang="en-US" sz="950" dirty="0">
+                      <a:endParaRPr lang="en-US" sz="900" dirty="0">
                         <a:latin typeface="Arial" charset="0"/>
                         <a:ea typeface="Arial" charset="0"/>
                         <a:cs typeface="Arial" charset="0"/>
@@ -12438,7 +13006,7 @@
                         <a:buNone/>
                       </a:pPr>
                       <a:r>
-                        <a:rPr lang="en-US" sz="950" dirty="0">
+                        <a:rPr lang="en-US" sz="900" dirty="0">
                           <a:solidFill>
                             <a:srgbClr val="262626"/>
                           </a:solidFill>
@@ -12446,9 +13014,9 @@
                           <a:ea typeface="Arial" pitchFamily="34" charset="-122"/>
                           <a:cs typeface="Arial" pitchFamily="34" charset="-120"/>
                         </a:rPr>
-                        <a:t>&lt; 0</a:t>
+                        <a:t>Δe &lt; 0  (zero = the host itself)</a:t>
                       </a:r>
-                      <a:endParaRPr lang="en-US" sz="950" dirty="0">
+                      <a:endParaRPr lang="en-US" sz="900" dirty="0">
                         <a:latin typeface="Arial" charset="0"/>
                         <a:ea typeface="Arial" charset="0"/>
                         <a:cs typeface="Arial" charset="0"/>
@@ -12503,7 +13071,7 @@
                         <a:buNone/>
                       </a:pPr>
                       <a:r>
-                        <a:rPr lang="en-US" sz="950" dirty="0">
+                        <a:rPr lang="en-US" sz="900" dirty="0">
                           <a:solidFill>
                             <a:srgbClr val="262626"/>
                           </a:solidFill>
@@ -12511,9 +13079,9 @@
                           <a:ea typeface="Arial" pitchFamily="34" charset="-122"/>
                           <a:cs typeface="Arial" pitchFamily="34" charset="-120"/>
                         </a:rPr>
-                        <a:t>favorability vs the host ITSELF — not an arbitrary cut</a:t>
+                        <a:t>favorability vs the host — not an arbitrary cut</a:t>
                       </a:r>
-                      <a:endParaRPr lang="en-US" sz="950" dirty="0">
+                      <a:endParaRPr lang="en-US" sz="900" dirty="0">
                         <a:latin typeface="Arial" charset="0"/>
                         <a:ea typeface="Arial" charset="0"/>
                         <a:cs typeface="Arial" charset="0"/>
@@ -12568,7 +13136,7 @@
                         <a:buNone/>
                       </a:pPr>
                       <a:r>
-                        <a:rPr lang="en-US" sz="950" dirty="0">
+                        <a:rPr lang="en-US" sz="900" dirty="0">
                           <a:solidFill>
                             <a:srgbClr val="262626"/>
                           </a:solidFill>
@@ -12578,7 +13146,7 @@
                         </a:rPr>
                         <a:t>Xiao F2 · Sendek P1</a:t>
                       </a:r>
-                      <a:endParaRPr lang="en-US" sz="950" dirty="0">
+                      <a:endParaRPr lang="en-US" sz="900" dirty="0">
                         <a:latin typeface="Arial" charset="0"/>
                         <a:ea typeface="Arial" charset="0"/>
                         <a:cs typeface="Arial" charset="0"/>
@@ -12625,7 +13193,7 @@
                   </a:tcPr>
                 </a:tc>
               </a:tr>
-              <a:tr h="475488">
+              <a:tr h="512064">
                 <a:tc>
                   <a:txBody>
                     <a:bodyPr/>
@@ -12635,7 +13203,7 @@
                         <a:buNone/>
                       </a:pPr>
                       <a:r>
-                        <a:rPr lang="en-US" sz="950" dirty="0">
+                        <a:rPr lang="en-US" sz="900" dirty="0">
                           <a:solidFill>
                             <a:srgbClr val="262626"/>
                           </a:solidFill>
@@ -12645,7 +13213,7 @@
                         </a:rPr>
                         <a:t>G2 window</a:t>
                       </a:r>
-                      <a:endParaRPr lang="en-US" sz="950" dirty="0">
+                      <a:endParaRPr lang="en-US" sz="900" dirty="0">
                         <a:latin typeface="Arial" charset="0"/>
                         <a:ea typeface="Arial" charset="0"/>
                         <a:cs typeface="Arial" charset="0"/>
@@ -12700,7 +13268,7 @@
                         <a:buNone/>
                       </a:pPr>
                       <a:r>
-                        <a:rPr lang="en-US" sz="950" dirty="0">
+                        <a:rPr lang="en-US" sz="900" dirty="0">
                           <a:solidFill>
                             <a:srgbClr val="262626"/>
                           </a:solidFill>
@@ -12708,9 +13276,9 @@
                           <a:ea typeface="Arial" pitchFamily="34" charset="-122"/>
                           <a:cs typeface="Arial" pitchFamily="34" charset="-120"/>
                         </a:rPr>
-                        <a:t>e⁻ insulation (gap-based)</a:t>
+                        <a:t>grand-potential ESW width</a:t>
                       </a:r>
-                      <a:endParaRPr lang="en-US" sz="950" dirty="0">
+                      <a:endParaRPr lang="en-US" sz="900" dirty="0">
                         <a:latin typeface="Arial" charset="0"/>
                         <a:ea typeface="Arial" charset="0"/>
                         <a:cs typeface="Arial" charset="0"/>
@@ -12765,7 +13333,7 @@
                         <a:buNone/>
                       </a:pPr>
                       <a:r>
-                        <a:rPr lang="en-US" sz="950" dirty="0">
+                        <a:rPr lang="en-US" sz="900" dirty="0">
                           <a:solidFill>
                             <a:srgbClr val="262626"/>
                           </a:solidFill>
@@ -12773,9 +13341,9 @@
                           <a:ea typeface="Arial" pitchFamily="34" charset="-122"/>
                           <a:cs typeface="Arial" pitchFamily="34" charset="-120"/>
                         </a:rPr>
-                        <a:t>keep insulating</a:t>
+                        <a:t>window ≥ 0.05 V</a:t>
                       </a:r>
-                      <a:endParaRPr lang="en-US" sz="950" dirty="0">
+                      <a:endParaRPr lang="en-US" sz="900" dirty="0">
                         <a:latin typeface="Arial" charset="0"/>
                         <a:ea typeface="Arial" charset="0"/>
                         <a:cs typeface="Arial" charset="0"/>
@@ -12830,7 +13398,7 @@
                         <a:buNone/>
                       </a:pPr>
                       <a:r>
-                        <a:rPr lang="en-US" sz="950" dirty="0">
+                        <a:rPr lang="en-US" sz="900" dirty="0">
                           <a:solidFill>
                             <a:srgbClr val="262626"/>
                           </a:solidFill>
@@ -12838,9 +13406,9 @@
                           <a:ea typeface="Arial" pitchFamily="34" charset="-122"/>
                           <a:cs typeface="Arial" pitchFamily="34" charset="-120"/>
                         </a:rPr>
-                        <a:t>electron leak kills self-limiting SEI</a:t>
+                        <a:t>a window must exist at all</a:t>
                       </a:r>
-                      <a:endParaRPr lang="en-US" sz="950" dirty="0">
+                      <a:endParaRPr lang="en-US" sz="900" dirty="0">
                         <a:latin typeface="Arial" charset="0"/>
                         <a:ea typeface="Arial" charset="0"/>
                         <a:cs typeface="Arial" charset="0"/>
@@ -12895,7 +13463,7 @@
                         <a:buNone/>
                       </a:pPr>
                       <a:r>
-                        <a:rPr lang="en-US" sz="950" dirty="0">
+                        <a:rPr lang="en-US" sz="900" dirty="0">
                           <a:solidFill>
                             <a:srgbClr val="262626"/>
                           </a:solidFill>
@@ -12903,9 +13471,9 @@
                           <a:ea typeface="Arial" pitchFamily="34" charset="-122"/>
                           <a:cs typeface="Arial" pitchFamily="34" charset="-120"/>
                         </a:rPr>
-                        <a:t>Sendek gap ≥ 1 eV</a:t>
+                        <a:t>Zhu 2015 · Xiao F3</a:t>
                       </a:r>
-                      <a:endParaRPr lang="en-US" sz="950" dirty="0">
+                      <a:endParaRPr lang="en-US" sz="900" dirty="0">
                         <a:latin typeface="Arial" charset="0"/>
                         <a:ea typeface="Arial" charset="0"/>
                         <a:cs typeface="Arial" charset="0"/>
@@ -12952,7 +13520,7 @@
                   </a:tcPr>
                 </a:tc>
               </a:tr>
-              <a:tr h="475488">
+              <a:tr h="512064">
                 <a:tc>
                   <a:txBody>
                     <a:bodyPr/>
@@ -12962,7 +13530,7 @@
                         <a:buNone/>
                       </a:pPr>
                       <a:r>
-                        <a:rPr lang="en-US" sz="950" dirty="0">
+                        <a:rPr lang="en-US" sz="900" dirty="0">
                           <a:solidFill>
                             <a:srgbClr val="262626"/>
                           </a:solidFill>
@@ -12972,7 +13540,7 @@
                         </a:rPr>
                         <a:t>G3 oxidation</a:t>
                       </a:r>
-                      <a:endParaRPr lang="en-US" sz="950" dirty="0">
+                      <a:endParaRPr lang="en-US" sz="900" dirty="0">
                         <a:latin typeface="Arial" charset="0"/>
                         <a:ea typeface="Arial" charset="0"/>
                         <a:cs typeface="Arial" charset="0"/>
@@ -13027,7 +13595,7 @@
                         <a:buNone/>
                       </a:pPr>
                       <a:r>
-                        <a:rPr lang="en-US" sz="950" dirty="0">
+                        <a:rPr lang="en-US" sz="900" dirty="0">
                           <a:solidFill>
                             <a:srgbClr val="262626"/>
                           </a:solidFill>
@@ -13035,9 +13603,9 @@
                           <a:ea typeface="Arial" pitchFamily="34" charset="-122"/>
                           <a:cs typeface="Arial" pitchFamily="34" charset="-120"/>
                         </a:rPr>
-                        <a:t>oxidation-onset axis</a:t>
+                        <a:t>oxidation onset (V vs Li)</a:t>
                       </a:r>
-                      <a:endParaRPr lang="en-US" sz="950" dirty="0">
+                      <a:endParaRPr lang="en-US" sz="900" dirty="0">
                         <a:latin typeface="Arial" charset="0"/>
                         <a:ea typeface="Arial" charset="0"/>
                         <a:cs typeface="Arial" charset="0"/>
@@ -13092,7 +13660,7 @@
                         <a:buNone/>
                       </a:pPr>
                       <a:r>
-                        <a:rPr lang="en-US" sz="950" dirty="0">
+                        <a:rPr lang="en-US" sz="900" dirty="0">
                           <a:solidFill>
                             <a:srgbClr val="262626"/>
                           </a:solidFill>
@@ -13100,9 +13668,9 @@
                           <a:ea typeface="Arial" pitchFamily="34" charset="-122"/>
                           <a:cs typeface="Arial" pitchFamily="34" charset="-120"/>
                         </a:rPr>
-                        <a:t>axis cut</a:t>
+                        <a:t>V_ox ≥ 2.14 V  (= undoped host onset)</a:t>
                       </a:r>
-                      <a:endParaRPr lang="en-US" sz="950" dirty="0">
+                      <a:endParaRPr lang="en-US" sz="900" dirty="0">
                         <a:latin typeface="Arial" charset="0"/>
                         <a:ea typeface="Arial" charset="0"/>
                         <a:cs typeface="Arial" charset="0"/>
@@ -13157,7 +13725,7 @@
                         <a:buNone/>
                       </a:pPr>
                       <a:r>
-                        <a:rPr lang="en-US" sz="950" dirty="0">
+                        <a:rPr lang="en-US" sz="900" dirty="0">
                           <a:solidFill>
                             <a:srgbClr val="262626"/>
                           </a:solidFill>
@@ -13165,9 +13733,9 @@
                           <a:ea typeface="Arial" pitchFamily="34" charset="-122"/>
                           <a:cs typeface="Arial" pitchFamily="34" charset="-120"/>
                         </a:rPr>
-                        <a:t>high-V cathode side survival</a:t>
+                        <a:t>must not be WORSE than the host</a:t>
                       </a:r>
-                      <a:endParaRPr lang="en-US" sz="950" dirty="0">
+                      <a:endParaRPr lang="en-US" sz="900" dirty="0">
                         <a:latin typeface="Arial" charset="0"/>
                         <a:ea typeface="Arial" charset="0"/>
                         <a:cs typeface="Arial" charset="0"/>
@@ -13222,7 +13790,7 @@
                         <a:buNone/>
                       </a:pPr>
                       <a:r>
-                        <a:rPr lang="en-US" sz="950" dirty="0">
+                        <a:rPr lang="en-US" sz="900" dirty="0">
                           <a:solidFill>
                             <a:srgbClr val="262626"/>
                           </a:solidFill>
@@ -13232,7 +13800,7 @@
                         </a:rPr>
                         <a:t>Richards windows</a:t>
                       </a:r>
-                      <a:endParaRPr lang="en-US" sz="950" dirty="0">
+                      <a:endParaRPr lang="en-US" sz="900" dirty="0">
                         <a:latin typeface="Arial" charset="0"/>
                         <a:ea typeface="Arial" charset="0"/>
                         <a:cs typeface="Arial" charset="0"/>
@@ -13279,7 +13847,7 @@
                   </a:tcPr>
                 </a:tc>
               </a:tr>
-              <a:tr h="475488">
+              <a:tr h="512064">
                 <a:tc>
                   <a:txBody>
                     <a:bodyPr/>
@@ -13289,7 +13857,7 @@
                         <a:buNone/>
                       </a:pPr>
                       <a:r>
-                        <a:rPr lang="en-US" sz="950" dirty="0">
+                        <a:rPr lang="en-US" sz="900" dirty="0">
                           <a:solidFill>
                             <a:srgbClr val="262626"/>
                           </a:solidFill>
@@ -13299,7 +13867,7 @@
                         </a:rPr>
                         <a:t>G4 transport</a:t>
                       </a:r>
-                      <a:endParaRPr lang="en-US" sz="950" dirty="0">
+                      <a:endParaRPr lang="en-US" sz="900" dirty="0">
                         <a:latin typeface="Arial" charset="0"/>
                         <a:ea typeface="Arial" charset="0"/>
                         <a:cs typeface="Arial" charset="0"/>
@@ -13354,7 +13922,7 @@
                         <a:buNone/>
                       </a:pPr>
                       <a:r>
-                        <a:rPr lang="en-US" sz="950" dirty="0">
+                        <a:rPr lang="en-US" sz="900" dirty="0">
                           <a:solidFill>
                             <a:srgbClr val="262626"/>
                           </a:solidFill>
@@ -13362,9 +13930,9 @@
                           <a:ea typeface="Arial" pitchFamily="34" charset="-122"/>
                           <a:cs typeface="Arial" pitchFamily="34" charset="-120"/>
                         </a:rPr>
-                        <a:t>Li-transport axis (MD / BVSE)</a:t>
+                        <a:t>BVSE proxy score (x = 0.05), min–max norm</a:t>
                       </a:r>
-                      <a:endParaRPr lang="en-US" sz="950" dirty="0">
+                      <a:endParaRPr lang="en-US" sz="900" dirty="0">
                         <a:latin typeface="Arial" charset="0"/>
                         <a:ea typeface="Arial" charset="0"/>
                         <a:cs typeface="Arial" charset="0"/>
@@ -13419,7 +13987,7 @@
                         <a:buNone/>
                       </a:pPr>
                       <a:r>
-                        <a:rPr lang="en-US" sz="950" dirty="0">
+                        <a:rPr lang="en-US" sz="900" dirty="0">
                           <a:solidFill>
                             <a:srgbClr val="262626"/>
                           </a:solidFill>
@@ -13427,9 +13995,9 @@
                           <a:ea typeface="Arial" pitchFamily="34" charset="-122"/>
                           <a:cs typeface="Arial" pitchFamily="34" charset="-120"/>
                         </a:rPr>
-                        <a:t>axis cut</a:t>
+                        <a:t>norm &gt; 0.3</a:t>
                       </a:r>
-                      <a:endParaRPr lang="en-US" sz="950" dirty="0">
+                      <a:endParaRPr lang="en-US" sz="900" dirty="0">
                         <a:latin typeface="Arial" charset="0"/>
                         <a:ea typeface="Arial" charset="0"/>
                         <a:cs typeface="Arial" charset="0"/>
@@ -13484,7 +14052,7 @@
                         <a:buNone/>
                       </a:pPr>
                       <a:r>
-                        <a:rPr lang="en-US" sz="950" dirty="0">
+                        <a:rPr lang="en-US" sz="900" dirty="0">
                           <a:solidFill>
                             <a:srgbClr val="262626"/>
                           </a:solidFill>
@@ -13494,7 +14062,7 @@
                         </a:rPr>
                         <a:t>the property we exist for</a:t>
                       </a:r>
-                      <a:endParaRPr lang="en-US" sz="950" dirty="0">
+                      <a:endParaRPr lang="en-US" sz="900" dirty="0">
                         <a:latin typeface="Arial" charset="0"/>
                         <a:ea typeface="Arial" charset="0"/>
                         <a:cs typeface="Arial" charset="0"/>
@@ -13549,7 +14117,7 @@
                         <a:buNone/>
                       </a:pPr>
                       <a:r>
-                        <a:rPr lang="en-US" sz="950" dirty="0">
+                        <a:rPr lang="en-US" sz="900" dirty="0">
                           <a:solidFill>
                             <a:srgbClr val="262626"/>
                           </a:solidFill>
@@ -13559,7 +14127,7 @@
                         </a:rPr>
                         <a:t>Kahle HT-AIMD</a:t>
                       </a:r>
-                      <a:endParaRPr lang="en-US" sz="950" dirty="0">
+                      <a:endParaRPr lang="en-US" sz="900" dirty="0">
                         <a:latin typeface="Arial" charset="0"/>
                         <a:ea typeface="Arial" charset="0"/>
                         <a:cs typeface="Arial" charset="0"/>
@@ -13606,7 +14174,7 @@
                   </a:tcPr>
                 </a:tc>
               </a:tr>
-              <a:tr h="475488">
+              <a:tr h="512064">
                 <a:tc>
                   <a:txBody>
                     <a:bodyPr/>
@@ -13616,7 +14184,7 @@
                         <a:buNone/>
                       </a:pPr>
                       <a:r>
-                        <a:rPr lang="en-US" sz="950" dirty="0">
+                        <a:rPr lang="en-US" sz="900" dirty="0">
                           <a:solidFill>
                             <a:srgbClr val="262626"/>
                           </a:solidFill>
@@ -13626,7 +14194,7 @@
                         </a:rPr>
                         <a:t>G5 mechanical</a:t>
                       </a:r>
-                      <a:endParaRPr lang="en-US" sz="950" dirty="0">
+                      <a:endParaRPr lang="en-US" sz="900" dirty="0">
                         <a:latin typeface="Arial" charset="0"/>
                         <a:ea typeface="Arial" charset="0"/>
                         <a:cs typeface="Arial" charset="0"/>
@@ -13681,7 +14249,7 @@
                         <a:buNone/>
                       </a:pPr>
                       <a:r>
-                        <a:rPr lang="en-US" sz="950" dirty="0">
+                        <a:rPr lang="en-US" sz="900" dirty="0">
                           <a:solidFill>
                             <a:srgbClr val="262626"/>
                           </a:solidFill>
@@ -13689,9 +14257,9 @@
                           <a:ea typeface="Arial" pitchFamily="34" charset="-122"/>
                           <a:cs typeface="Arial" pitchFamily="34" charset="-120"/>
                         </a:rPr>
-                        <a:t>stiffness / softness axes</a:t>
+                        <a:t>E (UMA) and G/B</a:t>
                       </a:r>
-                      <a:endParaRPr lang="en-US" sz="950" dirty="0">
+                      <a:endParaRPr lang="en-US" sz="900" dirty="0">
                         <a:latin typeface="Arial" charset="0"/>
                         <a:ea typeface="Arial" charset="0"/>
                         <a:cs typeface="Arial" charset="0"/>
@@ -13746,7 +14314,7 @@
                         <a:buNone/>
                       </a:pPr>
                       <a:r>
-                        <a:rPr lang="en-US" sz="950" dirty="0">
+                        <a:rPr lang="en-US" sz="900" dirty="0">
                           <a:solidFill>
                             <a:srgbClr val="262626"/>
                           </a:solidFill>
@@ -13754,9 +14322,9 @@
                           <a:ea typeface="Arial" pitchFamily="34" charset="-122"/>
                           <a:cs typeface="Arial" pitchFamily="34" charset="-120"/>
                         </a:rPr>
-                        <a:t>axis cut</a:t>
+                        <a:t>E ≤ 46.9 GPa AND G/B ≤ 0.78  (roster medians)</a:t>
                       </a:r>
-                      <a:endParaRPr lang="en-US" sz="950" dirty="0">
+                      <a:endParaRPr lang="en-US" sz="900" dirty="0">
                         <a:latin typeface="Arial" charset="0"/>
                         <a:ea typeface="Arial" charset="0"/>
                         <a:cs typeface="Arial" charset="0"/>
@@ -13811,7 +14379,7 @@
                         <a:buNone/>
                       </a:pPr>
                       <a:r>
-                        <a:rPr lang="en-US" sz="950" dirty="0">
+                        <a:rPr lang="en-US" sz="900" dirty="0">
                           <a:solidFill>
                             <a:srgbClr val="262626"/>
                           </a:solidFill>
@@ -13819,9 +14387,9 @@
                           <a:ea typeface="Arial" pitchFamily="34" charset="-122"/>
                           <a:cs typeface="Arial" pitchFamily="34" charset="-120"/>
                         </a:rPr>
-                        <a:t>contact maintenance in SSB</a:t>
+                        <a:t>soft + ductile keeps contact in SSB</a:t>
                       </a:r>
-                      <a:endParaRPr lang="en-US" sz="950" dirty="0">
+                      <a:endParaRPr lang="en-US" sz="900" dirty="0">
                         <a:latin typeface="Arial" charset="0"/>
                         <a:ea typeface="Arial" charset="0"/>
                         <a:cs typeface="Arial" charset="0"/>
@@ -13876,7 +14444,7 @@
                         <a:buNone/>
                       </a:pPr>
                       <a:r>
-                        <a:rPr lang="en-US" sz="950" dirty="0">
+                        <a:rPr lang="en-US" sz="900" dirty="0">
                           <a:solidFill>
                             <a:srgbClr val="262626"/>
                           </a:solidFill>
@@ -13886,7 +14454,7 @@
                         </a:rPr>
                         <a:t>—</a:t>
                       </a:r>
-                      <a:endParaRPr lang="en-US" sz="950" dirty="0">
+                      <a:endParaRPr lang="en-US" sz="900" dirty="0">
                         <a:latin typeface="Arial" charset="0"/>
                         <a:ea typeface="Arial" charset="0"/>
                         <a:cs typeface="Arial" charset="0"/>
@@ -13945,8 +14513,8 @@
         </p:nvSpPr>
         <p:spPr>
           <a:xfrm>
-            <a:off x="502920" y="4846320"/>
-            <a:ext cx="8138160" cy="548640"/>
+            <a:off x="502920" y="4892040"/>
+            <a:ext cx="8138160" cy="822960"/>
           </a:xfrm>
           <a:prstGeom prst="rect">
             <a:avLst/>
@@ -13966,7 +14534,7 @@
               <a:buChar char="·"/>
             </a:pPr>
             <a:r>
-              <a:rPr lang="en-US" sz="1150" b="1" dirty="0">
+              <a:rPr lang="en-US" sz="1100" b="1" dirty="0">
                 <a:solidFill>
                   <a:srgbClr val="1F4E79"/>
                 </a:solidFill>
@@ -13974,9 +14542,30 @@
                 <a:ea typeface="Arial" pitchFamily="34" charset="-122"/>
                 <a:cs typeface="Arial" pitchFamily="34" charset="-120"/>
               </a:rPr>
+              <a:t>Two of five gates use the HOST as the zero point (G1, G3) — the cut is physics, not taste</a:t>
+            </a:r>
+            <a:endParaRPr lang="en-US" sz="1100" dirty="0"/>
+          </a:p>
+          <a:p>
+            <a:pPr marL="127000" indent="-127000">
+              <a:spcAft>
+                <a:spcPts val="500"/>
+              </a:spcAft>
+              <a:buSzPct val="100000"/>
+              <a:buChar char="·"/>
+            </a:pPr>
+            <a:r>
+              <a:rPr lang="en-US" sz="1100" b="1" dirty="0">
+                <a:solidFill>
+                  <a:srgbClr val="262626"/>
+                </a:solidFill>
+                <a:latin typeface="Arial" pitchFamily="34" charset="0"/>
+                <a:ea typeface="Arial" pitchFamily="34" charset="-122"/>
+                <a:cs typeface="Arial" pitchFamily="34" charset="-120"/>
+              </a:rPr>
               <a:t>Δe uses the mean of 3 dose champions (verified 47/47) — dose-blind cherry-picking is structurally blocked</a:t>
             </a:r>
-            <a:endParaRPr lang="en-US" sz="1150" dirty="0"/>
+            <a:endParaRPr lang="en-US" sz="1100" dirty="0"/>
           </a:p>
         </p:txBody>
       </p:sp>
@@ -14251,7 +14840,7 @@
                 <a:ea typeface="Arial" pitchFamily="34" charset="-122"/>
                 <a:cs typeface="Arial" pitchFamily="34" charset="-120"/>
               </a:rPr>
-              <a:t>G1 passing all 47 is by design (threshold = the host itself)</a:t>
+              <a:t>G1 passing all 47 reflects the curated pool, not gate power — the JSON flags this itself</a:t>
             </a:r>
             <a:endParaRPr lang="en-US" sz="1150" dirty="0"/>
           </a:p>
@@ -14624,7 +15213,46 @@
       </p:sp>
       <p:sp>
         <p:nvSpPr>
-          <p:cNvPr id="7" name="Shape 5"/>
+          <p:cNvPr id="7" name="Text 5"/>
+          <p:cNvSpPr/>
+          <p:nvPr/>
+        </p:nvSpPr>
+        <p:spPr>
+          <a:xfrm>
+            <a:off x="502920" y="3575304"/>
+            <a:ext cx="1188720" cy="201168"/>
+          </a:xfrm>
+          <a:prstGeom prst="rect">
+            <a:avLst/>
+          </a:prstGeom>
+          <a:noFill/>
+          <a:ln/>
+        </p:spPr>
+        <p:txBody>
+          <a:bodyPr wrap="square" lIns="0" tIns="0" rIns="0" bIns="0" rtlCol="0" anchor="ctr"/>
+          <a:lstStyle/>
+          <a:p>
+            <a:pPr algn="ctr" indent="0" marL="0">
+              <a:buNone/>
+            </a:pPr>
+            <a:r>
+              <a:rPr lang="en-US" sz="850" i="1" dirty="0">
+                <a:solidFill>
+                  <a:srgbClr val="7F7F7F"/>
+                </a:solidFill>
+                <a:latin typeface="Arial" pitchFamily="34" charset="0"/>
+                <a:ea typeface="Arial" pitchFamily="34" charset="-122"/>
+                <a:cs typeface="Arial" pitchFamily="34" charset="-120"/>
+              </a:rPr>
+              <a:t>ask</a:t>
+            </a:r>
+            <a:endParaRPr lang="en-US" sz="850" dirty="0"/>
+          </a:p>
+        </p:txBody>
+      </p:sp>
+      <p:sp>
+        <p:nvSpPr>
+          <p:cNvPr id="8" name="Shape 6"/>
           <p:cNvSpPr/>
           <p:nvPr/>
         </p:nvSpPr>
@@ -14648,7 +15276,7 @@
       </p:sp>
       <p:sp>
         <p:nvSpPr>
-          <p:cNvPr id="8" name="Shape 6"/>
+          <p:cNvPr id="9" name="Shape 7"/>
           <p:cNvSpPr/>
           <p:nvPr/>
         </p:nvSpPr>
@@ -14675,7 +15303,7 @@
       </p:sp>
       <p:sp>
         <p:nvSpPr>
-          <p:cNvPr id="9" name="Text 7"/>
+          <p:cNvPr id="10" name="Text 8"/>
           <p:cNvSpPr/>
           <p:nvPr/>
         </p:nvSpPr>
@@ -14732,7 +15360,46 @@
       </p:sp>
       <p:sp>
         <p:nvSpPr>
-          <p:cNvPr id="10" name="Shape 8"/>
+          <p:cNvPr id="11" name="Text 9"/>
+          <p:cNvSpPr/>
+          <p:nvPr/>
+        </p:nvSpPr>
+        <p:spPr>
+          <a:xfrm>
+            <a:off x="1892808" y="3575304"/>
+            <a:ext cx="1188720" cy="201168"/>
+          </a:xfrm>
+          <a:prstGeom prst="rect">
+            <a:avLst/>
+          </a:prstGeom>
+          <a:noFill/>
+          <a:ln/>
+        </p:spPr>
+        <p:txBody>
+          <a:bodyPr wrap="square" lIns="0" tIns="0" rIns="0" bIns="0" rtlCol="0" anchor="ctr"/>
+          <a:lstStyle/>
+          <a:p>
+            <a:pPr algn="ctr" indent="0" marL="0">
+              <a:buNone/>
+            </a:pPr>
+            <a:r>
+              <a:rPr lang="en-US" sz="850" i="1" dirty="0">
+                <a:solidFill>
+                  <a:srgbClr val="7F7F7F"/>
+                </a:solidFill>
+                <a:latin typeface="Arial" pitchFamily="34" charset="0"/>
+                <a:ea typeface="Arial" pitchFamily="34" charset="-122"/>
+                <a:cs typeface="Arial" pitchFamily="34" charset="-120"/>
+              </a:rPr>
+              <a:t>measure</a:t>
+            </a:r>
+            <a:endParaRPr lang="en-US" sz="850" dirty="0"/>
+          </a:p>
+        </p:txBody>
+      </p:sp>
+      <p:sp>
+        <p:nvSpPr>
+          <p:cNvPr id="12" name="Shape 10"/>
           <p:cNvSpPr/>
           <p:nvPr/>
         </p:nvSpPr>
@@ -14756,7 +15423,7 @@
       </p:sp>
       <p:sp>
         <p:nvSpPr>
-          <p:cNvPr id="11" name="Shape 9"/>
+          <p:cNvPr id="13" name="Shape 11"/>
           <p:cNvSpPr/>
           <p:nvPr/>
         </p:nvSpPr>
@@ -14783,7 +15450,7 @@
       </p:sp>
       <p:sp>
         <p:nvSpPr>
-          <p:cNvPr id="12" name="Text 10"/>
+          <p:cNvPr id="14" name="Text 12"/>
           <p:cNvSpPr/>
           <p:nvPr/>
         </p:nvSpPr>
@@ -14840,7 +15507,46 @@
       </p:sp>
       <p:sp>
         <p:nvSpPr>
-          <p:cNvPr id="13" name="Shape 11"/>
+          <p:cNvPr id="15" name="Text 13"/>
+          <p:cNvSpPr/>
+          <p:nvPr/>
+        </p:nvSpPr>
+        <p:spPr>
+          <a:xfrm>
+            <a:off x="3282696" y="3575304"/>
+            <a:ext cx="1188720" cy="201168"/>
+          </a:xfrm>
+          <a:prstGeom prst="rect">
+            <a:avLst/>
+          </a:prstGeom>
+          <a:noFill/>
+          <a:ln/>
+        </p:spPr>
+        <p:txBody>
+          <a:bodyPr wrap="square" lIns="0" tIns="0" rIns="0" bIns="0" rtlCol="0" anchor="ctr"/>
+          <a:lstStyle/>
+          <a:p>
+            <a:pPr algn="ctr" indent="0" marL="0">
+              <a:buNone/>
+            </a:pPr>
+            <a:r>
+              <a:rPr lang="en-US" sz="850" i="1" dirty="0">
+                <a:solidFill>
+                  <a:srgbClr val="7F7F7F"/>
+                </a:solidFill>
+                <a:latin typeface="Arial" pitchFamily="34" charset="0"/>
+                <a:ea typeface="Arial" pitchFamily="34" charset="-122"/>
+                <a:cs typeface="Arial" pitchFamily="34" charset="-120"/>
+              </a:rPr>
+              <a:t>learn</a:t>
+            </a:r>
+            <a:endParaRPr lang="en-US" sz="850" dirty="0"/>
+          </a:p>
+        </p:txBody>
+      </p:sp>
+      <p:sp>
+        <p:nvSpPr>
+          <p:cNvPr id="16" name="Shape 14"/>
           <p:cNvSpPr/>
           <p:nvPr/>
         </p:nvSpPr>
@@ -14864,7 +15570,7 @@
       </p:sp>
       <p:sp>
         <p:nvSpPr>
-          <p:cNvPr id="14" name="Shape 12"/>
+          <p:cNvPr id="17" name="Shape 15"/>
           <p:cNvSpPr/>
           <p:nvPr/>
         </p:nvSpPr>
@@ -14891,7 +15597,7 @@
       </p:sp>
       <p:sp>
         <p:nvSpPr>
-          <p:cNvPr id="15" name="Text 13"/>
+          <p:cNvPr id="18" name="Text 16"/>
           <p:cNvSpPr/>
           <p:nvPr/>
         </p:nvSpPr>
@@ -14948,7 +15654,46 @@
       </p:sp>
       <p:sp>
         <p:nvSpPr>
-          <p:cNvPr id="16" name="Shape 14"/>
+          <p:cNvPr id="19" name="Text 17"/>
+          <p:cNvSpPr/>
+          <p:nvPr/>
+        </p:nvSpPr>
+        <p:spPr>
+          <a:xfrm>
+            <a:off x="4672584" y="3575304"/>
+            <a:ext cx="1188720" cy="201168"/>
+          </a:xfrm>
+          <a:prstGeom prst="rect">
+            <a:avLst/>
+          </a:prstGeom>
+          <a:noFill/>
+          <a:ln/>
+        </p:spPr>
+        <p:txBody>
+          <a:bodyPr wrap="square" lIns="0" tIns="0" rIns="0" bIns="0" rtlCol="0" anchor="ctr"/>
+          <a:lstStyle/>
+          <a:p>
+            <a:pPr algn="ctr" indent="0" marL="0">
+              <a:buNone/>
+            </a:pPr>
+            <a:r>
+              <a:rPr lang="en-US" sz="850" i="1" dirty="0">
+                <a:solidFill>
+                  <a:srgbClr val="7F7F7F"/>
+                </a:solidFill>
+                <a:latin typeface="Arial" pitchFamily="34" charset="0"/>
+                <a:ea typeface="Arial" pitchFamily="34" charset="-122"/>
+                <a:cs typeface="Arial" pitchFamily="34" charset="-120"/>
+              </a:rPr>
+              <a:t>gate</a:t>
+            </a:r>
+            <a:endParaRPr lang="en-US" sz="850" dirty="0"/>
+          </a:p>
+        </p:txBody>
+      </p:sp>
+      <p:sp>
+        <p:nvSpPr>
+          <p:cNvPr id="20" name="Shape 18"/>
           <p:cNvSpPr/>
           <p:nvPr/>
         </p:nvSpPr>
@@ -14972,7 +15717,7 @@
       </p:sp>
       <p:sp>
         <p:nvSpPr>
-          <p:cNvPr id="17" name="Shape 15"/>
+          <p:cNvPr id="21" name="Shape 19"/>
           <p:cNvSpPr/>
           <p:nvPr/>
         </p:nvSpPr>
@@ -14999,7 +15744,7 @@
       </p:sp>
       <p:sp>
         <p:nvSpPr>
-          <p:cNvPr id="18" name="Text 16"/>
+          <p:cNvPr id="22" name="Text 20"/>
           <p:cNvSpPr/>
           <p:nvPr/>
         </p:nvSpPr>
@@ -15056,7 +15801,46 @@
       </p:sp>
       <p:sp>
         <p:nvSpPr>
-          <p:cNvPr id="19" name="Shape 17"/>
+          <p:cNvPr id="23" name="Text 21"/>
+          <p:cNvSpPr/>
+          <p:nvPr/>
+        </p:nvSpPr>
+        <p:spPr>
+          <a:xfrm>
+            <a:off x="6062472" y="3575304"/>
+            <a:ext cx="1188720" cy="201168"/>
+          </a:xfrm>
+          <a:prstGeom prst="rect">
+            <a:avLst/>
+          </a:prstGeom>
+          <a:noFill/>
+          <a:ln/>
+        </p:spPr>
+        <p:txBody>
+          <a:bodyPr wrap="square" lIns="0" tIns="0" rIns="0" bIns="0" rtlCol="0" anchor="ctr"/>
+          <a:lstStyle/>
+          <a:p>
+            <a:pPr algn="ctr" indent="0" marL="0">
+              <a:buNone/>
+            </a:pPr>
+            <a:r>
+              <a:rPr lang="en-US" sz="850" i="1" dirty="0">
+                <a:solidFill>
+                  <a:srgbClr val="7F7F7F"/>
+                </a:solidFill>
+                <a:latin typeface="Arial" pitchFamily="34" charset="0"/>
+                <a:ea typeface="Arial" pitchFamily="34" charset="-122"/>
+                <a:cs typeface="Arial" pitchFamily="34" charset="-120"/>
+              </a:rPr>
+              <a:t>combine</a:t>
+            </a:r>
+            <a:endParaRPr lang="en-US" sz="850" dirty="0"/>
+          </a:p>
+        </p:txBody>
+      </p:sp>
+      <p:sp>
+        <p:nvSpPr>
+          <p:cNvPr id="24" name="Shape 22"/>
           <p:cNvSpPr/>
           <p:nvPr/>
         </p:nvSpPr>
@@ -15080,7 +15864,7 @@
       </p:sp>
       <p:sp>
         <p:nvSpPr>
-          <p:cNvPr id="20" name="Shape 18"/>
+          <p:cNvPr id="25" name="Shape 23"/>
           <p:cNvSpPr/>
           <p:nvPr/>
         </p:nvSpPr>
@@ -15107,7 +15891,7 @@
       </p:sp>
       <p:sp>
         <p:nvSpPr>
-          <p:cNvPr id="21" name="Text 19"/>
+          <p:cNvPr id="26" name="Text 24"/>
           <p:cNvSpPr/>
           <p:nvPr/>
         </p:nvSpPr>
@@ -15156,7 +15940,7 @@
                 <a:ea typeface="Arial" pitchFamily="34" charset="-122"/>
                 <a:cs typeface="Arial" pitchFamily="34" charset="-120"/>
               </a:rPr>
-              <a:t>11 retractions</a:t>
+              <a:t>11 audited verdicts</a:t>
             </a:r>
             <a:endParaRPr lang="en-US" sz="1000" dirty="0"/>
           </a:p>
@@ -15164,7 +15948,46 @@
       </p:sp>
       <p:sp>
         <p:nvSpPr>
-          <p:cNvPr id="22" name="Shape 20"/>
+          <p:cNvPr id="27" name="Text 25"/>
+          <p:cNvSpPr/>
+          <p:nvPr/>
+        </p:nvSpPr>
+        <p:spPr>
+          <a:xfrm>
+            <a:off x="7452360" y="3575304"/>
+            <a:ext cx="1188720" cy="201168"/>
+          </a:xfrm>
+          <a:prstGeom prst="rect">
+            <a:avLst/>
+          </a:prstGeom>
+          <a:noFill/>
+          <a:ln/>
+        </p:spPr>
+        <p:txBody>
+          <a:bodyPr wrap="square" lIns="0" tIns="0" rIns="0" bIns="0" rtlCol="0" anchor="ctr"/>
+          <a:lstStyle/>
+          <a:p>
+            <a:pPr algn="ctr" indent="0" marL="0">
+              <a:buNone/>
+            </a:pPr>
+            <a:r>
+              <a:rPr lang="en-US" sz="850" i="1" dirty="0">
+                <a:solidFill>
+                  <a:srgbClr val="7F7F7F"/>
+                </a:solidFill>
+                <a:latin typeface="Arial" pitchFamily="34" charset="0"/>
+                <a:ea typeface="Arial" pitchFamily="34" charset="-122"/>
+                <a:cs typeface="Arial" pitchFamily="34" charset="-120"/>
+              </a:rPr>
+              <a:t>doubt</a:t>
+            </a:r>
+            <a:endParaRPr lang="en-US" sz="850" dirty="0"/>
+          </a:p>
+        </p:txBody>
+      </p:sp>
+      <p:sp>
+        <p:nvSpPr>
+          <p:cNvPr id="28" name="Shape 26"/>
           <p:cNvSpPr/>
           <p:nvPr/>
         </p:nvSpPr>
@@ -15188,7 +16011,7 @@
       </p:sp>
       <p:sp>
         <p:nvSpPr>
-          <p:cNvPr id="23" name="Shape 21"/>
+          <p:cNvPr id="29" name="Shape 27"/>
           <p:cNvSpPr/>
           <p:nvPr/>
         </p:nvSpPr>
@@ -15211,7 +16034,7 @@
       </p:sp>
       <p:sp>
         <p:nvSpPr>
-          <p:cNvPr id="24" name="Shape 22"/>
+          <p:cNvPr id="30" name="Shape 28"/>
           <p:cNvSpPr/>
           <p:nvPr/>
         </p:nvSpPr>
@@ -15234,7 +16057,7 @@
       </p:sp>
       <p:sp>
         <p:nvSpPr>
-          <p:cNvPr id="25" name="Text 23"/>
+          <p:cNvPr id="31" name="Text 29"/>
           <p:cNvSpPr/>
           <p:nvPr/>
         </p:nvSpPr>
@@ -15273,7 +16096,7 @@
       </p:sp>
       <p:sp>
         <p:nvSpPr>
-          <p:cNvPr id="26" name="Shape 24"/>
+          <p:cNvPr id="32" name="Shape 30"/>
           <p:cNvSpPr/>
           <p:nvPr/>
         </p:nvSpPr>
@@ -15297,7 +16120,7 @@
       </p:sp>
       <p:sp>
         <p:nvSpPr>
-          <p:cNvPr id="27" name="Shape 25"/>
+          <p:cNvPr id="33" name="Shape 31"/>
           <p:cNvSpPr/>
           <p:nvPr/>
         </p:nvSpPr>
@@ -15320,7 +16143,7 @@
       </p:sp>
       <p:sp>
         <p:nvSpPr>
-          <p:cNvPr id="28" name="Shape 26"/>
+          <p:cNvPr id="34" name="Shape 32"/>
           <p:cNvSpPr/>
           <p:nvPr/>
         </p:nvSpPr>
@@ -15343,7 +16166,7 @@
       </p:sp>
       <p:sp>
         <p:nvSpPr>
-          <p:cNvPr id="29" name="Text 27"/>
+          <p:cNvPr id="35" name="Text 33"/>
           <p:cNvSpPr/>
           <p:nvPr/>
         </p:nvSpPr>
@@ -15382,7 +16205,7 @@
       </p:sp>
       <p:sp>
         <p:nvSpPr>
-          <p:cNvPr id="30" name="Text 28"/>
+          <p:cNvPr id="36" name="Text 34"/>
           <p:cNvSpPr/>
           <p:nvPr/>
         </p:nvSpPr>
@@ -15467,7 +16290,7 @@
       </p:sp>
       <p:sp>
         <p:nvSpPr>
-          <p:cNvPr id="31" name="Text 29"/>
+          <p:cNvPr id="37" name="Text 35"/>
           <p:cNvSpPr/>
           <p:nvPr/>
         </p:nvSpPr>
@@ -15506,7 +16329,7 @@
       </p:sp>
       <p:sp>
         <p:nvSpPr>
-          <p:cNvPr id="33" name="Text 30"/>
+          <p:cNvPr id="39" name="Text 36"/>
           <p:cNvSpPr/>
           <p:nvPr/>
         </p:nvSpPr>
@@ -15559,7 +16382,7 @@
       </p:sp>
       <p:sp>
         <p:nvSpPr>
-          <p:cNvPr id="34" name="Text 31"/>
+          <p:cNvPr id="40" name="Text 37"/>
           <p:cNvSpPr/>
           <p:nvPr/>
         </p:nvSpPr>
@@ -15861,7 +16684,7 @@
                 <a:ea typeface="Arial" pitchFamily="34" charset="-122"/>
                 <a:cs typeface="Arial" pitchFamily="34" charset="-120"/>
               </a:rPr>
-              <a:t>③ Axes really collide — our own data:</a:t>
+              <a:t>③ Axes really collide — our own data, three ways at once:</a:t>
             </a:r>
             <a:endParaRPr lang="en-US" sz="1100" dirty="0"/>
           </a:p>
@@ -15882,7 +16705,7 @@
                 <a:ea typeface="Arial" pitchFamily="34" charset="-122"/>
                 <a:cs typeface="Arial" pitchFamily="34" charset="-120"/>
               </a:rPr>
-              <a:t>+B₂O₃: best transport axis (PMF ΔF 0.1607 eV, 4-seed) yet worst-group air stability (B₂S₃ hydrolysis −0.901 eV, 46/47th in [Zhu20])</a:t>
+              <a:t>+B₂O₃: best MD free-energy barrier (PMF ΔF 0.16 eV @600 K, 4 systems) — yet the STATIC transport axis rejects it, and air stability is worst-group (B₂S₃ hydrolysis −0.90 eV, 3rd-worst of 46 [Zhu20])</a:t>
             </a:r>
             <a:endParaRPr lang="en-US" sz="1100" dirty="0"/>
           </a:p>
@@ -15932,7 +16755,7 @@
       </p:sp>
       <p:pic>
         <p:nvPicPr>
-          <p:cNvPr id="7" name="Image 0" descr="/tmp/claude-0/-home-user-Yonghoon-DEM-DFT/82ea256b-12bc-5a75-994e-7718d79c71ba/scratchpad/zhu_fig3a.png">    </p:cNvPr>
+          <p:cNvPr id="7" name="Image 0" descr="/tmp/claude-0/-home-user-Yonghoon-DEM-DFT/82ea256b-12bc-5a75-994e-7718d79c71ba/scratchpad/zhu_fig3a_annot.png">    </p:cNvPr>
           <p:cNvPicPr>
             <a:picLocks noChangeAspect="1"/>
           </p:cNvPicPr>
@@ -15986,7 +16809,7 @@
                 <a:ea typeface="Arial" pitchFamily="34" charset="-122"/>
                 <a:cs typeface="Arial" pitchFamily="34" charset="-120"/>
               </a:rPr>
-              <a:t>Hydrolysis vs reduction map (Zhu 2020) — note B³⁺ at the bottom: the same B our transport axis ranks first</a:t>
+              <a:t>Hydrolysis vs reduction map (Zhu 2020; circle added) — B³⁺ at the bottom is the same B our MD landscape ranks best</a:t>
             </a:r>
             <a:endParaRPr lang="en-US" sz="850" dirty="0"/>
           </a:p>
@@ -16358,7 +17181,46 @@
       </p:sp>
       <p:sp>
         <p:nvSpPr>
-          <p:cNvPr id="8" name="Shape 6"/>
+          <p:cNvPr id="8" name="Text 6"/>
+          <p:cNvSpPr/>
+          <p:nvPr/>
+        </p:nvSpPr>
+        <p:spPr>
+          <a:xfrm>
+            <a:off x="502920" y="5038344"/>
+            <a:ext cx="1188720" cy="201168"/>
+          </a:xfrm>
+          <a:prstGeom prst="rect">
+            <a:avLst/>
+          </a:prstGeom>
+          <a:noFill/>
+          <a:ln/>
+        </p:spPr>
+        <p:txBody>
+          <a:bodyPr wrap="square" lIns="0" tIns="0" rIns="0" bIns="0" rtlCol="0" anchor="ctr"/>
+          <a:lstStyle/>
+          <a:p>
+            <a:pPr algn="ctr" indent="0" marL="0">
+              <a:buNone/>
+            </a:pPr>
+            <a:r>
+              <a:rPr lang="en-US" sz="850" i="1" dirty="0">
+                <a:solidFill>
+                  <a:srgbClr val="7F7F7F"/>
+                </a:solidFill>
+                <a:latin typeface="Arial" pitchFamily="34" charset="0"/>
+                <a:ea typeface="Arial" pitchFamily="34" charset="-122"/>
+                <a:cs typeface="Arial" pitchFamily="34" charset="-120"/>
+              </a:rPr>
+              <a:t>ask</a:t>
+            </a:r>
+            <a:endParaRPr lang="en-US" sz="850" dirty="0"/>
+          </a:p>
+        </p:txBody>
+      </p:sp>
+      <p:sp>
+        <p:nvSpPr>
+          <p:cNvPr id="9" name="Shape 7"/>
           <p:cNvSpPr/>
           <p:nvPr/>
         </p:nvSpPr>
@@ -16382,7 +17244,7 @@
       </p:sp>
       <p:sp>
         <p:nvSpPr>
-          <p:cNvPr id="9" name="Shape 7"/>
+          <p:cNvPr id="10" name="Shape 8"/>
           <p:cNvSpPr/>
           <p:nvPr/>
         </p:nvSpPr>
@@ -16409,7 +17271,7 @@
       </p:sp>
       <p:sp>
         <p:nvSpPr>
-          <p:cNvPr id="10" name="Text 8"/>
+          <p:cNvPr id="11" name="Text 9"/>
           <p:cNvSpPr/>
           <p:nvPr/>
         </p:nvSpPr>
@@ -16466,7 +17328,46 @@
       </p:sp>
       <p:sp>
         <p:nvSpPr>
-          <p:cNvPr id="11" name="Shape 9"/>
+          <p:cNvPr id="12" name="Text 10"/>
+          <p:cNvSpPr/>
+          <p:nvPr/>
+        </p:nvSpPr>
+        <p:spPr>
+          <a:xfrm>
+            <a:off x="1892808" y="5038344"/>
+            <a:ext cx="1188720" cy="201168"/>
+          </a:xfrm>
+          <a:prstGeom prst="rect">
+            <a:avLst/>
+          </a:prstGeom>
+          <a:noFill/>
+          <a:ln/>
+        </p:spPr>
+        <p:txBody>
+          <a:bodyPr wrap="square" lIns="0" tIns="0" rIns="0" bIns="0" rtlCol="0" anchor="ctr"/>
+          <a:lstStyle/>
+          <a:p>
+            <a:pPr algn="ctr" indent="0" marL="0">
+              <a:buNone/>
+            </a:pPr>
+            <a:r>
+              <a:rPr lang="en-US" sz="850" i="1" dirty="0">
+                <a:solidFill>
+                  <a:srgbClr val="7F7F7F"/>
+                </a:solidFill>
+                <a:latin typeface="Arial" pitchFamily="34" charset="0"/>
+                <a:ea typeface="Arial" pitchFamily="34" charset="-122"/>
+                <a:cs typeface="Arial" pitchFamily="34" charset="-120"/>
+              </a:rPr>
+              <a:t>measure</a:t>
+            </a:r>
+            <a:endParaRPr lang="en-US" sz="850" dirty="0"/>
+          </a:p>
+        </p:txBody>
+      </p:sp>
+      <p:sp>
+        <p:nvSpPr>
+          <p:cNvPr id="13" name="Shape 11"/>
           <p:cNvSpPr/>
           <p:nvPr/>
         </p:nvSpPr>
@@ -16490,7 +17391,7 @@
       </p:sp>
       <p:sp>
         <p:nvSpPr>
-          <p:cNvPr id="12" name="Shape 10"/>
+          <p:cNvPr id="14" name="Shape 12"/>
           <p:cNvSpPr/>
           <p:nvPr/>
         </p:nvSpPr>
@@ -16517,7 +17418,7 @@
       </p:sp>
       <p:sp>
         <p:nvSpPr>
-          <p:cNvPr id="13" name="Text 11"/>
+          <p:cNvPr id="15" name="Text 13"/>
           <p:cNvSpPr/>
           <p:nvPr/>
         </p:nvSpPr>
@@ -16574,7 +17475,46 @@
       </p:sp>
       <p:sp>
         <p:nvSpPr>
-          <p:cNvPr id="14" name="Shape 12"/>
+          <p:cNvPr id="16" name="Text 14"/>
+          <p:cNvSpPr/>
+          <p:nvPr/>
+        </p:nvSpPr>
+        <p:spPr>
+          <a:xfrm>
+            <a:off x="3282696" y="5038344"/>
+            <a:ext cx="1188720" cy="201168"/>
+          </a:xfrm>
+          <a:prstGeom prst="rect">
+            <a:avLst/>
+          </a:prstGeom>
+          <a:noFill/>
+          <a:ln/>
+        </p:spPr>
+        <p:txBody>
+          <a:bodyPr wrap="square" lIns="0" tIns="0" rIns="0" bIns="0" rtlCol="0" anchor="ctr"/>
+          <a:lstStyle/>
+          <a:p>
+            <a:pPr algn="ctr" indent="0" marL="0">
+              <a:buNone/>
+            </a:pPr>
+            <a:r>
+              <a:rPr lang="en-US" sz="850" i="1" dirty="0">
+                <a:solidFill>
+                  <a:srgbClr val="7F7F7F"/>
+                </a:solidFill>
+                <a:latin typeface="Arial" pitchFamily="34" charset="0"/>
+                <a:ea typeface="Arial" pitchFamily="34" charset="-122"/>
+                <a:cs typeface="Arial" pitchFamily="34" charset="-120"/>
+              </a:rPr>
+              <a:t>learn</a:t>
+            </a:r>
+            <a:endParaRPr lang="en-US" sz="850" dirty="0"/>
+          </a:p>
+        </p:txBody>
+      </p:sp>
+      <p:sp>
+        <p:nvSpPr>
+          <p:cNvPr id="17" name="Shape 15"/>
           <p:cNvSpPr/>
           <p:nvPr/>
         </p:nvSpPr>
@@ -16598,7 +17538,7 @@
       </p:sp>
       <p:sp>
         <p:nvSpPr>
-          <p:cNvPr id="15" name="Shape 13"/>
+          <p:cNvPr id="18" name="Shape 16"/>
           <p:cNvSpPr/>
           <p:nvPr/>
         </p:nvSpPr>
@@ -16625,7 +17565,7 @@
       </p:sp>
       <p:sp>
         <p:nvSpPr>
-          <p:cNvPr id="16" name="Text 14"/>
+          <p:cNvPr id="19" name="Text 17"/>
           <p:cNvSpPr/>
           <p:nvPr/>
         </p:nvSpPr>
@@ -16682,7 +17622,46 @@
       </p:sp>
       <p:sp>
         <p:nvSpPr>
-          <p:cNvPr id="17" name="Shape 15"/>
+          <p:cNvPr id="20" name="Text 18"/>
+          <p:cNvSpPr/>
+          <p:nvPr/>
+        </p:nvSpPr>
+        <p:spPr>
+          <a:xfrm>
+            <a:off x="4672584" y="5038344"/>
+            <a:ext cx="1188720" cy="201168"/>
+          </a:xfrm>
+          <a:prstGeom prst="rect">
+            <a:avLst/>
+          </a:prstGeom>
+          <a:noFill/>
+          <a:ln/>
+        </p:spPr>
+        <p:txBody>
+          <a:bodyPr wrap="square" lIns="0" tIns="0" rIns="0" bIns="0" rtlCol="0" anchor="ctr"/>
+          <a:lstStyle/>
+          <a:p>
+            <a:pPr algn="ctr" indent="0" marL="0">
+              <a:buNone/>
+            </a:pPr>
+            <a:r>
+              <a:rPr lang="en-US" sz="850" i="1" dirty="0">
+                <a:solidFill>
+                  <a:srgbClr val="7F7F7F"/>
+                </a:solidFill>
+                <a:latin typeface="Arial" pitchFamily="34" charset="0"/>
+                <a:ea typeface="Arial" pitchFamily="34" charset="-122"/>
+                <a:cs typeface="Arial" pitchFamily="34" charset="-120"/>
+              </a:rPr>
+              <a:t>gate</a:t>
+            </a:r>
+            <a:endParaRPr lang="en-US" sz="850" dirty="0"/>
+          </a:p>
+        </p:txBody>
+      </p:sp>
+      <p:sp>
+        <p:nvSpPr>
+          <p:cNvPr id="21" name="Shape 19"/>
           <p:cNvSpPr/>
           <p:nvPr/>
         </p:nvSpPr>
@@ -16706,7 +17685,7 @@
       </p:sp>
       <p:sp>
         <p:nvSpPr>
-          <p:cNvPr id="18" name="Shape 16"/>
+          <p:cNvPr id="22" name="Shape 20"/>
           <p:cNvSpPr/>
           <p:nvPr/>
         </p:nvSpPr>
@@ -16733,7 +17712,7 @@
       </p:sp>
       <p:sp>
         <p:nvSpPr>
-          <p:cNvPr id="19" name="Text 17"/>
+          <p:cNvPr id="23" name="Text 21"/>
           <p:cNvSpPr/>
           <p:nvPr/>
         </p:nvSpPr>
@@ -16790,7 +17769,46 @@
       </p:sp>
       <p:sp>
         <p:nvSpPr>
-          <p:cNvPr id="20" name="Shape 18"/>
+          <p:cNvPr id="24" name="Text 22"/>
+          <p:cNvSpPr/>
+          <p:nvPr/>
+        </p:nvSpPr>
+        <p:spPr>
+          <a:xfrm>
+            <a:off x="6062472" y="5038344"/>
+            <a:ext cx="1188720" cy="201168"/>
+          </a:xfrm>
+          <a:prstGeom prst="rect">
+            <a:avLst/>
+          </a:prstGeom>
+          <a:noFill/>
+          <a:ln/>
+        </p:spPr>
+        <p:txBody>
+          <a:bodyPr wrap="square" lIns="0" tIns="0" rIns="0" bIns="0" rtlCol="0" anchor="ctr"/>
+          <a:lstStyle/>
+          <a:p>
+            <a:pPr algn="ctr" indent="0" marL="0">
+              <a:buNone/>
+            </a:pPr>
+            <a:r>
+              <a:rPr lang="en-US" sz="850" b="1" i="1" dirty="0">
+                <a:solidFill>
+                  <a:srgbClr val="1F4E79"/>
+                </a:solidFill>
+                <a:latin typeface="Arial" pitchFamily="34" charset="0"/>
+                <a:ea typeface="Arial" pitchFamily="34" charset="-122"/>
+                <a:cs typeface="Arial" pitchFamily="34" charset="-120"/>
+              </a:rPr>
+              <a:t>combine</a:t>
+            </a:r>
+            <a:endParaRPr lang="en-US" sz="850" dirty="0"/>
+          </a:p>
+        </p:txBody>
+      </p:sp>
+      <p:sp>
+        <p:nvSpPr>
+          <p:cNvPr id="25" name="Shape 23"/>
           <p:cNvSpPr/>
           <p:nvPr/>
         </p:nvSpPr>
@@ -16814,7 +17832,7 @@
       </p:sp>
       <p:sp>
         <p:nvSpPr>
-          <p:cNvPr id="21" name="Shape 19"/>
+          <p:cNvPr id="26" name="Shape 24"/>
           <p:cNvSpPr/>
           <p:nvPr/>
         </p:nvSpPr>
@@ -16841,7 +17859,7 @@
       </p:sp>
       <p:sp>
         <p:nvSpPr>
-          <p:cNvPr id="22" name="Text 20"/>
+          <p:cNvPr id="27" name="Text 25"/>
           <p:cNvSpPr/>
           <p:nvPr/>
         </p:nvSpPr>
@@ -16890,7 +17908,7 @@
                 <a:ea typeface="Arial" pitchFamily="34" charset="-122"/>
                 <a:cs typeface="Arial" pitchFamily="34" charset="-120"/>
               </a:rPr>
-              <a:t>11 retractions</a:t>
+              <a:t>11 audited verdicts</a:t>
             </a:r>
             <a:endParaRPr lang="en-US" sz="1000" dirty="0"/>
           </a:p>
@@ -16898,7 +17916,46 @@
       </p:sp>
       <p:sp>
         <p:nvSpPr>
-          <p:cNvPr id="23" name="Shape 21"/>
+          <p:cNvPr id="28" name="Text 26"/>
+          <p:cNvSpPr/>
+          <p:nvPr/>
+        </p:nvSpPr>
+        <p:spPr>
+          <a:xfrm>
+            <a:off x="7452360" y="5038344"/>
+            <a:ext cx="1188720" cy="201168"/>
+          </a:xfrm>
+          <a:prstGeom prst="rect">
+            <a:avLst/>
+          </a:prstGeom>
+          <a:noFill/>
+          <a:ln/>
+        </p:spPr>
+        <p:txBody>
+          <a:bodyPr wrap="square" lIns="0" tIns="0" rIns="0" bIns="0" rtlCol="0" anchor="ctr"/>
+          <a:lstStyle/>
+          <a:p>
+            <a:pPr algn="ctr" indent="0" marL="0">
+              <a:buNone/>
+            </a:pPr>
+            <a:r>
+              <a:rPr lang="en-US" sz="850" i="1" dirty="0">
+                <a:solidFill>
+                  <a:srgbClr val="7F7F7F"/>
+                </a:solidFill>
+                <a:latin typeface="Arial" pitchFamily="34" charset="0"/>
+                <a:ea typeface="Arial" pitchFamily="34" charset="-122"/>
+                <a:cs typeface="Arial" pitchFamily="34" charset="-120"/>
+              </a:rPr>
+              <a:t>doubt</a:t>
+            </a:r>
+            <a:endParaRPr lang="en-US" sz="850" dirty="0"/>
+          </a:p>
+        </p:txBody>
+      </p:sp>
+      <p:sp>
+        <p:nvSpPr>
+          <p:cNvPr id="29" name="Shape 27"/>
           <p:cNvSpPr/>
           <p:nvPr/>
         </p:nvSpPr>
@@ -16922,7 +17979,7 @@
       </p:sp>
       <p:sp>
         <p:nvSpPr>
-          <p:cNvPr id="24" name="Shape 22"/>
+          <p:cNvPr id="30" name="Shape 28"/>
           <p:cNvSpPr/>
           <p:nvPr/>
         </p:nvSpPr>
@@ -16945,7 +18002,7 @@
       </p:sp>
       <p:sp>
         <p:nvSpPr>
-          <p:cNvPr id="25" name="Shape 23"/>
+          <p:cNvPr id="31" name="Shape 29"/>
           <p:cNvSpPr/>
           <p:nvPr/>
         </p:nvSpPr>
@@ -16968,7 +18025,7 @@
       </p:sp>
       <p:sp>
         <p:nvSpPr>
-          <p:cNvPr id="26" name="Text 24"/>
+          <p:cNvPr id="32" name="Text 30"/>
           <p:cNvSpPr/>
           <p:nvPr/>
         </p:nvSpPr>
@@ -17007,7 +18064,7 @@
       </p:sp>
       <p:sp>
         <p:nvSpPr>
-          <p:cNvPr id="27" name="Shape 25"/>
+          <p:cNvPr id="33" name="Shape 31"/>
           <p:cNvSpPr/>
           <p:nvPr/>
         </p:nvSpPr>
@@ -17031,7 +18088,7 @@
       </p:sp>
       <p:sp>
         <p:nvSpPr>
-          <p:cNvPr id="28" name="Shape 26"/>
+          <p:cNvPr id="34" name="Shape 32"/>
           <p:cNvSpPr/>
           <p:nvPr/>
         </p:nvSpPr>
@@ -17054,7 +18111,7 @@
       </p:sp>
       <p:sp>
         <p:nvSpPr>
-          <p:cNvPr id="29" name="Shape 27"/>
+          <p:cNvPr id="35" name="Shape 33"/>
           <p:cNvSpPr/>
           <p:nvPr/>
         </p:nvSpPr>
@@ -17077,7 +18134,7 @@
       </p:sp>
       <p:sp>
         <p:nvSpPr>
-          <p:cNvPr id="30" name="Text 28"/>
+          <p:cNvPr id="36" name="Text 34"/>
           <p:cNvSpPr/>
           <p:nvPr/>
         </p:nvSpPr>
@@ -17116,7 +18173,7 @@
       </p:sp>
       <p:sp>
         <p:nvSpPr>
-          <p:cNvPr id="31" name="Text 29"/>
+          <p:cNvPr id="37" name="Text 35"/>
           <p:cNvSpPr/>
           <p:nvPr/>
         </p:nvSpPr>
@@ -17169,7 +18226,7 @@
       </p:sp>
       <p:sp>
         <p:nvSpPr>
-          <p:cNvPr id="32" name="Text 30"/>
+          <p:cNvPr id="38" name="Text 36"/>
           <p:cNvSpPr/>
           <p:nvPr/>
         </p:nvSpPr>
@@ -19486,6 +20543,45 @@
         </p:nvSpPr>
         <p:spPr>
           <a:xfrm>
+            <a:off x="502920" y="2999232"/>
+            <a:ext cx="8138160" cy="219456"/>
+          </a:xfrm>
+          <a:prstGeom prst="rect">
+            <a:avLst/>
+          </a:prstGeom>
+          <a:noFill/>
+          <a:ln/>
+        </p:spPr>
+        <p:txBody>
+          <a:bodyPr wrap="square" lIns="0" tIns="0" rIns="0" bIns="0" rtlCol="0" anchor="ctr"/>
+          <a:lstStyle/>
+          <a:p>
+            <a:pPr indent="0" marL="0">
+              <a:buNone/>
+            </a:pPr>
+            <a:r>
+              <a:rPr lang="en-US" sz="850" i="1" dirty="0">
+                <a:solidFill>
+                  <a:srgbClr val="7F7F7F"/>
+                </a:solidFill>
+                <a:latin typeface="Arial" pitchFamily="34" charset="0"/>
+                <a:ea typeface="Arial" pitchFamily="34" charset="-122"/>
+                <a:cs typeface="Arial" pitchFamily="34" charset="-120"/>
+              </a:rPr>
+              <a:t>rows 1/3/4 share 1.114 V because the oxidation end is set by HfO₂ (common) — the reduction end is the partner's job</a:t>
+            </a:r>
+            <a:endParaRPr lang="en-US" sz="850" dirty="0"/>
+          </a:p>
+        </p:txBody>
+      </p:sp>
+      <p:sp>
+        <p:nvSpPr>
+          <p:cNvPr id="8" name="Text 5"/>
+          <p:cNvSpPr/>
+          <p:nvPr/>
+        </p:nvSpPr>
+        <p:spPr>
+          <a:xfrm>
             <a:off x="502920" y="3291840"/>
             <a:ext cx="8138160" cy="2743200"/>
           </a:xfrm>
@@ -19628,7 +20724,7 @@
       </p:sp>
       <p:sp>
         <p:nvSpPr>
-          <p:cNvPr id="9" name="Text 5"/>
+          <p:cNvPr id="10" name="Text 6"/>
           <p:cNvSpPr/>
           <p:nvPr/>
         </p:nvSpPr>
@@ -19681,7 +20777,7 @@
       </p:sp>
       <p:sp>
         <p:nvSpPr>
-          <p:cNvPr id="10" name="Text 6"/>
+          <p:cNvPr id="11" name="Text 7"/>
           <p:cNvSpPr/>
           <p:nvPr/>
         </p:nvSpPr>
@@ -20593,6 +21689,333 @@
                       <a:r>
                         <a:rPr lang="en-US" sz="1000" dirty="0">
                           <a:solidFill>
+                            <a:srgbClr val="7F7F7F"/>
+                          </a:solidFill>
+                          <a:latin typeface="Arial" pitchFamily="34" charset="0"/>
+                          <a:ea typeface="Arial" pitchFamily="34" charset="-122"/>
+                          <a:cs typeface="Arial" pitchFamily="34" charset="-120"/>
+                        </a:rPr>
+                        <a:t>2  pair features</a:t>
+                      </a:r>
+                      <a:endParaRPr lang="en-US" sz="1000" dirty="0">
+                        <a:latin typeface="Arial" charset="0"/>
+                        <a:ea typeface="Arial" charset="0"/>
+                        <a:cs typeface="Arial" charset="0"/>
+                      </a:endParaRPr>
+                    </a:p>
+                  </a:txBody>
+                  <a:tcPr marL="36576" marR="36576" marT="36576" marB="36576" anchor="ctr">
+                    <a:lnL w="9525" cap="flat" cmpd="sng" algn="ctr">
+                      <a:solidFill>
+                        <a:srgbClr val="D9D9D9"/>
+                      </a:solidFill>
+                      <a:prstDash val="solid"/>
+                      <a:round/>
+                      <a:headEnd type="none" w="med" len="med"/>
+                      <a:tailEnd type="none" w="med" len="med"/>
+                    </a:lnL>
+                    <a:lnR w="9525" cap="flat" cmpd="sng" algn="ctr">
+                      <a:solidFill>
+                        <a:srgbClr val="D9D9D9"/>
+                      </a:solidFill>
+                      <a:prstDash val="solid"/>
+                      <a:round/>
+                      <a:headEnd type="none" w="med" len="med"/>
+                      <a:tailEnd type="none" w="med" len="med"/>
+                    </a:lnR>
+                    <a:lnT w="9525" cap="flat" cmpd="sng" algn="ctr">
+                      <a:solidFill>
+                        <a:srgbClr val="D9D9D9"/>
+                      </a:solidFill>
+                      <a:prstDash val="solid"/>
+                      <a:round/>
+                      <a:headEnd type="none" w="med" len="med"/>
+                      <a:tailEnd type="none" w="med" len="med"/>
+                    </a:lnT>
+                    <a:lnB w="9525" cap="flat" cmpd="sng" algn="ctr">
+                      <a:solidFill>
+                        <a:srgbClr val="D9D9D9"/>
+                      </a:solidFill>
+                      <a:prstDash val="solid"/>
+                      <a:round/>
+                      <a:headEnd type="none" w="med" len="med"/>
+                      <a:tailEnd type="none" w="med" len="med"/>
+                    </a:lnB>
+                  </a:tcPr>
+                </a:tc>
+                <a:tc>
+                  <a:txBody>
+                    <a:bodyPr/>
+                    <a:lstStyle/>
+                    <a:p>
+                      <a:pPr indent="0" marL="0">
+                        <a:buNone/>
+                      </a:pPr>
+                      <a:r>
+                        <a:rPr lang="en-US" sz="1000" dirty="0">
+                          <a:solidFill>
+                            <a:srgbClr val="7F7F7F"/>
+                          </a:solidFill>
+                          <a:latin typeface="Arial" pitchFamily="34" charset="0"/>
+                          <a:ea typeface="Arial" pitchFamily="34" charset="-122"/>
+                          <a:cs typeface="Arial" pitchFamily="34" charset="-120"/>
+                        </a:rPr>
+                        <a:t>feature construction (min/max/avg + quadratic)</a:t>
+                      </a:r>
+                      <a:endParaRPr lang="en-US" sz="1000" dirty="0">
+                        <a:latin typeface="Arial" charset="0"/>
+                        <a:ea typeface="Arial" charset="0"/>
+                        <a:cs typeface="Arial" charset="0"/>
+                      </a:endParaRPr>
+                    </a:p>
+                  </a:txBody>
+                  <a:tcPr marL="36576" marR="36576" marT="36576" marB="36576" anchor="ctr">
+                    <a:lnL w="9525" cap="flat" cmpd="sng" algn="ctr">
+                      <a:solidFill>
+                        <a:srgbClr val="D9D9D9"/>
+                      </a:solidFill>
+                      <a:prstDash val="solid"/>
+                      <a:round/>
+                      <a:headEnd type="none" w="med" len="med"/>
+                      <a:tailEnd type="none" w="med" len="med"/>
+                    </a:lnL>
+                    <a:lnR w="9525" cap="flat" cmpd="sng" algn="ctr">
+                      <a:solidFill>
+                        <a:srgbClr val="D9D9D9"/>
+                      </a:solidFill>
+                      <a:prstDash val="solid"/>
+                      <a:round/>
+                      <a:headEnd type="none" w="med" len="med"/>
+                      <a:tailEnd type="none" w="med" len="med"/>
+                    </a:lnR>
+                    <a:lnT w="9525" cap="flat" cmpd="sng" algn="ctr">
+                      <a:solidFill>
+                        <a:srgbClr val="D9D9D9"/>
+                      </a:solidFill>
+                      <a:prstDash val="solid"/>
+                      <a:round/>
+                      <a:headEnd type="none" w="med" len="med"/>
+                      <a:tailEnd type="none" w="med" len="med"/>
+                    </a:lnT>
+                    <a:lnB w="9525" cap="flat" cmpd="sng" algn="ctr">
+                      <a:solidFill>
+                        <a:srgbClr val="D9D9D9"/>
+                      </a:solidFill>
+                      <a:prstDash val="solid"/>
+                      <a:round/>
+                      <a:headEnd type="none" w="med" len="med"/>
+                      <a:tailEnd type="none" w="med" len="med"/>
+                    </a:lnB>
+                  </a:tcPr>
+                </a:tc>
+                <a:tc>
+                  <a:txBody>
+                    <a:bodyPr/>
+                    <a:lstStyle/>
+                    <a:p>
+                      <a:pPr indent="0" marL="0">
+                        <a:buNone/>
+                      </a:pPr>
+                      <a:r>
+                        <a:rPr lang="en-US" sz="1000" dirty="0">
+                          <a:solidFill>
+                            <a:srgbClr val="7F7F7F"/>
+                          </a:solidFill>
+                          <a:latin typeface="Arial" pitchFamily="34" charset="0"/>
+                          <a:ea typeface="Arial" pitchFamily="34" charset="-122"/>
+                          <a:cs typeface="Arial" pitchFamily="34" charset="-120"/>
+                        </a:rPr>
+                        <a:t>—</a:t>
+                      </a:r>
+                      <a:endParaRPr lang="en-US" sz="1000" dirty="0">
+                        <a:latin typeface="Arial" charset="0"/>
+                        <a:ea typeface="Arial" charset="0"/>
+                        <a:cs typeface="Arial" charset="0"/>
+                      </a:endParaRPr>
+                    </a:p>
+                  </a:txBody>
+                  <a:tcPr marL="36576" marR="36576" marT="36576" marB="36576" anchor="ctr">
+                    <a:lnL w="9525" cap="flat" cmpd="sng" algn="ctr">
+                      <a:solidFill>
+                        <a:srgbClr val="D9D9D9"/>
+                      </a:solidFill>
+                      <a:prstDash val="solid"/>
+                      <a:round/>
+                      <a:headEnd type="none" w="med" len="med"/>
+                      <a:tailEnd type="none" w="med" len="med"/>
+                    </a:lnL>
+                    <a:lnR w="9525" cap="flat" cmpd="sng" algn="ctr">
+                      <a:solidFill>
+                        <a:srgbClr val="D9D9D9"/>
+                      </a:solidFill>
+                      <a:prstDash val="solid"/>
+                      <a:round/>
+                      <a:headEnd type="none" w="med" len="med"/>
+                      <a:tailEnd type="none" w="med" len="med"/>
+                    </a:lnR>
+                    <a:lnT w="9525" cap="flat" cmpd="sng" algn="ctr">
+                      <a:solidFill>
+                        <a:srgbClr val="D9D9D9"/>
+                      </a:solidFill>
+                      <a:prstDash val="solid"/>
+                      <a:round/>
+                      <a:headEnd type="none" w="med" len="med"/>
+                      <a:tailEnd type="none" w="med" len="med"/>
+                    </a:lnT>
+                    <a:lnB w="9525" cap="flat" cmpd="sng" algn="ctr">
+                      <a:solidFill>
+                        <a:srgbClr val="D9D9D9"/>
+                      </a:solidFill>
+                      <a:prstDash val="solid"/>
+                      <a:round/>
+                      <a:headEnd type="none" w="med" len="med"/>
+                      <a:tailEnd type="none" w="med" len="med"/>
+                    </a:lnB>
+                  </a:tcPr>
+                </a:tc>
+                <a:tc>
+                  <a:txBody>
+                    <a:bodyPr/>
+                    <a:lstStyle/>
+                    <a:p>
+                      <a:pPr indent="0" marL="0">
+                        <a:buNone/>
+                      </a:pPr>
+                      <a:r>
+                        <a:rPr lang="en-US" sz="1000" dirty="0">
+                          <a:solidFill>
+                            <a:srgbClr val="7F7F7F"/>
+                          </a:solidFill>
+                          <a:latin typeface="Arial" pitchFamily="34" charset="0"/>
+                          <a:ea typeface="Arial" pitchFamily="34" charset="-122"/>
+                          <a:cs typeface="Arial" pitchFamily="34" charset="-120"/>
+                        </a:rPr>
+                        <a:t>—</a:t>
+                      </a:r>
+                      <a:endParaRPr lang="en-US" sz="1000" dirty="0">
+                        <a:latin typeface="Arial" charset="0"/>
+                        <a:ea typeface="Arial" charset="0"/>
+                        <a:cs typeface="Arial" charset="0"/>
+                      </a:endParaRPr>
+                    </a:p>
+                  </a:txBody>
+                  <a:tcPr marL="36576" marR="36576" marT="36576" marB="36576" anchor="ctr">
+                    <a:lnL w="9525" cap="flat" cmpd="sng" algn="ctr">
+                      <a:solidFill>
+                        <a:srgbClr val="D9D9D9"/>
+                      </a:solidFill>
+                      <a:prstDash val="solid"/>
+                      <a:round/>
+                      <a:headEnd type="none" w="med" len="med"/>
+                      <a:tailEnd type="none" w="med" len="med"/>
+                    </a:lnL>
+                    <a:lnR w="9525" cap="flat" cmpd="sng" algn="ctr">
+                      <a:solidFill>
+                        <a:srgbClr val="D9D9D9"/>
+                      </a:solidFill>
+                      <a:prstDash val="solid"/>
+                      <a:round/>
+                      <a:headEnd type="none" w="med" len="med"/>
+                      <a:tailEnd type="none" w="med" len="med"/>
+                    </a:lnR>
+                    <a:lnT w="9525" cap="flat" cmpd="sng" algn="ctr">
+                      <a:solidFill>
+                        <a:srgbClr val="D9D9D9"/>
+                      </a:solidFill>
+                      <a:prstDash val="solid"/>
+                      <a:round/>
+                      <a:headEnd type="none" w="med" len="med"/>
+                      <a:tailEnd type="none" w="med" len="med"/>
+                    </a:lnT>
+                    <a:lnB w="9525" cap="flat" cmpd="sng" algn="ctr">
+                      <a:solidFill>
+                        <a:srgbClr val="D9D9D9"/>
+                      </a:solidFill>
+                      <a:prstDash val="solid"/>
+                      <a:round/>
+                      <a:headEnd type="none" w="med" len="med"/>
+                      <a:tailEnd type="none" w="med" len="med"/>
+                    </a:lnB>
+                  </a:tcPr>
+                </a:tc>
+                <a:tc>
+                  <a:txBody>
+                    <a:bodyPr/>
+                    <a:lstStyle/>
+                    <a:p>
+                      <a:pPr indent="0" marL="0">
+                        <a:buNone/>
+                      </a:pPr>
+                      <a:r>
+                        <a:rPr lang="en-US" sz="1000" dirty="0">
+                          <a:solidFill>
+                            <a:srgbClr val="7F7F7F"/>
+                          </a:solidFill>
+                          <a:latin typeface="Arial" pitchFamily="34" charset="0"/>
+                          <a:ea typeface="Arial" pitchFamily="34" charset="-122"/>
+                          <a:cs typeface="Arial" pitchFamily="34" charset="-120"/>
+                        </a:rPr>
+                        <a:t>construction stage — no CV target</a:t>
+                      </a:r>
+                      <a:endParaRPr lang="en-US" sz="1000" dirty="0">
+                        <a:latin typeface="Arial" charset="0"/>
+                        <a:ea typeface="Arial" charset="0"/>
+                        <a:cs typeface="Arial" charset="0"/>
+                      </a:endParaRPr>
+                    </a:p>
+                  </a:txBody>
+                  <a:tcPr marL="36576" marR="36576" marT="36576" marB="36576" anchor="ctr">
+                    <a:lnL w="9525" cap="flat" cmpd="sng" algn="ctr">
+                      <a:solidFill>
+                        <a:srgbClr val="D9D9D9"/>
+                      </a:solidFill>
+                      <a:prstDash val="solid"/>
+                      <a:round/>
+                      <a:headEnd type="none" w="med" len="med"/>
+                      <a:tailEnd type="none" w="med" len="med"/>
+                    </a:lnL>
+                    <a:lnR w="9525" cap="flat" cmpd="sng" algn="ctr">
+                      <a:solidFill>
+                        <a:srgbClr val="D9D9D9"/>
+                      </a:solidFill>
+                      <a:prstDash val="solid"/>
+                      <a:round/>
+                      <a:headEnd type="none" w="med" len="med"/>
+                      <a:tailEnd type="none" w="med" len="med"/>
+                    </a:lnR>
+                    <a:lnT w="9525" cap="flat" cmpd="sng" algn="ctr">
+                      <a:solidFill>
+                        <a:srgbClr val="D9D9D9"/>
+                      </a:solidFill>
+                      <a:prstDash val="solid"/>
+                      <a:round/>
+                      <a:headEnd type="none" w="med" len="med"/>
+                      <a:tailEnd type="none" w="med" len="med"/>
+                    </a:lnT>
+                    <a:lnB w="9525" cap="flat" cmpd="sng" algn="ctr">
+                      <a:solidFill>
+                        <a:srgbClr val="D9D9D9"/>
+                      </a:solidFill>
+                      <a:prstDash val="solid"/>
+                      <a:round/>
+                      <a:headEnd type="none" w="med" len="med"/>
+                      <a:tailEnd type="none" w="med" len="med"/>
+                    </a:lnB>
+                  </a:tcPr>
+                </a:tc>
+              </a:tr>
+              <a:tr h="457200">
+                <a:tc>
+                  <a:txBody>
+                    <a:bodyPr/>
+                    <a:lstStyle/>
+                    <a:p>
+                      <a:pPr indent="0" marL="0">
+                        <a:buNone/>
+                      </a:pPr>
+                      <a:r>
+                        <a:rPr lang="en-US" sz="1000" dirty="0">
+                          <a:solidFill>
                             <a:srgbClr val="262626"/>
                           </a:solidFill>
                           <a:latin typeface="Arial" pitchFamily="34" charset="0"/>
@@ -20943,13 +22366,13 @@
             <a:r>
               <a:rPr lang="en-US" sz="1050" b="1" dirty="0">
                 <a:solidFill>
-                  <a:srgbClr val="262626"/>
-                </a:solidFill>
-                <a:latin typeface="Arial" pitchFamily="34" charset="0"/>
-                <a:ea typeface="Arial" pitchFamily="34" charset="-122"/>
-                <a:cs typeface="Arial" pitchFamily="34" charset="-120"/>
-              </a:rPr>
-              <a:t>Leakage audited: fold-out re-standardization shifts σ_loo by +3.4% — negligible; the low R² is real</a:t>
+                  <a:srgbClr val="9E2A2B"/>
+                </a:solidFill>
+                <a:latin typeface="Arial" pitchFamily="34" charset="0"/>
+                <a:ea typeface="Arial" pitchFamily="34" charset="-122"/>
+                <a:cs typeface="Arial" pitchFamily="34" charset="-120"/>
+              </a:rPr>
+              <a:t>And 0.089 is the OPTIMISTIC number: dopant-level CV (LODO/L2DO) drives R² negative (−0.18 / −0.25) — optimism bias +0.34 quantified</a:t>
             </a:r>
             <a:endParaRPr lang="en-US" sz="1050" dirty="0"/>
           </a:p>
@@ -20985,7 +22408,7 @@
             <a:r>
               <a:rPr lang="en-US" sz="1050" b="1" dirty="0">
                 <a:solidFill>
-                  <a:srgbClr val="9E2A2B"/>
+                  <a:srgbClr val="262626"/>
                 </a:solidFill>
                 <a:latin typeface="Arial" pitchFamily="34" charset="0"/>
                 <a:ea typeface="Arial" pitchFamily="34" charset="-122"/>
@@ -21012,7 +22435,7 @@
                 <a:ea typeface="Arial" pitchFamily="34" charset="-122"/>
                 <a:cs typeface="Arial" pitchFamily="34" charset="-120"/>
               </a:rPr>
-              <a:t>Small-sample defense inherited from Sendek (40 ≈ 47): LOOCV · exhaustive feature subsets · X-randomization — procedure only (they classify cross-material; we regress within-host)</a:t>
+              <a:t>Small-sample defense (Sendek procedure, 40 ≈ 47): LOOCV · label-shuffle / X-randomization · applicability domain · dopant-level CV — they classify cross-material; we regress within-host</a:t>
             </a:r>
             <a:endParaRPr lang="en-US" sz="1050" dirty="0"/>
           </a:p>
@@ -21265,7 +22688,7 @@
         </p:nvSpPr>
         <p:spPr>
           <a:xfrm>
-            <a:off x="502920" y="1371600"/>
+            <a:off x="502920" y="1417320"/>
             <a:ext cx="4206240" cy="274320"/>
           </a:xfrm>
           <a:prstGeom prst="rect">
@@ -21304,7 +22727,7 @@
         </p:nvSpPr>
         <p:spPr>
           <a:xfrm>
-            <a:off x="777240" y="1737360"/>
+            <a:off x="868680" y="2148840"/>
             <a:ext cx="475488" cy="475488"/>
           </a:xfrm>
           <a:prstGeom prst="rect">
@@ -21329,7 +22752,7 @@
         </p:nvSpPr>
         <p:spPr>
           <a:xfrm>
-            <a:off x="1252728" y="1737360"/>
+            <a:off x="1344168" y="2148840"/>
             <a:ext cx="475488" cy="475488"/>
           </a:xfrm>
           <a:prstGeom prst="rect">
@@ -21354,7 +22777,7 @@
         </p:nvSpPr>
         <p:spPr>
           <a:xfrm>
-            <a:off x="1728216" y="1737360"/>
+            <a:off x="1819656" y="2148840"/>
             <a:ext cx="475488" cy="475488"/>
           </a:xfrm>
           <a:prstGeom prst="rect">
@@ -21379,7 +22802,7 @@
         </p:nvSpPr>
         <p:spPr>
           <a:xfrm>
-            <a:off x="777240" y="2212848"/>
+            <a:off x="868680" y="2624328"/>
             <a:ext cx="475488" cy="475488"/>
           </a:xfrm>
           <a:prstGeom prst="rect">
@@ -21404,7 +22827,7 @@
         </p:nvSpPr>
         <p:spPr>
           <a:xfrm>
-            <a:off x="1252728" y="2212848"/>
+            <a:off x="1344168" y="2624328"/>
             <a:ext cx="475488" cy="475488"/>
           </a:xfrm>
           <a:prstGeom prst="rect">
@@ -21429,7 +22852,7 @@
         </p:nvSpPr>
         <p:spPr>
           <a:xfrm>
-            <a:off x="1728216" y="2212848"/>
+            <a:off x="1819656" y="2624328"/>
             <a:ext cx="475488" cy="475488"/>
           </a:xfrm>
           <a:prstGeom prst="rect">
@@ -21454,7 +22877,7 @@
         </p:nvSpPr>
         <p:spPr>
           <a:xfrm>
-            <a:off x="777240" y="2688336"/>
+            <a:off x="868680" y="3099816"/>
             <a:ext cx="475488" cy="475488"/>
           </a:xfrm>
           <a:prstGeom prst="rect">
@@ -21479,7 +22902,7 @@
         </p:nvSpPr>
         <p:spPr>
           <a:xfrm>
-            <a:off x="1252728" y="2688336"/>
+            <a:off x="1344168" y="3099816"/>
             <a:ext cx="475488" cy="475488"/>
           </a:xfrm>
           <a:prstGeom prst="rect">
@@ -21504,7 +22927,7 @@
         </p:nvSpPr>
         <p:spPr>
           <a:xfrm>
-            <a:off x="1728216" y="2688336"/>
+            <a:off x="1819656" y="3099816"/>
             <a:ext cx="475488" cy="475488"/>
           </a:xfrm>
           <a:prstGeom prst="rect">
@@ -21529,8 +22952,8 @@
         </p:nvSpPr>
         <p:spPr>
           <a:xfrm>
-            <a:off x="777240" y="1481328"/>
-            <a:ext cx="475488" cy="219456"/>
+            <a:off x="868680" y="1911096"/>
+            <a:ext cx="475488" cy="201168"/>
           </a:xfrm>
           <a:prstGeom prst="rect">
             <a:avLst/>
@@ -21568,8 +22991,8 @@
         </p:nvSpPr>
         <p:spPr>
           <a:xfrm>
-            <a:off x="1252728" y="1481328"/>
-            <a:ext cx="475488" cy="219456"/>
+            <a:off x="1344168" y="1911096"/>
+            <a:ext cx="475488" cy="201168"/>
           </a:xfrm>
           <a:prstGeom prst="rect">
             <a:avLst/>
@@ -21607,8 +23030,8 @@
         </p:nvSpPr>
         <p:spPr>
           <a:xfrm>
-            <a:off x="1728216" y="1481328"/>
-            <a:ext cx="475488" cy="219456"/>
+            <a:off x="1819656" y="1911096"/>
+            <a:ext cx="475488" cy="201168"/>
           </a:xfrm>
           <a:prstGeom prst="rect">
             <a:avLst/>
@@ -21646,7 +23069,7 @@
         </p:nvSpPr>
         <p:spPr>
           <a:xfrm>
-            <a:off x="301752" y="1865376"/>
+            <a:off x="393192" y="2276856"/>
             <a:ext cx="438912" cy="219456"/>
           </a:xfrm>
           <a:prstGeom prst="rect">
@@ -21685,7 +23108,7 @@
         </p:nvSpPr>
         <p:spPr>
           <a:xfrm>
-            <a:off x="301752" y="2340864"/>
+            <a:off x="393192" y="2752344"/>
             <a:ext cx="438912" cy="219456"/>
           </a:xfrm>
           <a:prstGeom prst="rect">
@@ -21724,7 +23147,7 @@
         </p:nvSpPr>
         <p:spPr>
           <a:xfrm>
-            <a:off x="301752" y="2816352"/>
+            <a:off x="393192" y="3227832"/>
             <a:ext cx="438912" cy="219456"/>
           </a:xfrm>
           <a:prstGeom prst="rect">
@@ -21763,7 +23186,7 @@
         </p:nvSpPr>
         <p:spPr>
           <a:xfrm>
-            <a:off x="502920" y="3300984"/>
+            <a:off x="502920" y="3712464"/>
             <a:ext cx="4023360" cy="548640"/>
           </a:xfrm>
           <a:prstGeom prst="rect">
@@ -22195,7 +23618,7 @@
                 <a:ea typeface="Arial" pitchFamily="34" charset="-122"/>
                 <a:cs typeface="Arial" pitchFamily="34" charset="-120"/>
               </a:rPr>
-              <a:t>11 retracted verdicts · one retracted twice · one systematic bias · one provenance audit</a:t>
+              <a:t>11 audited verdicts — 9 retracted, one of them twice · one systematic bias · one provenance audit</a:t>
             </a:r>
             <a:endParaRPr lang="en-US" sz="1250" dirty="0"/>
           </a:p>
@@ -22287,7 +23710,46 @@
       </p:sp>
       <p:sp>
         <p:nvSpPr>
-          <p:cNvPr id="8" name="Shape 6"/>
+          <p:cNvPr id="8" name="Text 6"/>
+          <p:cNvSpPr/>
+          <p:nvPr/>
+        </p:nvSpPr>
+        <p:spPr>
+          <a:xfrm>
+            <a:off x="502920" y="5038344"/>
+            <a:ext cx="1188720" cy="201168"/>
+          </a:xfrm>
+          <a:prstGeom prst="rect">
+            <a:avLst/>
+          </a:prstGeom>
+          <a:noFill/>
+          <a:ln/>
+        </p:spPr>
+        <p:txBody>
+          <a:bodyPr wrap="square" lIns="0" tIns="0" rIns="0" bIns="0" rtlCol="0" anchor="ctr"/>
+          <a:lstStyle/>
+          <a:p>
+            <a:pPr algn="ctr" indent="0" marL="0">
+              <a:buNone/>
+            </a:pPr>
+            <a:r>
+              <a:rPr lang="en-US" sz="850" i="1" dirty="0">
+                <a:solidFill>
+                  <a:srgbClr val="7F7F7F"/>
+                </a:solidFill>
+                <a:latin typeface="Arial" pitchFamily="34" charset="0"/>
+                <a:ea typeface="Arial" pitchFamily="34" charset="-122"/>
+                <a:cs typeface="Arial" pitchFamily="34" charset="-120"/>
+              </a:rPr>
+              <a:t>ask</a:t>
+            </a:r>
+            <a:endParaRPr lang="en-US" sz="850" dirty="0"/>
+          </a:p>
+        </p:txBody>
+      </p:sp>
+      <p:sp>
+        <p:nvSpPr>
+          <p:cNvPr id="9" name="Shape 7"/>
           <p:cNvSpPr/>
           <p:nvPr/>
         </p:nvSpPr>
@@ -22311,7 +23773,7 @@
       </p:sp>
       <p:sp>
         <p:nvSpPr>
-          <p:cNvPr id="9" name="Shape 7"/>
+          <p:cNvPr id="10" name="Shape 8"/>
           <p:cNvSpPr/>
           <p:nvPr/>
         </p:nvSpPr>
@@ -22338,7 +23800,7 @@
       </p:sp>
       <p:sp>
         <p:nvSpPr>
-          <p:cNvPr id="10" name="Text 8"/>
+          <p:cNvPr id="11" name="Text 9"/>
           <p:cNvSpPr/>
           <p:nvPr/>
         </p:nvSpPr>
@@ -22395,7 +23857,46 @@
       </p:sp>
       <p:sp>
         <p:nvSpPr>
-          <p:cNvPr id="11" name="Shape 9"/>
+          <p:cNvPr id="12" name="Text 10"/>
+          <p:cNvSpPr/>
+          <p:nvPr/>
+        </p:nvSpPr>
+        <p:spPr>
+          <a:xfrm>
+            <a:off x="1892808" y="5038344"/>
+            <a:ext cx="1188720" cy="201168"/>
+          </a:xfrm>
+          <a:prstGeom prst="rect">
+            <a:avLst/>
+          </a:prstGeom>
+          <a:noFill/>
+          <a:ln/>
+        </p:spPr>
+        <p:txBody>
+          <a:bodyPr wrap="square" lIns="0" tIns="0" rIns="0" bIns="0" rtlCol="0" anchor="ctr"/>
+          <a:lstStyle/>
+          <a:p>
+            <a:pPr algn="ctr" indent="0" marL="0">
+              <a:buNone/>
+            </a:pPr>
+            <a:r>
+              <a:rPr lang="en-US" sz="850" i="1" dirty="0">
+                <a:solidFill>
+                  <a:srgbClr val="7F7F7F"/>
+                </a:solidFill>
+                <a:latin typeface="Arial" pitchFamily="34" charset="0"/>
+                <a:ea typeface="Arial" pitchFamily="34" charset="-122"/>
+                <a:cs typeface="Arial" pitchFamily="34" charset="-120"/>
+              </a:rPr>
+              <a:t>measure</a:t>
+            </a:r>
+            <a:endParaRPr lang="en-US" sz="850" dirty="0"/>
+          </a:p>
+        </p:txBody>
+      </p:sp>
+      <p:sp>
+        <p:nvSpPr>
+          <p:cNvPr id="13" name="Shape 11"/>
           <p:cNvSpPr/>
           <p:nvPr/>
         </p:nvSpPr>
@@ -22419,7 +23920,7 @@
       </p:sp>
       <p:sp>
         <p:nvSpPr>
-          <p:cNvPr id="12" name="Shape 10"/>
+          <p:cNvPr id="14" name="Shape 12"/>
           <p:cNvSpPr/>
           <p:nvPr/>
         </p:nvSpPr>
@@ -22446,7 +23947,7 @@
       </p:sp>
       <p:sp>
         <p:nvSpPr>
-          <p:cNvPr id="13" name="Text 11"/>
+          <p:cNvPr id="15" name="Text 13"/>
           <p:cNvSpPr/>
           <p:nvPr/>
         </p:nvSpPr>
@@ -22503,7 +24004,46 @@
       </p:sp>
       <p:sp>
         <p:nvSpPr>
-          <p:cNvPr id="14" name="Shape 12"/>
+          <p:cNvPr id="16" name="Text 14"/>
+          <p:cNvSpPr/>
+          <p:nvPr/>
+        </p:nvSpPr>
+        <p:spPr>
+          <a:xfrm>
+            <a:off x="3282696" y="5038344"/>
+            <a:ext cx="1188720" cy="201168"/>
+          </a:xfrm>
+          <a:prstGeom prst="rect">
+            <a:avLst/>
+          </a:prstGeom>
+          <a:noFill/>
+          <a:ln/>
+        </p:spPr>
+        <p:txBody>
+          <a:bodyPr wrap="square" lIns="0" tIns="0" rIns="0" bIns="0" rtlCol="0" anchor="ctr"/>
+          <a:lstStyle/>
+          <a:p>
+            <a:pPr algn="ctr" indent="0" marL="0">
+              <a:buNone/>
+            </a:pPr>
+            <a:r>
+              <a:rPr lang="en-US" sz="850" i="1" dirty="0">
+                <a:solidFill>
+                  <a:srgbClr val="7F7F7F"/>
+                </a:solidFill>
+                <a:latin typeface="Arial" pitchFamily="34" charset="0"/>
+                <a:ea typeface="Arial" pitchFamily="34" charset="-122"/>
+                <a:cs typeface="Arial" pitchFamily="34" charset="-120"/>
+              </a:rPr>
+              <a:t>learn</a:t>
+            </a:r>
+            <a:endParaRPr lang="en-US" sz="850" dirty="0"/>
+          </a:p>
+        </p:txBody>
+      </p:sp>
+      <p:sp>
+        <p:nvSpPr>
+          <p:cNvPr id="17" name="Shape 15"/>
           <p:cNvSpPr/>
           <p:nvPr/>
         </p:nvSpPr>
@@ -22527,7 +24067,7 @@
       </p:sp>
       <p:sp>
         <p:nvSpPr>
-          <p:cNvPr id="15" name="Shape 13"/>
+          <p:cNvPr id="18" name="Shape 16"/>
           <p:cNvSpPr/>
           <p:nvPr/>
         </p:nvSpPr>
@@ -22554,7 +24094,7 @@
       </p:sp>
       <p:sp>
         <p:nvSpPr>
-          <p:cNvPr id="16" name="Text 14"/>
+          <p:cNvPr id="19" name="Text 17"/>
           <p:cNvSpPr/>
           <p:nvPr/>
         </p:nvSpPr>
@@ -22611,7 +24151,46 @@
       </p:sp>
       <p:sp>
         <p:nvSpPr>
-          <p:cNvPr id="17" name="Shape 15"/>
+          <p:cNvPr id="20" name="Text 18"/>
+          <p:cNvSpPr/>
+          <p:nvPr/>
+        </p:nvSpPr>
+        <p:spPr>
+          <a:xfrm>
+            <a:off x="4672584" y="5038344"/>
+            <a:ext cx="1188720" cy="201168"/>
+          </a:xfrm>
+          <a:prstGeom prst="rect">
+            <a:avLst/>
+          </a:prstGeom>
+          <a:noFill/>
+          <a:ln/>
+        </p:spPr>
+        <p:txBody>
+          <a:bodyPr wrap="square" lIns="0" tIns="0" rIns="0" bIns="0" rtlCol="0" anchor="ctr"/>
+          <a:lstStyle/>
+          <a:p>
+            <a:pPr algn="ctr" indent="0" marL="0">
+              <a:buNone/>
+            </a:pPr>
+            <a:r>
+              <a:rPr lang="en-US" sz="850" i="1" dirty="0">
+                <a:solidFill>
+                  <a:srgbClr val="7F7F7F"/>
+                </a:solidFill>
+                <a:latin typeface="Arial" pitchFamily="34" charset="0"/>
+                <a:ea typeface="Arial" pitchFamily="34" charset="-122"/>
+                <a:cs typeface="Arial" pitchFamily="34" charset="-120"/>
+              </a:rPr>
+              <a:t>gate</a:t>
+            </a:r>
+            <a:endParaRPr lang="en-US" sz="850" dirty="0"/>
+          </a:p>
+        </p:txBody>
+      </p:sp>
+      <p:sp>
+        <p:nvSpPr>
+          <p:cNvPr id="21" name="Shape 19"/>
           <p:cNvSpPr/>
           <p:nvPr/>
         </p:nvSpPr>
@@ -22635,7 +24214,7 @@
       </p:sp>
       <p:sp>
         <p:nvSpPr>
-          <p:cNvPr id="18" name="Shape 16"/>
+          <p:cNvPr id="22" name="Shape 20"/>
           <p:cNvSpPr/>
           <p:nvPr/>
         </p:nvSpPr>
@@ -22662,7 +24241,7 @@
       </p:sp>
       <p:sp>
         <p:nvSpPr>
-          <p:cNvPr id="19" name="Text 17"/>
+          <p:cNvPr id="23" name="Text 21"/>
           <p:cNvSpPr/>
           <p:nvPr/>
         </p:nvSpPr>
@@ -22719,7 +24298,46 @@
       </p:sp>
       <p:sp>
         <p:nvSpPr>
-          <p:cNvPr id="20" name="Shape 18"/>
+          <p:cNvPr id="24" name="Text 22"/>
+          <p:cNvSpPr/>
+          <p:nvPr/>
+        </p:nvSpPr>
+        <p:spPr>
+          <a:xfrm>
+            <a:off x="6062472" y="5038344"/>
+            <a:ext cx="1188720" cy="201168"/>
+          </a:xfrm>
+          <a:prstGeom prst="rect">
+            <a:avLst/>
+          </a:prstGeom>
+          <a:noFill/>
+          <a:ln/>
+        </p:spPr>
+        <p:txBody>
+          <a:bodyPr wrap="square" lIns="0" tIns="0" rIns="0" bIns="0" rtlCol="0" anchor="ctr"/>
+          <a:lstStyle/>
+          <a:p>
+            <a:pPr algn="ctr" indent="0" marL="0">
+              <a:buNone/>
+            </a:pPr>
+            <a:r>
+              <a:rPr lang="en-US" sz="850" i="1" dirty="0">
+                <a:solidFill>
+                  <a:srgbClr val="7F7F7F"/>
+                </a:solidFill>
+                <a:latin typeface="Arial" pitchFamily="34" charset="0"/>
+                <a:ea typeface="Arial" pitchFamily="34" charset="-122"/>
+                <a:cs typeface="Arial" pitchFamily="34" charset="-120"/>
+              </a:rPr>
+              <a:t>combine</a:t>
+            </a:r>
+            <a:endParaRPr lang="en-US" sz="850" dirty="0"/>
+          </a:p>
+        </p:txBody>
+      </p:sp>
+      <p:sp>
+        <p:nvSpPr>
+          <p:cNvPr id="25" name="Shape 23"/>
           <p:cNvSpPr/>
           <p:nvPr/>
         </p:nvSpPr>
@@ -22743,7 +24361,7 @@
       </p:sp>
       <p:sp>
         <p:nvSpPr>
-          <p:cNvPr id="21" name="Shape 19"/>
+          <p:cNvPr id="26" name="Shape 24"/>
           <p:cNvSpPr/>
           <p:nvPr/>
         </p:nvSpPr>
@@ -22770,7 +24388,7 @@
       </p:sp>
       <p:sp>
         <p:nvSpPr>
-          <p:cNvPr id="22" name="Text 20"/>
+          <p:cNvPr id="27" name="Text 25"/>
           <p:cNvSpPr/>
           <p:nvPr/>
         </p:nvSpPr>
@@ -22819,7 +24437,7 @@
                 <a:ea typeface="Arial" pitchFamily="34" charset="-122"/>
                 <a:cs typeface="Arial" pitchFamily="34" charset="-120"/>
               </a:rPr>
-              <a:t>11 retractions</a:t>
+              <a:t>11 audited verdicts</a:t>
             </a:r>
             <a:endParaRPr lang="en-US" sz="1000" dirty="0"/>
           </a:p>
@@ -22827,7 +24445,46 @@
       </p:sp>
       <p:sp>
         <p:nvSpPr>
-          <p:cNvPr id="23" name="Shape 21"/>
+          <p:cNvPr id="28" name="Text 26"/>
+          <p:cNvSpPr/>
+          <p:nvPr/>
+        </p:nvSpPr>
+        <p:spPr>
+          <a:xfrm>
+            <a:off x="7452360" y="5038344"/>
+            <a:ext cx="1188720" cy="201168"/>
+          </a:xfrm>
+          <a:prstGeom prst="rect">
+            <a:avLst/>
+          </a:prstGeom>
+          <a:noFill/>
+          <a:ln/>
+        </p:spPr>
+        <p:txBody>
+          <a:bodyPr wrap="square" lIns="0" tIns="0" rIns="0" bIns="0" rtlCol="0" anchor="ctr"/>
+          <a:lstStyle/>
+          <a:p>
+            <a:pPr algn="ctr" indent="0" marL="0">
+              <a:buNone/>
+            </a:pPr>
+            <a:r>
+              <a:rPr lang="en-US" sz="850" b="1" i="1" dirty="0">
+                <a:solidFill>
+                  <a:srgbClr val="9E2A2B"/>
+                </a:solidFill>
+                <a:latin typeface="Arial" pitchFamily="34" charset="0"/>
+                <a:ea typeface="Arial" pitchFamily="34" charset="-122"/>
+                <a:cs typeface="Arial" pitchFamily="34" charset="-120"/>
+              </a:rPr>
+              <a:t>doubt</a:t>
+            </a:r>
+            <a:endParaRPr lang="en-US" sz="850" dirty="0"/>
+          </a:p>
+        </p:txBody>
+      </p:sp>
+      <p:sp>
+        <p:nvSpPr>
+          <p:cNvPr id="29" name="Shape 27"/>
           <p:cNvSpPr/>
           <p:nvPr/>
         </p:nvSpPr>
@@ -22851,7 +24508,7 @@
       </p:sp>
       <p:sp>
         <p:nvSpPr>
-          <p:cNvPr id="24" name="Shape 22"/>
+          <p:cNvPr id="30" name="Shape 28"/>
           <p:cNvSpPr/>
           <p:nvPr/>
         </p:nvSpPr>
@@ -22874,7 +24531,7 @@
       </p:sp>
       <p:sp>
         <p:nvSpPr>
-          <p:cNvPr id="25" name="Shape 23"/>
+          <p:cNvPr id="31" name="Shape 29"/>
           <p:cNvSpPr/>
           <p:nvPr/>
         </p:nvSpPr>
@@ -22897,7 +24554,7 @@
       </p:sp>
       <p:sp>
         <p:nvSpPr>
-          <p:cNvPr id="26" name="Text 24"/>
+          <p:cNvPr id="32" name="Text 30"/>
           <p:cNvSpPr/>
           <p:nvPr/>
         </p:nvSpPr>
@@ -22936,7 +24593,7 @@
       </p:sp>
       <p:sp>
         <p:nvSpPr>
-          <p:cNvPr id="27" name="Shape 25"/>
+          <p:cNvPr id="33" name="Shape 31"/>
           <p:cNvSpPr/>
           <p:nvPr/>
         </p:nvSpPr>
@@ -22960,7 +24617,7 @@
       </p:sp>
       <p:sp>
         <p:nvSpPr>
-          <p:cNvPr id="28" name="Shape 26"/>
+          <p:cNvPr id="34" name="Shape 32"/>
           <p:cNvSpPr/>
           <p:nvPr/>
         </p:nvSpPr>
@@ -22983,7 +24640,7 @@
       </p:sp>
       <p:sp>
         <p:nvSpPr>
-          <p:cNvPr id="29" name="Shape 27"/>
+          <p:cNvPr id="35" name="Shape 33"/>
           <p:cNvSpPr/>
           <p:nvPr/>
         </p:nvSpPr>
@@ -23006,7 +24663,7 @@
       </p:sp>
       <p:sp>
         <p:nvSpPr>
-          <p:cNvPr id="30" name="Text 28"/>
+          <p:cNvPr id="36" name="Text 34"/>
           <p:cNvSpPr/>
           <p:nvPr/>
         </p:nvSpPr>
@@ -23045,7 +24702,7 @@
       </p:sp>
       <p:sp>
         <p:nvSpPr>
-          <p:cNvPr id="31" name="Text 29"/>
+          <p:cNvPr id="37" name="Text 35"/>
           <p:cNvSpPr/>
           <p:nvPr/>
         </p:nvSpPr>
@@ -23098,7 +24755,7 @@
       </p:sp>
       <p:sp>
         <p:nvSpPr>
-          <p:cNvPr id="32" name="Text 30"/>
+          <p:cNvPr id="38" name="Text 36"/>
           <p:cNvSpPr/>
           <p:nvPr/>
         </p:nvSpPr>
@@ -26069,7 +27726,7 @@
                           <a:ea typeface="Arial" pitchFamily="34" charset="-122"/>
                           <a:cs typeface="Arial" pitchFamily="34" charset="-120"/>
                         </a:rPr>
-                        <a:t>metastable theoretical polymorph picked</a:t>
+                        <a:t>metastable theoretical polymorph (mp-32586) picked</a:t>
                       </a:r>
                       <a:endParaRPr lang="en-US" sz="880" dirty="0">
                         <a:latin typeface="Arial" charset="0"/>
@@ -26134,7 +27791,7 @@
                           <a:ea typeface="Arial" pitchFamily="34" charset="-122"/>
                           <a:cs typeface="Arial" pitchFamily="34" charset="-120"/>
                         </a:rPr>
-                        <a:t>material-id pinning → 0.760</a:t>
+                        <a:t>material-id pinning → 0.760 (obs. Pnma)</a:t>
                       </a:r>
                       <a:endParaRPr lang="en-US" sz="880" dirty="0">
                         <a:latin typeface="Arial" charset="0"/>
@@ -26396,7 +28053,7 @@
                           <a:ea typeface="Arial" pitchFamily="34" charset="-122"/>
                           <a:cs typeface="Arial" pitchFamily="34" charset="-120"/>
                         </a:rPr>
-                        <a:t>provenance audit (2 slides ahead)</a:t>
+                        <a:t>provenance audit (p.30)</a:t>
                       </a:r>
                       <a:endParaRPr lang="en-US" sz="880" dirty="0">
                         <a:latin typeface="Arial" charset="0"/>
@@ -26486,7 +28143,7 @@
                 <a:ea typeface="Arial" pitchFamily="34" charset="-122"/>
                 <a:cs typeface="Arial" pitchFamily="34" charset="-120"/>
               </a:rPr>
-              <a:t>6 of 11 landed within the last 3 days — the gates are running now</a:t>
+              <a:t>Ledger: 9 retracted · 1 on hold (#3) · 1 provenance-flagged (#11) — and 5 of 11 landed within the last four days</a:t>
             </a:r>
             <a:endParaRPr lang="en-US" sz="1100" dirty="0"/>
           </a:p>
@@ -27218,7 +28875,7 @@
                 <a:ea typeface="Arial" pitchFamily="34" charset="-122"/>
                 <a:cs typeface="Arial" pitchFamily="34" charset="-120"/>
               </a:rPr>
-              <a:t>Physisorbed endpoint (DFT+U cell)</a:t>
+              <a:t>Physisorbed endpoint — display geometry; energies: runs/sdcp_phaseB_vasp_v1</a:t>
             </a:r>
             <a:endParaRPr lang="en-US" sz="850" dirty="0"/>
           </a:p>
@@ -27339,7 +28996,7 @@
                 <a:ea typeface="Arial" pitchFamily="34" charset="-122"/>
                 <a:cs typeface="Arial" pitchFamily="34" charset="-120"/>
               </a:rPr>
-              <a:t>Li-transfer endpoint — the +0.34 eV side</a:t>
+              <a:t>Li-transfer endpoint (display) — the +0.34 eV side</a:t>
             </a:r>
             <a:endParaRPr lang="en-US" sz="850" dirty="0"/>
           </a:p>
@@ -27724,7 +29381,7 @@
                 <a:ea typeface="Arial" pitchFamily="34" charset="-122"/>
                 <a:cs typeface="Arial" pitchFamily="34" charset="-120"/>
               </a:rPr>
-              <a:t>26 agree · 9 disagree · 12 absent</a:t>
+              <a:t>99 rows → matched to our 47-dopant pool: 35 overlap (26 + 9) + 12 absent</a:t>
             </a:r>
             <a:endParaRPr lang="en-US" sz="1150" dirty="0"/>
           </a:p>
@@ -28356,7 +30013,46 @@
       </p:sp>
       <p:sp>
         <p:nvSpPr>
-          <p:cNvPr id="8" name="Shape 6"/>
+          <p:cNvPr id="8" name="Text 6"/>
+          <p:cNvSpPr/>
+          <p:nvPr/>
+        </p:nvSpPr>
+        <p:spPr>
+          <a:xfrm>
+            <a:off x="502920" y="5038344"/>
+            <a:ext cx="1188720" cy="201168"/>
+          </a:xfrm>
+          <a:prstGeom prst="rect">
+            <a:avLst/>
+          </a:prstGeom>
+          <a:noFill/>
+          <a:ln/>
+        </p:spPr>
+        <p:txBody>
+          <a:bodyPr wrap="square" lIns="0" tIns="0" rIns="0" bIns="0" rtlCol="0" anchor="ctr"/>
+          <a:lstStyle/>
+          <a:p>
+            <a:pPr algn="ctr" indent="0" marL="0">
+              <a:buNone/>
+            </a:pPr>
+            <a:r>
+              <a:rPr lang="en-US" sz="850" b="1" i="1" dirty="0">
+                <a:solidFill>
+                  <a:srgbClr val="1F4E79"/>
+                </a:solidFill>
+                <a:latin typeface="Arial" pitchFamily="34" charset="0"/>
+                <a:ea typeface="Arial" pitchFamily="34" charset="-122"/>
+                <a:cs typeface="Arial" pitchFamily="34" charset="-120"/>
+              </a:rPr>
+              <a:t>ask</a:t>
+            </a:r>
+            <a:endParaRPr lang="en-US" sz="850" dirty="0"/>
+          </a:p>
+        </p:txBody>
+      </p:sp>
+      <p:sp>
+        <p:nvSpPr>
+          <p:cNvPr id="9" name="Shape 7"/>
           <p:cNvSpPr/>
           <p:nvPr/>
         </p:nvSpPr>
@@ -28380,7 +30076,7 @@
       </p:sp>
       <p:sp>
         <p:nvSpPr>
-          <p:cNvPr id="9" name="Shape 7"/>
+          <p:cNvPr id="10" name="Shape 8"/>
           <p:cNvSpPr/>
           <p:nvPr/>
         </p:nvSpPr>
@@ -28407,7 +30103,7 @@
       </p:sp>
       <p:sp>
         <p:nvSpPr>
-          <p:cNvPr id="10" name="Text 8"/>
+          <p:cNvPr id="11" name="Text 9"/>
           <p:cNvSpPr/>
           <p:nvPr/>
         </p:nvSpPr>
@@ -28464,7 +30160,46 @@
       </p:sp>
       <p:sp>
         <p:nvSpPr>
-          <p:cNvPr id="11" name="Shape 9"/>
+          <p:cNvPr id="12" name="Text 10"/>
+          <p:cNvSpPr/>
+          <p:nvPr/>
+        </p:nvSpPr>
+        <p:spPr>
+          <a:xfrm>
+            <a:off x="1892808" y="5038344"/>
+            <a:ext cx="1188720" cy="201168"/>
+          </a:xfrm>
+          <a:prstGeom prst="rect">
+            <a:avLst/>
+          </a:prstGeom>
+          <a:noFill/>
+          <a:ln/>
+        </p:spPr>
+        <p:txBody>
+          <a:bodyPr wrap="square" lIns="0" tIns="0" rIns="0" bIns="0" rtlCol="0" anchor="ctr"/>
+          <a:lstStyle/>
+          <a:p>
+            <a:pPr algn="ctr" indent="0" marL="0">
+              <a:buNone/>
+            </a:pPr>
+            <a:r>
+              <a:rPr lang="en-US" sz="850" i="1" dirty="0">
+                <a:solidFill>
+                  <a:srgbClr val="7F7F7F"/>
+                </a:solidFill>
+                <a:latin typeface="Arial" pitchFamily="34" charset="0"/>
+                <a:ea typeface="Arial" pitchFamily="34" charset="-122"/>
+                <a:cs typeface="Arial" pitchFamily="34" charset="-120"/>
+              </a:rPr>
+              <a:t>measure</a:t>
+            </a:r>
+            <a:endParaRPr lang="en-US" sz="850" dirty="0"/>
+          </a:p>
+        </p:txBody>
+      </p:sp>
+      <p:sp>
+        <p:nvSpPr>
+          <p:cNvPr id="13" name="Shape 11"/>
           <p:cNvSpPr/>
           <p:nvPr/>
         </p:nvSpPr>
@@ -28488,7 +30223,7 @@
       </p:sp>
       <p:sp>
         <p:nvSpPr>
-          <p:cNvPr id="12" name="Shape 10"/>
+          <p:cNvPr id="14" name="Shape 12"/>
           <p:cNvSpPr/>
           <p:nvPr/>
         </p:nvSpPr>
@@ -28515,7 +30250,7 @@
       </p:sp>
       <p:sp>
         <p:nvSpPr>
-          <p:cNvPr id="13" name="Text 11"/>
+          <p:cNvPr id="15" name="Text 13"/>
           <p:cNvSpPr/>
           <p:nvPr/>
         </p:nvSpPr>
@@ -28572,7 +30307,46 @@
       </p:sp>
       <p:sp>
         <p:nvSpPr>
-          <p:cNvPr id="14" name="Shape 12"/>
+          <p:cNvPr id="16" name="Text 14"/>
+          <p:cNvSpPr/>
+          <p:nvPr/>
+        </p:nvSpPr>
+        <p:spPr>
+          <a:xfrm>
+            <a:off x="3282696" y="5038344"/>
+            <a:ext cx="1188720" cy="201168"/>
+          </a:xfrm>
+          <a:prstGeom prst="rect">
+            <a:avLst/>
+          </a:prstGeom>
+          <a:noFill/>
+          <a:ln/>
+        </p:spPr>
+        <p:txBody>
+          <a:bodyPr wrap="square" lIns="0" tIns="0" rIns="0" bIns="0" rtlCol="0" anchor="ctr"/>
+          <a:lstStyle/>
+          <a:p>
+            <a:pPr algn="ctr" indent="0" marL="0">
+              <a:buNone/>
+            </a:pPr>
+            <a:r>
+              <a:rPr lang="en-US" sz="850" i="1" dirty="0">
+                <a:solidFill>
+                  <a:srgbClr val="7F7F7F"/>
+                </a:solidFill>
+                <a:latin typeface="Arial" pitchFamily="34" charset="0"/>
+                <a:ea typeface="Arial" pitchFamily="34" charset="-122"/>
+                <a:cs typeface="Arial" pitchFamily="34" charset="-120"/>
+              </a:rPr>
+              <a:t>learn</a:t>
+            </a:r>
+            <a:endParaRPr lang="en-US" sz="850" dirty="0"/>
+          </a:p>
+        </p:txBody>
+      </p:sp>
+      <p:sp>
+        <p:nvSpPr>
+          <p:cNvPr id="17" name="Shape 15"/>
           <p:cNvSpPr/>
           <p:nvPr/>
         </p:nvSpPr>
@@ -28596,7 +30370,7 @@
       </p:sp>
       <p:sp>
         <p:nvSpPr>
-          <p:cNvPr id="15" name="Shape 13"/>
+          <p:cNvPr id="18" name="Shape 16"/>
           <p:cNvSpPr/>
           <p:nvPr/>
         </p:nvSpPr>
@@ -28623,7 +30397,7 @@
       </p:sp>
       <p:sp>
         <p:nvSpPr>
-          <p:cNvPr id="16" name="Text 14"/>
+          <p:cNvPr id="19" name="Text 17"/>
           <p:cNvSpPr/>
           <p:nvPr/>
         </p:nvSpPr>
@@ -28680,7 +30454,46 @@
       </p:sp>
       <p:sp>
         <p:nvSpPr>
-          <p:cNvPr id="17" name="Shape 15"/>
+          <p:cNvPr id="20" name="Text 18"/>
+          <p:cNvSpPr/>
+          <p:nvPr/>
+        </p:nvSpPr>
+        <p:spPr>
+          <a:xfrm>
+            <a:off x="4672584" y="5038344"/>
+            <a:ext cx="1188720" cy="201168"/>
+          </a:xfrm>
+          <a:prstGeom prst="rect">
+            <a:avLst/>
+          </a:prstGeom>
+          <a:noFill/>
+          <a:ln/>
+        </p:spPr>
+        <p:txBody>
+          <a:bodyPr wrap="square" lIns="0" tIns="0" rIns="0" bIns="0" rtlCol="0" anchor="ctr"/>
+          <a:lstStyle/>
+          <a:p>
+            <a:pPr algn="ctr" indent="0" marL="0">
+              <a:buNone/>
+            </a:pPr>
+            <a:r>
+              <a:rPr lang="en-US" sz="850" i="1" dirty="0">
+                <a:solidFill>
+                  <a:srgbClr val="7F7F7F"/>
+                </a:solidFill>
+                <a:latin typeface="Arial" pitchFamily="34" charset="0"/>
+                <a:ea typeface="Arial" pitchFamily="34" charset="-122"/>
+                <a:cs typeface="Arial" pitchFamily="34" charset="-120"/>
+              </a:rPr>
+              <a:t>gate</a:t>
+            </a:r>
+            <a:endParaRPr lang="en-US" sz="850" dirty="0"/>
+          </a:p>
+        </p:txBody>
+      </p:sp>
+      <p:sp>
+        <p:nvSpPr>
+          <p:cNvPr id="21" name="Shape 19"/>
           <p:cNvSpPr/>
           <p:nvPr/>
         </p:nvSpPr>
@@ -28704,7 +30517,7 @@
       </p:sp>
       <p:sp>
         <p:nvSpPr>
-          <p:cNvPr id="18" name="Shape 16"/>
+          <p:cNvPr id="22" name="Shape 20"/>
           <p:cNvSpPr/>
           <p:nvPr/>
         </p:nvSpPr>
@@ -28731,7 +30544,7 @@
       </p:sp>
       <p:sp>
         <p:nvSpPr>
-          <p:cNvPr id="19" name="Text 17"/>
+          <p:cNvPr id="23" name="Text 21"/>
           <p:cNvSpPr/>
           <p:nvPr/>
         </p:nvSpPr>
@@ -28788,7 +30601,46 @@
       </p:sp>
       <p:sp>
         <p:nvSpPr>
-          <p:cNvPr id="20" name="Shape 18"/>
+          <p:cNvPr id="24" name="Text 22"/>
+          <p:cNvSpPr/>
+          <p:nvPr/>
+        </p:nvSpPr>
+        <p:spPr>
+          <a:xfrm>
+            <a:off x="6062472" y="5038344"/>
+            <a:ext cx="1188720" cy="201168"/>
+          </a:xfrm>
+          <a:prstGeom prst="rect">
+            <a:avLst/>
+          </a:prstGeom>
+          <a:noFill/>
+          <a:ln/>
+        </p:spPr>
+        <p:txBody>
+          <a:bodyPr wrap="square" lIns="0" tIns="0" rIns="0" bIns="0" rtlCol="0" anchor="ctr"/>
+          <a:lstStyle/>
+          <a:p>
+            <a:pPr algn="ctr" indent="0" marL="0">
+              <a:buNone/>
+            </a:pPr>
+            <a:r>
+              <a:rPr lang="en-US" sz="850" i="1" dirty="0">
+                <a:solidFill>
+                  <a:srgbClr val="7F7F7F"/>
+                </a:solidFill>
+                <a:latin typeface="Arial" pitchFamily="34" charset="0"/>
+                <a:ea typeface="Arial" pitchFamily="34" charset="-122"/>
+                <a:cs typeface="Arial" pitchFamily="34" charset="-120"/>
+              </a:rPr>
+              <a:t>combine</a:t>
+            </a:r>
+            <a:endParaRPr lang="en-US" sz="850" dirty="0"/>
+          </a:p>
+        </p:txBody>
+      </p:sp>
+      <p:sp>
+        <p:nvSpPr>
+          <p:cNvPr id="25" name="Shape 23"/>
           <p:cNvSpPr/>
           <p:nvPr/>
         </p:nvSpPr>
@@ -28812,7 +30664,7 @@
       </p:sp>
       <p:sp>
         <p:nvSpPr>
-          <p:cNvPr id="21" name="Shape 19"/>
+          <p:cNvPr id="26" name="Shape 24"/>
           <p:cNvSpPr/>
           <p:nvPr/>
         </p:nvSpPr>
@@ -28839,7 +30691,7 @@
       </p:sp>
       <p:sp>
         <p:nvSpPr>
-          <p:cNvPr id="22" name="Text 20"/>
+          <p:cNvPr id="27" name="Text 25"/>
           <p:cNvSpPr/>
           <p:nvPr/>
         </p:nvSpPr>
@@ -28888,7 +30740,7 @@
                 <a:ea typeface="Arial" pitchFamily="34" charset="-122"/>
                 <a:cs typeface="Arial" pitchFamily="34" charset="-120"/>
               </a:rPr>
-              <a:t>11 retractions</a:t>
+              <a:t>11 audited verdicts</a:t>
             </a:r>
             <a:endParaRPr lang="en-US" sz="1000" dirty="0"/>
           </a:p>
@@ -28896,7 +30748,46 @@
       </p:sp>
       <p:sp>
         <p:nvSpPr>
-          <p:cNvPr id="23" name="Shape 21"/>
+          <p:cNvPr id="28" name="Text 26"/>
+          <p:cNvSpPr/>
+          <p:nvPr/>
+        </p:nvSpPr>
+        <p:spPr>
+          <a:xfrm>
+            <a:off x="7452360" y="5038344"/>
+            <a:ext cx="1188720" cy="201168"/>
+          </a:xfrm>
+          <a:prstGeom prst="rect">
+            <a:avLst/>
+          </a:prstGeom>
+          <a:noFill/>
+          <a:ln/>
+        </p:spPr>
+        <p:txBody>
+          <a:bodyPr wrap="square" lIns="0" tIns="0" rIns="0" bIns="0" rtlCol="0" anchor="ctr"/>
+          <a:lstStyle/>
+          <a:p>
+            <a:pPr algn="ctr" indent="0" marL="0">
+              <a:buNone/>
+            </a:pPr>
+            <a:r>
+              <a:rPr lang="en-US" sz="850" i="1" dirty="0">
+                <a:solidFill>
+                  <a:srgbClr val="7F7F7F"/>
+                </a:solidFill>
+                <a:latin typeface="Arial" pitchFamily="34" charset="0"/>
+                <a:ea typeface="Arial" pitchFamily="34" charset="-122"/>
+                <a:cs typeface="Arial" pitchFamily="34" charset="-120"/>
+              </a:rPr>
+              <a:t>doubt</a:t>
+            </a:r>
+            <a:endParaRPr lang="en-US" sz="850" dirty="0"/>
+          </a:p>
+        </p:txBody>
+      </p:sp>
+      <p:sp>
+        <p:nvSpPr>
+          <p:cNvPr id="29" name="Shape 27"/>
           <p:cNvSpPr/>
           <p:nvPr/>
         </p:nvSpPr>
@@ -28920,7 +30811,7 @@
       </p:sp>
       <p:sp>
         <p:nvSpPr>
-          <p:cNvPr id="24" name="Shape 22"/>
+          <p:cNvPr id="30" name="Shape 28"/>
           <p:cNvSpPr/>
           <p:nvPr/>
         </p:nvSpPr>
@@ -28943,7 +30834,7 @@
       </p:sp>
       <p:sp>
         <p:nvSpPr>
-          <p:cNvPr id="25" name="Shape 23"/>
+          <p:cNvPr id="31" name="Shape 29"/>
           <p:cNvSpPr/>
           <p:nvPr/>
         </p:nvSpPr>
@@ -28966,7 +30857,7 @@
       </p:sp>
       <p:sp>
         <p:nvSpPr>
-          <p:cNvPr id="26" name="Text 24"/>
+          <p:cNvPr id="32" name="Text 30"/>
           <p:cNvSpPr/>
           <p:nvPr/>
         </p:nvSpPr>
@@ -29005,7 +30896,7 @@
       </p:sp>
       <p:sp>
         <p:nvSpPr>
-          <p:cNvPr id="27" name="Shape 25"/>
+          <p:cNvPr id="33" name="Shape 31"/>
           <p:cNvSpPr/>
           <p:nvPr/>
         </p:nvSpPr>
@@ -29029,7 +30920,7 @@
       </p:sp>
       <p:sp>
         <p:nvSpPr>
-          <p:cNvPr id="28" name="Shape 26"/>
+          <p:cNvPr id="34" name="Shape 32"/>
           <p:cNvSpPr/>
           <p:nvPr/>
         </p:nvSpPr>
@@ -29052,7 +30943,7 @@
       </p:sp>
       <p:sp>
         <p:nvSpPr>
-          <p:cNvPr id="29" name="Shape 27"/>
+          <p:cNvPr id="35" name="Shape 33"/>
           <p:cNvSpPr/>
           <p:nvPr/>
         </p:nvSpPr>
@@ -29075,7 +30966,7 @@
       </p:sp>
       <p:sp>
         <p:nvSpPr>
-          <p:cNvPr id="30" name="Text 28"/>
+          <p:cNvPr id="36" name="Text 34"/>
           <p:cNvSpPr/>
           <p:nvPr/>
         </p:nvSpPr>
@@ -29114,7 +31005,7 @@
       </p:sp>
       <p:sp>
         <p:nvSpPr>
-          <p:cNvPr id="31" name="Text 29"/>
+          <p:cNvPr id="37" name="Text 35"/>
           <p:cNvSpPr/>
           <p:nvPr/>
         </p:nvSpPr>
@@ -29167,7 +31058,7 @@
       </p:sp>
       <p:sp>
         <p:nvSpPr>
-          <p:cNvPr id="32" name="Text 30"/>
+          <p:cNvPr id="38" name="Text 36"/>
           <p:cNvSpPr/>
           <p:nvPr/>
         </p:nvSpPr>
@@ -29509,7 +31400,7 @@
                 <a:ea typeface="Arial" pitchFamily="34" charset="-122"/>
                 <a:cs typeface="Arial" pitchFamily="34" charset="-120"/>
               </a:rPr>
-              <a:t>The 4 canonical gaps (2.066 / 2.099 / 1.9671 / 2.2309 eV): values match the canon files — but the runs that produced them cannot be located</a:t>
+              <a:t>The 4 canonical gaps (2.066 / 2.099 / 1.967 / 2.231 eV): values match the canon files — but the runs that produced them cannot be located</a:t>
             </a:r>
             <a:endParaRPr lang="en-US" sz="1050" dirty="0"/>
           </a:p>
@@ -29965,7 +31856,46 @@
       </p:sp>
       <p:sp>
         <p:nvSpPr>
-          <p:cNvPr id="8" name="Shape 6"/>
+          <p:cNvPr id="8" name="Text 6"/>
+          <p:cNvSpPr/>
+          <p:nvPr/>
+        </p:nvSpPr>
+        <p:spPr>
+          <a:xfrm>
+            <a:off x="502920" y="5038344"/>
+            <a:ext cx="1188720" cy="201168"/>
+          </a:xfrm>
+          <a:prstGeom prst="rect">
+            <a:avLst/>
+          </a:prstGeom>
+          <a:noFill/>
+          <a:ln/>
+        </p:spPr>
+        <p:txBody>
+          <a:bodyPr wrap="square" lIns="0" tIns="0" rIns="0" bIns="0" rtlCol="0" anchor="ctr"/>
+          <a:lstStyle/>
+          <a:p>
+            <a:pPr algn="ctr" indent="0" marL="0">
+              <a:buNone/>
+            </a:pPr>
+            <a:r>
+              <a:rPr lang="en-US" sz="850" i="1" dirty="0">
+                <a:solidFill>
+                  <a:srgbClr val="7F7F7F"/>
+                </a:solidFill>
+                <a:latin typeface="Arial" pitchFamily="34" charset="0"/>
+                <a:ea typeface="Arial" pitchFamily="34" charset="-122"/>
+                <a:cs typeface="Arial" pitchFamily="34" charset="-120"/>
+              </a:rPr>
+              <a:t>ask</a:t>
+            </a:r>
+            <a:endParaRPr lang="en-US" sz="850" dirty="0"/>
+          </a:p>
+        </p:txBody>
+      </p:sp>
+      <p:sp>
+        <p:nvSpPr>
+          <p:cNvPr id="9" name="Shape 7"/>
           <p:cNvSpPr/>
           <p:nvPr/>
         </p:nvSpPr>
@@ -29989,7 +31919,7 @@
       </p:sp>
       <p:sp>
         <p:nvSpPr>
-          <p:cNvPr id="9" name="Shape 7"/>
+          <p:cNvPr id="10" name="Shape 8"/>
           <p:cNvSpPr/>
           <p:nvPr/>
         </p:nvSpPr>
@@ -30016,7 +31946,7 @@
       </p:sp>
       <p:sp>
         <p:nvSpPr>
-          <p:cNvPr id="10" name="Text 8"/>
+          <p:cNvPr id="11" name="Text 9"/>
           <p:cNvSpPr/>
           <p:nvPr/>
         </p:nvSpPr>
@@ -30073,7 +32003,46 @@
       </p:sp>
       <p:sp>
         <p:nvSpPr>
-          <p:cNvPr id="11" name="Shape 9"/>
+          <p:cNvPr id="12" name="Text 10"/>
+          <p:cNvSpPr/>
+          <p:nvPr/>
+        </p:nvSpPr>
+        <p:spPr>
+          <a:xfrm>
+            <a:off x="1892808" y="5038344"/>
+            <a:ext cx="1188720" cy="201168"/>
+          </a:xfrm>
+          <a:prstGeom prst="rect">
+            <a:avLst/>
+          </a:prstGeom>
+          <a:noFill/>
+          <a:ln/>
+        </p:spPr>
+        <p:txBody>
+          <a:bodyPr wrap="square" lIns="0" tIns="0" rIns="0" bIns="0" rtlCol="0" anchor="ctr"/>
+          <a:lstStyle/>
+          <a:p>
+            <a:pPr algn="ctr" indent="0" marL="0">
+              <a:buNone/>
+            </a:pPr>
+            <a:r>
+              <a:rPr lang="en-US" sz="850" i="1" dirty="0">
+                <a:solidFill>
+                  <a:srgbClr val="7F7F7F"/>
+                </a:solidFill>
+                <a:latin typeface="Arial" pitchFamily="34" charset="0"/>
+                <a:ea typeface="Arial" pitchFamily="34" charset="-122"/>
+                <a:cs typeface="Arial" pitchFamily="34" charset="-120"/>
+              </a:rPr>
+              <a:t>measure</a:t>
+            </a:r>
+            <a:endParaRPr lang="en-US" sz="850" dirty="0"/>
+          </a:p>
+        </p:txBody>
+      </p:sp>
+      <p:sp>
+        <p:nvSpPr>
+          <p:cNvPr id="13" name="Shape 11"/>
           <p:cNvSpPr/>
           <p:nvPr/>
         </p:nvSpPr>
@@ -30097,7 +32066,7 @@
       </p:sp>
       <p:sp>
         <p:nvSpPr>
-          <p:cNvPr id="12" name="Shape 10"/>
+          <p:cNvPr id="14" name="Shape 12"/>
           <p:cNvSpPr/>
           <p:nvPr/>
         </p:nvSpPr>
@@ -30124,7 +32093,7 @@
       </p:sp>
       <p:sp>
         <p:nvSpPr>
-          <p:cNvPr id="13" name="Text 11"/>
+          <p:cNvPr id="15" name="Text 13"/>
           <p:cNvSpPr/>
           <p:nvPr/>
         </p:nvSpPr>
@@ -30181,7 +32150,46 @@
       </p:sp>
       <p:sp>
         <p:nvSpPr>
-          <p:cNvPr id="14" name="Shape 12"/>
+          <p:cNvPr id="16" name="Text 14"/>
+          <p:cNvSpPr/>
+          <p:nvPr/>
+        </p:nvSpPr>
+        <p:spPr>
+          <a:xfrm>
+            <a:off x="3282696" y="5038344"/>
+            <a:ext cx="1188720" cy="201168"/>
+          </a:xfrm>
+          <a:prstGeom prst="rect">
+            <a:avLst/>
+          </a:prstGeom>
+          <a:noFill/>
+          <a:ln/>
+        </p:spPr>
+        <p:txBody>
+          <a:bodyPr wrap="square" lIns="0" tIns="0" rIns="0" bIns="0" rtlCol="0" anchor="ctr"/>
+          <a:lstStyle/>
+          <a:p>
+            <a:pPr algn="ctr" indent="0" marL="0">
+              <a:buNone/>
+            </a:pPr>
+            <a:r>
+              <a:rPr lang="en-US" sz="850" i="1" dirty="0">
+                <a:solidFill>
+                  <a:srgbClr val="7F7F7F"/>
+                </a:solidFill>
+                <a:latin typeface="Arial" pitchFamily="34" charset="0"/>
+                <a:ea typeface="Arial" pitchFamily="34" charset="-122"/>
+                <a:cs typeface="Arial" pitchFamily="34" charset="-120"/>
+              </a:rPr>
+              <a:t>learn</a:t>
+            </a:r>
+            <a:endParaRPr lang="en-US" sz="850" dirty="0"/>
+          </a:p>
+        </p:txBody>
+      </p:sp>
+      <p:sp>
+        <p:nvSpPr>
+          <p:cNvPr id="17" name="Shape 15"/>
           <p:cNvSpPr/>
           <p:nvPr/>
         </p:nvSpPr>
@@ -30205,7 +32213,7 @@
       </p:sp>
       <p:sp>
         <p:nvSpPr>
-          <p:cNvPr id="15" name="Shape 13"/>
+          <p:cNvPr id="18" name="Shape 16"/>
           <p:cNvSpPr/>
           <p:nvPr/>
         </p:nvSpPr>
@@ -30232,7 +32240,7 @@
       </p:sp>
       <p:sp>
         <p:nvSpPr>
-          <p:cNvPr id="16" name="Text 14"/>
+          <p:cNvPr id="19" name="Text 17"/>
           <p:cNvSpPr/>
           <p:nvPr/>
         </p:nvSpPr>
@@ -30289,7 +32297,46 @@
       </p:sp>
       <p:sp>
         <p:nvSpPr>
-          <p:cNvPr id="17" name="Shape 15"/>
+          <p:cNvPr id="20" name="Text 18"/>
+          <p:cNvSpPr/>
+          <p:nvPr/>
+        </p:nvSpPr>
+        <p:spPr>
+          <a:xfrm>
+            <a:off x="4672584" y="5038344"/>
+            <a:ext cx="1188720" cy="201168"/>
+          </a:xfrm>
+          <a:prstGeom prst="rect">
+            <a:avLst/>
+          </a:prstGeom>
+          <a:noFill/>
+          <a:ln/>
+        </p:spPr>
+        <p:txBody>
+          <a:bodyPr wrap="square" lIns="0" tIns="0" rIns="0" bIns="0" rtlCol="0" anchor="ctr"/>
+          <a:lstStyle/>
+          <a:p>
+            <a:pPr algn="ctr" indent="0" marL="0">
+              <a:buNone/>
+            </a:pPr>
+            <a:r>
+              <a:rPr lang="en-US" sz="850" i="1" dirty="0">
+                <a:solidFill>
+                  <a:srgbClr val="7F7F7F"/>
+                </a:solidFill>
+                <a:latin typeface="Arial" pitchFamily="34" charset="0"/>
+                <a:ea typeface="Arial" pitchFamily="34" charset="-122"/>
+                <a:cs typeface="Arial" pitchFamily="34" charset="-120"/>
+              </a:rPr>
+              <a:t>gate</a:t>
+            </a:r>
+            <a:endParaRPr lang="en-US" sz="850" dirty="0"/>
+          </a:p>
+        </p:txBody>
+      </p:sp>
+      <p:sp>
+        <p:nvSpPr>
+          <p:cNvPr id="21" name="Shape 19"/>
           <p:cNvSpPr/>
           <p:nvPr/>
         </p:nvSpPr>
@@ -30313,7 +32360,7 @@
       </p:sp>
       <p:sp>
         <p:nvSpPr>
-          <p:cNvPr id="18" name="Shape 16"/>
+          <p:cNvPr id="22" name="Shape 20"/>
           <p:cNvSpPr/>
           <p:nvPr/>
         </p:nvSpPr>
@@ -30340,7 +32387,7 @@
       </p:sp>
       <p:sp>
         <p:nvSpPr>
-          <p:cNvPr id="19" name="Text 17"/>
+          <p:cNvPr id="23" name="Text 21"/>
           <p:cNvSpPr/>
           <p:nvPr/>
         </p:nvSpPr>
@@ -30397,7 +32444,46 @@
       </p:sp>
       <p:sp>
         <p:nvSpPr>
-          <p:cNvPr id="20" name="Shape 18"/>
+          <p:cNvPr id="24" name="Text 22"/>
+          <p:cNvSpPr/>
+          <p:nvPr/>
+        </p:nvSpPr>
+        <p:spPr>
+          <a:xfrm>
+            <a:off x="6062472" y="5038344"/>
+            <a:ext cx="1188720" cy="201168"/>
+          </a:xfrm>
+          <a:prstGeom prst="rect">
+            <a:avLst/>
+          </a:prstGeom>
+          <a:noFill/>
+          <a:ln/>
+        </p:spPr>
+        <p:txBody>
+          <a:bodyPr wrap="square" lIns="0" tIns="0" rIns="0" bIns="0" rtlCol="0" anchor="ctr"/>
+          <a:lstStyle/>
+          <a:p>
+            <a:pPr algn="ctr" indent="0" marL="0">
+              <a:buNone/>
+            </a:pPr>
+            <a:r>
+              <a:rPr lang="en-US" sz="850" i="1" dirty="0">
+                <a:solidFill>
+                  <a:srgbClr val="7F7F7F"/>
+                </a:solidFill>
+                <a:latin typeface="Arial" pitchFamily="34" charset="0"/>
+                <a:ea typeface="Arial" pitchFamily="34" charset="-122"/>
+                <a:cs typeface="Arial" pitchFamily="34" charset="-120"/>
+              </a:rPr>
+              <a:t>combine</a:t>
+            </a:r>
+            <a:endParaRPr lang="en-US" sz="850" dirty="0"/>
+          </a:p>
+        </p:txBody>
+      </p:sp>
+      <p:sp>
+        <p:nvSpPr>
+          <p:cNvPr id="25" name="Shape 23"/>
           <p:cNvSpPr/>
           <p:nvPr/>
         </p:nvSpPr>
@@ -30421,7 +32507,7 @@
       </p:sp>
       <p:sp>
         <p:nvSpPr>
-          <p:cNvPr id="21" name="Shape 19"/>
+          <p:cNvPr id="26" name="Shape 24"/>
           <p:cNvSpPr/>
           <p:nvPr/>
         </p:nvSpPr>
@@ -30448,7 +32534,7 @@
       </p:sp>
       <p:sp>
         <p:nvSpPr>
-          <p:cNvPr id="22" name="Text 20"/>
+          <p:cNvPr id="27" name="Text 25"/>
           <p:cNvSpPr/>
           <p:nvPr/>
         </p:nvSpPr>
@@ -30497,7 +32583,7 @@
                 <a:ea typeface="Arial" pitchFamily="34" charset="-122"/>
                 <a:cs typeface="Arial" pitchFamily="34" charset="-120"/>
               </a:rPr>
-              <a:t>11 retractions</a:t>
+              <a:t>11 audited verdicts</a:t>
             </a:r>
             <a:endParaRPr lang="en-US" sz="1000" dirty="0"/>
           </a:p>
@@ -30505,7 +32591,46 @@
       </p:sp>
       <p:sp>
         <p:nvSpPr>
-          <p:cNvPr id="23" name="Shape 21"/>
+          <p:cNvPr id="28" name="Text 26"/>
+          <p:cNvSpPr/>
+          <p:nvPr/>
+        </p:nvSpPr>
+        <p:spPr>
+          <a:xfrm>
+            <a:off x="7452360" y="5038344"/>
+            <a:ext cx="1188720" cy="201168"/>
+          </a:xfrm>
+          <a:prstGeom prst="rect">
+            <a:avLst/>
+          </a:prstGeom>
+          <a:noFill/>
+          <a:ln/>
+        </p:spPr>
+        <p:txBody>
+          <a:bodyPr wrap="square" lIns="0" tIns="0" rIns="0" bIns="0" rtlCol="0" anchor="ctr"/>
+          <a:lstStyle/>
+          <a:p>
+            <a:pPr algn="ctr" indent="0" marL="0">
+              <a:buNone/>
+            </a:pPr>
+            <a:r>
+              <a:rPr lang="en-US" sz="850" b="1" i="1" dirty="0">
+                <a:solidFill>
+                  <a:srgbClr val="9E2A2B"/>
+                </a:solidFill>
+                <a:latin typeface="Arial" pitchFamily="34" charset="0"/>
+                <a:ea typeface="Arial" pitchFamily="34" charset="-122"/>
+                <a:cs typeface="Arial" pitchFamily="34" charset="-120"/>
+              </a:rPr>
+              <a:t>doubt</a:t>
+            </a:r>
+            <a:endParaRPr lang="en-US" sz="850" dirty="0"/>
+          </a:p>
+        </p:txBody>
+      </p:sp>
+      <p:sp>
+        <p:nvSpPr>
+          <p:cNvPr id="29" name="Shape 27"/>
           <p:cNvSpPr/>
           <p:nvPr/>
         </p:nvSpPr>
@@ -30529,7 +32654,7 @@
       </p:sp>
       <p:sp>
         <p:nvSpPr>
-          <p:cNvPr id="24" name="Shape 22"/>
+          <p:cNvPr id="30" name="Shape 28"/>
           <p:cNvSpPr/>
           <p:nvPr/>
         </p:nvSpPr>
@@ -30552,7 +32677,7 @@
       </p:sp>
       <p:sp>
         <p:nvSpPr>
-          <p:cNvPr id="25" name="Shape 23"/>
+          <p:cNvPr id="31" name="Shape 29"/>
           <p:cNvSpPr/>
           <p:nvPr/>
         </p:nvSpPr>
@@ -30575,7 +32700,7 @@
       </p:sp>
       <p:sp>
         <p:nvSpPr>
-          <p:cNvPr id="26" name="Text 24"/>
+          <p:cNvPr id="32" name="Text 30"/>
           <p:cNvSpPr/>
           <p:nvPr/>
         </p:nvSpPr>
@@ -30614,7 +32739,7 @@
       </p:sp>
       <p:sp>
         <p:nvSpPr>
-          <p:cNvPr id="27" name="Shape 25"/>
+          <p:cNvPr id="33" name="Shape 31"/>
           <p:cNvSpPr/>
           <p:nvPr/>
         </p:nvSpPr>
@@ -30638,7 +32763,7 @@
       </p:sp>
       <p:sp>
         <p:nvSpPr>
-          <p:cNvPr id="28" name="Shape 26"/>
+          <p:cNvPr id="34" name="Shape 32"/>
           <p:cNvSpPr/>
           <p:nvPr/>
         </p:nvSpPr>
@@ -30661,7 +32786,7 @@
       </p:sp>
       <p:sp>
         <p:nvSpPr>
-          <p:cNvPr id="29" name="Shape 27"/>
+          <p:cNvPr id="35" name="Shape 33"/>
           <p:cNvSpPr/>
           <p:nvPr/>
         </p:nvSpPr>
@@ -30684,7 +32809,7 @@
       </p:sp>
       <p:sp>
         <p:nvSpPr>
-          <p:cNvPr id="30" name="Text 28"/>
+          <p:cNvPr id="36" name="Text 34"/>
           <p:cNvSpPr/>
           <p:nvPr/>
         </p:nvSpPr>
@@ -30723,7 +32848,7 @@
       </p:sp>
       <p:sp>
         <p:nvSpPr>
-          <p:cNvPr id="31" name="Text 29"/>
+          <p:cNvPr id="37" name="Text 35"/>
           <p:cNvSpPr/>
           <p:nvPr/>
         </p:nvSpPr>
@@ -30776,7 +32901,7 @@
       </p:sp>
       <p:sp>
         <p:nvSpPr>
-          <p:cNvPr id="32" name="Text 30"/>
+          <p:cNvPr id="38" name="Text 36"/>
           <p:cNvSpPr/>
           <p:nvPr/>
         </p:nvSpPr>
@@ -31186,7 +33311,7 @@
                           <a:ea typeface="Arial" pitchFamily="34" charset="-122"/>
                           <a:cs typeface="Arial" pitchFamily="34" charset="-120"/>
                         </a:rPr>
-                        <a:t>done — drives axis design</a:t>
+                        <a:t>confirmed in-house (consistent with literature) — drives axis design</a:t>
                       </a:r>
                       <a:endParaRPr lang="en-US" sz="1050" dirty="0">
                         <a:latin typeface="Arial" charset="0"/>
@@ -31318,7 +33443,7 @@
                           <a:ea typeface="Arial" pitchFamily="34" charset="-122"/>
                           <a:cs typeface="Arial" pitchFamily="34" charset="-120"/>
                         </a:rPr>
-                        <a:t>live (web app + registry)</a:t>
+                        <a:t>complete — 273/273 calcs; ranking live (web app + registry)</a:t>
                       </a:r>
                       <a:endParaRPr lang="en-US" sz="1050" dirty="0">
                         <a:latin typeface="Arial" charset="0"/>
@@ -31450,7 +33575,7 @@
                           <a:ea typeface="Arial" pitchFamily="34" charset="-122"/>
                           <a:cs typeface="Arial" pitchFamily="34" charset="-120"/>
                         </a:rPr>
-                        <a:t>hypotheses; labels queued</a:t>
+                        <a:t>hypotheses; supercell labels queued (dose-grid design fixed)</a:t>
                       </a:r>
                       <a:endParaRPr lang="en-US" sz="1050" dirty="0">
                         <a:latin typeface="Arial" charset="0"/>
@@ -31517,7 +33642,7 @@
                           <a:ea typeface="Arial" pitchFamily="34" charset="-122"/>
                           <a:cs typeface="Arial" pitchFamily="34" charset="-120"/>
                         </a:rPr>
-                        <a:t>SEI phases: 6 citable gaps + Li₂S NEB 0.272 eV</a:t>
+                        <a:t>SEI phases: 6 citable gaps + Li₂S NEB converged (0.27 eV, fwd = bwd)</a:t>
                       </a:r>
                       <a:endParaRPr lang="en-US" sz="1050" dirty="0">
                         <a:latin typeface="Arial" charset="0"/>
@@ -31582,7 +33707,7 @@
                           <a:ea typeface="Arial" pitchFamily="34" charset="-122"/>
                           <a:cs typeface="Arial" pitchFamily="34" charset="-120"/>
                         </a:rPr>
-                        <a:t>registered / running</a:t>
+                        <a:t>gaps in db; NEB registration syncing (cell-size caveat)</a:t>
                       </a:r>
                       <a:endParaRPr lang="en-US" sz="1050" dirty="0">
                         <a:latin typeface="Arial" charset="0"/>
@@ -31946,7 +34071,7 @@
               <a:buNone/>
             </a:pPr>
             <a:r>
-              <a:rPr lang="en-US" sz="1500" b="1" dirty="0">
+              <a:rPr lang="en-US" sz="1450" b="1" dirty="0">
                 <a:solidFill>
                   <a:srgbClr val="FFFFFF"/>
                 </a:solidFill>
@@ -31954,9 +34079,9 @@
                 <a:ea typeface="Arial" pitchFamily="34" charset="-122"/>
                 <a:cs typeface="Arial" pitchFamily="34" charset="-120"/>
               </a:rPr>
-              <a:t>Screening is only as good as its gates — ours caught 11 of our own verdicts, one of them twice.</a:t>
-            </a:r>
-            <a:endParaRPr lang="en-US" sz="1500" dirty="0"/>
+              <a:t>Screening is only as good as its gates — ours audited 11 of our own verdicts, retracted 9, one of them twice.</a:t>
+            </a:r>
+            <a:endParaRPr lang="en-US" sz="1450" dirty="0"/>
           </a:p>
         </p:txBody>
       </p:sp>
@@ -32342,7 +34467,7 @@
                 <a:ea typeface="Arial" pitchFamily="34" charset="-122"/>
                 <a:cs typeface="Arial" pitchFamily="34" charset="-120"/>
               </a:rPr>
-              <a:t>SEI NEB finish: Li₃P, Li₃PO₄γ  (Li₂S 0.272 eV done)</a:t>
+              <a:t>SEI NEB finish: Li₃P, Li₃PO₄γ  (Li₂S converged — 0.27 eV, cell-size caveat)</a:t>
             </a:r>
             <a:endParaRPr lang="en-US" sz="1050" dirty="0"/>
           </a:p>
@@ -32384,7 +34509,7 @@
                 <a:ea typeface="Arial" pitchFamily="34" charset="-122"/>
                 <a:cs typeface="Arial" pitchFamily="34" charset="-120"/>
               </a:rPr>
-              <a:t>β-gate rescue: comp1 2×2×2 cell (Li 24→192) · 6-point Arrhenius 500–1000 K</a:t>
+              <a:t>β-gate rescue: comp1 2×2×2 cell (Li 24→192) · Arrhenius extension 700/900 K first (500 K after feasibility)</a:t>
             </a:r>
             <a:endParaRPr lang="en-US" sz="1050" dirty="0"/>
           </a:p>
@@ -33190,7 +35315,46 @@
       </p:sp>
       <p:sp>
         <p:nvSpPr>
-          <p:cNvPr id="16" name="Shape 14"/>
+          <p:cNvPr id="16" name="Text 14"/>
+          <p:cNvSpPr/>
+          <p:nvPr/>
+        </p:nvSpPr>
+        <p:spPr>
+          <a:xfrm>
+            <a:off x="502920" y="4809744"/>
+            <a:ext cx="1188720" cy="201168"/>
+          </a:xfrm>
+          <a:prstGeom prst="rect">
+            <a:avLst/>
+          </a:prstGeom>
+          <a:noFill/>
+          <a:ln/>
+        </p:spPr>
+        <p:txBody>
+          <a:bodyPr wrap="square" lIns="0" tIns="0" rIns="0" bIns="0" rtlCol="0" anchor="ctr"/>
+          <a:lstStyle/>
+          <a:p>
+            <a:pPr algn="ctr" indent="0" marL="0">
+              <a:buNone/>
+            </a:pPr>
+            <a:r>
+              <a:rPr lang="en-US" sz="850" i="1" dirty="0">
+                <a:solidFill>
+                  <a:srgbClr val="7F7F7F"/>
+                </a:solidFill>
+                <a:latin typeface="Arial" pitchFamily="34" charset="0"/>
+                <a:ea typeface="Arial" pitchFamily="34" charset="-122"/>
+                <a:cs typeface="Arial" pitchFamily="34" charset="-120"/>
+              </a:rPr>
+              <a:t>ask</a:t>
+            </a:r>
+            <a:endParaRPr lang="en-US" sz="850" dirty="0"/>
+          </a:p>
+        </p:txBody>
+      </p:sp>
+      <p:sp>
+        <p:nvSpPr>
+          <p:cNvPr id="17" name="Shape 15"/>
           <p:cNvSpPr/>
           <p:nvPr/>
         </p:nvSpPr>
@@ -33214,7 +35378,7 @@
       </p:sp>
       <p:sp>
         <p:nvSpPr>
-          <p:cNvPr id="17" name="Shape 15"/>
+          <p:cNvPr id="18" name="Shape 16"/>
           <p:cNvSpPr/>
           <p:nvPr/>
         </p:nvSpPr>
@@ -33241,7 +35405,7 @@
       </p:sp>
       <p:sp>
         <p:nvSpPr>
-          <p:cNvPr id="18" name="Text 16"/>
+          <p:cNvPr id="19" name="Text 17"/>
           <p:cNvSpPr/>
           <p:nvPr/>
         </p:nvSpPr>
@@ -33298,7 +35462,46 @@
       </p:sp>
       <p:sp>
         <p:nvSpPr>
-          <p:cNvPr id="19" name="Shape 17"/>
+          <p:cNvPr id="20" name="Text 18"/>
+          <p:cNvSpPr/>
+          <p:nvPr/>
+        </p:nvSpPr>
+        <p:spPr>
+          <a:xfrm>
+            <a:off x="1892808" y="4809744"/>
+            <a:ext cx="1188720" cy="201168"/>
+          </a:xfrm>
+          <a:prstGeom prst="rect">
+            <a:avLst/>
+          </a:prstGeom>
+          <a:noFill/>
+          <a:ln/>
+        </p:spPr>
+        <p:txBody>
+          <a:bodyPr wrap="square" lIns="0" tIns="0" rIns="0" bIns="0" rtlCol="0" anchor="ctr"/>
+          <a:lstStyle/>
+          <a:p>
+            <a:pPr algn="ctr" indent="0" marL="0">
+              <a:buNone/>
+            </a:pPr>
+            <a:r>
+              <a:rPr lang="en-US" sz="850" i="1" dirty="0">
+                <a:solidFill>
+                  <a:srgbClr val="7F7F7F"/>
+                </a:solidFill>
+                <a:latin typeface="Arial" pitchFamily="34" charset="0"/>
+                <a:ea typeface="Arial" pitchFamily="34" charset="-122"/>
+                <a:cs typeface="Arial" pitchFamily="34" charset="-120"/>
+              </a:rPr>
+              <a:t>measure</a:t>
+            </a:r>
+            <a:endParaRPr lang="en-US" sz="850" dirty="0"/>
+          </a:p>
+        </p:txBody>
+      </p:sp>
+      <p:sp>
+        <p:nvSpPr>
+          <p:cNvPr id="21" name="Shape 19"/>
           <p:cNvSpPr/>
           <p:nvPr/>
         </p:nvSpPr>
@@ -33322,7 +35525,7 @@
       </p:sp>
       <p:sp>
         <p:nvSpPr>
-          <p:cNvPr id="20" name="Shape 18"/>
+          <p:cNvPr id="22" name="Shape 20"/>
           <p:cNvSpPr/>
           <p:nvPr/>
         </p:nvSpPr>
@@ -33349,7 +35552,7 @@
       </p:sp>
       <p:sp>
         <p:nvSpPr>
-          <p:cNvPr id="21" name="Text 19"/>
+          <p:cNvPr id="23" name="Text 21"/>
           <p:cNvSpPr/>
           <p:nvPr/>
         </p:nvSpPr>
@@ -33406,7 +35609,46 @@
       </p:sp>
       <p:sp>
         <p:nvSpPr>
-          <p:cNvPr id="22" name="Shape 20"/>
+          <p:cNvPr id="24" name="Text 22"/>
+          <p:cNvSpPr/>
+          <p:nvPr/>
+        </p:nvSpPr>
+        <p:spPr>
+          <a:xfrm>
+            <a:off x="3282696" y="4809744"/>
+            <a:ext cx="1188720" cy="201168"/>
+          </a:xfrm>
+          <a:prstGeom prst="rect">
+            <a:avLst/>
+          </a:prstGeom>
+          <a:noFill/>
+          <a:ln/>
+        </p:spPr>
+        <p:txBody>
+          <a:bodyPr wrap="square" lIns="0" tIns="0" rIns="0" bIns="0" rtlCol="0" anchor="ctr"/>
+          <a:lstStyle/>
+          <a:p>
+            <a:pPr algn="ctr" indent="0" marL="0">
+              <a:buNone/>
+            </a:pPr>
+            <a:r>
+              <a:rPr lang="en-US" sz="850" i="1" dirty="0">
+                <a:solidFill>
+                  <a:srgbClr val="7F7F7F"/>
+                </a:solidFill>
+                <a:latin typeface="Arial" pitchFamily="34" charset="0"/>
+                <a:ea typeface="Arial" pitchFamily="34" charset="-122"/>
+                <a:cs typeface="Arial" pitchFamily="34" charset="-120"/>
+              </a:rPr>
+              <a:t>learn</a:t>
+            </a:r>
+            <a:endParaRPr lang="en-US" sz="850" dirty="0"/>
+          </a:p>
+        </p:txBody>
+      </p:sp>
+      <p:sp>
+        <p:nvSpPr>
+          <p:cNvPr id="25" name="Shape 23"/>
           <p:cNvSpPr/>
           <p:nvPr/>
         </p:nvSpPr>
@@ -33430,7 +35672,7 @@
       </p:sp>
       <p:sp>
         <p:nvSpPr>
-          <p:cNvPr id="23" name="Shape 21"/>
+          <p:cNvPr id="26" name="Shape 24"/>
           <p:cNvSpPr/>
           <p:nvPr/>
         </p:nvSpPr>
@@ -33457,7 +35699,7 @@
       </p:sp>
       <p:sp>
         <p:nvSpPr>
-          <p:cNvPr id="24" name="Text 22"/>
+          <p:cNvPr id="27" name="Text 25"/>
           <p:cNvSpPr/>
           <p:nvPr/>
         </p:nvSpPr>
@@ -33514,7 +35756,46 @@
       </p:sp>
       <p:sp>
         <p:nvSpPr>
-          <p:cNvPr id="25" name="Shape 23"/>
+          <p:cNvPr id="28" name="Text 26"/>
+          <p:cNvSpPr/>
+          <p:nvPr/>
+        </p:nvSpPr>
+        <p:spPr>
+          <a:xfrm>
+            <a:off x="4672584" y="4809744"/>
+            <a:ext cx="1188720" cy="201168"/>
+          </a:xfrm>
+          <a:prstGeom prst="rect">
+            <a:avLst/>
+          </a:prstGeom>
+          <a:noFill/>
+          <a:ln/>
+        </p:spPr>
+        <p:txBody>
+          <a:bodyPr wrap="square" lIns="0" tIns="0" rIns="0" bIns="0" rtlCol="0" anchor="ctr"/>
+          <a:lstStyle/>
+          <a:p>
+            <a:pPr algn="ctr" indent="0" marL="0">
+              <a:buNone/>
+            </a:pPr>
+            <a:r>
+              <a:rPr lang="en-US" sz="850" i="1" dirty="0">
+                <a:solidFill>
+                  <a:srgbClr val="7F7F7F"/>
+                </a:solidFill>
+                <a:latin typeface="Arial" pitchFamily="34" charset="0"/>
+                <a:ea typeface="Arial" pitchFamily="34" charset="-122"/>
+                <a:cs typeface="Arial" pitchFamily="34" charset="-120"/>
+              </a:rPr>
+              <a:t>gate</a:t>
+            </a:r>
+            <a:endParaRPr lang="en-US" sz="850" dirty="0"/>
+          </a:p>
+        </p:txBody>
+      </p:sp>
+      <p:sp>
+        <p:nvSpPr>
+          <p:cNvPr id="29" name="Shape 27"/>
           <p:cNvSpPr/>
           <p:nvPr/>
         </p:nvSpPr>
@@ -33538,7 +35819,7 @@
       </p:sp>
       <p:sp>
         <p:nvSpPr>
-          <p:cNvPr id="26" name="Shape 24"/>
+          <p:cNvPr id="30" name="Shape 28"/>
           <p:cNvSpPr/>
           <p:nvPr/>
         </p:nvSpPr>
@@ -33565,7 +35846,7 @@
       </p:sp>
       <p:sp>
         <p:nvSpPr>
-          <p:cNvPr id="27" name="Text 25"/>
+          <p:cNvPr id="31" name="Text 29"/>
           <p:cNvSpPr/>
           <p:nvPr/>
         </p:nvSpPr>
@@ -33622,7 +35903,46 @@
       </p:sp>
       <p:sp>
         <p:nvSpPr>
-          <p:cNvPr id="28" name="Shape 26"/>
+          <p:cNvPr id="32" name="Text 30"/>
+          <p:cNvSpPr/>
+          <p:nvPr/>
+        </p:nvSpPr>
+        <p:spPr>
+          <a:xfrm>
+            <a:off x="6062472" y="4809744"/>
+            <a:ext cx="1188720" cy="201168"/>
+          </a:xfrm>
+          <a:prstGeom prst="rect">
+            <a:avLst/>
+          </a:prstGeom>
+          <a:noFill/>
+          <a:ln/>
+        </p:spPr>
+        <p:txBody>
+          <a:bodyPr wrap="square" lIns="0" tIns="0" rIns="0" bIns="0" rtlCol="0" anchor="ctr"/>
+          <a:lstStyle/>
+          <a:p>
+            <a:pPr algn="ctr" indent="0" marL="0">
+              <a:buNone/>
+            </a:pPr>
+            <a:r>
+              <a:rPr lang="en-US" sz="850" i="1" dirty="0">
+                <a:solidFill>
+                  <a:srgbClr val="7F7F7F"/>
+                </a:solidFill>
+                <a:latin typeface="Arial" pitchFamily="34" charset="0"/>
+                <a:ea typeface="Arial" pitchFamily="34" charset="-122"/>
+                <a:cs typeface="Arial" pitchFamily="34" charset="-120"/>
+              </a:rPr>
+              <a:t>combine</a:t>
+            </a:r>
+            <a:endParaRPr lang="en-US" sz="850" dirty="0"/>
+          </a:p>
+        </p:txBody>
+      </p:sp>
+      <p:sp>
+        <p:nvSpPr>
+          <p:cNvPr id="33" name="Shape 31"/>
           <p:cNvSpPr/>
           <p:nvPr/>
         </p:nvSpPr>
@@ -33646,7 +35966,7 @@
       </p:sp>
       <p:sp>
         <p:nvSpPr>
-          <p:cNvPr id="29" name="Shape 27"/>
+          <p:cNvPr id="34" name="Shape 32"/>
           <p:cNvSpPr/>
           <p:nvPr/>
         </p:nvSpPr>
@@ -33673,7 +35993,7 @@
       </p:sp>
       <p:sp>
         <p:nvSpPr>
-          <p:cNvPr id="30" name="Text 28"/>
+          <p:cNvPr id="35" name="Text 33"/>
           <p:cNvSpPr/>
           <p:nvPr/>
         </p:nvSpPr>
@@ -33722,7 +36042,7 @@
                 <a:ea typeface="Arial" pitchFamily="34" charset="-122"/>
                 <a:cs typeface="Arial" pitchFamily="34" charset="-120"/>
               </a:rPr>
-              <a:t>11 retractions</a:t>
+              <a:t>11 audited verdicts</a:t>
             </a:r>
             <a:endParaRPr lang="en-US" sz="1000" dirty="0"/>
           </a:p>
@@ -33730,7 +36050,46 @@
       </p:sp>
       <p:sp>
         <p:nvSpPr>
-          <p:cNvPr id="31" name="Shape 29"/>
+          <p:cNvPr id="36" name="Text 34"/>
+          <p:cNvSpPr/>
+          <p:nvPr/>
+        </p:nvSpPr>
+        <p:spPr>
+          <a:xfrm>
+            <a:off x="7452360" y="4809744"/>
+            <a:ext cx="1188720" cy="201168"/>
+          </a:xfrm>
+          <a:prstGeom prst="rect">
+            <a:avLst/>
+          </a:prstGeom>
+          <a:noFill/>
+          <a:ln/>
+        </p:spPr>
+        <p:txBody>
+          <a:bodyPr wrap="square" lIns="0" tIns="0" rIns="0" bIns="0" rtlCol="0" anchor="ctr"/>
+          <a:lstStyle/>
+          <a:p>
+            <a:pPr algn="ctr" indent="0" marL="0">
+              <a:buNone/>
+            </a:pPr>
+            <a:r>
+              <a:rPr lang="en-US" sz="850" b="1" i="1" dirty="0">
+                <a:solidFill>
+                  <a:srgbClr val="9E2A2B"/>
+                </a:solidFill>
+                <a:latin typeface="Arial" pitchFamily="34" charset="0"/>
+                <a:ea typeface="Arial" pitchFamily="34" charset="-122"/>
+                <a:cs typeface="Arial" pitchFamily="34" charset="-120"/>
+              </a:rPr>
+              <a:t>doubt</a:t>
+            </a:r>
+            <a:endParaRPr lang="en-US" sz="850" dirty="0"/>
+          </a:p>
+        </p:txBody>
+      </p:sp>
+      <p:sp>
+        <p:nvSpPr>
+          <p:cNvPr id="37" name="Shape 35"/>
           <p:cNvSpPr/>
           <p:nvPr/>
         </p:nvSpPr>
@@ -33754,7 +36113,7 @@
       </p:sp>
       <p:sp>
         <p:nvSpPr>
-          <p:cNvPr id="32" name="Shape 30"/>
+          <p:cNvPr id="38" name="Shape 36"/>
           <p:cNvSpPr/>
           <p:nvPr/>
         </p:nvSpPr>
@@ -33777,7 +36136,7 @@
       </p:sp>
       <p:sp>
         <p:nvSpPr>
-          <p:cNvPr id="33" name="Shape 31"/>
+          <p:cNvPr id="39" name="Shape 37"/>
           <p:cNvSpPr/>
           <p:nvPr/>
         </p:nvSpPr>
@@ -33800,7 +36159,7 @@
       </p:sp>
       <p:sp>
         <p:nvSpPr>
-          <p:cNvPr id="34" name="Text 32"/>
+          <p:cNvPr id="40" name="Text 38"/>
           <p:cNvSpPr/>
           <p:nvPr/>
         </p:nvSpPr>
@@ -33839,7 +36198,7 @@
       </p:sp>
       <p:sp>
         <p:nvSpPr>
-          <p:cNvPr id="35" name="Shape 33"/>
+          <p:cNvPr id="41" name="Shape 39"/>
           <p:cNvSpPr/>
           <p:nvPr/>
         </p:nvSpPr>
@@ -33863,7 +36222,7 @@
       </p:sp>
       <p:sp>
         <p:nvSpPr>
-          <p:cNvPr id="36" name="Shape 34"/>
+          <p:cNvPr id="42" name="Shape 40"/>
           <p:cNvSpPr/>
           <p:nvPr/>
         </p:nvSpPr>
@@ -33886,7 +36245,7 @@
       </p:sp>
       <p:sp>
         <p:nvSpPr>
-          <p:cNvPr id="37" name="Shape 35"/>
+          <p:cNvPr id="43" name="Shape 41"/>
           <p:cNvSpPr/>
           <p:nvPr/>
         </p:nvSpPr>
@@ -33909,7 +36268,7 @@
       </p:sp>
       <p:sp>
         <p:nvSpPr>
-          <p:cNvPr id="38" name="Text 36"/>
+          <p:cNvPr id="44" name="Text 42"/>
           <p:cNvSpPr/>
           <p:nvPr/>
         </p:nvSpPr>
@@ -33948,7 +36307,7 @@
       </p:sp>
       <p:sp>
         <p:nvSpPr>
-          <p:cNvPr id="39" name="Text 37"/>
+          <p:cNvPr id="45" name="Text 43"/>
           <p:cNvSpPr/>
           <p:nvPr/>
         </p:nvSpPr>
@@ -33987,7 +36346,7 @@
       </p:sp>
       <p:sp>
         <p:nvSpPr>
-          <p:cNvPr id="41" name="Text 38"/>
+          <p:cNvPr id="47" name="Text 44"/>
           <p:cNvSpPr/>
           <p:nvPr/>
         </p:nvSpPr>
@@ -34040,7 +36399,7 @@
       </p:sp>
       <p:sp>
         <p:nvSpPr>
-          <p:cNvPr id="42" name="Text 39"/>
+          <p:cNvPr id="48" name="Text 45"/>
           <p:cNvSpPr/>
           <p:nvPr/>
         </p:nvSpPr>
@@ -34351,7 +36710,46 @@
       </p:sp>
       <p:sp>
         <p:nvSpPr>
-          <p:cNvPr id="8" name="Shape 6"/>
+          <p:cNvPr id="8" name="Text 6"/>
+          <p:cNvSpPr/>
+          <p:nvPr/>
+        </p:nvSpPr>
+        <p:spPr>
+          <a:xfrm>
+            <a:off x="502920" y="5038344"/>
+            <a:ext cx="1188720" cy="201168"/>
+          </a:xfrm>
+          <a:prstGeom prst="rect">
+            <a:avLst/>
+          </a:prstGeom>
+          <a:noFill/>
+          <a:ln/>
+        </p:spPr>
+        <p:txBody>
+          <a:bodyPr wrap="square" lIns="0" tIns="0" rIns="0" bIns="0" rtlCol="0" anchor="ctr"/>
+          <a:lstStyle/>
+          <a:p>
+            <a:pPr algn="ctr" indent="0" marL="0">
+              <a:buNone/>
+            </a:pPr>
+            <a:r>
+              <a:rPr lang="en-US" sz="850" i="1" dirty="0">
+                <a:solidFill>
+                  <a:srgbClr val="7F7F7F"/>
+                </a:solidFill>
+                <a:latin typeface="Arial" pitchFamily="34" charset="0"/>
+                <a:ea typeface="Arial" pitchFamily="34" charset="-122"/>
+                <a:cs typeface="Arial" pitchFamily="34" charset="-120"/>
+              </a:rPr>
+              <a:t>ask</a:t>
+            </a:r>
+            <a:endParaRPr lang="en-US" sz="850" dirty="0"/>
+          </a:p>
+        </p:txBody>
+      </p:sp>
+      <p:sp>
+        <p:nvSpPr>
+          <p:cNvPr id="9" name="Shape 7"/>
           <p:cNvSpPr/>
           <p:nvPr/>
         </p:nvSpPr>
@@ -34375,7 +36773,7 @@
       </p:sp>
       <p:sp>
         <p:nvSpPr>
-          <p:cNvPr id="9" name="Shape 7"/>
+          <p:cNvPr id="10" name="Shape 8"/>
           <p:cNvSpPr/>
           <p:nvPr/>
         </p:nvSpPr>
@@ -34402,7 +36800,7 @@
       </p:sp>
       <p:sp>
         <p:nvSpPr>
-          <p:cNvPr id="10" name="Text 8"/>
+          <p:cNvPr id="11" name="Text 9"/>
           <p:cNvSpPr/>
           <p:nvPr/>
         </p:nvSpPr>
@@ -34459,7 +36857,46 @@
       </p:sp>
       <p:sp>
         <p:nvSpPr>
-          <p:cNvPr id="11" name="Shape 9"/>
+          <p:cNvPr id="12" name="Text 10"/>
+          <p:cNvSpPr/>
+          <p:nvPr/>
+        </p:nvSpPr>
+        <p:spPr>
+          <a:xfrm>
+            <a:off x="1892808" y="5038344"/>
+            <a:ext cx="1188720" cy="201168"/>
+          </a:xfrm>
+          <a:prstGeom prst="rect">
+            <a:avLst/>
+          </a:prstGeom>
+          <a:noFill/>
+          <a:ln/>
+        </p:spPr>
+        <p:txBody>
+          <a:bodyPr wrap="square" lIns="0" tIns="0" rIns="0" bIns="0" rtlCol="0" anchor="ctr"/>
+          <a:lstStyle/>
+          <a:p>
+            <a:pPr algn="ctr" indent="0" marL="0">
+              <a:buNone/>
+            </a:pPr>
+            <a:r>
+              <a:rPr lang="en-US" sz="850" i="1" dirty="0">
+                <a:solidFill>
+                  <a:srgbClr val="7F7F7F"/>
+                </a:solidFill>
+                <a:latin typeface="Arial" pitchFamily="34" charset="0"/>
+                <a:ea typeface="Arial" pitchFamily="34" charset="-122"/>
+                <a:cs typeface="Arial" pitchFamily="34" charset="-120"/>
+              </a:rPr>
+              <a:t>measure</a:t>
+            </a:r>
+            <a:endParaRPr lang="en-US" sz="850" dirty="0"/>
+          </a:p>
+        </p:txBody>
+      </p:sp>
+      <p:sp>
+        <p:nvSpPr>
+          <p:cNvPr id="13" name="Shape 11"/>
           <p:cNvSpPr/>
           <p:nvPr/>
         </p:nvSpPr>
@@ -34483,7 +36920,7 @@
       </p:sp>
       <p:sp>
         <p:nvSpPr>
-          <p:cNvPr id="12" name="Shape 10"/>
+          <p:cNvPr id="14" name="Shape 12"/>
           <p:cNvSpPr/>
           <p:nvPr/>
         </p:nvSpPr>
@@ -34510,7 +36947,7 @@
       </p:sp>
       <p:sp>
         <p:nvSpPr>
-          <p:cNvPr id="13" name="Text 11"/>
+          <p:cNvPr id="15" name="Text 13"/>
           <p:cNvSpPr/>
           <p:nvPr/>
         </p:nvSpPr>
@@ -34567,7 +37004,46 @@
       </p:sp>
       <p:sp>
         <p:nvSpPr>
-          <p:cNvPr id="14" name="Shape 12"/>
+          <p:cNvPr id="16" name="Text 14"/>
+          <p:cNvSpPr/>
+          <p:nvPr/>
+        </p:nvSpPr>
+        <p:spPr>
+          <a:xfrm>
+            <a:off x="3282696" y="5038344"/>
+            <a:ext cx="1188720" cy="201168"/>
+          </a:xfrm>
+          <a:prstGeom prst="rect">
+            <a:avLst/>
+          </a:prstGeom>
+          <a:noFill/>
+          <a:ln/>
+        </p:spPr>
+        <p:txBody>
+          <a:bodyPr wrap="square" lIns="0" tIns="0" rIns="0" bIns="0" rtlCol="0" anchor="ctr"/>
+          <a:lstStyle/>
+          <a:p>
+            <a:pPr algn="ctr" indent="0" marL="0">
+              <a:buNone/>
+            </a:pPr>
+            <a:r>
+              <a:rPr lang="en-US" sz="850" i="1" dirty="0">
+                <a:solidFill>
+                  <a:srgbClr val="7F7F7F"/>
+                </a:solidFill>
+                <a:latin typeface="Arial" pitchFamily="34" charset="0"/>
+                <a:ea typeface="Arial" pitchFamily="34" charset="-122"/>
+                <a:cs typeface="Arial" pitchFamily="34" charset="-120"/>
+              </a:rPr>
+              <a:t>learn</a:t>
+            </a:r>
+            <a:endParaRPr lang="en-US" sz="850" dirty="0"/>
+          </a:p>
+        </p:txBody>
+      </p:sp>
+      <p:sp>
+        <p:nvSpPr>
+          <p:cNvPr id="17" name="Shape 15"/>
           <p:cNvSpPr/>
           <p:nvPr/>
         </p:nvSpPr>
@@ -34591,7 +37067,7 @@
       </p:sp>
       <p:sp>
         <p:nvSpPr>
-          <p:cNvPr id="15" name="Shape 13"/>
+          <p:cNvPr id="18" name="Shape 16"/>
           <p:cNvSpPr/>
           <p:nvPr/>
         </p:nvSpPr>
@@ -34618,7 +37094,7 @@
       </p:sp>
       <p:sp>
         <p:nvSpPr>
-          <p:cNvPr id="16" name="Text 14"/>
+          <p:cNvPr id="19" name="Text 17"/>
           <p:cNvSpPr/>
           <p:nvPr/>
         </p:nvSpPr>
@@ -34675,7 +37151,46 @@
       </p:sp>
       <p:sp>
         <p:nvSpPr>
-          <p:cNvPr id="17" name="Shape 15"/>
+          <p:cNvPr id="20" name="Text 18"/>
+          <p:cNvSpPr/>
+          <p:nvPr/>
+        </p:nvSpPr>
+        <p:spPr>
+          <a:xfrm>
+            <a:off x="4672584" y="5038344"/>
+            <a:ext cx="1188720" cy="201168"/>
+          </a:xfrm>
+          <a:prstGeom prst="rect">
+            <a:avLst/>
+          </a:prstGeom>
+          <a:noFill/>
+          <a:ln/>
+        </p:spPr>
+        <p:txBody>
+          <a:bodyPr wrap="square" lIns="0" tIns="0" rIns="0" bIns="0" rtlCol="0" anchor="ctr"/>
+          <a:lstStyle/>
+          <a:p>
+            <a:pPr algn="ctr" indent="0" marL="0">
+              <a:buNone/>
+            </a:pPr>
+            <a:r>
+              <a:rPr lang="en-US" sz="850" i="1" dirty="0">
+                <a:solidFill>
+                  <a:srgbClr val="7F7F7F"/>
+                </a:solidFill>
+                <a:latin typeface="Arial" pitchFamily="34" charset="0"/>
+                <a:ea typeface="Arial" pitchFamily="34" charset="-122"/>
+                <a:cs typeface="Arial" pitchFamily="34" charset="-120"/>
+              </a:rPr>
+              <a:t>gate</a:t>
+            </a:r>
+            <a:endParaRPr lang="en-US" sz="850" dirty="0"/>
+          </a:p>
+        </p:txBody>
+      </p:sp>
+      <p:sp>
+        <p:nvSpPr>
+          <p:cNvPr id="21" name="Shape 19"/>
           <p:cNvSpPr/>
           <p:nvPr/>
         </p:nvSpPr>
@@ -34699,7 +37214,7 @@
       </p:sp>
       <p:sp>
         <p:nvSpPr>
-          <p:cNvPr id="18" name="Shape 16"/>
+          <p:cNvPr id="22" name="Shape 20"/>
           <p:cNvSpPr/>
           <p:nvPr/>
         </p:nvSpPr>
@@ -34726,7 +37241,7 @@
       </p:sp>
       <p:sp>
         <p:nvSpPr>
-          <p:cNvPr id="19" name="Text 17"/>
+          <p:cNvPr id="23" name="Text 21"/>
           <p:cNvSpPr/>
           <p:nvPr/>
         </p:nvSpPr>
@@ -34783,7 +37298,46 @@
       </p:sp>
       <p:sp>
         <p:nvSpPr>
-          <p:cNvPr id="20" name="Shape 18"/>
+          <p:cNvPr id="24" name="Text 22"/>
+          <p:cNvSpPr/>
+          <p:nvPr/>
+        </p:nvSpPr>
+        <p:spPr>
+          <a:xfrm>
+            <a:off x="6062472" y="5038344"/>
+            <a:ext cx="1188720" cy="201168"/>
+          </a:xfrm>
+          <a:prstGeom prst="rect">
+            <a:avLst/>
+          </a:prstGeom>
+          <a:noFill/>
+          <a:ln/>
+        </p:spPr>
+        <p:txBody>
+          <a:bodyPr wrap="square" lIns="0" tIns="0" rIns="0" bIns="0" rtlCol="0" anchor="ctr"/>
+          <a:lstStyle/>
+          <a:p>
+            <a:pPr algn="ctr" indent="0" marL="0">
+              <a:buNone/>
+            </a:pPr>
+            <a:r>
+              <a:rPr lang="en-US" sz="850" i="1" dirty="0">
+                <a:solidFill>
+                  <a:srgbClr val="7F7F7F"/>
+                </a:solidFill>
+                <a:latin typeface="Arial" pitchFamily="34" charset="0"/>
+                <a:ea typeface="Arial" pitchFamily="34" charset="-122"/>
+                <a:cs typeface="Arial" pitchFamily="34" charset="-120"/>
+              </a:rPr>
+              <a:t>combine</a:t>
+            </a:r>
+            <a:endParaRPr lang="en-US" sz="850" dirty="0"/>
+          </a:p>
+        </p:txBody>
+      </p:sp>
+      <p:sp>
+        <p:nvSpPr>
+          <p:cNvPr id="25" name="Shape 23"/>
           <p:cNvSpPr/>
           <p:nvPr/>
         </p:nvSpPr>
@@ -34807,7 +37361,7 @@
       </p:sp>
       <p:sp>
         <p:nvSpPr>
-          <p:cNvPr id="21" name="Shape 19"/>
+          <p:cNvPr id="26" name="Shape 24"/>
           <p:cNvSpPr/>
           <p:nvPr/>
         </p:nvSpPr>
@@ -34834,7 +37388,7 @@
       </p:sp>
       <p:sp>
         <p:nvSpPr>
-          <p:cNvPr id="22" name="Text 20"/>
+          <p:cNvPr id="27" name="Text 25"/>
           <p:cNvSpPr/>
           <p:nvPr/>
         </p:nvSpPr>
@@ -34883,7 +37437,7 @@
                 <a:ea typeface="Arial" pitchFamily="34" charset="-122"/>
                 <a:cs typeface="Arial" pitchFamily="34" charset="-120"/>
               </a:rPr>
-              <a:t>11 retractions</a:t>
+              <a:t>11 audited verdicts</a:t>
             </a:r>
             <a:endParaRPr lang="en-US" sz="1000" dirty="0"/>
           </a:p>
@@ -34891,7 +37445,46 @@
       </p:sp>
       <p:sp>
         <p:nvSpPr>
-          <p:cNvPr id="23" name="Shape 21"/>
+          <p:cNvPr id="28" name="Text 26"/>
+          <p:cNvSpPr/>
+          <p:nvPr/>
+        </p:nvSpPr>
+        <p:spPr>
+          <a:xfrm>
+            <a:off x="7452360" y="5038344"/>
+            <a:ext cx="1188720" cy="201168"/>
+          </a:xfrm>
+          <a:prstGeom prst="rect">
+            <a:avLst/>
+          </a:prstGeom>
+          <a:noFill/>
+          <a:ln/>
+        </p:spPr>
+        <p:txBody>
+          <a:bodyPr wrap="square" lIns="0" tIns="0" rIns="0" bIns="0" rtlCol="0" anchor="ctr"/>
+          <a:lstStyle/>
+          <a:p>
+            <a:pPr algn="ctr" indent="0" marL="0">
+              <a:buNone/>
+            </a:pPr>
+            <a:r>
+              <a:rPr lang="en-US" sz="850" i="1" dirty="0">
+                <a:solidFill>
+                  <a:srgbClr val="7F7F7F"/>
+                </a:solidFill>
+                <a:latin typeface="Arial" pitchFamily="34" charset="0"/>
+                <a:ea typeface="Arial" pitchFamily="34" charset="-122"/>
+                <a:cs typeface="Arial" pitchFamily="34" charset="-120"/>
+              </a:rPr>
+              <a:t>doubt</a:t>
+            </a:r>
+            <a:endParaRPr lang="en-US" sz="850" dirty="0"/>
+          </a:p>
+        </p:txBody>
+      </p:sp>
+      <p:sp>
+        <p:nvSpPr>
+          <p:cNvPr id="29" name="Shape 27"/>
           <p:cNvSpPr/>
           <p:nvPr/>
         </p:nvSpPr>
@@ -34915,7 +37508,7 @@
       </p:sp>
       <p:sp>
         <p:nvSpPr>
-          <p:cNvPr id="24" name="Shape 22"/>
+          <p:cNvPr id="30" name="Shape 28"/>
           <p:cNvSpPr/>
           <p:nvPr/>
         </p:nvSpPr>
@@ -34938,7 +37531,7 @@
       </p:sp>
       <p:sp>
         <p:nvSpPr>
-          <p:cNvPr id="25" name="Shape 23"/>
+          <p:cNvPr id="31" name="Shape 29"/>
           <p:cNvSpPr/>
           <p:nvPr/>
         </p:nvSpPr>
@@ -34961,7 +37554,7 @@
       </p:sp>
       <p:sp>
         <p:nvSpPr>
-          <p:cNvPr id="26" name="Text 24"/>
+          <p:cNvPr id="32" name="Text 30"/>
           <p:cNvSpPr/>
           <p:nvPr/>
         </p:nvSpPr>
@@ -35000,7 +37593,7 @@
       </p:sp>
       <p:sp>
         <p:nvSpPr>
-          <p:cNvPr id="27" name="Shape 25"/>
+          <p:cNvPr id="33" name="Shape 31"/>
           <p:cNvSpPr/>
           <p:nvPr/>
         </p:nvSpPr>
@@ -35024,7 +37617,7 @@
       </p:sp>
       <p:sp>
         <p:nvSpPr>
-          <p:cNvPr id="28" name="Shape 26"/>
+          <p:cNvPr id="34" name="Shape 32"/>
           <p:cNvSpPr/>
           <p:nvPr/>
         </p:nvSpPr>
@@ -35047,7 +37640,7 @@
       </p:sp>
       <p:sp>
         <p:nvSpPr>
-          <p:cNvPr id="29" name="Shape 27"/>
+          <p:cNvPr id="35" name="Shape 33"/>
           <p:cNvSpPr/>
           <p:nvPr/>
         </p:nvSpPr>
@@ -35070,7 +37663,7 @@
       </p:sp>
       <p:sp>
         <p:nvSpPr>
-          <p:cNvPr id="30" name="Text 28"/>
+          <p:cNvPr id="36" name="Text 34"/>
           <p:cNvSpPr/>
           <p:nvPr/>
         </p:nvSpPr>
@@ -35109,7 +37702,7 @@
       </p:sp>
       <p:sp>
         <p:nvSpPr>
-          <p:cNvPr id="31" name="Text 29"/>
+          <p:cNvPr id="37" name="Text 35"/>
           <p:cNvSpPr/>
           <p:nvPr/>
         </p:nvSpPr>
@@ -35162,7 +37755,7 @@
       </p:sp>
       <p:sp>
         <p:nvSpPr>
-          <p:cNvPr id="32" name="Text 30"/>
+          <p:cNvPr id="38" name="Text 36"/>
           <p:cNvSpPr/>
           <p:nvPr/>
         </p:nvSpPr>
@@ -37822,7 +40415,7 @@
         <p:spPr>
           <a:xfrm>
             <a:off x="502920" y="1371600"/>
-            <a:ext cx="4023360" cy="2926080"/>
+            <a:ext cx="4023360" cy="3291840"/>
           </a:xfrm>
           <a:prstGeom prst="rect">
             <a:avLst/>
@@ -37917,11 +40510,32 @@
             </a:r>
             <a:endParaRPr lang="en-US" sz="1050" dirty="0"/>
           </a:p>
+          <a:p>
+            <a:pPr lvl="1" marL="254000" indent="-127000">
+              <a:spcAft>
+                <a:spcPts val="500"/>
+              </a:spcAft>
+              <a:buSzPct val="100000"/>
+              <a:buChar char="–"/>
+            </a:pPr>
+            <a:r>
+              <a:rPr lang="en-US" sz="1050" dirty="0">
+                <a:solidFill>
+                  <a:srgbClr val="7F7F7F"/>
+                </a:solidFill>
+                <a:latin typeface="Arial" pitchFamily="34" charset="0"/>
+                <a:ea typeface="Arial" pitchFamily="34" charset="-122"/>
+                <a:cs typeface="Arial" pitchFamily="34" charset="-120"/>
+              </a:rPr>
+              <a:t>Canonical MSD fit window: 2–50 ps (fixed)</a:t>
+            </a:r>
+            <a:endParaRPr lang="en-US" sz="1050" dirty="0"/>
+          </a:p>
         </p:txBody>
       </p:sp>
       <p:pic>
         <p:nvPicPr>
-          <p:cNvPr id="6" name="Image 0" descr="/home/user/Yonghoon-DEM-DFT/docs/figures/slide09_arrhenius/arrhenius_comp1_modelc.png">    </p:cNvPr>
+          <p:cNvPr id="6" name="Image 0" descr="/tmp/claude-0/-home-user-Yonghoon-DEM-DFT/82ea256b-12bc-5a75-994e-7718d79c71ba/scratchpad/beta_schematic.png">    </p:cNvPr>
           <p:cNvPicPr>
             <a:picLocks noChangeAspect="1"/>
           </p:cNvPicPr>
@@ -37934,8 +40548,8 @@
         </p:blipFill>
         <p:spPr>
           <a:xfrm>
-            <a:off x="4709160" y="1417320"/>
-            <a:ext cx="3931920" cy="2194560"/>
+            <a:off x="4709160" y="1463040"/>
+            <a:ext cx="3931920" cy="2834640"/>
           </a:xfrm>
           <a:prstGeom prst="rect">
             <a:avLst/>
@@ -37950,7 +40564,7 @@
         </p:nvSpPr>
         <p:spPr>
           <a:xfrm>
-            <a:off x="4709160" y="3630168"/>
+            <a:off x="4709160" y="4315968"/>
             <a:ext cx="3931920" cy="274320"/>
           </a:xfrm>
           <a:prstGeom prst="rect">
@@ -37975,77 +40589,15 @@
                 <a:ea typeface="Arial" pitchFamily="34" charset="-122"/>
                 <a:cs typeface="Arial" pitchFamily="34" charset="-120"/>
               </a:rPr>
-              <a:t>Arrhenius, comp1 vs modelc (multi-seed)</a:t>
+              <a:t>Schematic only — no measured data. The gate separates rattling from transport</a:t>
             </a:r>
             <a:endParaRPr lang="en-US" sz="850" dirty="0"/>
           </a:p>
         </p:txBody>
       </p:sp>
-      <p:pic>
-        <p:nvPicPr>
-          <p:cNvPr id="8" name="Image 1" descr="/home/user/Yonghoon-DEM-DFT/docs/figures/cascade/b2o3_md_arrhenius.png">    </p:cNvPr>
-          <p:cNvPicPr>
-            <a:picLocks noChangeAspect="1"/>
-          </p:cNvPicPr>
-          <p:nvPr/>
-        </p:nvPicPr>
-        <p:blipFill>
-          <a:blip r:embed="rId2"/>
-          <a:srcRect l="0" r="0" t="0" b="0"/>
-          <a:stretch/>
-        </p:blipFill>
-        <p:spPr>
-          <a:xfrm>
-            <a:off x="4709160" y="3886200"/>
-            <a:ext cx="3931920" cy="2011680"/>
-          </a:xfrm>
-          <a:prstGeom prst="rect">
-            <a:avLst/>
-          </a:prstGeom>
-        </p:spPr>
-      </p:pic>
       <p:sp>
         <p:nvSpPr>
           <p:cNvPr id="9" name="Text 5"/>
-          <p:cNvSpPr/>
-          <p:nvPr/>
-        </p:nvSpPr>
-        <p:spPr>
-          <a:xfrm>
-            <a:off x="4709160" y="5916168"/>
-            <a:ext cx="3931920" cy="274320"/>
-          </a:xfrm>
-          <a:prstGeom prst="rect">
-            <a:avLst/>
-          </a:prstGeom>
-          <a:noFill/>
-          <a:ln/>
-        </p:spPr>
-        <p:txBody>
-          <a:bodyPr wrap="square" lIns="0" tIns="0" rIns="0" bIns="0" rtlCol="0" anchor="ctr"/>
-          <a:lstStyle/>
-          <a:p>
-            <a:pPr algn="ctr" indent="0" marL="0">
-              <a:buNone/>
-            </a:pPr>
-            <a:r>
-              <a:rPr lang="en-US" sz="850" i="1" dirty="0">
-                <a:solidFill>
-                  <a:srgbClr val="7F7F7F"/>
-                </a:solidFill>
-                <a:latin typeface="Arial" pitchFamily="34" charset="0"/>
-                <a:ea typeface="Arial" pitchFamily="34" charset="-122"/>
-                <a:cs typeface="Arial" pitchFamily="34" charset="-120"/>
-              </a:rPr>
-              <a:t>Arrhenius, +B₂O₃</a:t>
-            </a:r>
-            <a:endParaRPr lang="en-US" sz="850" dirty="0"/>
-          </a:p>
-        </p:txBody>
-      </p:sp>
-      <p:sp>
-        <p:nvSpPr>
-          <p:cNvPr id="11" name="Text 6"/>
           <p:cNvSpPr/>
           <p:nvPr/>
         </p:nvSpPr>
@@ -38098,7 +40650,7 @@
       </p:sp>
       <p:sp>
         <p:nvSpPr>
-          <p:cNvPr id="12" name="Text 7"/>
+          <p:cNvPr id="10" name="Text 6"/>
           <p:cNvSpPr/>
           <p:nvPr/>
         </p:nvSpPr>
@@ -40926,7 +43478,7 @@
                           <a:ea typeface="Arial" pitchFamily="34" charset="-122"/>
                           <a:cs typeface="Arial" pitchFamily="34" charset="-120"/>
                         </a:rPr>
-                        <a:t>Retraction count measures gate density; a gateless pipeline reports zero.</a:t>
+                        <a:t>Gate density, not carelessness — and the follow-up: rules born from errors now run as code (see #7, pre-registered).</a:t>
                       </a:r>
                       <a:endParaRPr lang="en-US" sz="880" dirty="0">
                         <a:latin typeface="Arial" charset="0"/>
@@ -41657,7 +44209,7 @@
                 <a:ea typeface="Arial" pitchFamily="34" charset="-122"/>
                 <a:cs typeface="Arial" pitchFamily="34" charset="-120"/>
               </a:rPr>
-              <a:t>Appendix A6</a:t>
+              <a:t>Appendix A5b</a:t>
             </a:r>
             <a:endParaRPr lang="en-US" sz="1100" dirty="0"/>
           </a:p>
@@ -41696,7 +44248,7 @@
                 <a:ea typeface="Arial" pitchFamily="34" charset="-122"/>
                 <a:cs typeface="Arial" pitchFamily="34" charset="-120"/>
               </a:rPr>
-              <a:t>References — only what we physically hold (litdb)</a:t>
+              <a:t>Five harder questions — from our own red-team review</a:t>
             </a:r>
             <a:endParaRPr lang="en-US" sz="2000" dirty="0"/>
           </a:p>
@@ -41725,16 +44277,844 @@
           </a:ln>
         </p:spPr>
       </p:sp>
-      <p:sp>
-        <p:nvSpPr>
-          <p:cNvPr id="5" name="Text 3"/>
-          <p:cNvSpPr/>
-          <p:nvPr/>
-        </p:nvSpPr>
-        <p:spPr>
-          <a:xfrm>
-            <a:off x="502920" y="1463040"/>
-            <a:ext cx="8138160" cy="4389120"/>
+      <p:graphicFrame>
+        <p:nvGraphicFramePr>
+          <p:cNvPr id="42" name="Table 0"/>
+          <p:cNvGraphicFramePr>
+            <a:graphicFrameLocks noGrp="1"/>
+          </p:cNvGraphicFramePr>
+          <p:nvPr>
+            <p:extLst>
+              <p:ext uri="{D42A27DB-BD31-4B8C-83A1-F6EECF244321}">
+                <p14:modId xmlns:p14="http://schemas.microsoft.com/office/powerpoint/2010/main" val="1579011935"/>
+              </p:ext>
+            </p:extLst>
+          </p:nvPr>
+        </p:nvGraphicFramePr>
+        <p:xfrm>
+          <a:off x="502920" y="1371600"/>
+          <a:ext cx="8138160" cy="914400"/>
+        </p:xfrm>
+        <a:graphic>
+          <a:graphicData uri="http://schemas.openxmlformats.org/drawingml/2006/table">
+            <a:tbl>
+              <a:tblPr/>
+              <a:tblGrid>
+                <a:gridCol w="3291840"/>
+                <a:gridCol w="4846320"/>
+              </a:tblGrid>
+              <a:tr h="566928">
+                <a:tc>
+                  <a:txBody>
+                    <a:bodyPr/>
+                    <a:lstStyle/>
+                    <a:p>
+                      <a:pPr indent="0" marL="0">
+                        <a:buNone/>
+                      </a:pPr>
+                      <a:r>
+                        <a:rPr lang="en-US" sz="900" b="1" dirty="0">
+                          <a:solidFill>
+                            <a:srgbClr val="FFFFFF"/>
+                          </a:solidFill>
+                          <a:latin typeface="Arial" pitchFamily="34" charset="0"/>
+                          <a:ea typeface="Arial" pitchFamily="34" charset="-122"/>
+                          <a:cs typeface="Arial" pitchFamily="34" charset="-120"/>
+                        </a:rPr>
+                        <a:t>Q (who asks)</a:t>
+                      </a:r>
+                      <a:endParaRPr lang="en-US" sz="900" dirty="0">
+                        <a:latin typeface="Arial" charset="0"/>
+                        <a:ea typeface="Arial" charset="0"/>
+                        <a:cs typeface="Arial" charset="0"/>
+                      </a:endParaRPr>
+                    </a:p>
+                  </a:txBody>
+                  <a:tcPr marL="36576" marR="36576" marT="36576" marB="36576" anchor="ctr">
+                    <a:lnL w="9525" cap="flat" cmpd="sng" algn="ctr">
+                      <a:solidFill>
+                        <a:srgbClr val="D9D9D9"/>
+                      </a:solidFill>
+                      <a:prstDash val="solid"/>
+                      <a:round/>
+                      <a:headEnd type="none" w="med" len="med"/>
+                      <a:tailEnd type="none" w="med" len="med"/>
+                    </a:lnL>
+                    <a:lnR w="9525" cap="flat" cmpd="sng" algn="ctr">
+                      <a:solidFill>
+                        <a:srgbClr val="D9D9D9"/>
+                      </a:solidFill>
+                      <a:prstDash val="solid"/>
+                      <a:round/>
+                      <a:headEnd type="none" w="med" len="med"/>
+                      <a:tailEnd type="none" w="med" len="med"/>
+                    </a:lnR>
+                    <a:lnT w="9525" cap="flat" cmpd="sng" algn="ctr">
+                      <a:solidFill>
+                        <a:srgbClr val="D9D9D9"/>
+                      </a:solidFill>
+                      <a:prstDash val="solid"/>
+                      <a:round/>
+                      <a:headEnd type="none" w="med" len="med"/>
+                      <a:tailEnd type="none" w="med" len="med"/>
+                    </a:lnT>
+                    <a:lnB w="9525" cap="flat" cmpd="sng" algn="ctr">
+                      <a:solidFill>
+                        <a:srgbClr val="D9D9D9"/>
+                      </a:solidFill>
+                      <a:prstDash val="solid"/>
+                      <a:round/>
+                      <a:headEnd type="none" w="med" len="med"/>
+                      <a:tailEnd type="none" w="med" len="med"/>
+                    </a:lnB>
+                    <a:solidFill>
+                      <a:srgbClr val="1F4E79"/>
+                    </a:solidFill>
+                  </a:tcPr>
+                </a:tc>
+                <a:tc>
+                  <a:txBody>
+                    <a:bodyPr/>
+                    <a:lstStyle/>
+                    <a:p>
+                      <a:pPr indent="0" marL="0">
+                        <a:buNone/>
+                      </a:pPr>
+                      <a:r>
+                        <a:rPr lang="en-US" sz="900" b="1" dirty="0">
+                          <a:solidFill>
+                            <a:srgbClr val="FFFFFF"/>
+                          </a:solidFill>
+                          <a:latin typeface="Arial" pitchFamily="34" charset="0"/>
+                          <a:ea typeface="Arial" pitchFamily="34" charset="-122"/>
+                          <a:cs typeface="Arial" pitchFamily="34" charset="-120"/>
+                        </a:rPr>
+                        <a:t>First sentence of the answer</a:t>
+                      </a:r>
+                      <a:endParaRPr lang="en-US" sz="900" dirty="0">
+                        <a:latin typeface="Arial" charset="0"/>
+                        <a:ea typeface="Arial" charset="0"/>
+                        <a:cs typeface="Arial" charset="0"/>
+                      </a:endParaRPr>
+                    </a:p>
+                  </a:txBody>
+                  <a:tcPr marL="36576" marR="36576" marT="36576" marB="36576" anchor="ctr">
+                    <a:lnL w="9525" cap="flat" cmpd="sng" algn="ctr">
+                      <a:solidFill>
+                        <a:srgbClr val="D9D9D9"/>
+                      </a:solidFill>
+                      <a:prstDash val="solid"/>
+                      <a:round/>
+                      <a:headEnd type="none" w="med" len="med"/>
+                      <a:tailEnd type="none" w="med" len="med"/>
+                    </a:lnL>
+                    <a:lnR w="9525" cap="flat" cmpd="sng" algn="ctr">
+                      <a:solidFill>
+                        <a:srgbClr val="D9D9D9"/>
+                      </a:solidFill>
+                      <a:prstDash val="solid"/>
+                      <a:round/>
+                      <a:headEnd type="none" w="med" len="med"/>
+                      <a:tailEnd type="none" w="med" len="med"/>
+                    </a:lnR>
+                    <a:lnT w="9525" cap="flat" cmpd="sng" algn="ctr">
+                      <a:solidFill>
+                        <a:srgbClr val="D9D9D9"/>
+                      </a:solidFill>
+                      <a:prstDash val="solid"/>
+                      <a:round/>
+                      <a:headEnd type="none" w="med" len="med"/>
+                      <a:tailEnd type="none" w="med" len="med"/>
+                    </a:lnT>
+                    <a:lnB w="9525" cap="flat" cmpd="sng" algn="ctr">
+                      <a:solidFill>
+                        <a:srgbClr val="D9D9D9"/>
+                      </a:solidFill>
+                      <a:prstDash val="solid"/>
+                      <a:round/>
+                      <a:headEnd type="none" w="med" len="med"/>
+                      <a:tailEnd type="none" w="med" len="med"/>
+                    </a:lnB>
+                    <a:solidFill>
+                      <a:srgbClr val="1F4E79"/>
+                    </a:solidFill>
+                  </a:tcPr>
+                </a:tc>
+              </a:tr>
+              <a:tr h="566928">
+                <a:tc>
+                  <a:txBody>
+                    <a:bodyPr/>
+                    <a:lstStyle/>
+                    <a:p>
+                      <a:pPr indent="0" marL="0">
+                        <a:buNone/>
+                      </a:pPr>
+                      <a:r>
+                        <a:rPr lang="en-US" sz="900" dirty="0">
+                          <a:solidFill>
+                            <a:srgbClr val="262626"/>
+                          </a:solidFill>
+                          <a:latin typeface="Arial" pitchFamily="34" charset="0"/>
+                          <a:ea typeface="Arial" pitchFamily="34" charset="-122"/>
+                          <a:cs typeface="Arial" pitchFamily="34" charset="-120"/>
+                        </a:rPr>
+                        <a:t>Why must an electrolyte be an electronic insulator? (basics, on purpose)</a:t>
+                      </a:r>
+                      <a:endParaRPr lang="en-US" sz="900" dirty="0">
+                        <a:latin typeface="Arial" charset="0"/>
+                        <a:ea typeface="Arial" charset="0"/>
+                        <a:cs typeface="Arial" charset="0"/>
+                      </a:endParaRPr>
+                    </a:p>
+                  </a:txBody>
+                  <a:tcPr marL="36576" marR="36576" marT="36576" marB="36576" anchor="ctr">
+                    <a:lnL w="9525" cap="flat" cmpd="sng" algn="ctr">
+                      <a:solidFill>
+                        <a:srgbClr val="D9D9D9"/>
+                      </a:solidFill>
+                      <a:prstDash val="solid"/>
+                      <a:round/>
+                      <a:headEnd type="none" w="med" len="med"/>
+                      <a:tailEnd type="none" w="med" len="med"/>
+                    </a:lnL>
+                    <a:lnR w="9525" cap="flat" cmpd="sng" algn="ctr">
+                      <a:solidFill>
+                        <a:srgbClr val="D9D9D9"/>
+                      </a:solidFill>
+                      <a:prstDash val="solid"/>
+                      <a:round/>
+                      <a:headEnd type="none" w="med" len="med"/>
+                      <a:tailEnd type="none" w="med" len="med"/>
+                    </a:lnR>
+                    <a:lnT w="9525" cap="flat" cmpd="sng" algn="ctr">
+                      <a:solidFill>
+                        <a:srgbClr val="D9D9D9"/>
+                      </a:solidFill>
+                      <a:prstDash val="solid"/>
+                      <a:round/>
+                      <a:headEnd type="none" w="med" len="med"/>
+                      <a:tailEnd type="none" w="med" len="med"/>
+                    </a:lnT>
+                    <a:lnB w="9525" cap="flat" cmpd="sng" algn="ctr">
+                      <a:solidFill>
+                        <a:srgbClr val="D9D9D9"/>
+                      </a:solidFill>
+                      <a:prstDash val="solid"/>
+                      <a:round/>
+                      <a:headEnd type="none" w="med" len="med"/>
+                      <a:tailEnd type="none" w="med" len="med"/>
+                    </a:lnB>
+                  </a:tcPr>
+                </a:tc>
+                <a:tc>
+                  <a:txBody>
+                    <a:bodyPr/>
+                    <a:lstStyle/>
+                    <a:p>
+                      <a:pPr indent="0" marL="0">
+                        <a:buNone/>
+                      </a:pPr>
+                      <a:r>
+                        <a:rPr lang="en-US" sz="900" dirty="0">
+                          <a:solidFill>
+                            <a:srgbClr val="262626"/>
+                          </a:solidFill>
+                          <a:latin typeface="Arial" pitchFamily="34" charset="0"/>
+                          <a:ea typeface="Arial" pitchFamily="34" charset="-122"/>
+                          <a:cs typeface="Arial" pitchFamily="34" charset="-120"/>
+                        </a:rPr>
+                        <a:t>If electrons leak, Li⁺ keeps reducing inside/at interfaces — SEI never self-limits and dendrite paths grow; ion-only transport is the defining condition.</a:t>
+                      </a:r>
+                      <a:endParaRPr lang="en-US" sz="900" dirty="0">
+                        <a:latin typeface="Arial" charset="0"/>
+                        <a:ea typeface="Arial" charset="0"/>
+                        <a:cs typeface="Arial" charset="0"/>
+                      </a:endParaRPr>
+                    </a:p>
+                  </a:txBody>
+                  <a:tcPr marL="36576" marR="36576" marT="36576" marB="36576" anchor="ctr">
+                    <a:lnL w="9525" cap="flat" cmpd="sng" algn="ctr">
+                      <a:solidFill>
+                        <a:srgbClr val="D9D9D9"/>
+                      </a:solidFill>
+                      <a:prstDash val="solid"/>
+                      <a:round/>
+                      <a:headEnd type="none" w="med" len="med"/>
+                      <a:tailEnd type="none" w="med" len="med"/>
+                    </a:lnL>
+                    <a:lnR w="9525" cap="flat" cmpd="sng" algn="ctr">
+                      <a:solidFill>
+                        <a:srgbClr val="D9D9D9"/>
+                      </a:solidFill>
+                      <a:prstDash val="solid"/>
+                      <a:round/>
+                      <a:headEnd type="none" w="med" len="med"/>
+                      <a:tailEnd type="none" w="med" len="med"/>
+                    </a:lnR>
+                    <a:lnT w="9525" cap="flat" cmpd="sng" algn="ctr">
+                      <a:solidFill>
+                        <a:srgbClr val="D9D9D9"/>
+                      </a:solidFill>
+                      <a:prstDash val="solid"/>
+                      <a:round/>
+                      <a:headEnd type="none" w="med" len="med"/>
+                      <a:tailEnd type="none" w="med" len="med"/>
+                    </a:lnT>
+                    <a:lnB w="9525" cap="flat" cmpd="sng" algn="ctr">
+                      <a:solidFill>
+                        <a:srgbClr val="D9D9D9"/>
+                      </a:solidFill>
+                      <a:prstDash val="solid"/>
+                      <a:round/>
+                      <a:headEnd type="none" w="med" len="med"/>
+                      <a:tailEnd type="none" w="med" len="med"/>
+                    </a:lnB>
+                  </a:tcPr>
+                </a:tc>
+              </a:tr>
+              <a:tr h="566928">
+                <a:tc>
+                  <a:txBody>
+                    <a:bodyPr/>
+                    <a:lstStyle/>
+                    <a:p>
+                      <a:pPr indent="0" marL="0">
+                        <a:buNone/>
+                      </a:pPr>
+                      <a:r>
+                        <a:rPr lang="en-US" sz="900" dirty="0">
+                          <a:solidFill>
+                            <a:srgbClr val="262626"/>
+                          </a:solidFill>
+                          <a:latin typeface="Arial" pitchFamily="34" charset="0"/>
+                          <a:ea typeface="Arial" pitchFamily="34" charset="-122"/>
+                          <a:cs typeface="Arial" pitchFamily="34" charset="-120"/>
+                        </a:rPr>
+                        <a:t>What IS Ea physically — where is the hill in the structure? (basics)</a:t>
+                      </a:r>
+                      <a:endParaRPr lang="en-US" sz="900" dirty="0">
+                        <a:latin typeface="Arial" charset="0"/>
+                        <a:ea typeface="Arial" charset="0"/>
+                        <a:cs typeface="Arial" charset="0"/>
+                      </a:endParaRPr>
+                    </a:p>
+                  </a:txBody>
+                  <a:tcPr marL="36576" marR="36576" marT="36576" marB="36576" anchor="ctr">
+                    <a:lnL w="9525" cap="flat" cmpd="sng" algn="ctr">
+                      <a:solidFill>
+                        <a:srgbClr val="D9D9D9"/>
+                      </a:solidFill>
+                      <a:prstDash val="solid"/>
+                      <a:round/>
+                      <a:headEnd type="none" w="med" len="med"/>
+                      <a:tailEnd type="none" w="med" len="med"/>
+                    </a:lnL>
+                    <a:lnR w="9525" cap="flat" cmpd="sng" algn="ctr">
+                      <a:solidFill>
+                        <a:srgbClr val="D9D9D9"/>
+                      </a:solidFill>
+                      <a:prstDash val="solid"/>
+                      <a:round/>
+                      <a:headEnd type="none" w="med" len="med"/>
+                      <a:tailEnd type="none" w="med" len="med"/>
+                    </a:lnR>
+                    <a:lnT w="9525" cap="flat" cmpd="sng" algn="ctr">
+                      <a:solidFill>
+                        <a:srgbClr val="D9D9D9"/>
+                      </a:solidFill>
+                      <a:prstDash val="solid"/>
+                      <a:round/>
+                      <a:headEnd type="none" w="med" len="med"/>
+                      <a:tailEnd type="none" w="med" len="med"/>
+                    </a:lnT>
+                    <a:lnB w="9525" cap="flat" cmpd="sng" algn="ctr">
+                      <a:solidFill>
+                        <a:srgbClr val="D9D9D9"/>
+                      </a:solidFill>
+                      <a:prstDash val="solid"/>
+                      <a:round/>
+                      <a:headEnd type="none" w="med" len="med"/>
+                      <a:tailEnd type="none" w="med" len="med"/>
+                    </a:lnB>
+                  </a:tcPr>
+                </a:tc>
+                <a:tc>
+                  <a:txBody>
+                    <a:bodyPr/>
+                    <a:lstStyle/>
+                    <a:p>
+                      <a:pPr indent="0" marL="0">
+                        <a:buNone/>
+                      </a:pPr>
+                      <a:r>
+                        <a:rPr lang="en-US" sz="900" dirty="0">
+                          <a:solidFill>
+                            <a:srgbClr val="262626"/>
+                          </a:solidFill>
+                          <a:latin typeface="Arial" pitchFamily="34" charset="0"/>
+                          <a:ea typeface="Arial" pitchFamily="34" charset="-122"/>
+                          <a:cs typeface="Arial" pitchFamily="34" charset="-120"/>
+                        </a:rPr>
+                        <a:t>Not cage rattling but the inter-cage jump saddle; 4d-site disorder lowers that saddle — exactly what the β-gate separates.</a:t>
+                      </a:r>
+                      <a:endParaRPr lang="en-US" sz="900" dirty="0">
+                        <a:latin typeface="Arial" charset="0"/>
+                        <a:ea typeface="Arial" charset="0"/>
+                        <a:cs typeface="Arial" charset="0"/>
+                      </a:endParaRPr>
+                    </a:p>
+                  </a:txBody>
+                  <a:tcPr marL="36576" marR="36576" marT="36576" marB="36576" anchor="ctr">
+                    <a:lnL w="9525" cap="flat" cmpd="sng" algn="ctr">
+                      <a:solidFill>
+                        <a:srgbClr val="D9D9D9"/>
+                      </a:solidFill>
+                      <a:prstDash val="solid"/>
+                      <a:round/>
+                      <a:headEnd type="none" w="med" len="med"/>
+                      <a:tailEnd type="none" w="med" len="med"/>
+                    </a:lnL>
+                    <a:lnR w="9525" cap="flat" cmpd="sng" algn="ctr">
+                      <a:solidFill>
+                        <a:srgbClr val="D9D9D9"/>
+                      </a:solidFill>
+                      <a:prstDash val="solid"/>
+                      <a:round/>
+                      <a:headEnd type="none" w="med" len="med"/>
+                      <a:tailEnd type="none" w="med" len="med"/>
+                    </a:lnR>
+                    <a:lnT w="9525" cap="flat" cmpd="sng" algn="ctr">
+                      <a:solidFill>
+                        <a:srgbClr val="D9D9D9"/>
+                      </a:solidFill>
+                      <a:prstDash val="solid"/>
+                      <a:round/>
+                      <a:headEnd type="none" w="med" len="med"/>
+                      <a:tailEnd type="none" w="med" len="med"/>
+                    </a:lnT>
+                    <a:lnB w="9525" cap="flat" cmpd="sng" algn="ctr">
+                      <a:solidFill>
+                        <a:srgbClr val="D9D9D9"/>
+                      </a:solidFill>
+                      <a:prstDash val="solid"/>
+                      <a:round/>
+                      <a:headEnd type="none" w="med" len="med"/>
+                      <a:tailEnd type="none" w="med" len="med"/>
+                    </a:lnB>
+                  </a:tcPr>
+                </a:tc>
+              </a:tr>
+              <a:tr h="566928">
+                <a:tc>
+                  <a:txBody>
+                    <a:bodyPr/>
+                    <a:lstStyle/>
+                    <a:p>
+                      <a:pPr indent="0" marL="0">
+                        <a:buNone/>
+                      </a:pPr>
+                      <a:r>
+                        <a:rPr lang="en-US" sz="900" dirty="0">
+                          <a:solidFill>
+                            <a:srgbClr val="262626"/>
+                          </a:solidFill>
+                          <a:latin typeface="Arial" pitchFamily="34" charset="0"/>
+                          <a:ea typeface="Arial" pitchFamily="34" charset="-122"/>
+                          <a:cs typeface="Arial" pitchFamily="34" charset="-120"/>
+                        </a:rPr>
+                        <a:t>“UMA is a validated standard” — validated on what, by how much?</a:t>
+                      </a:r>
+                      <a:endParaRPr lang="en-US" sz="900" dirty="0">
+                        <a:latin typeface="Arial" charset="0"/>
+                        <a:ea typeface="Arial" charset="0"/>
+                        <a:cs typeface="Arial" charset="0"/>
+                      </a:endParaRPr>
+                    </a:p>
+                  </a:txBody>
+                  <a:tcPr marL="36576" marR="36576" marT="36576" marB="36576" anchor="ctr">
+                    <a:lnL w="9525" cap="flat" cmpd="sng" algn="ctr">
+                      <a:solidFill>
+                        <a:srgbClr val="D9D9D9"/>
+                      </a:solidFill>
+                      <a:prstDash val="solid"/>
+                      <a:round/>
+                      <a:headEnd type="none" w="med" len="med"/>
+                      <a:tailEnd type="none" w="med" len="med"/>
+                    </a:lnL>
+                    <a:lnR w="9525" cap="flat" cmpd="sng" algn="ctr">
+                      <a:solidFill>
+                        <a:srgbClr val="D9D9D9"/>
+                      </a:solidFill>
+                      <a:prstDash val="solid"/>
+                      <a:round/>
+                      <a:headEnd type="none" w="med" len="med"/>
+                      <a:tailEnd type="none" w="med" len="med"/>
+                    </a:lnR>
+                    <a:lnT w="9525" cap="flat" cmpd="sng" algn="ctr">
+                      <a:solidFill>
+                        <a:srgbClr val="D9D9D9"/>
+                      </a:solidFill>
+                      <a:prstDash val="solid"/>
+                      <a:round/>
+                      <a:headEnd type="none" w="med" len="med"/>
+                      <a:tailEnd type="none" w="med" len="med"/>
+                    </a:lnT>
+                    <a:lnB w="9525" cap="flat" cmpd="sng" algn="ctr">
+                      <a:solidFill>
+                        <a:srgbClr val="D9D9D9"/>
+                      </a:solidFill>
+                      <a:prstDash val="solid"/>
+                      <a:round/>
+                      <a:headEnd type="none" w="med" len="med"/>
+                      <a:tailEnd type="none" w="med" len="med"/>
+                    </a:lnB>
+                  </a:tcPr>
+                </a:tc>
+                <a:tc>
+                  <a:txBody>
+                    <a:bodyPr/>
+                    <a:lstStyle/>
+                    <a:p>
+                      <a:pPr indent="0" marL="0">
+                        <a:buNone/>
+                      </a:pPr>
+                      <a:r>
+                        <a:rPr lang="en-US" sz="900" dirty="0">
+                          <a:solidFill>
+                            <a:srgbClr val="262626"/>
+                          </a:solidFill>
+                          <a:latin typeface="Arial" pitchFamily="34" charset="0"/>
+                          <a:ea typeface="Arial" pitchFamily="34" charset="-122"/>
+                          <a:cs typeface="Arial" pitchFamily="34" charset="-120"/>
+                        </a:rPr>
+                        <a:t>Validated for relative ranking and structure reproduction on the LPSCl family (records in repo); absolutes are never quoted — that IS the acknowledged limit.</a:t>
+                      </a:r>
+                      <a:endParaRPr lang="en-US" sz="900" dirty="0">
+                        <a:latin typeface="Arial" charset="0"/>
+                        <a:ea typeface="Arial" charset="0"/>
+                        <a:cs typeface="Arial" charset="0"/>
+                      </a:endParaRPr>
+                    </a:p>
+                  </a:txBody>
+                  <a:tcPr marL="36576" marR="36576" marT="36576" marB="36576" anchor="ctr">
+                    <a:lnL w="9525" cap="flat" cmpd="sng" algn="ctr">
+                      <a:solidFill>
+                        <a:srgbClr val="D9D9D9"/>
+                      </a:solidFill>
+                      <a:prstDash val="solid"/>
+                      <a:round/>
+                      <a:headEnd type="none" w="med" len="med"/>
+                      <a:tailEnd type="none" w="med" len="med"/>
+                    </a:lnL>
+                    <a:lnR w="9525" cap="flat" cmpd="sng" algn="ctr">
+                      <a:solidFill>
+                        <a:srgbClr val="D9D9D9"/>
+                      </a:solidFill>
+                      <a:prstDash val="solid"/>
+                      <a:round/>
+                      <a:headEnd type="none" w="med" len="med"/>
+                      <a:tailEnd type="none" w="med" len="med"/>
+                    </a:lnR>
+                    <a:lnT w="9525" cap="flat" cmpd="sng" algn="ctr">
+                      <a:solidFill>
+                        <a:srgbClr val="D9D9D9"/>
+                      </a:solidFill>
+                      <a:prstDash val="solid"/>
+                      <a:round/>
+                      <a:headEnd type="none" w="med" len="med"/>
+                      <a:tailEnd type="none" w="med" len="med"/>
+                    </a:lnT>
+                    <a:lnB w="9525" cap="flat" cmpd="sng" algn="ctr">
+                      <a:solidFill>
+                        <a:srgbClr val="D9D9D9"/>
+                      </a:solidFill>
+                      <a:prstDash val="solid"/>
+                      <a:round/>
+                      <a:headEnd type="none" w="med" len="med"/>
+                      <a:tailEnd type="none" w="med" len="med"/>
+                    </a:lnB>
+                  </a:tcPr>
+                </a:tc>
+              </a:tr>
+              <a:tr h="566928">
+                <a:tc>
+                  <a:txBody>
+                    <a:bodyPr/>
+                    <a:lstStyle/>
+                    <a:p>
+                      <a:pPr indent="0" marL="0">
+                        <a:buNone/>
+                      </a:pPr>
+                      <a:r>
+                        <a:rPr lang="en-US" sz="900" dirty="0">
+                          <a:solidFill>
+                            <a:srgbClr val="262626"/>
+                          </a:solidFill>
+                          <a:latin typeface="Arial" pitchFamily="34" charset="0"/>
+                          <a:ea typeface="Arial" pitchFamily="34" charset="-122"/>
+                          <a:cs typeface="Arial" pitchFamily="34" charset="-120"/>
+                        </a:rPr>
+                        <a:t>Will HfO₂ really enter the lattice in a 550 °C H₂S synthesis? Cost of Hf?</a:t>
+                      </a:r>
+                      <a:endParaRPr lang="en-US" sz="900" dirty="0">
+                        <a:latin typeface="Arial" charset="0"/>
+                        <a:ea typeface="Arial" charset="0"/>
+                        <a:cs typeface="Arial" charset="0"/>
+                      </a:endParaRPr>
+                    </a:p>
+                  </a:txBody>
+                  <a:tcPr marL="36576" marR="36576" marT="36576" marB="36576" anchor="ctr">
+                    <a:lnL w="9525" cap="flat" cmpd="sng" algn="ctr">
+                      <a:solidFill>
+                        <a:srgbClr val="D9D9D9"/>
+                      </a:solidFill>
+                      <a:prstDash val="solid"/>
+                      <a:round/>
+                      <a:headEnd type="none" w="med" len="med"/>
+                      <a:tailEnd type="none" w="med" len="med"/>
+                    </a:lnL>
+                    <a:lnR w="9525" cap="flat" cmpd="sng" algn="ctr">
+                      <a:solidFill>
+                        <a:srgbClr val="D9D9D9"/>
+                      </a:solidFill>
+                      <a:prstDash val="solid"/>
+                      <a:round/>
+                      <a:headEnd type="none" w="med" len="med"/>
+                      <a:tailEnd type="none" w="med" len="med"/>
+                    </a:lnR>
+                    <a:lnT w="9525" cap="flat" cmpd="sng" algn="ctr">
+                      <a:solidFill>
+                        <a:srgbClr val="D9D9D9"/>
+                      </a:solidFill>
+                      <a:prstDash val="solid"/>
+                      <a:round/>
+                      <a:headEnd type="none" w="med" len="med"/>
+                      <a:tailEnd type="none" w="med" len="med"/>
+                    </a:lnT>
+                    <a:lnB w="9525" cap="flat" cmpd="sng" algn="ctr">
+                      <a:solidFill>
+                        <a:srgbClr val="D9D9D9"/>
+                      </a:solidFill>
+                      <a:prstDash val="solid"/>
+                      <a:round/>
+                      <a:headEnd type="none" w="med" len="med"/>
+                      <a:tailEnd type="none" w="med" len="med"/>
+                    </a:lnB>
+                  </a:tcPr>
+                </a:tc>
+                <a:tc>
+                  <a:txBody>
+                    <a:bodyPr/>
+                    <a:lstStyle/>
+                    <a:p>
+                      <a:pPr indent="0" marL="0">
+                        <a:buNone/>
+                      </a:pPr>
+                      <a:r>
+                        <a:rPr lang="en-US" sz="900" dirty="0">
+                          <a:solidFill>
+                            <a:srgbClr val="262626"/>
+                          </a:solidFill>
+                          <a:latin typeface="Arial" pitchFamily="34" charset="0"/>
+                          <a:ea typeface="Arial" pitchFamily="34" charset="-122"/>
+                          <a:cs typeface="Arial" pitchFamily="34" charset="-120"/>
+                        </a:rPr>
+                        <a:t>We don't know — that is why formation-energy and phase-separation checks are in the label plan, and synthesis/cost is the experimental team's call. Today it is a hypothesis.</a:t>
+                      </a:r>
+                      <a:endParaRPr lang="en-US" sz="900" dirty="0">
+                        <a:latin typeface="Arial" charset="0"/>
+                        <a:ea typeface="Arial" charset="0"/>
+                        <a:cs typeface="Arial" charset="0"/>
+                      </a:endParaRPr>
+                    </a:p>
+                  </a:txBody>
+                  <a:tcPr marL="36576" marR="36576" marT="36576" marB="36576" anchor="ctr">
+                    <a:lnL w="9525" cap="flat" cmpd="sng" algn="ctr">
+                      <a:solidFill>
+                        <a:srgbClr val="D9D9D9"/>
+                      </a:solidFill>
+                      <a:prstDash val="solid"/>
+                      <a:round/>
+                      <a:headEnd type="none" w="med" len="med"/>
+                      <a:tailEnd type="none" w="med" len="med"/>
+                    </a:lnL>
+                    <a:lnR w="9525" cap="flat" cmpd="sng" algn="ctr">
+                      <a:solidFill>
+                        <a:srgbClr val="D9D9D9"/>
+                      </a:solidFill>
+                      <a:prstDash val="solid"/>
+                      <a:round/>
+                      <a:headEnd type="none" w="med" len="med"/>
+                      <a:tailEnd type="none" w="med" len="med"/>
+                    </a:lnR>
+                    <a:lnT w="9525" cap="flat" cmpd="sng" algn="ctr">
+                      <a:solidFill>
+                        <a:srgbClr val="D9D9D9"/>
+                      </a:solidFill>
+                      <a:prstDash val="solid"/>
+                      <a:round/>
+                      <a:headEnd type="none" w="med" len="med"/>
+                      <a:tailEnd type="none" w="med" len="med"/>
+                    </a:lnT>
+                    <a:lnB w="9525" cap="flat" cmpd="sng" algn="ctr">
+                      <a:solidFill>
+                        <a:srgbClr val="D9D9D9"/>
+                      </a:solidFill>
+                      <a:prstDash val="solid"/>
+                      <a:round/>
+                      <a:headEnd type="none" w="med" len="med"/>
+                      <a:tailEnd type="none" w="med" len="med"/>
+                    </a:lnB>
+                  </a:tcPr>
+                </a:tc>
+              </a:tr>
+              <a:tr h="566928">
+                <a:tc>
+                  <a:txBody>
+                    <a:bodyPr/>
+                    <a:lstStyle/>
+                    <a:p>
+                      <a:pPr indent="0" marL="0">
+                        <a:buNone/>
+                      </a:pPr>
+                      <a:r>
+                        <a:rPr lang="en-US" sz="900" dirty="0">
+                          <a:solidFill>
+                            <a:srgbClr val="262626"/>
+                          </a:solidFill>
+                          <a:latin typeface="Arial" pitchFamily="34" charset="0"/>
+                          <a:ea typeface="Arial" pitchFamily="34" charset="-122"/>
+                          <a:cs typeface="Arial" pitchFamily="34" charset="-120"/>
+                        </a:rPr>
+                        <a:t>Name three elements NOT in your 47 — how does curation bias propagate?</a:t>
+                      </a:r>
+                      <a:endParaRPr lang="en-US" sz="900" dirty="0">
+                        <a:latin typeface="Arial" charset="0"/>
+                        <a:ea typeface="Arial" charset="0"/>
+                        <a:cs typeface="Arial" charset="0"/>
+                      </a:endParaRPr>
+                    </a:p>
+                  </a:txBody>
+                  <a:tcPr marL="36576" marR="36576" marT="36576" marB="36576" anchor="ctr">
+                    <a:lnL w="9525" cap="flat" cmpd="sng" algn="ctr">
+                      <a:solidFill>
+                        <a:srgbClr val="D9D9D9"/>
+                      </a:solidFill>
+                      <a:prstDash val="solid"/>
+                      <a:round/>
+                      <a:headEnd type="none" w="med" len="med"/>
+                      <a:tailEnd type="none" w="med" len="med"/>
+                    </a:lnL>
+                    <a:lnR w="9525" cap="flat" cmpd="sng" algn="ctr">
+                      <a:solidFill>
+                        <a:srgbClr val="D9D9D9"/>
+                      </a:solidFill>
+                      <a:prstDash val="solid"/>
+                      <a:round/>
+                      <a:headEnd type="none" w="med" len="med"/>
+                      <a:tailEnd type="none" w="med" len="med"/>
+                    </a:lnR>
+                    <a:lnT w="9525" cap="flat" cmpd="sng" algn="ctr">
+                      <a:solidFill>
+                        <a:srgbClr val="D9D9D9"/>
+                      </a:solidFill>
+                      <a:prstDash val="solid"/>
+                      <a:round/>
+                      <a:headEnd type="none" w="med" len="med"/>
+                      <a:tailEnd type="none" w="med" len="med"/>
+                    </a:lnT>
+                    <a:lnB w="9525" cap="flat" cmpd="sng" algn="ctr">
+                      <a:solidFill>
+                        <a:srgbClr val="D9D9D9"/>
+                      </a:solidFill>
+                      <a:prstDash val="solid"/>
+                      <a:round/>
+                      <a:headEnd type="none" w="med" len="med"/>
+                      <a:tailEnd type="none" w="med" len="med"/>
+                    </a:lnB>
+                  </a:tcPr>
+                </a:tc>
+                <a:tc>
+                  <a:txBody>
+                    <a:bodyPr/>
+                    <a:lstStyle/>
+                    <a:p>
+                      <a:pPr indent="0" marL="0">
+                        <a:buNone/>
+                      </a:pPr>
+                      <a:r>
+                        <a:rPr lang="en-US" sz="900" dirty="0">
+                          <a:solidFill>
+                            <a:srgbClr val="262626"/>
+                          </a:solidFill>
+                          <a:latin typeface="Arial" pitchFamily="34" charset="0"/>
+                          <a:ea typeface="Arial" pitchFamily="34" charset="-122"/>
+                          <a:cs typeface="Arial" pitchFamily="34" charset="-120"/>
+                        </a:rPr>
+                        <a:t>Selection history is logged step-by-step (pool_provenance); we did not quantify bias propagation — which is exactly why pass counts are never used as discovery metrics.</a:t>
+                      </a:r>
+                      <a:endParaRPr lang="en-US" sz="900" dirty="0">
+                        <a:latin typeface="Arial" charset="0"/>
+                        <a:ea typeface="Arial" charset="0"/>
+                        <a:cs typeface="Arial" charset="0"/>
+                      </a:endParaRPr>
+                    </a:p>
+                  </a:txBody>
+                  <a:tcPr marL="36576" marR="36576" marT="36576" marB="36576" anchor="ctr">
+                    <a:lnL w="9525" cap="flat" cmpd="sng" algn="ctr">
+                      <a:solidFill>
+                        <a:srgbClr val="D9D9D9"/>
+                      </a:solidFill>
+                      <a:prstDash val="solid"/>
+                      <a:round/>
+                      <a:headEnd type="none" w="med" len="med"/>
+                      <a:tailEnd type="none" w="med" len="med"/>
+                    </a:lnL>
+                    <a:lnR w="9525" cap="flat" cmpd="sng" algn="ctr">
+                      <a:solidFill>
+                        <a:srgbClr val="D9D9D9"/>
+                      </a:solidFill>
+                      <a:prstDash val="solid"/>
+                      <a:round/>
+                      <a:headEnd type="none" w="med" len="med"/>
+                      <a:tailEnd type="none" w="med" len="med"/>
+                    </a:lnR>
+                    <a:lnT w="9525" cap="flat" cmpd="sng" algn="ctr">
+                      <a:solidFill>
+                        <a:srgbClr val="D9D9D9"/>
+                      </a:solidFill>
+                      <a:prstDash val="solid"/>
+                      <a:round/>
+                      <a:headEnd type="none" w="med" len="med"/>
+                      <a:tailEnd type="none" w="med" len="med"/>
+                    </a:lnT>
+                    <a:lnB w="9525" cap="flat" cmpd="sng" algn="ctr">
+                      <a:solidFill>
+                        <a:srgbClr val="D9D9D9"/>
+                      </a:solidFill>
+                      <a:prstDash val="solid"/>
+                      <a:round/>
+                      <a:headEnd type="none" w="med" len="med"/>
+                      <a:tailEnd type="none" w="med" len="med"/>
+                    </a:lnB>
+                  </a:tcPr>
+                </a:tc>
+              </a:tr>
+            </a:tbl>
+          </a:graphicData>
+        </a:graphic>
+      </p:graphicFrame>
+      <p:sp>
+        <p:nvSpPr>
+          <p:cNvPr id="6" name="Text 3"/>
+          <p:cNvSpPr/>
+          <p:nvPr/>
+        </p:nvSpPr>
+        <p:spPr>
+          <a:xfrm>
+            <a:off x="502920" y="5120640"/>
+            <a:ext cx="8138160" cy="274320"/>
           </a:xfrm>
           <a:prstGeom prst="rect">
             <a:avLst/>
@@ -41743,186 +45123,14 @@
           <a:ln/>
         </p:spPr>
         <p:txBody>
-          <a:bodyPr wrap="square" lIns="0" tIns="0" rIns="0" bIns="0" rtlCol="0" anchor="t"/>
-          <a:lstStyle/>
-          <a:p>
-            <a:pPr lvl="1" marL="254000" indent="-127000">
-              <a:spcAft>
-                <a:spcPts val="500"/>
-              </a:spcAft>
-              <a:buSzPct val="100000"/>
-              <a:buChar char="–"/>
-            </a:pPr>
-            <a:r>
-              <a:rPr lang="en-US" sz="1100" dirty="0">
-                <a:solidFill>
-                  <a:srgbClr val="7F7F7F"/>
-                </a:solidFill>
-                <a:latin typeface="Arial" pitchFamily="34" charset="0"/>
-                <a:ea typeface="Arial" pitchFamily="34" charset="-122"/>
-                <a:cs typeface="Arial" pitchFamily="34" charset="-120"/>
-              </a:rPr>
-              <a:t>Sendek et al., Energy Environ. Sci. 2017, 10, 306 — 12,831-candidate ML screening</a:t>
-            </a:r>
-            <a:endParaRPr lang="en-US" sz="1100" dirty="0"/>
-          </a:p>
-          <a:p>
-            <a:pPr lvl="1" marL="254000" indent="-127000">
-              <a:spcAft>
-                <a:spcPts val="500"/>
-              </a:spcAft>
-              <a:buSzPct val="100000"/>
-              <a:buChar char="–"/>
-            </a:pPr>
-            <a:r>
-              <a:rPr lang="en-US" sz="1100" dirty="0">
-                <a:solidFill>
-                  <a:srgbClr val="7F7F7F"/>
-                </a:solidFill>
-                <a:latin typeface="Arial" pitchFamily="34" charset="0"/>
-                <a:ea typeface="Arial" pitchFamily="34" charset="-122"/>
-                <a:cs typeface="Arial" pitchFamily="34" charset="-120"/>
-              </a:rPr>
-              <a:t>Xiao et al., Joule 2019 — cathode-coating funnel (104,082 → 184)</a:t>
-            </a:r>
-            <a:endParaRPr lang="en-US" sz="1100" dirty="0"/>
-          </a:p>
-          <a:p>
-            <a:pPr lvl="1" marL="254000" indent="-127000">
-              <a:spcAft>
-                <a:spcPts val="500"/>
-              </a:spcAft>
-              <a:buSzPct val="100000"/>
-              <a:buChar char="–"/>
-            </a:pPr>
-            <a:r>
-              <a:rPr lang="en-US" sz="1100" dirty="0">
-                <a:solidFill>
-                  <a:srgbClr val="7F7F7F"/>
-                </a:solidFill>
-                <a:latin typeface="Arial" pitchFamily="34" charset="0"/>
-                <a:ea typeface="Arial" pitchFamily="34" charset="-122"/>
-                <a:cs typeface="Arial" pitchFamily="34" charset="-120"/>
-              </a:rPr>
-              <a:t>Richards et al., Chem. Mater. 2016 — pseudo-binary interface stability</a:t>
-            </a:r>
-            <a:endParaRPr lang="en-US" sz="1100" dirty="0"/>
-          </a:p>
-          <a:p>
-            <a:pPr lvl="1" marL="254000" indent="-127000">
-              <a:spcAft>
-                <a:spcPts val="500"/>
-              </a:spcAft>
-              <a:buSzPct val="100000"/>
-              <a:buChar char="–"/>
-            </a:pPr>
-            <a:r>
-              <a:rPr lang="en-US" sz="1100" dirty="0">
-                <a:solidFill>
-                  <a:srgbClr val="7F7F7F"/>
-                </a:solidFill>
-                <a:latin typeface="Arial" pitchFamily="34" charset="0"/>
-                <a:ea typeface="Arial" pitchFamily="34" charset="-122"/>
-                <a:cs typeface="Arial" pitchFamily="34" charset="-120"/>
-              </a:rPr>
-              <a:t>Zhu et al., Angew. Chem. 2020 — air-stability design principles (ΔG_hyd)</a:t>
-            </a:r>
-            <a:endParaRPr lang="en-US" sz="1100" dirty="0"/>
-          </a:p>
-          <a:p>
-            <a:pPr lvl="1" marL="254000" indent="-127000">
-              <a:spcAft>
-                <a:spcPts val="500"/>
-              </a:spcAft>
-              <a:buSzPct val="100000"/>
-              <a:buChar char="–"/>
-            </a:pPr>
-            <a:r>
-              <a:rPr lang="en-US" sz="1100" dirty="0">
-                <a:solidFill>
-                  <a:srgbClr val="7F7F7F"/>
-                </a:solidFill>
-                <a:latin typeface="Arial" pitchFamily="34" charset="0"/>
-                <a:ea typeface="Arial" pitchFamily="34" charset="-122"/>
-                <a:cs typeface="Arial" pitchFamily="34" charset="-120"/>
-              </a:rPr>
-              <a:t>Kahle et al. 2020 — high-throughput AIMD screening</a:t>
-            </a:r>
-            <a:endParaRPr lang="en-US" sz="1100" dirty="0"/>
-          </a:p>
-          <a:p>
-            <a:pPr lvl="1" marL="254000" indent="-127000">
-              <a:spcAft>
-                <a:spcPts val="500"/>
-              </a:spcAft>
-              <a:buSzPct val="100000"/>
-              <a:buChar char="–"/>
-            </a:pPr>
-            <a:r>
-              <a:rPr lang="en-US" sz="1100" dirty="0">
-                <a:solidFill>
-                  <a:srgbClr val="7F7F7F"/>
-                </a:solidFill>
-                <a:latin typeface="Arial" pitchFamily="34" charset="0"/>
-                <a:ea typeface="Arial" pitchFamily="34" charset="-122"/>
-                <a:cs typeface="Arial" pitchFamily="34" charset="-120"/>
-              </a:rPr>
-              <a:t>He et al., Energy Environ. Mater. 2019 — DFT for battery materials (review)</a:t>
-            </a:r>
-            <a:endParaRPr lang="en-US" sz="1100" dirty="0"/>
-          </a:p>
-          <a:p>
-            <a:pPr lvl="1" marL="254000" indent="-127000">
-              <a:spcAft>
-                <a:spcPts val="500"/>
-              </a:spcAft>
-              <a:buSzPct val="100000"/>
-              <a:buChar char="–"/>
-            </a:pPr>
-            <a:r>
-              <a:rPr lang="en-US" sz="1100" dirty="0">
-                <a:solidFill>
-                  <a:srgbClr val="7F7F7F"/>
-                </a:solidFill>
-                <a:latin typeface="Arial" pitchFamily="34" charset="0"/>
-                <a:ea typeface="Arial" pitchFamily="34" charset="-122"/>
-                <a:cs typeface="Arial" pitchFamily="34" charset="-120"/>
-              </a:rPr>
-              <a:t>Famprikis et al., Nat. Mater. 2019 — fundamentals of inorganic SSEs</a:t>
-            </a:r>
-            <a:endParaRPr lang="en-US" sz="1100" dirty="0"/>
-          </a:p>
-          <a:p>
-            <a:pPr lvl="1" marL="254000" indent="-127000">
-              <a:spcAft>
-                <a:spcPts val="500"/>
-              </a:spcAft>
-              <a:buSzPct val="100000"/>
-              <a:buChar char="–"/>
-            </a:pPr>
-            <a:r>
-              <a:rPr lang="en-US" sz="1100" dirty="0">
-                <a:solidFill>
-                  <a:srgbClr val="7F7F7F"/>
-                </a:solidFill>
-                <a:latin typeface="Arial" pitchFamily="34" charset="0"/>
-                <a:ea typeface="Arial" pitchFamily="34" charset="-122"/>
-                <a:cs typeface="Arial" pitchFamily="34" charset="-120"/>
-              </a:rPr>
-              <a:t>InF₃/GaF₃ co-substitution lineage (AEM 2024 / EMA 2026) — argyrodite two-dopant precedent</a:t>
-            </a:r>
-            <a:endParaRPr lang="en-US" sz="1100" dirty="0"/>
-          </a:p>
-          <a:p>
-            <a:pPr marL="127000" indent="-127000">
-              <a:spcAft>
-                <a:spcPts val="800"/>
-              </a:spcAft>
-              <a:buSzPct val="100000"/>
-              <a:buChar char="·"/>
-            </a:pPr>
-            <a:r>
-              <a:rPr lang="en-US" sz="1100" b="1" dirty="0">
+          <a:bodyPr wrap="square" lIns="0" tIns="0" rIns="0" bIns="0" rtlCol="0" anchor="ctr"/>
+          <a:lstStyle/>
+          <a:p>
+            <a:pPr indent="0" marL="0">
+              <a:buNone/>
+            </a:pPr>
+            <a:r>
+              <a:rPr lang="en-US" sz="950" i="1" dirty="0">
                 <a:solidFill>
                   <a:srgbClr val="9E2A2B"/>
                 </a:solidFill>
@@ -41930,15 +45138,15 @@
                 <a:ea typeface="Arial" pitchFamily="34" charset="-122"/>
                 <a:cs typeface="Arial" pitchFamily="34" charset="-120"/>
               </a:rPr>
-              <a:t>NOT held (do not cite until PDFs secured): Hohenberg–Kohn 1964 · Kohn–Sham 1965 · Pugh · Dronskowski · Dudarev</a:t>
-            </a:r>
-            <a:endParaRPr lang="en-US" sz="1100" dirty="0"/>
-          </a:p>
-        </p:txBody>
-      </p:sp>
-      <p:sp>
-        <p:nvSpPr>
-          <p:cNvPr id="7" name="Text 4"/>
+              <a:t>Before the talk: actually memorize three excluded elements — the last answer collapses without them.</a:t>
+            </a:r>
+            <a:endParaRPr lang="en-US" sz="950" dirty="0"/>
+          </a:p>
+        </p:txBody>
+      </p:sp>
+      <p:sp>
+        <p:nvSpPr>
+          <p:cNvPr id="8" name="Text 4"/>
           <p:cNvSpPr/>
           <p:nvPr/>
         </p:nvSpPr>
@@ -41991,7 +45199,7 @@
       </p:sp>
       <p:sp>
         <p:nvSpPr>
-          <p:cNvPr id="8" name="Text 5"/>
+          <p:cNvPr id="9" name="Text 5"/>
           <p:cNvSpPr/>
           <p:nvPr/>
         </p:nvSpPr>
@@ -42086,7 +45294,7 @@
                 <a:ea typeface="Arial" pitchFamily="34" charset="-122"/>
                 <a:cs typeface="Arial" pitchFamily="34" charset="-120"/>
               </a:rPr>
-              <a:t>Appendix A7</a:t>
+              <a:t>Appendix A6</a:t>
             </a:r>
             <a:endParaRPr lang="en-US" sz="1100" dirty="0"/>
           </a:p>
@@ -42125,7 +45333,7 @@
                 <a:ea typeface="Arial" pitchFamily="34" charset="-122"/>
                 <a:cs typeface="Arial" pitchFamily="34" charset="-120"/>
               </a:rPr>
-              <a:t>ML backup — the numbers behind Part 5</a:t>
+              <a:t>References — only what we physically hold (litdb)</a:t>
             </a:r>
             <a:endParaRPr lang="en-US" sz="2000" dirty="0"/>
           </a:p>
@@ -42154,9 +45362,438 @@
           </a:ln>
         </p:spPr>
       </p:sp>
+      <p:sp>
+        <p:nvSpPr>
+          <p:cNvPr id="5" name="Text 3"/>
+          <p:cNvSpPr/>
+          <p:nvPr/>
+        </p:nvSpPr>
+        <p:spPr>
+          <a:xfrm>
+            <a:off x="502920" y="1463040"/>
+            <a:ext cx="8138160" cy="4389120"/>
+          </a:xfrm>
+          <a:prstGeom prst="rect">
+            <a:avLst/>
+          </a:prstGeom>
+          <a:noFill/>
+          <a:ln/>
+        </p:spPr>
+        <p:txBody>
+          <a:bodyPr wrap="square" lIns="0" tIns="0" rIns="0" bIns="0" rtlCol="0" anchor="t"/>
+          <a:lstStyle/>
+          <a:p>
+            <a:pPr lvl="1" marL="254000" indent="-127000">
+              <a:spcAft>
+                <a:spcPts val="500"/>
+              </a:spcAft>
+              <a:buSzPct val="100000"/>
+              <a:buChar char="–"/>
+            </a:pPr>
+            <a:r>
+              <a:rPr lang="en-US" sz="1100" dirty="0">
+                <a:solidFill>
+                  <a:srgbClr val="7F7F7F"/>
+                </a:solidFill>
+                <a:latin typeface="Arial" pitchFamily="34" charset="0"/>
+                <a:ea typeface="Arial" pitchFamily="34" charset="-122"/>
+                <a:cs typeface="Arial" pitchFamily="34" charset="-120"/>
+              </a:rPr>
+              <a:t>Sendek et al., Energy Environ. Sci. 2017, 10, 306 — 12,831-candidate ML screening</a:t>
+            </a:r>
+            <a:endParaRPr lang="en-US" sz="1100" dirty="0"/>
+          </a:p>
+          <a:p>
+            <a:pPr lvl="1" marL="254000" indent="-127000">
+              <a:spcAft>
+                <a:spcPts val="500"/>
+              </a:spcAft>
+              <a:buSzPct val="100000"/>
+              <a:buChar char="–"/>
+            </a:pPr>
+            <a:r>
+              <a:rPr lang="en-US" sz="1100" dirty="0">
+                <a:solidFill>
+                  <a:srgbClr val="7F7F7F"/>
+                </a:solidFill>
+                <a:latin typeface="Arial" pitchFamily="34" charset="0"/>
+                <a:ea typeface="Arial" pitchFamily="34" charset="-122"/>
+                <a:cs typeface="Arial" pitchFamily="34" charset="-120"/>
+              </a:rPr>
+              <a:t>Xiao et al., Joule 2019 — cathode-coating funnel (104,082 → 184)</a:t>
+            </a:r>
+            <a:endParaRPr lang="en-US" sz="1100" dirty="0"/>
+          </a:p>
+          <a:p>
+            <a:pPr lvl="1" marL="254000" indent="-127000">
+              <a:spcAft>
+                <a:spcPts val="500"/>
+              </a:spcAft>
+              <a:buSzPct val="100000"/>
+              <a:buChar char="–"/>
+            </a:pPr>
+            <a:r>
+              <a:rPr lang="en-US" sz="1100" dirty="0">
+                <a:solidFill>
+                  <a:srgbClr val="7F7F7F"/>
+                </a:solidFill>
+                <a:latin typeface="Arial" pitchFamily="34" charset="0"/>
+                <a:ea typeface="Arial" pitchFamily="34" charset="-122"/>
+                <a:cs typeface="Arial" pitchFamily="34" charset="-120"/>
+              </a:rPr>
+              <a:t>Richards et al., Chem. Mater. 2016 — pseudo-binary interface stability</a:t>
+            </a:r>
+            <a:endParaRPr lang="en-US" sz="1100" dirty="0"/>
+          </a:p>
+          <a:p>
+            <a:pPr lvl="1" marL="254000" indent="-127000">
+              <a:spcAft>
+                <a:spcPts val="500"/>
+              </a:spcAft>
+              <a:buSzPct val="100000"/>
+              <a:buChar char="–"/>
+            </a:pPr>
+            <a:r>
+              <a:rPr lang="en-US" sz="1100" dirty="0">
+                <a:solidFill>
+                  <a:srgbClr val="7F7F7F"/>
+                </a:solidFill>
+                <a:latin typeface="Arial" pitchFamily="34" charset="0"/>
+                <a:ea typeface="Arial" pitchFamily="34" charset="-122"/>
+                <a:cs typeface="Arial" pitchFamily="34" charset="-120"/>
+              </a:rPr>
+              <a:t>Zhu et al., Angew. Chem. 2020 — air-stability design principles (ΔG_hyd)</a:t>
+            </a:r>
+            <a:endParaRPr lang="en-US" sz="1100" dirty="0"/>
+          </a:p>
+          <a:p>
+            <a:pPr lvl="1" marL="254000" indent="-127000">
+              <a:spcAft>
+                <a:spcPts val="500"/>
+              </a:spcAft>
+              <a:buSzPct val="100000"/>
+              <a:buChar char="–"/>
+            </a:pPr>
+            <a:r>
+              <a:rPr lang="en-US" sz="1100" dirty="0">
+                <a:solidFill>
+                  <a:srgbClr val="7F7F7F"/>
+                </a:solidFill>
+                <a:latin typeface="Arial" pitchFamily="34" charset="0"/>
+                <a:ea typeface="Arial" pitchFamily="34" charset="-122"/>
+                <a:cs typeface="Arial" pitchFamily="34" charset="-120"/>
+              </a:rPr>
+              <a:t>Kahle et al. 2020 — high-throughput AIMD screening</a:t>
+            </a:r>
+            <a:endParaRPr lang="en-US" sz="1100" dirty="0"/>
+          </a:p>
+          <a:p>
+            <a:pPr lvl="1" marL="254000" indent="-127000">
+              <a:spcAft>
+                <a:spcPts val="500"/>
+              </a:spcAft>
+              <a:buSzPct val="100000"/>
+              <a:buChar char="–"/>
+            </a:pPr>
+            <a:r>
+              <a:rPr lang="en-US" sz="1100" dirty="0">
+                <a:solidFill>
+                  <a:srgbClr val="7F7F7F"/>
+                </a:solidFill>
+                <a:latin typeface="Arial" pitchFamily="34" charset="0"/>
+                <a:ea typeface="Arial" pitchFamily="34" charset="-122"/>
+                <a:cs typeface="Arial" pitchFamily="34" charset="-120"/>
+              </a:rPr>
+              <a:t>He et al., Energy Environ. Mater. 2019 — DFT for battery materials (review)</a:t>
+            </a:r>
+            <a:endParaRPr lang="en-US" sz="1100" dirty="0"/>
+          </a:p>
+          <a:p>
+            <a:pPr lvl="1" marL="254000" indent="-127000">
+              <a:spcAft>
+                <a:spcPts val="500"/>
+              </a:spcAft>
+              <a:buSzPct val="100000"/>
+              <a:buChar char="–"/>
+            </a:pPr>
+            <a:r>
+              <a:rPr lang="en-US" sz="1100" dirty="0">
+                <a:solidFill>
+                  <a:srgbClr val="7F7F7F"/>
+                </a:solidFill>
+                <a:latin typeface="Arial" pitchFamily="34" charset="0"/>
+                <a:ea typeface="Arial" pitchFamily="34" charset="-122"/>
+                <a:cs typeface="Arial" pitchFamily="34" charset="-120"/>
+              </a:rPr>
+              <a:t>Famprikis et al., Nat. Mater. 2019 — fundamentals of inorganic SSEs</a:t>
+            </a:r>
+            <a:endParaRPr lang="en-US" sz="1100" dirty="0"/>
+          </a:p>
+          <a:p>
+            <a:pPr lvl="1" marL="254000" indent="-127000">
+              <a:spcAft>
+                <a:spcPts val="500"/>
+              </a:spcAft>
+              <a:buSzPct val="100000"/>
+              <a:buChar char="–"/>
+            </a:pPr>
+            <a:r>
+              <a:rPr lang="en-US" sz="1100" dirty="0">
+                <a:solidFill>
+                  <a:srgbClr val="7F7F7F"/>
+                </a:solidFill>
+                <a:latin typeface="Arial" pitchFamily="34" charset="0"/>
+                <a:ea typeface="Arial" pitchFamily="34" charset="-122"/>
+                <a:cs typeface="Arial" pitchFamily="34" charset="-120"/>
+              </a:rPr>
+              <a:t>InF₃/GaF₃ co-substitution lineage (AEM 2024 / EMA 2026) — argyrodite two-dopant precedent</a:t>
+            </a:r>
+            <a:endParaRPr lang="en-US" sz="1100" dirty="0"/>
+          </a:p>
+          <a:p>
+            <a:pPr marL="127000" indent="-127000">
+              <a:spcAft>
+                <a:spcPts val="800"/>
+              </a:spcAft>
+              <a:buSzPct val="100000"/>
+              <a:buChar char="·"/>
+            </a:pPr>
+            <a:r>
+              <a:rPr lang="en-US" sz="1100" b="1" dirty="0">
+                <a:solidFill>
+                  <a:srgbClr val="9E2A2B"/>
+                </a:solidFill>
+                <a:latin typeface="Arial" pitchFamily="34" charset="0"/>
+                <a:ea typeface="Arial" pitchFamily="34" charset="-122"/>
+                <a:cs typeface="Arial" pitchFamily="34" charset="-120"/>
+              </a:rPr>
+              <a:t>NOT held (do not cite until PDFs secured): Hohenberg–Kohn 1964 · Kohn–Sham 1965 · Pugh · Dronskowski · Dudarev</a:t>
+            </a:r>
+            <a:endParaRPr lang="en-US" sz="1100" dirty="0"/>
+          </a:p>
+        </p:txBody>
+      </p:sp>
+      <p:sp>
+        <p:nvSpPr>
+          <p:cNvPr id="7" name="Text 4"/>
+          <p:cNvSpPr/>
+          <p:nvPr/>
+        </p:nvSpPr>
+        <p:spPr>
+          <a:xfrm>
+            <a:off x="457200" y="6473952"/>
+            <a:ext cx="5029200" cy="274320"/>
+          </a:xfrm>
+          <a:prstGeom prst="rect">
+            <a:avLst/>
+          </a:prstGeom>
+          <a:noFill/>
+          <a:ln/>
+        </p:spPr>
+        <p:txBody>
+          <a:bodyPr wrap="square" lIns="0" tIns="0" rIns="0" bIns="0" rtlCol="0" anchor="ctr"/>
+          <a:lstStyle/>
+          <a:p>
+            <a:pPr indent="0" marL="0">
+              <a:buNone/>
+            </a:pPr>
+            <a:r>
+              <a:rPr lang="en-US" sz="800" b="1" dirty="0">
+                <a:solidFill>
+                  <a:srgbClr val="1F4E79"/>
+                </a:solidFill>
+                <a:latin typeface="Arial" pitchFamily="34" charset="0"/>
+                <a:ea typeface="Arial" pitchFamily="34" charset="-122"/>
+                <a:cs typeface="Arial" pitchFamily="34" charset="-120"/>
+              </a:rPr>
+              <a:t>HANYANG UNIVERSITY</a:t>
+            </a:r>
+            <a:pPr indent="0" marL="0">
+              <a:buNone/>
+            </a:pPr>
+            <a:r>
+              <a:rPr lang="en-US" sz="800" dirty="0">
+                <a:solidFill>
+                  <a:srgbClr val="7F7F7F"/>
+                </a:solidFill>
+                <a:latin typeface="Arial" pitchFamily="34" charset="0"/>
+                <a:ea typeface="Arial" pitchFamily="34" charset="-122"/>
+                <a:cs typeface="Arial" pitchFamily="34" charset="-120"/>
+              </a:rPr>
+              <a:t>   Battery Materials Lab.</a:t>
+            </a:r>
+            <a:endParaRPr lang="en-US" sz="800" dirty="0"/>
+          </a:p>
+        </p:txBody>
+      </p:sp>
+      <p:sp>
+        <p:nvSpPr>
+          <p:cNvPr id="8" name="Text 5"/>
+          <p:cNvSpPr/>
+          <p:nvPr/>
+        </p:nvSpPr>
+        <p:spPr>
+          <a:xfrm>
+            <a:off x="8503920" y="6473952"/>
+            <a:ext cx="320040" cy="274320"/>
+          </a:xfrm>
+          <a:prstGeom prst="rect">
+            <a:avLst/>
+          </a:prstGeom>
+          <a:noFill/>
+          <a:ln/>
+        </p:spPr>
+        <p:txBody>
+          <a:bodyPr wrap="square" lIns="0" tIns="0" rIns="0" bIns="0" rtlCol="0" anchor="ctr"/>
+          <a:lstStyle/>
+          <a:p>
+            <a:pPr algn="r" indent="0" marL="0">
+              <a:buNone/>
+            </a:pPr>
+            <a:r>
+              <a:rPr lang="en-US" sz="900" dirty="0">
+                <a:solidFill>
+                  <a:srgbClr val="7F7F7F"/>
+                </a:solidFill>
+                <a:latin typeface="Arial" pitchFamily="34" charset="0"/>
+                <a:ea typeface="Arial" pitchFamily="34" charset="-122"/>
+                <a:cs typeface="Arial" pitchFamily="34" charset="-120"/>
+              </a:rPr>
+              <a:t>42</a:t>
+            </a:r>
+            <a:endParaRPr lang="en-US" sz="900" dirty="0"/>
+          </a:p>
+        </p:txBody>
+      </p:sp>
+    </p:spTree>
+  </p:cSld>
+  <p:clrMapOvr>
+    <a:masterClrMapping/>
+  </p:clrMapOvr>
+</p:sld>
+</file>
+
+<file path=ppt/slides/slide43.xml><?xml version="1.0" encoding="utf-8"?>
+<p:sld xmlns:a="http://schemas.openxmlformats.org/drawingml/2006/main" xmlns:r="http://schemas.openxmlformats.org/officeDocument/2006/relationships" xmlns:p="http://schemas.openxmlformats.org/presentationml/2006/main">
+  <p:cSld name="Slide 43">
+    <p:spTree>
+      <p:nvGrpSpPr>
+        <p:cNvPr id="1" name=""/>
+        <p:cNvGrpSpPr/>
+        <p:nvPr/>
+      </p:nvGrpSpPr>
+      <p:grpSpPr>
+        <a:xfrm>
+          <a:off x="0" y="0"/>
+          <a:ext cx="0" cy="0"/>
+          <a:chOff x="0" y="0"/>
+          <a:chExt cx="0" cy="0"/>
+        </a:xfrm>
+      </p:grpSpPr>
+      <p:sp>
+        <p:nvSpPr>
+          <p:cNvPr id="2" name="Text 0"/>
+          <p:cNvSpPr/>
+          <p:nvPr/>
+        </p:nvSpPr>
+        <p:spPr>
+          <a:xfrm>
+            <a:off x="457200" y="237744"/>
+            <a:ext cx="3200400" cy="256032"/>
+          </a:xfrm>
+          <a:prstGeom prst="rect">
+            <a:avLst/>
+          </a:prstGeom>
+          <a:noFill/>
+          <a:ln/>
+        </p:spPr>
+        <p:txBody>
+          <a:bodyPr wrap="square" lIns="0" tIns="0" rIns="0" bIns="0" rtlCol="0" anchor="ctr"/>
+          <a:lstStyle/>
+          <a:p>
+            <a:pPr indent="0" marL="0">
+              <a:buNone/>
+            </a:pPr>
+            <a:r>
+              <a:rPr lang="en-US" sz="1100" b="1" dirty="0">
+                <a:solidFill>
+                  <a:srgbClr val="1F4E79"/>
+                </a:solidFill>
+                <a:latin typeface="Arial" pitchFamily="34" charset="0"/>
+                <a:ea typeface="Arial" pitchFamily="34" charset="-122"/>
+                <a:cs typeface="Arial" pitchFamily="34" charset="-120"/>
+              </a:rPr>
+              <a:t>Appendix A7</a:t>
+            </a:r>
+            <a:endParaRPr lang="en-US" sz="1100" dirty="0"/>
+          </a:p>
+        </p:txBody>
+      </p:sp>
+      <p:sp>
+        <p:nvSpPr>
+          <p:cNvPr id="3" name="Text 1"/>
+          <p:cNvSpPr/>
+          <p:nvPr/>
+        </p:nvSpPr>
+        <p:spPr>
+          <a:xfrm>
+            <a:off x="457200" y="512064"/>
+            <a:ext cx="8229600" cy="566928"/>
+          </a:xfrm>
+          <a:prstGeom prst="rect">
+            <a:avLst/>
+          </a:prstGeom>
+          <a:noFill/>
+          <a:ln/>
+        </p:spPr>
+        <p:txBody>
+          <a:bodyPr wrap="square" lIns="0" tIns="0" rIns="0" bIns="0" rtlCol="0" anchor="ctr"/>
+          <a:lstStyle/>
+          <a:p>
+            <a:pPr indent="0" marL="0">
+              <a:buNone/>
+            </a:pPr>
+            <a:r>
+              <a:rPr lang="en-US" sz="2000" b="1" dirty="0">
+                <a:solidFill>
+                  <a:srgbClr val="262626"/>
+                </a:solidFill>
+                <a:latin typeface="Arial" pitchFamily="34" charset="0"/>
+                <a:ea typeface="Arial" pitchFamily="34" charset="-122"/>
+                <a:cs typeface="Arial" pitchFamily="34" charset="-120"/>
+              </a:rPr>
+              <a:t>ML backup — the numbers behind Part 5</a:t>
+            </a:r>
+            <a:endParaRPr lang="en-US" sz="2000" dirty="0"/>
+          </a:p>
+        </p:txBody>
+      </p:sp>
+      <p:sp>
+        <p:nvSpPr>
+          <p:cNvPr id="4" name="Shape 2"/>
+          <p:cNvSpPr/>
+          <p:nvPr/>
+        </p:nvSpPr>
+        <p:spPr>
+          <a:xfrm>
+            <a:off x="457200" y="1115568"/>
+            <a:ext cx="8229600" cy="0"/>
+          </a:xfrm>
+          <a:prstGeom prst="line">
+            <a:avLst/>
+          </a:prstGeom>
+          <a:noFill/>
+          <a:ln w="12700">
+            <a:solidFill>
+              <a:srgbClr val="D9D9D9"/>
+            </a:solidFill>
+            <a:prstDash val="solid"/>
+          </a:ln>
+        </p:spPr>
+      </p:sp>
       <p:graphicFrame>
         <p:nvGraphicFramePr>
-          <p:cNvPr id="43" name="Table 0"/>
+          <p:cNvPr id="44" name="Table 0"/>
           <p:cNvGraphicFramePr>
             <a:graphicFrameLocks noGrp="1"/>
           </p:cNvGraphicFramePr>
@@ -42996,7 +46633,7 @@
                           <a:ea typeface="Arial" pitchFamily="34" charset="-122"/>
                           <a:cs typeface="Arial" pitchFamily="34" charset="-120"/>
                         </a:rPr>
-                        <a:t>stage-3 residual</a:t>
+                        <a:t>stage-3 dopant-level CV</a:t>
                       </a:r>
                       <a:endParaRPr lang="en-US" sz="950" dirty="0">
                         <a:latin typeface="Arial" charset="0"/>
@@ -43061,7 +46698,204 @@
                           <a:ea typeface="Arial" pitchFamily="34" charset="-122"/>
                           <a:cs typeface="Arial" pitchFamily="34" charset="-120"/>
                         </a:rPr>
-                        <a:t>2.33 tz units</a:t>
+                        <a:t>LODO −0.18 · L2DO −0.25</a:t>
+                      </a:r>
+                      <a:endParaRPr lang="en-US" sz="950" dirty="0">
+                        <a:latin typeface="Arial" charset="0"/>
+                        <a:ea typeface="Arial" charset="0"/>
+                        <a:cs typeface="Arial" charset="0"/>
+                      </a:endParaRPr>
+                    </a:p>
+                  </a:txBody>
+                  <a:tcPr marL="36576" marR="36576" marT="36576" marB="36576" anchor="ctr">
+                    <a:lnL w="9525" cap="flat" cmpd="sng" algn="ctr">
+                      <a:solidFill>
+                        <a:srgbClr val="D9D9D9"/>
+                      </a:solidFill>
+                      <a:prstDash val="solid"/>
+                      <a:round/>
+                      <a:headEnd type="none" w="med" len="med"/>
+                      <a:tailEnd type="none" w="med" len="med"/>
+                    </a:lnL>
+                    <a:lnR w="9525" cap="flat" cmpd="sng" algn="ctr">
+                      <a:solidFill>
+                        <a:srgbClr val="D9D9D9"/>
+                      </a:solidFill>
+                      <a:prstDash val="solid"/>
+                      <a:round/>
+                      <a:headEnd type="none" w="med" len="med"/>
+                      <a:tailEnd type="none" w="med" len="med"/>
+                    </a:lnR>
+                    <a:lnT w="9525" cap="flat" cmpd="sng" algn="ctr">
+                      <a:solidFill>
+                        <a:srgbClr val="D9D9D9"/>
+                      </a:solidFill>
+                      <a:prstDash val="solid"/>
+                      <a:round/>
+                      <a:headEnd type="none" w="med" len="med"/>
+                      <a:tailEnd type="none" w="med" len="med"/>
+                    </a:lnT>
+                    <a:lnB w="9525" cap="flat" cmpd="sng" algn="ctr">
+                      <a:solidFill>
+                        <a:srgbClr val="D9D9D9"/>
+                      </a:solidFill>
+                      <a:prstDash val="solid"/>
+                      <a:round/>
+                      <a:headEnd type="none" w="med" len="med"/>
+                      <a:tailEnd type="none" w="med" len="med"/>
+                    </a:lnB>
+                  </a:tcPr>
+                </a:tc>
+                <a:tc>
+                  <a:txBody>
+                    <a:bodyPr/>
+                    <a:lstStyle/>
+                    <a:p>
+                      <a:pPr indent="0" marL="0">
+                        <a:buNone/>
+                      </a:pPr>
+                      <a:r>
+                        <a:rPr lang="en-US" sz="950" dirty="0">
+                          <a:solidFill>
+                            <a:srgbClr val="262626"/>
+                          </a:solidFill>
+                          <a:latin typeface="Arial" pitchFamily="34" charset="0"/>
+                          <a:ea typeface="Arial" pitchFamily="34" charset="-122"/>
+                          <a:cs typeface="Arial" pitchFamily="34" charset="-120"/>
+                        </a:rPr>
+                        <a:t>independent folds: R² &lt; 0 (bias +0.34)</a:t>
+                      </a:r>
+                      <a:endParaRPr lang="en-US" sz="950" dirty="0">
+                        <a:latin typeface="Arial" charset="0"/>
+                        <a:ea typeface="Arial" charset="0"/>
+                        <a:cs typeface="Arial" charset="0"/>
+                      </a:endParaRPr>
+                    </a:p>
+                  </a:txBody>
+                  <a:tcPr marL="36576" marR="36576" marT="36576" marB="36576" anchor="ctr">
+                    <a:lnL w="9525" cap="flat" cmpd="sng" algn="ctr">
+                      <a:solidFill>
+                        <a:srgbClr val="D9D9D9"/>
+                      </a:solidFill>
+                      <a:prstDash val="solid"/>
+                      <a:round/>
+                      <a:headEnd type="none" w="med" len="med"/>
+                      <a:tailEnd type="none" w="med" len="med"/>
+                    </a:lnL>
+                    <a:lnR w="9525" cap="flat" cmpd="sng" algn="ctr">
+                      <a:solidFill>
+                        <a:srgbClr val="D9D9D9"/>
+                      </a:solidFill>
+                      <a:prstDash val="solid"/>
+                      <a:round/>
+                      <a:headEnd type="none" w="med" len="med"/>
+                      <a:tailEnd type="none" w="med" len="med"/>
+                    </a:lnR>
+                    <a:lnT w="9525" cap="flat" cmpd="sng" algn="ctr">
+                      <a:solidFill>
+                        <a:srgbClr val="D9D9D9"/>
+                      </a:solidFill>
+                      <a:prstDash val="solid"/>
+                      <a:round/>
+                      <a:headEnd type="none" w="med" len="med"/>
+                      <a:tailEnd type="none" w="med" len="med"/>
+                    </a:lnT>
+                    <a:lnB w="9525" cap="flat" cmpd="sng" algn="ctr">
+                      <a:solidFill>
+                        <a:srgbClr val="D9D9D9"/>
+                      </a:solidFill>
+                      <a:prstDash val="solid"/>
+                      <a:round/>
+                      <a:headEnd type="none" w="med" len="med"/>
+                      <a:tailEnd type="none" w="med" len="med"/>
+                    </a:lnB>
+                  </a:tcPr>
+                </a:tc>
+              </a:tr>
+              <a:tr h="384048">
+                <a:tc>
+                  <a:txBody>
+                    <a:bodyPr/>
+                    <a:lstStyle/>
+                    <a:p>
+                      <a:pPr indent="0" marL="0">
+                        <a:buNone/>
+                      </a:pPr>
+                      <a:r>
+                        <a:rPr lang="en-US" sz="950" dirty="0">
+                          <a:solidFill>
+                            <a:srgbClr val="262626"/>
+                          </a:solidFill>
+                          <a:latin typeface="Arial" pitchFamily="34" charset="0"/>
+                          <a:ea typeface="Arial" pitchFamily="34" charset="-122"/>
+                          <a:cs typeface="Arial" pitchFamily="34" charset="-120"/>
+                        </a:rPr>
+                        <a:t>stage-3 residual</a:t>
+                      </a:r>
+                      <a:endParaRPr lang="en-US" sz="950" dirty="0">
+                        <a:latin typeface="Arial" charset="0"/>
+                        <a:ea typeface="Arial" charset="0"/>
+                        <a:cs typeface="Arial" charset="0"/>
+                      </a:endParaRPr>
+                    </a:p>
+                  </a:txBody>
+                  <a:tcPr marL="36576" marR="36576" marT="36576" marB="36576" anchor="ctr">
+                    <a:lnL w="9525" cap="flat" cmpd="sng" algn="ctr">
+                      <a:solidFill>
+                        <a:srgbClr val="D9D9D9"/>
+                      </a:solidFill>
+                      <a:prstDash val="solid"/>
+                      <a:round/>
+                      <a:headEnd type="none" w="med" len="med"/>
+                      <a:tailEnd type="none" w="med" len="med"/>
+                    </a:lnL>
+                    <a:lnR w="9525" cap="flat" cmpd="sng" algn="ctr">
+                      <a:solidFill>
+                        <a:srgbClr val="D9D9D9"/>
+                      </a:solidFill>
+                      <a:prstDash val="solid"/>
+                      <a:round/>
+                      <a:headEnd type="none" w="med" len="med"/>
+                      <a:tailEnd type="none" w="med" len="med"/>
+                    </a:lnR>
+                    <a:lnT w="9525" cap="flat" cmpd="sng" algn="ctr">
+                      <a:solidFill>
+                        <a:srgbClr val="D9D9D9"/>
+                      </a:solidFill>
+                      <a:prstDash val="solid"/>
+                      <a:round/>
+                      <a:headEnd type="none" w="med" len="med"/>
+                      <a:tailEnd type="none" w="med" len="med"/>
+                    </a:lnT>
+                    <a:lnB w="9525" cap="flat" cmpd="sng" algn="ctr">
+                      <a:solidFill>
+                        <a:srgbClr val="D9D9D9"/>
+                      </a:solidFill>
+                      <a:prstDash val="solid"/>
+                      <a:round/>
+                      <a:headEnd type="none" w="med" len="med"/>
+                      <a:tailEnd type="none" w="med" len="med"/>
+                    </a:lnB>
+                  </a:tcPr>
+                </a:tc>
+                <a:tc>
+                  <a:txBody>
+                    <a:bodyPr/>
+                    <a:lstStyle/>
+                    <a:p>
+                      <a:pPr indent="0" marL="0">
+                        <a:buNone/>
+                      </a:pPr>
+                      <a:r>
+                        <a:rPr lang="en-US" sz="950" dirty="0">
+                          <a:solidFill>
+                            <a:srgbClr val="262626"/>
+                          </a:solidFill>
+                          <a:latin typeface="Arial" pitchFamily="34" charset="0"/>
+                          <a:ea typeface="Arial" pitchFamily="34" charset="-122"/>
+                          <a:cs typeface="Arial" pitchFamily="34" charset="-120"/>
+                        </a:rPr>
+                        <a:t>2.33 z-units</a:t>
                       </a:r>
                       <a:endParaRPr lang="en-US" sz="950" dirty="0">
                         <a:latin typeface="Arial" charset="0"/>
@@ -44053,7 +47887,7 @@
                 <a:ea typeface="Arial" pitchFamily="34" charset="-122"/>
                 <a:cs typeface="Arial" pitchFamily="34" charset="-120"/>
               </a:rPr>
-              <a:t>42</a:t>
+              <a:t>43</a:t>
             </a:r>
             <a:endParaRPr lang="en-US" sz="900" dirty="0"/>
           </a:p>
@@ -44243,7 +48077,7 @@
                 <a:ea typeface="Arial" pitchFamily="34" charset="-122"/>
                 <a:cs typeface="Arial" pitchFamily="34" charset="-120"/>
               </a:rPr>
-              <a:t>The harder question: did the wrong ones actually fail?  Nobody reports that</a:t>
+              <a:t>The harder question: did the wrong ones actually fail?  That is rarely reported</a:t>
             </a:r>
             <a:endParaRPr lang="en-US" sz="1300" dirty="0"/>
           </a:p>
@@ -44264,7 +48098,7 @@
                 <a:ea typeface="Arial" pitchFamily="34" charset="-122"/>
                 <a:cs typeface="Arial" pitchFamily="34" charset="-120"/>
               </a:rPr>
-              <a:t>This talk shows 11 verdicts we retracted ourselves — and which gate caught each</a:t>
+              <a:t>This talk puts 11 of our own verdicts under audit — 9 retracted — with the gate that caught each</a:t>
             </a:r>
             <a:endParaRPr lang="en-US" sz="1300" dirty="0"/>
           </a:p>
@@ -44285,7 +48119,7 @@
                 <a:ea typeface="Arial" pitchFamily="34" charset="-122"/>
                 <a:cs typeface="Arial" pitchFamily="34" charset="-120"/>
               </a:rPr>
-              <a:t>Without those gates, all 11 numbers would have shipped</a:t>
+              <a:t>One of the 11 was presented as a conclusion in our previous seminar deck</a:t>
             </a:r>
             <a:endParaRPr lang="en-US" sz="1300" dirty="0"/>
           </a:p>
@@ -44359,21 +48193,101 @@
       </p:sp>
       <p:sp>
         <p:nvSpPr>
-          <p:cNvPr id="8" name="Text 6"/>
-          <p:cNvSpPr/>
-          <p:nvPr/>
-        </p:nvSpPr>
-        <p:spPr>
-          <a:xfrm>
-            <a:off x="685800" y="4023360"/>
-            <a:ext cx="3566160" cy="1463040"/>
+          <p:cNvPr id="8" name="Shape 6"/>
+          <p:cNvSpPr/>
+          <p:nvPr/>
+        </p:nvSpPr>
+        <p:spPr>
+          <a:xfrm>
+            <a:off x="777240" y="4041648"/>
+            <a:ext cx="2377440" cy="201168"/>
           </a:xfrm>
           <a:prstGeom prst="rect">
             <a:avLst/>
           </a:prstGeom>
-          <a:noFill/>
+          <a:solidFill>
+            <a:srgbClr val="C9CDD3"/>
+          </a:solidFill>
           <a:ln/>
         </p:spPr>
+      </p:sp>
+      <p:sp>
+        <p:nvSpPr>
+          <p:cNvPr id="9" name="Shape 7"/>
+          <p:cNvSpPr/>
+          <p:nvPr/>
+        </p:nvSpPr>
+        <p:spPr>
+          <a:xfrm>
+            <a:off x="1097280" y="4334256"/>
+            <a:ext cx="1737360" cy="201168"/>
+          </a:xfrm>
+          <a:prstGeom prst="rect">
+            <a:avLst/>
+          </a:prstGeom>
+          <a:solidFill>
+            <a:srgbClr val="C9CDD3"/>
+          </a:solidFill>
+          <a:ln/>
+        </p:spPr>
+      </p:sp>
+      <p:sp>
+        <p:nvSpPr>
+          <p:cNvPr id="10" name="Shape 8"/>
+          <p:cNvSpPr/>
+          <p:nvPr/>
+        </p:nvSpPr>
+        <p:spPr>
+          <a:xfrm>
+            <a:off x="1417320" y="4626864"/>
+            <a:ext cx="1097280" cy="201168"/>
+          </a:xfrm>
+          <a:prstGeom prst="rect">
+            <a:avLst/>
+          </a:prstGeom>
+          <a:solidFill>
+            <a:srgbClr val="C9CDD3"/>
+          </a:solidFill>
+          <a:ln/>
+        </p:spPr>
+      </p:sp>
+      <p:sp>
+        <p:nvSpPr>
+          <p:cNvPr id="11" name="Shape 9"/>
+          <p:cNvSpPr/>
+          <p:nvPr/>
+        </p:nvSpPr>
+        <p:spPr>
+          <a:xfrm>
+            <a:off x="1737360" y="4919472"/>
+            <a:ext cx="457200" cy="201168"/>
+          </a:xfrm>
+          <a:prstGeom prst="rect">
+            <a:avLst/>
+          </a:prstGeom>
+          <a:solidFill>
+            <a:srgbClr val="C9CDD3"/>
+          </a:solidFill>
+          <a:ln/>
+        </p:spPr>
+      </p:sp>
+      <p:sp>
+        <p:nvSpPr>
+          <p:cNvPr id="12" name="Text 10"/>
+          <p:cNvSpPr/>
+          <p:nvPr/>
+        </p:nvSpPr>
+        <p:spPr>
+          <a:xfrm>
+            <a:off x="685800" y="5257800"/>
+            <a:ext cx="3566160" cy="457200"/>
+          </a:xfrm>
+          <a:prstGeom prst="rect">
+            <a:avLst/>
+          </a:prstGeom>
+          <a:noFill/>
+          <a:ln/>
+        </p:spPr>
         <p:txBody>
           <a:bodyPr wrap="square" lIns="0" tIns="0" rIns="0" bIns="0" rtlCol="0" anchor="ctr"/>
           <a:lstStyle/>
@@ -44382,7 +48296,7 @@
               <a:buNone/>
             </a:pPr>
             <a:r>
-              <a:rPr lang="en-US" sz="1150" dirty="0">
+              <a:rPr lang="en-US" sz="1050" dirty="0">
                 <a:solidFill>
                   <a:srgbClr val="7F7F7F"/>
                 </a:solidFill>
@@ -44392,14 +48306,14 @@
               </a:rPr>
               <a:t>pass counts only</a:t>
             </a:r>
-            <a:endParaRPr lang="en-US" sz="1150" dirty="0"/>
+            <a:endParaRPr lang="en-US" sz="1050" dirty="0"/>
           </a:p>
           <a:p>
             <a:pPr indent="0" marL="0">
               <a:buNone/>
             </a:pPr>
             <a:r>
-              <a:rPr lang="en-US" sz="1150" dirty="0">
+              <a:rPr lang="en-US" sz="1050" dirty="0">
                 <a:solidFill>
                   <a:srgbClr val="7F7F7F"/>
                 </a:solidFill>
@@ -44409,30 +48323,13 @@
               </a:rPr>
               <a:t>false rejects invisible</a:t>
             </a:r>
-            <a:endParaRPr lang="en-US" sz="1150" dirty="0"/>
-          </a:p>
-          <a:p>
-            <a:pPr indent="0" marL="0">
-              <a:buNone/>
-            </a:pPr>
-            <a:r>
-              <a:rPr lang="en-US" sz="1150" dirty="0">
-                <a:solidFill>
-                  <a:srgbClr val="7F7F7F"/>
-                </a:solidFill>
-                <a:latin typeface="Arial" pitchFamily="34" charset="0"/>
-                <a:ea typeface="Arial" pitchFamily="34" charset="-122"/>
-                <a:cs typeface="Arial" pitchFamily="34" charset="-120"/>
-              </a:rPr>
-              <a:t>retractions unreported</a:t>
-            </a:r>
-            <a:endParaRPr lang="en-US" sz="1150" dirty="0"/>
-          </a:p>
-        </p:txBody>
-      </p:sp>
-      <p:sp>
-        <p:nvSpPr>
-          <p:cNvPr id="9" name="Shape 7"/>
+            <a:endParaRPr lang="en-US" sz="1050" dirty="0"/>
+          </a:p>
+        </p:txBody>
+      </p:sp>
+      <p:sp>
+        <p:nvSpPr>
+          <p:cNvPr id="13" name="Shape 11"/>
           <p:cNvSpPr/>
           <p:nvPr/>
         </p:nvSpPr>
@@ -44459,7 +48356,7 @@
       </p:sp>
       <p:sp>
         <p:nvSpPr>
-          <p:cNvPr id="10" name="Text 8"/>
+          <p:cNvPr id="14" name="Text 12"/>
           <p:cNvSpPr/>
           <p:nvPr/>
         </p:nvSpPr>
@@ -44498,21 +48395,41 @@
       </p:sp>
       <p:sp>
         <p:nvSpPr>
-          <p:cNvPr id="11" name="Text 9"/>
-          <p:cNvSpPr/>
-          <p:nvPr/>
-        </p:nvSpPr>
-        <p:spPr>
-          <a:xfrm>
-            <a:off x="4937760" y="4023360"/>
-            <a:ext cx="3566160" cy="1463040"/>
+          <p:cNvPr id="15" name="Shape 13"/>
+          <p:cNvSpPr/>
+          <p:nvPr/>
+        </p:nvSpPr>
+        <p:spPr>
+          <a:xfrm>
+            <a:off x="5029200" y="4041648"/>
+            <a:ext cx="2377440" cy="201168"/>
           </a:xfrm>
           <a:prstGeom prst="rect">
             <a:avLst/>
           </a:prstGeom>
-          <a:noFill/>
+          <a:solidFill>
+            <a:srgbClr val="1F4E79"/>
+          </a:solidFill>
           <a:ln/>
         </p:spPr>
+      </p:sp>
+      <p:sp>
+        <p:nvSpPr>
+          <p:cNvPr id="16" name="Text 14"/>
+          <p:cNvSpPr/>
+          <p:nvPr/>
+        </p:nvSpPr>
+        <p:spPr>
+          <a:xfrm>
+            <a:off x="7452360" y="3986784"/>
+            <a:ext cx="274320" cy="274320"/>
+          </a:xfrm>
+          <a:prstGeom prst="rect">
+            <a:avLst/>
+          </a:prstGeom>
+          <a:noFill/>
+          <a:ln/>
+        </p:spPr>
         <p:txBody>
           <a:bodyPr wrap="square" lIns="0" tIns="0" rIns="0" bIns="0" rtlCol="0" anchor="ctr"/>
           <a:lstStyle/>
@@ -44521,7 +48438,223 @@
               <a:buNone/>
             </a:pPr>
             <a:r>
-              <a:rPr lang="en-US" sz="1150" dirty="0">
+              <a:rPr lang="en-US" sz="1300" b="1" dirty="0">
+                <a:solidFill>
+                  <a:srgbClr val="9E2A2B"/>
+                </a:solidFill>
+                <a:latin typeface="Arial" pitchFamily="34" charset="0"/>
+                <a:ea typeface="Arial" pitchFamily="34" charset="-122"/>
+                <a:cs typeface="Arial" pitchFamily="34" charset="-120"/>
+              </a:rPr>
+              <a:t>×</a:t>
+            </a:r>
+            <a:endParaRPr lang="en-US" sz="1300" dirty="0"/>
+          </a:p>
+        </p:txBody>
+      </p:sp>
+      <p:sp>
+        <p:nvSpPr>
+          <p:cNvPr id="17" name="Shape 15"/>
+          <p:cNvSpPr/>
+          <p:nvPr/>
+        </p:nvSpPr>
+        <p:spPr>
+          <a:xfrm>
+            <a:off x="5349240" y="4334256"/>
+            <a:ext cx="1737360" cy="201168"/>
+          </a:xfrm>
+          <a:prstGeom prst="rect">
+            <a:avLst/>
+          </a:prstGeom>
+          <a:solidFill>
+            <a:srgbClr val="1F4E79"/>
+          </a:solidFill>
+          <a:ln/>
+        </p:spPr>
+      </p:sp>
+      <p:sp>
+        <p:nvSpPr>
+          <p:cNvPr id="18" name="Text 16"/>
+          <p:cNvSpPr/>
+          <p:nvPr/>
+        </p:nvSpPr>
+        <p:spPr>
+          <a:xfrm>
+            <a:off x="7132320" y="4279392"/>
+            <a:ext cx="274320" cy="274320"/>
+          </a:xfrm>
+          <a:prstGeom prst="rect">
+            <a:avLst/>
+          </a:prstGeom>
+          <a:noFill/>
+          <a:ln/>
+        </p:spPr>
+        <p:txBody>
+          <a:bodyPr wrap="square" lIns="0" tIns="0" rIns="0" bIns="0" rtlCol="0" anchor="ctr"/>
+          <a:lstStyle/>
+          <a:p>
+            <a:pPr indent="0" marL="0">
+              <a:buNone/>
+            </a:pPr>
+            <a:r>
+              <a:rPr lang="en-US" sz="1300" b="1" dirty="0">
+                <a:solidFill>
+                  <a:srgbClr val="9E2A2B"/>
+                </a:solidFill>
+                <a:latin typeface="Arial" pitchFamily="34" charset="0"/>
+                <a:ea typeface="Arial" pitchFamily="34" charset="-122"/>
+                <a:cs typeface="Arial" pitchFamily="34" charset="-120"/>
+              </a:rPr>
+              <a:t>×</a:t>
+            </a:r>
+            <a:endParaRPr lang="en-US" sz="1300" dirty="0"/>
+          </a:p>
+        </p:txBody>
+      </p:sp>
+      <p:sp>
+        <p:nvSpPr>
+          <p:cNvPr id="19" name="Shape 17"/>
+          <p:cNvSpPr/>
+          <p:nvPr/>
+        </p:nvSpPr>
+        <p:spPr>
+          <a:xfrm>
+            <a:off x="5669280" y="4626864"/>
+            <a:ext cx="1097280" cy="201168"/>
+          </a:xfrm>
+          <a:prstGeom prst="rect">
+            <a:avLst/>
+          </a:prstGeom>
+          <a:solidFill>
+            <a:srgbClr val="1F4E79"/>
+          </a:solidFill>
+          <a:ln/>
+        </p:spPr>
+      </p:sp>
+      <p:sp>
+        <p:nvSpPr>
+          <p:cNvPr id="20" name="Text 18"/>
+          <p:cNvSpPr/>
+          <p:nvPr/>
+        </p:nvSpPr>
+        <p:spPr>
+          <a:xfrm>
+            <a:off x="6812280" y="4572000"/>
+            <a:ext cx="274320" cy="274320"/>
+          </a:xfrm>
+          <a:prstGeom prst="rect">
+            <a:avLst/>
+          </a:prstGeom>
+          <a:noFill/>
+          <a:ln/>
+        </p:spPr>
+        <p:txBody>
+          <a:bodyPr wrap="square" lIns="0" tIns="0" rIns="0" bIns="0" rtlCol="0" anchor="ctr"/>
+          <a:lstStyle/>
+          <a:p>
+            <a:pPr indent="0" marL="0">
+              <a:buNone/>
+            </a:pPr>
+            <a:r>
+              <a:rPr lang="en-US" sz="1300" b="1" dirty="0">
+                <a:solidFill>
+                  <a:srgbClr val="9E2A2B"/>
+                </a:solidFill>
+                <a:latin typeface="Arial" pitchFamily="34" charset="0"/>
+                <a:ea typeface="Arial" pitchFamily="34" charset="-122"/>
+                <a:cs typeface="Arial" pitchFamily="34" charset="-120"/>
+              </a:rPr>
+              <a:t>×</a:t>
+            </a:r>
+            <a:endParaRPr lang="en-US" sz="1300" dirty="0"/>
+          </a:p>
+        </p:txBody>
+      </p:sp>
+      <p:sp>
+        <p:nvSpPr>
+          <p:cNvPr id="21" name="Shape 19"/>
+          <p:cNvSpPr/>
+          <p:nvPr/>
+        </p:nvSpPr>
+        <p:spPr>
+          <a:xfrm>
+            <a:off x="5989320" y="4919472"/>
+            <a:ext cx="457200" cy="201168"/>
+          </a:xfrm>
+          <a:prstGeom prst="rect">
+            <a:avLst/>
+          </a:prstGeom>
+          <a:solidFill>
+            <a:srgbClr val="1F4E79"/>
+          </a:solidFill>
+          <a:ln/>
+        </p:spPr>
+      </p:sp>
+      <p:sp>
+        <p:nvSpPr>
+          <p:cNvPr id="22" name="Text 20"/>
+          <p:cNvSpPr/>
+          <p:nvPr/>
+        </p:nvSpPr>
+        <p:spPr>
+          <a:xfrm>
+            <a:off x="6492240" y="4864608"/>
+            <a:ext cx="274320" cy="274320"/>
+          </a:xfrm>
+          <a:prstGeom prst="rect">
+            <a:avLst/>
+          </a:prstGeom>
+          <a:noFill/>
+          <a:ln/>
+        </p:spPr>
+        <p:txBody>
+          <a:bodyPr wrap="square" lIns="0" tIns="0" rIns="0" bIns="0" rtlCol="0" anchor="ctr"/>
+          <a:lstStyle/>
+          <a:p>
+            <a:pPr indent="0" marL="0">
+              <a:buNone/>
+            </a:pPr>
+            <a:r>
+              <a:rPr lang="en-US" sz="1300" b="1" dirty="0">
+                <a:solidFill>
+                  <a:srgbClr val="9E2A2B"/>
+                </a:solidFill>
+                <a:latin typeface="Arial" pitchFamily="34" charset="0"/>
+                <a:ea typeface="Arial" pitchFamily="34" charset="-122"/>
+                <a:cs typeface="Arial" pitchFamily="34" charset="-120"/>
+              </a:rPr>
+              <a:t>×</a:t>
+            </a:r>
+            <a:endParaRPr lang="en-US" sz="1300" dirty="0"/>
+          </a:p>
+        </p:txBody>
+      </p:sp>
+      <p:sp>
+        <p:nvSpPr>
+          <p:cNvPr id="23" name="Text 21"/>
+          <p:cNvSpPr/>
+          <p:nvPr/>
+        </p:nvSpPr>
+        <p:spPr>
+          <a:xfrm>
+            <a:off x="4937760" y="5257800"/>
+            <a:ext cx="3566160" cy="457200"/>
+          </a:xfrm>
+          <a:prstGeom prst="rect">
+            <a:avLst/>
+          </a:prstGeom>
+          <a:noFill/>
+          <a:ln/>
+        </p:spPr>
+        <p:txBody>
+          <a:bodyPr wrap="square" lIns="0" tIns="0" rIns="0" bIns="0" rtlCol="0" anchor="ctr"/>
+          <a:lstStyle/>
+          <a:p>
+            <a:pPr indent="0" marL="0">
+              <a:buNone/>
+            </a:pPr>
+            <a:r>
+              <a:rPr lang="en-US" sz="1050" dirty="0">
                 <a:solidFill>
                   <a:srgbClr val="262626"/>
                 </a:solidFill>
@@ -44529,16 +48662,16 @@
                 <a:ea typeface="Arial" pitchFamily="34" charset="-122"/>
                 <a:cs typeface="Arial" pitchFamily="34" charset="-120"/>
               </a:rPr>
-              <a:t>fail reasons attached to every gate</a:t>
-            </a:r>
-            <a:endParaRPr lang="en-US" sz="1150" dirty="0"/>
+              <a:t>every rejection carries its reason</a:t>
+            </a:r>
+            <a:endParaRPr lang="en-US" sz="1050" dirty="0"/>
           </a:p>
           <a:p>
             <a:pPr indent="0" marL="0">
               <a:buNone/>
             </a:pPr>
             <a:r>
-              <a:rPr lang="en-US" sz="1150" dirty="0">
+              <a:rPr lang="en-US" sz="1050" dirty="0">
                 <a:solidFill>
                   <a:srgbClr val="262626"/>
                 </a:solidFill>
@@ -44546,32 +48679,15 @@
                 <a:ea typeface="Arial" pitchFamily="34" charset="-122"/>
                 <a:cs typeface="Arial" pitchFamily="34" charset="-120"/>
               </a:rPr>
-              <a:t>11 self-retractions published</a:t>
-            </a:r>
-            <a:endParaRPr lang="en-US" sz="1150" dirty="0"/>
-          </a:p>
-          <a:p>
-            <a:pPr indent="0" marL="0">
-              <a:buNone/>
-            </a:pPr>
-            <a:r>
-              <a:rPr lang="en-US" sz="1150" dirty="0">
-                <a:solidFill>
-                  <a:srgbClr val="262626"/>
-                </a:solidFill>
-                <a:latin typeface="Arial" pitchFamily="34" charset="0"/>
-                <a:ea typeface="Arial" pitchFamily="34" charset="-122"/>
-                <a:cs typeface="Arial" pitchFamily="34" charset="-120"/>
-              </a:rPr>
-              <a:t>provenance checked on every run</a:t>
-            </a:r>
-            <a:endParaRPr lang="en-US" sz="1150" dirty="0"/>
-          </a:p>
-        </p:txBody>
-      </p:sp>
-      <p:sp>
-        <p:nvSpPr>
-          <p:cNvPr id="13" name="Text 10"/>
+              <a:t>9 retractions + 2 flags published</a:t>
+            </a:r>
+            <a:endParaRPr lang="en-US" sz="1050" dirty="0"/>
+          </a:p>
+        </p:txBody>
+      </p:sp>
+      <p:sp>
+        <p:nvSpPr>
+          <p:cNvPr id="25" name="Text 22"/>
           <p:cNvSpPr/>
           <p:nvPr/>
         </p:nvSpPr>
@@ -44624,7 +48740,7 @@
       </p:sp>
       <p:sp>
         <p:nvSpPr>
-          <p:cNvPr id="14" name="Text 11"/>
+          <p:cNvPr id="26" name="Text 23"/>
           <p:cNvSpPr/>
           <p:nvPr/>
         </p:nvSpPr>
@@ -44935,7 +49051,46 @@
       </p:sp>
       <p:sp>
         <p:nvSpPr>
-          <p:cNvPr id="8" name="Shape 6"/>
+          <p:cNvPr id="8" name="Text 6"/>
+          <p:cNvSpPr/>
+          <p:nvPr/>
+        </p:nvSpPr>
+        <p:spPr>
+          <a:xfrm>
+            <a:off x="502920" y="5038344"/>
+            <a:ext cx="1188720" cy="201168"/>
+          </a:xfrm>
+          <a:prstGeom prst="rect">
+            <a:avLst/>
+          </a:prstGeom>
+          <a:noFill/>
+          <a:ln/>
+        </p:spPr>
+        <p:txBody>
+          <a:bodyPr wrap="square" lIns="0" tIns="0" rIns="0" bIns="0" rtlCol="0" anchor="ctr"/>
+          <a:lstStyle/>
+          <a:p>
+            <a:pPr algn="ctr" indent="0" marL="0">
+              <a:buNone/>
+            </a:pPr>
+            <a:r>
+              <a:rPr lang="en-US" sz="850" i="1" dirty="0">
+                <a:solidFill>
+                  <a:srgbClr val="7F7F7F"/>
+                </a:solidFill>
+                <a:latin typeface="Arial" pitchFamily="34" charset="0"/>
+                <a:ea typeface="Arial" pitchFamily="34" charset="-122"/>
+                <a:cs typeface="Arial" pitchFamily="34" charset="-120"/>
+              </a:rPr>
+              <a:t>ask</a:t>
+            </a:r>
+            <a:endParaRPr lang="en-US" sz="850" dirty="0"/>
+          </a:p>
+        </p:txBody>
+      </p:sp>
+      <p:sp>
+        <p:nvSpPr>
+          <p:cNvPr id="9" name="Shape 7"/>
           <p:cNvSpPr/>
           <p:nvPr/>
         </p:nvSpPr>
@@ -44959,7 +49114,7 @@
       </p:sp>
       <p:sp>
         <p:nvSpPr>
-          <p:cNvPr id="9" name="Shape 7"/>
+          <p:cNvPr id="10" name="Shape 8"/>
           <p:cNvSpPr/>
           <p:nvPr/>
         </p:nvSpPr>
@@ -44986,7 +49141,7 @@
       </p:sp>
       <p:sp>
         <p:nvSpPr>
-          <p:cNvPr id="10" name="Text 8"/>
+          <p:cNvPr id="11" name="Text 9"/>
           <p:cNvSpPr/>
           <p:nvPr/>
         </p:nvSpPr>
@@ -45043,7 +49198,46 @@
       </p:sp>
       <p:sp>
         <p:nvSpPr>
-          <p:cNvPr id="11" name="Shape 9"/>
+          <p:cNvPr id="12" name="Text 10"/>
+          <p:cNvSpPr/>
+          <p:nvPr/>
+        </p:nvSpPr>
+        <p:spPr>
+          <a:xfrm>
+            <a:off x="1892808" y="5038344"/>
+            <a:ext cx="1188720" cy="201168"/>
+          </a:xfrm>
+          <a:prstGeom prst="rect">
+            <a:avLst/>
+          </a:prstGeom>
+          <a:noFill/>
+          <a:ln/>
+        </p:spPr>
+        <p:txBody>
+          <a:bodyPr wrap="square" lIns="0" tIns="0" rIns="0" bIns="0" rtlCol="0" anchor="ctr"/>
+          <a:lstStyle/>
+          <a:p>
+            <a:pPr algn="ctr" indent="0" marL="0">
+              <a:buNone/>
+            </a:pPr>
+            <a:r>
+              <a:rPr lang="en-US" sz="850" b="1" i="1" dirty="0">
+                <a:solidFill>
+                  <a:srgbClr val="1F4E79"/>
+                </a:solidFill>
+                <a:latin typeface="Arial" pitchFamily="34" charset="0"/>
+                <a:ea typeface="Arial" pitchFamily="34" charset="-122"/>
+                <a:cs typeface="Arial" pitchFamily="34" charset="-120"/>
+              </a:rPr>
+              <a:t>measure</a:t>
+            </a:r>
+            <a:endParaRPr lang="en-US" sz="850" dirty="0"/>
+          </a:p>
+        </p:txBody>
+      </p:sp>
+      <p:sp>
+        <p:nvSpPr>
+          <p:cNvPr id="13" name="Shape 11"/>
           <p:cNvSpPr/>
           <p:nvPr/>
         </p:nvSpPr>
@@ -45067,7 +49261,7 @@
       </p:sp>
       <p:sp>
         <p:nvSpPr>
-          <p:cNvPr id="12" name="Shape 10"/>
+          <p:cNvPr id="14" name="Shape 12"/>
           <p:cNvSpPr/>
           <p:nvPr/>
         </p:nvSpPr>
@@ -45094,7 +49288,7 @@
       </p:sp>
       <p:sp>
         <p:nvSpPr>
-          <p:cNvPr id="13" name="Text 11"/>
+          <p:cNvPr id="15" name="Text 13"/>
           <p:cNvSpPr/>
           <p:nvPr/>
         </p:nvSpPr>
@@ -45151,7 +49345,46 @@
       </p:sp>
       <p:sp>
         <p:nvSpPr>
-          <p:cNvPr id="14" name="Shape 12"/>
+          <p:cNvPr id="16" name="Text 14"/>
+          <p:cNvSpPr/>
+          <p:nvPr/>
+        </p:nvSpPr>
+        <p:spPr>
+          <a:xfrm>
+            <a:off x="3282696" y="5038344"/>
+            <a:ext cx="1188720" cy="201168"/>
+          </a:xfrm>
+          <a:prstGeom prst="rect">
+            <a:avLst/>
+          </a:prstGeom>
+          <a:noFill/>
+          <a:ln/>
+        </p:spPr>
+        <p:txBody>
+          <a:bodyPr wrap="square" lIns="0" tIns="0" rIns="0" bIns="0" rtlCol="0" anchor="ctr"/>
+          <a:lstStyle/>
+          <a:p>
+            <a:pPr algn="ctr" indent="0" marL="0">
+              <a:buNone/>
+            </a:pPr>
+            <a:r>
+              <a:rPr lang="en-US" sz="850" i="1" dirty="0">
+                <a:solidFill>
+                  <a:srgbClr val="7F7F7F"/>
+                </a:solidFill>
+                <a:latin typeface="Arial" pitchFamily="34" charset="0"/>
+                <a:ea typeface="Arial" pitchFamily="34" charset="-122"/>
+                <a:cs typeface="Arial" pitchFamily="34" charset="-120"/>
+              </a:rPr>
+              <a:t>learn</a:t>
+            </a:r>
+            <a:endParaRPr lang="en-US" sz="850" dirty="0"/>
+          </a:p>
+        </p:txBody>
+      </p:sp>
+      <p:sp>
+        <p:nvSpPr>
+          <p:cNvPr id="17" name="Shape 15"/>
           <p:cNvSpPr/>
           <p:nvPr/>
         </p:nvSpPr>
@@ -45175,7 +49408,7 @@
       </p:sp>
       <p:sp>
         <p:nvSpPr>
-          <p:cNvPr id="15" name="Shape 13"/>
+          <p:cNvPr id="18" name="Shape 16"/>
           <p:cNvSpPr/>
           <p:nvPr/>
         </p:nvSpPr>
@@ -45202,7 +49435,7 @@
       </p:sp>
       <p:sp>
         <p:nvSpPr>
-          <p:cNvPr id="16" name="Text 14"/>
+          <p:cNvPr id="19" name="Text 17"/>
           <p:cNvSpPr/>
           <p:nvPr/>
         </p:nvSpPr>
@@ -45259,7 +49492,46 @@
       </p:sp>
       <p:sp>
         <p:nvSpPr>
-          <p:cNvPr id="17" name="Shape 15"/>
+          <p:cNvPr id="20" name="Text 18"/>
+          <p:cNvSpPr/>
+          <p:nvPr/>
+        </p:nvSpPr>
+        <p:spPr>
+          <a:xfrm>
+            <a:off x="4672584" y="5038344"/>
+            <a:ext cx="1188720" cy="201168"/>
+          </a:xfrm>
+          <a:prstGeom prst="rect">
+            <a:avLst/>
+          </a:prstGeom>
+          <a:noFill/>
+          <a:ln/>
+        </p:spPr>
+        <p:txBody>
+          <a:bodyPr wrap="square" lIns="0" tIns="0" rIns="0" bIns="0" rtlCol="0" anchor="ctr"/>
+          <a:lstStyle/>
+          <a:p>
+            <a:pPr algn="ctr" indent="0" marL="0">
+              <a:buNone/>
+            </a:pPr>
+            <a:r>
+              <a:rPr lang="en-US" sz="850" i="1" dirty="0">
+                <a:solidFill>
+                  <a:srgbClr val="7F7F7F"/>
+                </a:solidFill>
+                <a:latin typeface="Arial" pitchFamily="34" charset="0"/>
+                <a:ea typeface="Arial" pitchFamily="34" charset="-122"/>
+                <a:cs typeface="Arial" pitchFamily="34" charset="-120"/>
+              </a:rPr>
+              <a:t>gate</a:t>
+            </a:r>
+            <a:endParaRPr lang="en-US" sz="850" dirty="0"/>
+          </a:p>
+        </p:txBody>
+      </p:sp>
+      <p:sp>
+        <p:nvSpPr>
+          <p:cNvPr id="21" name="Shape 19"/>
           <p:cNvSpPr/>
           <p:nvPr/>
         </p:nvSpPr>
@@ -45283,7 +49555,7 @@
       </p:sp>
       <p:sp>
         <p:nvSpPr>
-          <p:cNvPr id="18" name="Shape 16"/>
+          <p:cNvPr id="22" name="Shape 20"/>
           <p:cNvSpPr/>
           <p:nvPr/>
         </p:nvSpPr>
@@ -45310,7 +49582,7 @@
       </p:sp>
       <p:sp>
         <p:nvSpPr>
-          <p:cNvPr id="19" name="Text 17"/>
+          <p:cNvPr id="23" name="Text 21"/>
           <p:cNvSpPr/>
           <p:nvPr/>
         </p:nvSpPr>
@@ -45367,7 +49639,46 @@
       </p:sp>
       <p:sp>
         <p:nvSpPr>
-          <p:cNvPr id="20" name="Shape 18"/>
+          <p:cNvPr id="24" name="Text 22"/>
+          <p:cNvSpPr/>
+          <p:nvPr/>
+        </p:nvSpPr>
+        <p:spPr>
+          <a:xfrm>
+            <a:off x="6062472" y="5038344"/>
+            <a:ext cx="1188720" cy="201168"/>
+          </a:xfrm>
+          <a:prstGeom prst="rect">
+            <a:avLst/>
+          </a:prstGeom>
+          <a:noFill/>
+          <a:ln/>
+        </p:spPr>
+        <p:txBody>
+          <a:bodyPr wrap="square" lIns="0" tIns="0" rIns="0" bIns="0" rtlCol="0" anchor="ctr"/>
+          <a:lstStyle/>
+          <a:p>
+            <a:pPr algn="ctr" indent="0" marL="0">
+              <a:buNone/>
+            </a:pPr>
+            <a:r>
+              <a:rPr lang="en-US" sz="850" i="1" dirty="0">
+                <a:solidFill>
+                  <a:srgbClr val="7F7F7F"/>
+                </a:solidFill>
+                <a:latin typeface="Arial" pitchFamily="34" charset="0"/>
+                <a:ea typeface="Arial" pitchFamily="34" charset="-122"/>
+                <a:cs typeface="Arial" pitchFamily="34" charset="-120"/>
+              </a:rPr>
+              <a:t>combine</a:t>
+            </a:r>
+            <a:endParaRPr lang="en-US" sz="850" dirty="0"/>
+          </a:p>
+        </p:txBody>
+      </p:sp>
+      <p:sp>
+        <p:nvSpPr>
+          <p:cNvPr id="25" name="Shape 23"/>
           <p:cNvSpPr/>
           <p:nvPr/>
         </p:nvSpPr>
@@ -45391,7 +49702,7 @@
       </p:sp>
       <p:sp>
         <p:nvSpPr>
-          <p:cNvPr id="21" name="Shape 19"/>
+          <p:cNvPr id="26" name="Shape 24"/>
           <p:cNvSpPr/>
           <p:nvPr/>
         </p:nvSpPr>
@@ -45418,7 +49729,7 @@
       </p:sp>
       <p:sp>
         <p:nvSpPr>
-          <p:cNvPr id="22" name="Text 20"/>
+          <p:cNvPr id="27" name="Text 25"/>
           <p:cNvSpPr/>
           <p:nvPr/>
         </p:nvSpPr>
@@ -45467,7 +49778,7 @@
                 <a:ea typeface="Arial" pitchFamily="34" charset="-122"/>
                 <a:cs typeface="Arial" pitchFamily="34" charset="-120"/>
               </a:rPr>
-              <a:t>11 retractions</a:t>
+              <a:t>11 audited verdicts</a:t>
             </a:r>
             <a:endParaRPr lang="en-US" sz="1000" dirty="0"/>
           </a:p>
@@ -45475,7 +49786,46 @@
       </p:sp>
       <p:sp>
         <p:nvSpPr>
-          <p:cNvPr id="23" name="Shape 21"/>
+          <p:cNvPr id="28" name="Text 26"/>
+          <p:cNvSpPr/>
+          <p:nvPr/>
+        </p:nvSpPr>
+        <p:spPr>
+          <a:xfrm>
+            <a:off x="7452360" y="5038344"/>
+            <a:ext cx="1188720" cy="201168"/>
+          </a:xfrm>
+          <a:prstGeom prst="rect">
+            <a:avLst/>
+          </a:prstGeom>
+          <a:noFill/>
+          <a:ln/>
+        </p:spPr>
+        <p:txBody>
+          <a:bodyPr wrap="square" lIns="0" tIns="0" rIns="0" bIns="0" rtlCol="0" anchor="ctr"/>
+          <a:lstStyle/>
+          <a:p>
+            <a:pPr algn="ctr" indent="0" marL="0">
+              <a:buNone/>
+            </a:pPr>
+            <a:r>
+              <a:rPr lang="en-US" sz="850" i="1" dirty="0">
+                <a:solidFill>
+                  <a:srgbClr val="7F7F7F"/>
+                </a:solidFill>
+                <a:latin typeface="Arial" pitchFamily="34" charset="0"/>
+                <a:ea typeface="Arial" pitchFamily="34" charset="-122"/>
+                <a:cs typeface="Arial" pitchFamily="34" charset="-120"/>
+              </a:rPr>
+              <a:t>doubt</a:t>
+            </a:r>
+            <a:endParaRPr lang="en-US" sz="850" dirty="0"/>
+          </a:p>
+        </p:txBody>
+      </p:sp>
+      <p:sp>
+        <p:nvSpPr>
+          <p:cNvPr id="29" name="Shape 27"/>
           <p:cNvSpPr/>
           <p:nvPr/>
         </p:nvSpPr>
@@ -45499,7 +49849,7 @@
       </p:sp>
       <p:sp>
         <p:nvSpPr>
-          <p:cNvPr id="24" name="Shape 22"/>
+          <p:cNvPr id="30" name="Shape 28"/>
           <p:cNvSpPr/>
           <p:nvPr/>
         </p:nvSpPr>
@@ -45522,7 +49872,7 @@
       </p:sp>
       <p:sp>
         <p:nvSpPr>
-          <p:cNvPr id="25" name="Shape 23"/>
+          <p:cNvPr id="31" name="Shape 29"/>
           <p:cNvSpPr/>
           <p:nvPr/>
         </p:nvSpPr>
@@ -45545,7 +49895,7 @@
       </p:sp>
       <p:sp>
         <p:nvSpPr>
-          <p:cNvPr id="26" name="Text 24"/>
+          <p:cNvPr id="32" name="Text 30"/>
           <p:cNvSpPr/>
           <p:nvPr/>
         </p:nvSpPr>
@@ -45584,7 +49934,7 @@
       </p:sp>
       <p:sp>
         <p:nvSpPr>
-          <p:cNvPr id="27" name="Shape 25"/>
+          <p:cNvPr id="33" name="Shape 31"/>
           <p:cNvSpPr/>
           <p:nvPr/>
         </p:nvSpPr>
@@ -45608,7 +49958,7 @@
       </p:sp>
       <p:sp>
         <p:nvSpPr>
-          <p:cNvPr id="28" name="Shape 26"/>
+          <p:cNvPr id="34" name="Shape 32"/>
           <p:cNvSpPr/>
           <p:nvPr/>
         </p:nvSpPr>
@@ -45631,7 +49981,7 @@
       </p:sp>
       <p:sp>
         <p:nvSpPr>
-          <p:cNvPr id="29" name="Shape 27"/>
+          <p:cNvPr id="35" name="Shape 33"/>
           <p:cNvSpPr/>
           <p:nvPr/>
         </p:nvSpPr>
@@ -45654,7 +50004,7 @@
       </p:sp>
       <p:sp>
         <p:nvSpPr>
-          <p:cNvPr id="30" name="Text 28"/>
+          <p:cNvPr id="36" name="Text 34"/>
           <p:cNvSpPr/>
           <p:nvPr/>
         </p:nvSpPr>
@@ -45693,7 +50043,7 @@
       </p:sp>
       <p:sp>
         <p:nvSpPr>
-          <p:cNvPr id="31" name="Text 29"/>
+          <p:cNvPr id="37" name="Text 35"/>
           <p:cNvSpPr/>
           <p:nvPr/>
         </p:nvSpPr>
@@ -45746,7 +50096,7 @@
       </p:sp>
       <p:sp>
         <p:nvSpPr>
-          <p:cNvPr id="32" name="Text 30"/>
+          <p:cNvPr id="38" name="Text 36"/>
           <p:cNvSpPr/>
           <p:nvPr/>
         </p:nvSpPr>
@@ -46354,7 +50704,7 @@
         <p:spPr>
           <a:xfrm>
             <a:off x="4114800" y="1554480"/>
-            <a:ext cx="4572000" cy="3291840"/>
+            <a:ext cx="4572000" cy="2377440"/>
           </a:xfrm>
           <a:prstGeom prst="rect">
             <a:avLst/>
@@ -46428,32 +50778,77 @@
             </a:r>
             <a:endParaRPr lang="en-US" sz="1200" dirty="0"/>
           </a:p>
-          <a:p>
-            <a:pPr marL="127000" indent="-127000">
-              <a:spcAft>
-                <a:spcPts val="200"/>
-              </a:spcAft>
-              <a:buSzPct val="100000"/>
-              <a:buChar char="·"/>
-            </a:pPr>
-            <a:r>
-              <a:rPr lang="en-US" sz="1200" b="1" dirty="0">
-                <a:solidFill>
-                  <a:srgbClr val="9E2A2B"/>
-                </a:solidFill>
-                <a:latin typeface="Arial" pitchFamily="34" charset="0"/>
-                <a:ea typeface="Arial" pitchFamily="34" charset="-122"/>
-                <a:cs typeface="Arial" pitchFamily="34" charset="-120"/>
-              </a:rPr>
-              <a:t>So we do NOT trust: absolute gaps, absolute U-sensitive values</a:t>
-            </a:r>
-            <a:endParaRPr lang="en-US" sz="1200" dirty="0"/>
-          </a:p>
-        </p:txBody>
-      </p:sp>
-      <p:sp>
-        <p:nvSpPr>
-          <p:cNvPr id="19" name="Text 16"/>
+        </p:txBody>
+      </p:sp>
+      <p:sp>
+        <p:nvSpPr>
+          <p:cNvPr id="18" name="Shape 16"/>
+          <p:cNvSpPr/>
+          <p:nvPr/>
+        </p:nvSpPr>
+        <p:spPr>
+          <a:xfrm>
+            <a:off x="502920" y="5120640"/>
+            <a:ext cx="8138160" cy="731520"/>
+          </a:xfrm>
+          <a:prstGeom prst="roundRect">
+            <a:avLst>
+              <a:gd name="adj" fmla="val 10000"/>
+            </a:avLst>
+          </a:prstGeom>
+          <a:solidFill>
+            <a:srgbClr val="EEF3F9"/>
+          </a:solidFill>
+          <a:ln w="15875">
+            <a:solidFill>
+              <a:srgbClr val="1F4E79"/>
+            </a:solidFill>
+            <a:prstDash val="solid"/>
+          </a:ln>
+        </p:spPr>
+      </p:sp>
+      <p:sp>
+        <p:nvSpPr>
+          <p:cNvPr id="19" name="Text 17"/>
+          <p:cNvSpPr/>
+          <p:nvPr/>
+        </p:nvSpPr>
+        <p:spPr>
+          <a:xfrm>
+            <a:off x="731520" y="5120640"/>
+            <a:ext cx="7680960" cy="731520"/>
+          </a:xfrm>
+          <a:prstGeom prst="rect">
+            <a:avLst/>
+          </a:prstGeom>
+          <a:noFill/>
+          <a:ln/>
+        </p:spPr>
+        <p:txBody>
+          <a:bodyPr wrap="square" lIns="0" tIns="0" rIns="0" bIns="0" rtlCol="0" anchor="ctr"/>
+          <a:lstStyle/>
+          <a:p>
+            <a:pPr algn="ctr" indent="0" marL="0">
+              <a:buNone/>
+            </a:pPr>
+            <a:r>
+              <a:rPr lang="en-US" sz="1250" b="1" dirty="0">
+                <a:solidFill>
+                  <a:srgbClr val="1F4E79"/>
+                </a:solidFill>
+                <a:latin typeface="Arial" pitchFamily="34" charset="0"/>
+                <a:ea typeface="Arial" pitchFamily="34" charset="-122"/>
+                <a:cs typeface="Arial" pitchFamily="34" charset="-120"/>
+              </a:rPr>
+              <a:t>Take-home:  approximation enters in ONE place  →  error character is predictable  →  we never quote absolute gaps</a:t>
+            </a:r>
+            <a:endParaRPr lang="en-US" sz="1250" dirty="0"/>
+          </a:p>
+        </p:txBody>
+      </p:sp>
+      <p:sp>
+        <p:nvSpPr>
+          <p:cNvPr id="21" name="Text 18"/>
           <p:cNvSpPr/>
           <p:nvPr/>
         </p:nvSpPr>
@@ -46506,7 +50901,7 @@
       </p:sp>
       <p:sp>
         <p:nvSpPr>
-          <p:cNvPr id="20" name="Text 17"/>
+          <p:cNvPr id="22" name="Text 19"/>
           <p:cNvSpPr/>
           <p:nvPr/>
         </p:nvSpPr>
@@ -47353,7 +51748,7 @@
                           <a:ea typeface="Arial" pitchFamily="34" charset="-122"/>
                           <a:cs typeface="Arial" pitchFamily="34" charset="-120"/>
                         </a:rPr>
-                        <a:t>fixed-occupation nscf eigenvalues</a:t>
+                        <a:t>grand-potential hull</a:t>
                       </a:r>
                       <a:endParaRPr lang="en-US" sz="1050" dirty="0">
                         <a:latin typeface="Arial" charset="0"/>
@@ -47418,7 +51813,7 @@
                           <a:ea typeface="Arial" pitchFamily="34" charset="-122"/>
                           <a:cs typeface="Arial" pitchFamily="34" charset="-120"/>
                         </a:rPr>
-                        <a:t>band gap = e⁻ insulation</a:t>
+                        <a:t>ESW window · oxidation onset</a:t>
                       </a:r>
                       <a:endParaRPr lang="en-US" sz="1050" dirty="0">
                         <a:latin typeface="Arial" charset="0"/>
@@ -47483,7 +51878,7 @@
                           <a:ea typeface="Arial" pitchFamily="34" charset="-122"/>
                           <a:cs typeface="Arial" pitchFamily="34" charset="-120"/>
                         </a:rPr>
-                        <a:t>G2 window</a:t>
+                        <a:t>G2 window + G3 oxidation</a:t>
                       </a:r>
                       <a:endParaRPr lang="en-US" sz="1050" dirty="0">
                         <a:latin typeface="Arial" charset="0"/>
@@ -47550,7 +51945,7 @@
                           <a:ea typeface="Arial" pitchFamily="34" charset="-122"/>
                           <a:cs typeface="Arial" pitchFamily="34" charset="-120"/>
                         </a:rPr>
-                        <a:t>grand-potential hull</a:t>
+                        <a:t>BVSE (bond valence)</a:t>
                       </a:r>
                       <a:endParaRPr lang="en-US" sz="1050" dirty="0">
                         <a:latin typeface="Arial" charset="0"/>
@@ -47615,7 +52010,7 @@
                           <a:ea typeface="Arial" pitchFamily="34" charset="-122"/>
                           <a:cs typeface="Arial" pitchFamily="34" charset="-120"/>
                         </a:rPr>
-                        <a:t>ESW, decomposition products</a:t>
+                        <a:t>channels, bottlenecks (cheap)</a:t>
                       </a:r>
                       <a:endParaRPr lang="en-US" sz="1050" dirty="0">
                         <a:latin typeface="Arial" charset="0"/>
@@ -47680,7 +52075,7 @@
                           <a:ea typeface="Arial" pitchFamily="34" charset="-122"/>
                           <a:cs typeface="Arial" pitchFamily="34" charset="-120"/>
                         </a:rPr>
-                        <a:t>G3 oxidation</a:t>
+                        <a:t>G4 transport — the gate engine</a:t>
                       </a:r>
                       <a:endParaRPr lang="en-US" sz="1050" dirty="0">
                         <a:latin typeface="Arial" charset="0"/>
@@ -47877,7 +52272,7 @@
                           <a:ea typeface="Arial" pitchFamily="34" charset="-122"/>
                           <a:cs typeface="Arial" pitchFamily="34" charset="-120"/>
                         </a:rPr>
-                        <a:t>G4 transport</a:t>
+                        <a:t>champion validation (after the gates)</a:t>
                       </a:r>
                       <a:endParaRPr lang="en-US" sz="1050" dirty="0">
                         <a:latin typeface="Arial" charset="0"/>
@@ -47944,7 +52339,7 @@
                           <a:ea typeface="Arial" pitchFamily="34" charset="-122"/>
                           <a:cs typeface="Arial" pitchFamily="34" charset="-120"/>
                         </a:rPr>
-                        <a:t>BVSE (bond valence)</a:t>
+                        <a:t>fixed-occupation nscf eigenvalues</a:t>
                       </a:r>
                       <a:endParaRPr lang="en-US" sz="1050" dirty="0">
                         <a:latin typeface="Arial" charset="0"/>
@@ -48009,7 +52404,7 @@
                           <a:ea typeface="Arial" pitchFamily="34" charset="-122"/>
                           <a:cs typeface="Arial" pitchFamily="34" charset="-120"/>
                         </a:rPr>
-                        <a:t>channels, bottlenecks (cheap)</a:t>
+                        <a:t>band gap = e⁻ insulation</a:t>
                       </a:r>
                       <a:endParaRPr lang="en-US" sz="1050" dirty="0">
                         <a:latin typeface="Arial" charset="0"/>
@@ -48074,7 +52469,7 @@
                           <a:ea typeface="Arial" pitchFamily="34" charset="-122"/>
                           <a:cs typeface="Arial" pitchFamily="34" charset="-120"/>
                         </a:rPr>
-                        <a:t>G4 pre-screen</a:t>
+                        <a:t>diagnostic axis — NOT a gate</a:t>
                       </a:r>
                       <a:endParaRPr lang="en-US" sz="1050" dirty="0">
                         <a:latin typeface="Arial" charset="0"/>
@@ -48837,7 +53232,7 @@
       </p:sp>
       <p:pic>
         <p:nvPicPr>
-          <p:cNvPr id="7" name="Image 0" descr="/home/user/Yonghoon-DEM-DFT/docs/figures/msd_compare/msd_LPSCl_LPSCl16_slide.png">    </p:cNvPr>
+          <p:cNvPr id="7" name="Image 0" descr="/tmp/claude-0/-home-user-Yonghoon-DEM-DFT/82ea256b-12bc-5a75-994e-7718d79c71ba/scratchpad/msd_crop.png">    </p:cNvPr>
           <p:cNvPicPr>
             <a:picLocks noChangeAspect="1"/>
           </p:cNvPicPr>
@@ -48891,7 +53286,7 @@
                 <a:ea typeface="Arial" pitchFamily="34" charset="-122"/>
                 <a:cs typeface="Arial" pitchFamily="34" charset="-120"/>
               </a:rPr>
-              <a:t>MLIP-MD MSD, LPSCl vs LPSCl₁.₆ (200 ps, multi-seed)</a:t>
+              <a:t>MLIP-MD Li MSD, LPSCl vs LPSCl₁.₆ (multi-T; 100 ps window shown)</a:t>
             </a:r>
             <a:endParaRPr lang="en-US" sz="850" dirty="0"/>
           </a:p>
